--- a/Taller/Archivos notables/Desafio3_Presentacion_v3.pptx
+++ b/Taller/Archivos notables/Desafio3_Presentacion_v3.pptx
@@ -5,17 +5,17 @@
     <p:sldMasterId id="2147483648" r:id="rId1"/>
   </p:sldMasterIdLst>
   <p:sldIdLst>
-    <p:sldId id="256" r:id="rId7"/>
-    <p:sldId id="257" r:id="rId8"/>
-    <p:sldId id="258" r:id="rId9"/>
-    <p:sldId id="259" r:id="rId10"/>
-    <p:sldId id="260" r:id="rId11"/>
-    <p:sldId id="261" r:id="rId12"/>
-    <p:sldId id="262" r:id="rId13"/>
-    <p:sldId id="263" r:id="rId14"/>
-    <p:sldId id="264" r:id="rId15"/>
+    <p:sldId id="256" r:id="rId2"/>
+    <p:sldId id="257" r:id="rId3"/>
+    <p:sldId id="258" r:id="rId4"/>
+    <p:sldId id="259" r:id="rId5"/>
+    <p:sldId id="260" r:id="rId6"/>
+    <p:sldId id="261" r:id="rId7"/>
+    <p:sldId id="262" r:id="rId8"/>
+    <p:sldId id="263" r:id="rId9"/>
+    <p:sldId id="264" r:id="rId10"/>
   </p:sldIdLst>
-  <p:sldSz cx="12191695" cy="6858000" type="screen4x3"/>
+  <p:sldSz cx="12192000" cy="6858000"/>
   <p:notesSz cx="6858000" cy="9144000"/>
   <p:defaultTextStyle>
     <a:defPPr>
@@ -112,7 +112,6477 @@
       </a:defRPr>
     </a:lvl9pPr>
   </p:defaultTextStyle>
+  <p:extLst>
+    <p:ext uri="{EFAFB233-063F-42B5-8137-9DF3F51BA10A}">
+      <p15:sldGuideLst xmlns:p15="http://schemas.microsoft.com/office/powerpoint/2012/main">
+        <p15:guide id="1" orient="horz" pos="2160">
+          <p15:clr>
+            <a:srgbClr val="A4A3A4"/>
+          </p15:clr>
+        </p15:guide>
+        <p15:guide id="2" pos="2880">
+          <p15:clr>
+            <a:srgbClr val="A4A3A4"/>
+          </p15:clr>
+        </p15:guide>
+      </p15:sldGuideLst>
+    </p:ext>
+  </p:extLst>
 </p:presentation>
+</file>
+
+<file path=ppt/charts/chart1.xml><?xml version="1.0" encoding="utf-8"?>
+<c:chartSpace xmlns:c="http://schemas.openxmlformats.org/drawingml/2006/chart" xmlns:a="http://schemas.openxmlformats.org/drawingml/2006/main" xmlns:r="http://schemas.openxmlformats.org/officeDocument/2006/relationships" xmlns:c16r2="http://schemas.microsoft.com/office/drawing/2015/06/chart">
+  <c:date1904 val="0"/>
+  <c:lang val="es-ES"/>
+  <c:roundedCorners val="0"/>
+  <mc:AlternateContent xmlns:mc="http://schemas.openxmlformats.org/markup-compatibility/2006">
+    <mc:Choice xmlns:c14="http://schemas.microsoft.com/office/drawing/2007/8/2/chart" Requires="c14">
+      <c14:style val="102"/>
+    </mc:Choice>
+    <mc:Fallback>
+      <c:style val="2"/>
+    </mc:Fallback>
+  </mc:AlternateContent>
+  <c:pivotSource>
+    <c:name>[Supermarket Sales Dataset v1.0.xlsx]1!TablaDinámica1</c:name>
+    <c:fmtId val="3"/>
+  </c:pivotSource>
+  <c:chart>
+    <c:autoTitleDeleted val="0"/>
+    <c:pivotFmts>
+      <c:pivotFmt>
+        <c:idx val="0"/>
+        <c:spPr>
+          <a:solidFill>
+            <a:schemeClr val="accent1"/>
+          </a:solidFill>
+          <a:ln>
+            <a:noFill/>
+          </a:ln>
+          <a:effectLst/>
+        </c:spPr>
+        <c:marker>
+          <c:symbol val="none"/>
+        </c:marker>
+        <c:dLbl>
+          <c:idx val="0"/>
+          <c:spPr>
+            <a:noFill/>
+            <a:ln>
+              <a:noFill/>
+            </a:ln>
+            <a:effectLst/>
+          </c:spPr>
+          <c:txPr>
+            <a:bodyPr rot="0" spcFirstLastPara="1" vertOverflow="ellipsis" vert="horz" wrap="square" lIns="38100" tIns="19050" rIns="38100" bIns="19050" anchor="ctr" anchorCtr="1">
+              <a:spAutoFit/>
+            </a:bodyPr>
+            <a:lstStyle/>
+            <a:p>
+              <a:pPr>
+                <a:defRPr sz="900" b="0" i="0" u="none" strike="noStrike" kern="1200" baseline="0">
+                  <a:solidFill>
+                    <a:schemeClr val="tx1">
+                      <a:lumMod val="75000"/>
+                      <a:lumOff val="25000"/>
+                    </a:schemeClr>
+                  </a:solidFill>
+                  <a:latin typeface="+mn-lt"/>
+                  <a:ea typeface="+mn-ea"/>
+                  <a:cs typeface="+mn-cs"/>
+                </a:defRPr>
+              </a:pPr>
+              <a:endParaRPr lang="es-UY"/>
+            </a:p>
+          </c:txPr>
+          <c:showLegendKey val="0"/>
+          <c:showVal val="0"/>
+          <c:showCatName val="0"/>
+          <c:showSerName val="0"/>
+          <c:showPercent val="0"/>
+          <c:showBubbleSize val="0"/>
+          <c:extLst>
+            <c:ext xmlns:c15="http://schemas.microsoft.com/office/drawing/2012/chart" uri="{CE6537A1-D6FC-4f65-9D91-7224C49458BB}"/>
+          </c:extLst>
+        </c:dLbl>
+      </c:pivotFmt>
+      <c:pivotFmt>
+        <c:idx val="1"/>
+        <c:spPr>
+          <a:solidFill>
+            <a:schemeClr val="accent1"/>
+          </a:solidFill>
+          <a:ln>
+            <a:noFill/>
+          </a:ln>
+          <a:effectLst/>
+        </c:spPr>
+        <c:marker>
+          <c:symbol val="none"/>
+        </c:marker>
+        <c:dLbl>
+          <c:idx val="0"/>
+          <c:spPr>
+            <a:noFill/>
+            <a:ln>
+              <a:noFill/>
+            </a:ln>
+            <a:effectLst/>
+          </c:spPr>
+          <c:txPr>
+            <a:bodyPr rot="0" spcFirstLastPara="1" vertOverflow="ellipsis" vert="horz" wrap="square" lIns="38100" tIns="19050" rIns="38100" bIns="19050" anchor="ctr" anchorCtr="1">
+              <a:spAutoFit/>
+            </a:bodyPr>
+            <a:lstStyle/>
+            <a:p>
+              <a:pPr>
+                <a:defRPr sz="900" b="0" i="0" u="none" strike="noStrike" kern="1200" baseline="0">
+                  <a:solidFill>
+                    <a:schemeClr val="tx1">
+                      <a:lumMod val="75000"/>
+                      <a:lumOff val="25000"/>
+                    </a:schemeClr>
+                  </a:solidFill>
+                  <a:latin typeface="+mn-lt"/>
+                  <a:ea typeface="+mn-ea"/>
+                  <a:cs typeface="+mn-cs"/>
+                </a:defRPr>
+              </a:pPr>
+              <a:endParaRPr lang="es-UY"/>
+            </a:p>
+          </c:txPr>
+          <c:showLegendKey val="0"/>
+          <c:showVal val="0"/>
+          <c:showCatName val="0"/>
+          <c:showSerName val="0"/>
+          <c:showPercent val="0"/>
+          <c:showBubbleSize val="0"/>
+          <c:extLst>
+            <c:ext xmlns:c15="http://schemas.microsoft.com/office/drawing/2012/chart" uri="{CE6537A1-D6FC-4f65-9D91-7224C49458BB}"/>
+          </c:extLst>
+        </c:dLbl>
+      </c:pivotFmt>
+      <c:pivotFmt>
+        <c:idx val="2"/>
+        <c:spPr>
+          <a:solidFill>
+            <a:schemeClr val="accent1"/>
+          </a:solidFill>
+          <a:ln>
+            <a:noFill/>
+          </a:ln>
+          <a:effectLst/>
+        </c:spPr>
+        <c:marker>
+          <c:symbol val="none"/>
+        </c:marker>
+        <c:dLbl>
+          <c:idx val="0"/>
+          <c:showLegendKey val="0"/>
+          <c:showVal val="0"/>
+          <c:showCatName val="0"/>
+          <c:showSerName val="0"/>
+          <c:showPercent val="0"/>
+          <c:showBubbleSize val="0"/>
+          <c:extLst>
+            <c:ext xmlns:c15="http://schemas.microsoft.com/office/drawing/2012/chart" uri="{CE6537A1-D6FC-4f65-9D91-7224C49458BB}"/>
+          </c:extLst>
+        </c:dLbl>
+      </c:pivotFmt>
+      <c:pivotFmt>
+        <c:idx val="3"/>
+        <c:spPr>
+          <a:solidFill>
+            <a:schemeClr val="accent1"/>
+          </a:solidFill>
+          <a:ln>
+            <a:noFill/>
+          </a:ln>
+          <a:effectLst/>
+        </c:spPr>
+        <c:marker>
+          <c:symbol val="none"/>
+        </c:marker>
+        <c:dLbl>
+          <c:idx val="0"/>
+          <c:showLegendKey val="0"/>
+          <c:showVal val="0"/>
+          <c:showCatName val="0"/>
+          <c:showSerName val="0"/>
+          <c:showPercent val="0"/>
+          <c:showBubbleSize val="0"/>
+          <c:extLst>
+            <c:ext xmlns:c15="http://schemas.microsoft.com/office/drawing/2012/chart" uri="{CE6537A1-D6FC-4f65-9D91-7224C49458BB}"/>
+          </c:extLst>
+        </c:dLbl>
+      </c:pivotFmt>
+      <c:pivotFmt>
+        <c:idx val="4"/>
+        <c:spPr>
+          <a:solidFill>
+            <a:schemeClr val="accent1"/>
+          </a:solidFill>
+          <a:ln>
+            <a:noFill/>
+          </a:ln>
+          <a:effectLst/>
+        </c:spPr>
+        <c:marker>
+          <c:symbol val="none"/>
+        </c:marker>
+        <c:dLbl>
+          <c:idx val="0"/>
+          <c:showLegendKey val="0"/>
+          <c:showVal val="0"/>
+          <c:showCatName val="0"/>
+          <c:showSerName val="0"/>
+          <c:showPercent val="0"/>
+          <c:showBubbleSize val="0"/>
+          <c:extLst>
+            <c:ext xmlns:c15="http://schemas.microsoft.com/office/drawing/2012/chart" uri="{CE6537A1-D6FC-4f65-9D91-7224C49458BB}"/>
+          </c:extLst>
+        </c:dLbl>
+      </c:pivotFmt>
+      <c:pivotFmt>
+        <c:idx val="5"/>
+        <c:spPr>
+          <a:solidFill>
+            <a:schemeClr val="accent1"/>
+          </a:solidFill>
+          <a:ln>
+            <a:noFill/>
+          </a:ln>
+          <a:effectLst/>
+        </c:spPr>
+        <c:marker>
+          <c:symbol val="none"/>
+        </c:marker>
+        <c:dLbl>
+          <c:idx val="0"/>
+          <c:showLegendKey val="0"/>
+          <c:showVal val="0"/>
+          <c:showCatName val="0"/>
+          <c:showSerName val="0"/>
+          <c:showPercent val="0"/>
+          <c:showBubbleSize val="0"/>
+          <c:extLst>
+            <c:ext xmlns:c15="http://schemas.microsoft.com/office/drawing/2012/chart" uri="{CE6537A1-D6FC-4f65-9D91-7224C49458BB}"/>
+          </c:extLst>
+        </c:dLbl>
+      </c:pivotFmt>
+      <c:pivotFmt>
+        <c:idx val="6"/>
+        <c:spPr>
+          <a:solidFill>
+            <a:schemeClr val="accent1"/>
+          </a:solidFill>
+          <a:ln>
+            <a:noFill/>
+          </a:ln>
+          <a:effectLst/>
+        </c:spPr>
+        <c:marker>
+          <c:symbol val="none"/>
+        </c:marker>
+        <c:dLbl>
+          <c:idx val="0"/>
+          <c:showLegendKey val="0"/>
+          <c:showVal val="0"/>
+          <c:showCatName val="0"/>
+          <c:showSerName val="0"/>
+          <c:showPercent val="0"/>
+          <c:showBubbleSize val="0"/>
+          <c:extLst>
+            <c:ext xmlns:c15="http://schemas.microsoft.com/office/drawing/2012/chart" uri="{CE6537A1-D6FC-4f65-9D91-7224C49458BB}"/>
+          </c:extLst>
+        </c:dLbl>
+      </c:pivotFmt>
+      <c:pivotFmt>
+        <c:idx val="7"/>
+        <c:spPr>
+          <a:solidFill>
+            <a:schemeClr val="accent1"/>
+          </a:solidFill>
+          <a:ln>
+            <a:noFill/>
+          </a:ln>
+          <a:effectLst/>
+        </c:spPr>
+        <c:marker>
+          <c:symbol val="none"/>
+        </c:marker>
+        <c:dLbl>
+          <c:idx val="0"/>
+          <c:spPr>
+            <a:noFill/>
+            <a:ln>
+              <a:noFill/>
+            </a:ln>
+            <a:effectLst/>
+          </c:spPr>
+          <c:txPr>
+            <a:bodyPr rot="0" spcFirstLastPara="1" vertOverflow="ellipsis" vert="horz" wrap="square" lIns="38100" tIns="19050" rIns="38100" bIns="19050" anchor="ctr" anchorCtr="1">
+              <a:spAutoFit/>
+            </a:bodyPr>
+            <a:lstStyle/>
+            <a:p>
+              <a:pPr>
+                <a:defRPr sz="900" b="0" i="0" u="none" strike="noStrike" kern="1200" baseline="0">
+                  <a:solidFill>
+                    <a:schemeClr val="tx1">
+                      <a:lumMod val="75000"/>
+                      <a:lumOff val="25000"/>
+                    </a:schemeClr>
+                  </a:solidFill>
+                  <a:latin typeface="+mn-lt"/>
+                  <a:ea typeface="+mn-ea"/>
+                  <a:cs typeface="+mn-cs"/>
+                </a:defRPr>
+              </a:pPr>
+              <a:endParaRPr lang="es-UY"/>
+            </a:p>
+          </c:txPr>
+          <c:showLegendKey val="0"/>
+          <c:showVal val="0"/>
+          <c:showCatName val="0"/>
+          <c:showSerName val="0"/>
+          <c:showPercent val="0"/>
+          <c:showBubbleSize val="0"/>
+          <c:extLst>
+            <c:ext xmlns:c15="http://schemas.microsoft.com/office/drawing/2012/chart" uri="{CE6537A1-D6FC-4f65-9D91-7224C49458BB}"/>
+          </c:extLst>
+        </c:dLbl>
+      </c:pivotFmt>
+      <c:pivotFmt>
+        <c:idx val="8"/>
+        <c:spPr>
+          <a:solidFill>
+            <a:schemeClr val="accent1"/>
+          </a:solidFill>
+          <a:ln>
+            <a:noFill/>
+          </a:ln>
+          <a:effectLst/>
+        </c:spPr>
+        <c:marker>
+          <c:symbol val="none"/>
+        </c:marker>
+        <c:dLbl>
+          <c:idx val="0"/>
+          <c:spPr>
+            <a:noFill/>
+            <a:ln>
+              <a:noFill/>
+            </a:ln>
+            <a:effectLst/>
+          </c:spPr>
+          <c:txPr>
+            <a:bodyPr rot="0" spcFirstLastPara="1" vertOverflow="ellipsis" vert="horz" wrap="square" lIns="38100" tIns="19050" rIns="38100" bIns="19050" anchor="ctr" anchorCtr="1">
+              <a:spAutoFit/>
+            </a:bodyPr>
+            <a:lstStyle/>
+            <a:p>
+              <a:pPr>
+                <a:defRPr sz="900" b="0" i="0" u="none" strike="noStrike" kern="1200" baseline="0">
+                  <a:solidFill>
+                    <a:schemeClr val="tx1">
+                      <a:lumMod val="75000"/>
+                      <a:lumOff val="25000"/>
+                    </a:schemeClr>
+                  </a:solidFill>
+                  <a:latin typeface="+mn-lt"/>
+                  <a:ea typeface="+mn-ea"/>
+                  <a:cs typeface="+mn-cs"/>
+                </a:defRPr>
+              </a:pPr>
+              <a:endParaRPr lang="es-UY"/>
+            </a:p>
+          </c:txPr>
+          <c:showLegendKey val="0"/>
+          <c:showVal val="0"/>
+          <c:showCatName val="0"/>
+          <c:showSerName val="0"/>
+          <c:showPercent val="0"/>
+          <c:showBubbleSize val="0"/>
+          <c:extLst>
+            <c:ext xmlns:c15="http://schemas.microsoft.com/office/drawing/2012/chart" uri="{CE6537A1-D6FC-4f65-9D91-7224C49458BB}"/>
+          </c:extLst>
+        </c:dLbl>
+      </c:pivotFmt>
+      <c:pivotFmt>
+        <c:idx val="9"/>
+        <c:spPr>
+          <a:solidFill>
+            <a:schemeClr val="accent1"/>
+          </a:solidFill>
+          <a:ln>
+            <a:noFill/>
+          </a:ln>
+          <a:effectLst/>
+        </c:spPr>
+        <c:marker>
+          <c:symbol val="none"/>
+        </c:marker>
+        <c:dLbl>
+          <c:idx val="0"/>
+          <c:spPr>
+            <a:noFill/>
+            <a:ln>
+              <a:noFill/>
+            </a:ln>
+            <a:effectLst/>
+          </c:spPr>
+          <c:txPr>
+            <a:bodyPr rot="0" spcFirstLastPara="1" vertOverflow="ellipsis" vert="horz" wrap="square" lIns="38100" tIns="19050" rIns="38100" bIns="19050" anchor="ctr" anchorCtr="1">
+              <a:spAutoFit/>
+            </a:bodyPr>
+            <a:lstStyle/>
+            <a:p>
+              <a:pPr>
+                <a:defRPr sz="900" b="0" i="0" u="none" strike="noStrike" kern="1200" baseline="0">
+                  <a:solidFill>
+                    <a:schemeClr val="tx1">
+                      <a:lumMod val="75000"/>
+                      <a:lumOff val="25000"/>
+                    </a:schemeClr>
+                  </a:solidFill>
+                  <a:latin typeface="+mn-lt"/>
+                  <a:ea typeface="+mn-ea"/>
+                  <a:cs typeface="+mn-cs"/>
+                </a:defRPr>
+              </a:pPr>
+              <a:endParaRPr lang="es-UY"/>
+            </a:p>
+          </c:txPr>
+          <c:showLegendKey val="0"/>
+          <c:showVal val="0"/>
+          <c:showCatName val="0"/>
+          <c:showSerName val="0"/>
+          <c:showPercent val="0"/>
+          <c:showBubbleSize val="0"/>
+          <c:extLst>
+            <c:ext xmlns:c15="http://schemas.microsoft.com/office/drawing/2012/chart" uri="{CE6537A1-D6FC-4f65-9D91-7224C49458BB}"/>
+          </c:extLst>
+        </c:dLbl>
+      </c:pivotFmt>
+      <c:pivotFmt>
+        <c:idx val="10"/>
+        <c:spPr>
+          <a:solidFill>
+            <a:schemeClr val="accent1"/>
+          </a:solidFill>
+          <a:ln>
+            <a:noFill/>
+          </a:ln>
+          <a:effectLst/>
+        </c:spPr>
+        <c:marker>
+          <c:symbol val="none"/>
+        </c:marker>
+        <c:dLbl>
+          <c:idx val="0"/>
+          <c:spPr>
+            <a:noFill/>
+            <a:ln>
+              <a:noFill/>
+            </a:ln>
+            <a:effectLst/>
+          </c:spPr>
+          <c:txPr>
+            <a:bodyPr rot="0" spcFirstLastPara="1" vertOverflow="ellipsis" vert="horz" wrap="square" lIns="38100" tIns="19050" rIns="38100" bIns="19050" anchor="ctr" anchorCtr="1">
+              <a:spAutoFit/>
+            </a:bodyPr>
+            <a:lstStyle/>
+            <a:p>
+              <a:pPr>
+                <a:defRPr sz="900" b="0" i="0" u="none" strike="noStrike" kern="1200" baseline="0">
+                  <a:solidFill>
+                    <a:schemeClr val="tx1">
+                      <a:lumMod val="75000"/>
+                      <a:lumOff val="25000"/>
+                    </a:schemeClr>
+                  </a:solidFill>
+                  <a:latin typeface="+mn-lt"/>
+                  <a:ea typeface="+mn-ea"/>
+                  <a:cs typeface="+mn-cs"/>
+                </a:defRPr>
+              </a:pPr>
+              <a:endParaRPr lang="es-UY"/>
+            </a:p>
+          </c:txPr>
+          <c:showLegendKey val="0"/>
+          <c:showVal val="0"/>
+          <c:showCatName val="0"/>
+          <c:showSerName val="0"/>
+          <c:showPercent val="0"/>
+          <c:showBubbleSize val="0"/>
+          <c:extLst>
+            <c:ext xmlns:c15="http://schemas.microsoft.com/office/drawing/2012/chart" uri="{CE6537A1-D6FC-4f65-9D91-7224C49458BB}"/>
+          </c:extLst>
+        </c:dLbl>
+      </c:pivotFmt>
+      <c:pivotFmt>
+        <c:idx val="11"/>
+        <c:spPr>
+          <a:solidFill>
+            <a:schemeClr val="accent1"/>
+          </a:solidFill>
+          <a:ln>
+            <a:noFill/>
+          </a:ln>
+          <a:effectLst/>
+        </c:spPr>
+        <c:marker>
+          <c:symbol val="none"/>
+        </c:marker>
+        <c:dLbl>
+          <c:idx val="0"/>
+          <c:spPr>
+            <a:noFill/>
+            <a:ln>
+              <a:noFill/>
+            </a:ln>
+            <a:effectLst/>
+          </c:spPr>
+          <c:txPr>
+            <a:bodyPr rot="0" spcFirstLastPara="1" vertOverflow="ellipsis" vert="horz" wrap="square" lIns="38100" tIns="19050" rIns="38100" bIns="19050" anchor="ctr" anchorCtr="1">
+              <a:spAutoFit/>
+            </a:bodyPr>
+            <a:lstStyle/>
+            <a:p>
+              <a:pPr>
+                <a:defRPr sz="900" b="0" i="0" u="none" strike="noStrike" kern="1200" baseline="0">
+                  <a:solidFill>
+                    <a:schemeClr val="tx1">
+                      <a:lumMod val="75000"/>
+                      <a:lumOff val="25000"/>
+                    </a:schemeClr>
+                  </a:solidFill>
+                  <a:latin typeface="+mn-lt"/>
+                  <a:ea typeface="+mn-ea"/>
+                  <a:cs typeface="+mn-cs"/>
+                </a:defRPr>
+              </a:pPr>
+              <a:endParaRPr lang="es-UY"/>
+            </a:p>
+          </c:txPr>
+          <c:showLegendKey val="0"/>
+          <c:showVal val="0"/>
+          <c:showCatName val="0"/>
+          <c:showSerName val="0"/>
+          <c:showPercent val="0"/>
+          <c:showBubbleSize val="0"/>
+          <c:extLst>
+            <c:ext xmlns:c15="http://schemas.microsoft.com/office/drawing/2012/chart" uri="{CE6537A1-D6FC-4f65-9D91-7224C49458BB}"/>
+          </c:extLst>
+        </c:dLbl>
+      </c:pivotFmt>
+      <c:pivotFmt>
+        <c:idx val="12"/>
+        <c:spPr>
+          <a:solidFill>
+            <a:schemeClr val="accent1"/>
+          </a:solidFill>
+          <a:ln>
+            <a:noFill/>
+          </a:ln>
+          <a:effectLst/>
+        </c:spPr>
+        <c:marker>
+          <c:symbol val="none"/>
+        </c:marker>
+        <c:dLbl>
+          <c:idx val="0"/>
+          <c:spPr>
+            <a:noFill/>
+            <a:ln>
+              <a:noFill/>
+            </a:ln>
+            <a:effectLst/>
+          </c:spPr>
+          <c:txPr>
+            <a:bodyPr rot="0" spcFirstLastPara="1" vertOverflow="ellipsis" vert="horz" wrap="square" lIns="38100" tIns="19050" rIns="38100" bIns="19050" anchor="ctr" anchorCtr="1">
+              <a:spAutoFit/>
+            </a:bodyPr>
+            <a:lstStyle/>
+            <a:p>
+              <a:pPr>
+                <a:defRPr sz="900" b="0" i="0" u="none" strike="noStrike" kern="1200" baseline="0">
+                  <a:solidFill>
+                    <a:schemeClr val="tx1">
+                      <a:lumMod val="75000"/>
+                      <a:lumOff val="25000"/>
+                    </a:schemeClr>
+                  </a:solidFill>
+                  <a:latin typeface="+mn-lt"/>
+                  <a:ea typeface="+mn-ea"/>
+                  <a:cs typeface="+mn-cs"/>
+                </a:defRPr>
+              </a:pPr>
+              <a:endParaRPr lang="es-UY"/>
+            </a:p>
+          </c:txPr>
+          <c:showLegendKey val="0"/>
+          <c:showVal val="0"/>
+          <c:showCatName val="0"/>
+          <c:showSerName val="0"/>
+          <c:showPercent val="0"/>
+          <c:showBubbleSize val="0"/>
+          <c:extLst>
+            <c:ext xmlns:c15="http://schemas.microsoft.com/office/drawing/2012/chart" uri="{CE6537A1-D6FC-4f65-9D91-7224C49458BB}"/>
+          </c:extLst>
+        </c:dLbl>
+      </c:pivotFmt>
+      <c:pivotFmt>
+        <c:idx val="13"/>
+        <c:spPr>
+          <a:solidFill>
+            <a:schemeClr val="accent1"/>
+          </a:solidFill>
+          <a:ln>
+            <a:noFill/>
+          </a:ln>
+          <a:effectLst/>
+        </c:spPr>
+        <c:marker>
+          <c:symbol val="none"/>
+        </c:marker>
+        <c:dLbl>
+          <c:idx val="0"/>
+          <c:spPr>
+            <a:noFill/>
+            <a:ln>
+              <a:noFill/>
+            </a:ln>
+            <a:effectLst/>
+          </c:spPr>
+          <c:txPr>
+            <a:bodyPr rot="0" spcFirstLastPara="1" vertOverflow="ellipsis" vert="horz" wrap="square" lIns="38100" tIns="19050" rIns="38100" bIns="19050" anchor="ctr" anchorCtr="1">
+              <a:spAutoFit/>
+            </a:bodyPr>
+            <a:lstStyle/>
+            <a:p>
+              <a:pPr>
+                <a:defRPr sz="900" b="0" i="0" u="none" strike="noStrike" kern="1200" baseline="0">
+                  <a:solidFill>
+                    <a:schemeClr val="tx1">
+                      <a:lumMod val="75000"/>
+                      <a:lumOff val="25000"/>
+                    </a:schemeClr>
+                  </a:solidFill>
+                  <a:latin typeface="+mn-lt"/>
+                  <a:ea typeface="+mn-ea"/>
+                  <a:cs typeface="+mn-cs"/>
+                </a:defRPr>
+              </a:pPr>
+              <a:endParaRPr lang="es-UY"/>
+            </a:p>
+          </c:txPr>
+          <c:showLegendKey val="0"/>
+          <c:showVal val="0"/>
+          <c:showCatName val="0"/>
+          <c:showSerName val="0"/>
+          <c:showPercent val="0"/>
+          <c:showBubbleSize val="0"/>
+          <c:extLst>
+            <c:ext xmlns:c15="http://schemas.microsoft.com/office/drawing/2012/chart" uri="{CE6537A1-D6FC-4f65-9D91-7224C49458BB}"/>
+          </c:extLst>
+        </c:dLbl>
+      </c:pivotFmt>
+      <c:pivotFmt>
+        <c:idx val="14"/>
+        <c:spPr>
+          <a:solidFill>
+            <a:schemeClr val="accent1"/>
+          </a:solidFill>
+          <a:ln>
+            <a:noFill/>
+          </a:ln>
+          <a:effectLst/>
+        </c:spPr>
+        <c:marker>
+          <c:symbol val="none"/>
+        </c:marker>
+        <c:dLbl>
+          <c:idx val="0"/>
+          <c:spPr>
+            <a:noFill/>
+            <a:ln>
+              <a:noFill/>
+            </a:ln>
+            <a:effectLst/>
+          </c:spPr>
+          <c:txPr>
+            <a:bodyPr rot="0" spcFirstLastPara="1" vertOverflow="ellipsis" vert="horz" wrap="square" lIns="38100" tIns="19050" rIns="38100" bIns="19050" anchor="ctr" anchorCtr="1">
+              <a:spAutoFit/>
+            </a:bodyPr>
+            <a:lstStyle/>
+            <a:p>
+              <a:pPr>
+                <a:defRPr sz="900" b="0" i="0" u="none" strike="noStrike" kern="1200" baseline="0">
+                  <a:solidFill>
+                    <a:schemeClr val="tx1">
+                      <a:lumMod val="75000"/>
+                      <a:lumOff val="25000"/>
+                    </a:schemeClr>
+                  </a:solidFill>
+                  <a:latin typeface="+mn-lt"/>
+                  <a:ea typeface="+mn-ea"/>
+                  <a:cs typeface="+mn-cs"/>
+                </a:defRPr>
+              </a:pPr>
+              <a:endParaRPr lang="es-UY"/>
+            </a:p>
+          </c:txPr>
+          <c:showLegendKey val="0"/>
+          <c:showVal val="0"/>
+          <c:showCatName val="0"/>
+          <c:showSerName val="0"/>
+          <c:showPercent val="0"/>
+          <c:showBubbleSize val="0"/>
+          <c:extLst>
+            <c:ext xmlns:c15="http://schemas.microsoft.com/office/drawing/2012/chart" uri="{CE6537A1-D6FC-4f65-9D91-7224C49458BB}"/>
+          </c:extLst>
+        </c:dLbl>
+      </c:pivotFmt>
+      <c:pivotFmt>
+        <c:idx val="15"/>
+        <c:spPr>
+          <a:solidFill>
+            <a:schemeClr val="accent1"/>
+          </a:solidFill>
+          <a:ln>
+            <a:noFill/>
+          </a:ln>
+          <a:effectLst/>
+        </c:spPr>
+        <c:marker>
+          <c:symbol val="none"/>
+        </c:marker>
+        <c:dLbl>
+          <c:idx val="0"/>
+          <c:spPr>
+            <a:noFill/>
+            <a:ln>
+              <a:noFill/>
+            </a:ln>
+            <a:effectLst/>
+          </c:spPr>
+          <c:txPr>
+            <a:bodyPr rot="0" spcFirstLastPara="1" vertOverflow="ellipsis" vert="horz" wrap="square" lIns="38100" tIns="19050" rIns="38100" bIns="19050" anchor="ctr" anchorCtr="1">
+              <a:spAutoFit/>
+            </a:bodyPr>
+            <a:lstStyle/>
+            <a:p>
+              <a:pPr>
+                <a:defRPr sz="900" b="0" i="0" u="none" strike="noStrike" kern="1200" baseline="0">
+                  <a:solidFill>
+                    <a:schemeClr val="tx1">
+                      <a:lumMod val="75000"/>
+                      <a:lumOff val="25000"/>
+                    </a:schemeClr>
+                  </a:solidFill>
+                  <a:latin typeface="+mn-lt"/>
+                  <a:ea typeface="+mn-ea"/>
+                  <a:cs typeface="+mn-cs"/>
+                </a:defRPr>
+              </a:pPr>
+              <a:endParaRPr lang="es-UY"/>
+            </a:p>
+          </c:txPr>
+          <c:showLegendKey val="0"/>
+          <c:showVal val="0"/>
+          <c:showCatName val="0"/>
+          <c:showSerName val="0"/>
+          <c:showPercent val="0"/>
+          <c:showBubbleSize val="0"/>
+          <c:extLst>
+            <c:ext xmlns:c15="http://schemas.microsoft.com/office/drawing/2012/chart" uri="{CE6537A1-D6FC-4f65-9D91-7224C49458BB}"/>
+          </c:extLst>
+        </c:dLbl>
+      </c:pivotFmt>
+      <c:pivotFmt>
+        <c:idx val="16"/>
+        <c:spPr>
+          <a:solidFill>
+            <a:schemeClr val="accent1"/>
+          </a:solidFill>
+          <a:ln>
+            <a:noFill/>
+          </a:ln>
+          <a:effectLst/>
+        </c:spPr>
+        <c:marker>
+          <c:symbol val="none"/>
+        </c:marker>
+        <c:dLbl>
+          <c:idx val="0"/>
+          <c:spPr>
+            <a:noFill/>
+            <a:ln>
+              <a:noFill/>
+            </a:ln>
+            <a:effectLst/>
+          </c:spPr>
+          <c:txPr>
+            <a:bodyPr rot="0" spcFirstLastPara="1" vertOverflow="ellipsis" vert="horz" wrap="square" lIns="38100" tIns="19050" rIns="38100" bIns="19050" anchor="ctr" anchorCtr="1">
+              <a:spAutoFit/>
+            </a:bodyPr>
+            <a:lstStyle/>
+            <a:p>
+              <a:pPr>
+                <a:defRPr sz="900" b="0" i="0" u="none" strike="noStrike" kern="1200" baseline="0">
+                  <a:solidFill>
+                    <a:schemeClr val="tx1">
+                      <a:lumMod val="75000"/>
+                      <a:lumOff val="25000"/>
+                    </a:schemeClr>
+                  </a:solidFill>
+                  <a:latin typeface="+mn-lt"/>
+                  <a:ea typeface="+mn-ea"/>
+                  <a:cs typeface="+mn-cs"/>
+                </a:defRPr>
+              </a:pPr>
+              <a:endParaRPr lang="es-UY"/>
+            </a:p>
+          </c:txPr>
+          <c:showLegendKey val="0"/>
+          <c:showVal val="0"/>
+          <c:showCatName val="0"/>
+          <c:showSerName val="0"/>
+          <c:showPercent val="0"/>
+          <c:showBubbleSize val="0"/>
+          <c:extLst>
+            <c:ext xmlns:c15="http://schemas.microsoft.com/office/drawing/2012/chart" uri="{CE6537A1-D6FC-4f65-9D91-7224C49458BB}"/>
+          </c:extLst>
+        </c:dLbl>
+      </c:pivotFmt>
+      <c:pivotFmt>
+        <c:idx val="17"/>
+        <c:spPr>
+          <a:solidFill>
+            <a:schemeClr val="accent1"/>
+          </a:solidFill>
+          <a:ln>
+            <a:noFill/>
+          </a:ln>
+          <a:effectLst/>
+        </c:spPr>
+        <c:marker>
+          <c:symbol val="none"/>
+        </c:marker>
+        <c:dLbl>
+          <c:idx val="0"/>
+          <c:spPr>
+            <a:noFill/>
+            <a:ln>
+              <a:noFill/>
+            </a:ln>
+            <a:effectLst/>
+          </c:spPr>
+          <c:txPr>
+            <a:bodyPr rot="0" spcFirstLastPara="1" vertOverflow="ellipsis" vert="horz" wrap="square" lIns="38100" tIns="19050" rIns="38100" bIns="19050" anchor="ctr" anchorCtr="1">
+              <a:spAutoFit/>
+            </a:bodyPr>
+            <a:lstStyle/>
+            <a:p>
+              <a:pPr>
+                <a:defRPr sz="900" b="0" i="0" u="none" strike="noStrike" kern="1200" baseline="0">
+                  <a:solidFill>
+                    <a:schemeClr val="tx1">
+                      <a:lumMod val="75000"/>
+                      <a:lumOff val="25000"/>
+                    </a:schemeClr>
+                  </a:solidFill>
+                  <a:latin typeface="+mn-lt"/>
+                  <a:ea typeface="+mn-ea"/>
+                  <a:cs typeface="+mn-cs"/>
+                </a:defRPr>
+              </a:pPr>
+              <a:endParaRPr lang="es-UY"/>
+            </a:p>
+          </c:txPr>
+          <c:showLegendKey val="0"/>
+          <c:showVal val="0"/>
+          <c:showCatName val="0"/>
+          <c:showSerName val="0"/>
+          <c:showPercent val="0"/>
+          <c:showBubbleSize val="0"/>
+          <c:extLst>
+            <c:ext xmlns:c15="http://schemas.microsoft.com/office/drawing/2012/chart" uri="{CE6537A1-D6FC-4f65-9D91-7224C49458BB}"/>
+          </c:extLst>
+        </c:dLbl>
+      </c:pivotFmt>
+      <c:pivotFmt>
+        <c:idx val="18"/>
+        <c:spPr>
+          <a:solidFill>
+            <a:schemeClr val="accent1"/>
+          </a:solidFill>
+          <a:ln>
+            <a:noFill/>
+          </a:ln>
+          <a:effectLst/>
+        </c:spPr>
+        <c:marker>
+          <c:symbol val="none"/>
+        </c:marker>
+        <c:dLbl>
+          <c:idx val="0"/>
+          <c:spPr>
+            <a:noFill/>
+            <a:ln>
+              <a:noFill/>
+            </a:ln>
+            <a:effectLst/>
+          </c:spPr>
+          <c:txPr>
+            <a:bodyPr rot="0" spcFirstLastPara="1" vertOverflow="ellipsis" vert="horz" wrap="square" lIns="38100" tIns="19050" rIns="38100" bIns="19050" anchor="ctr" anchorCtr="1">
+              <a:spAutoFit/>
+            </a:bodyPr>
+            <a:lstStyle/>
+            <a:p>
+              <a:pPr>
+                <a:defRPr sz="900" b="0" i="0" u="none" strike="noStrike" kern="1200" baseline="0">
+                  <a:solidFill>
+                    <a:schemeClr val="tx1">
+                      <a:lumMod val="75000"/>
+                      <a:lumOff val="25000"/>
+                    </a:schemeClr>
+                  </a:solidFill>
+                  <a:latin typeface="+mn-lt"/>
+                  <a:ea typeface="+mn-ea"/>
+                  <a:cs typeface="+mn-cs"/>
+                </a:defRPr>
+              </a:pPr>
+              <a:endParaRPr lang="es-UY"/>
+            </a:p>
+          </c:txPr>
+          <c:showLegendKey val="0"/>
+          <c:showVal val="0"/>
+          <c:showCatName val="0"/>
+          <c:showSerName val="0"/>
+          <c:showPercent val="0"/>
+          <c:showBubbleSize val="0"/>
+          <c:extLst>
+            <c:ext xmlns:c15="http://schemas.microsoft.com/office/drawing/2012/chart" uri="{CE6537A1-D6FC-4f65-9D91-7224C49458BB}"/>
+          </c:extLst>
+        </c:dLbl>
+      </c:pivotFmt>
+      <c:pivotFmt>
+        <c:idx val="19"/>
+        <c:spPr>
+          <a:solidFill>
+            <a:schemeClr val="accent1"/>
+          </a:solidFill>
+          <a:ln>
+            <a:noFill/>
+          </a:ln>
+          <a:effectLst/>
+        </c:spPr>
+        <c:marker>
+          <c:symbol val="none"/>
+        </c:marker>
+        <c:dLbl>
+          <c:idx val="0"/>
+          <c:spPr>
+            <a:noFill/>
+            <a:ln>
+              <a:noFill/>
+            </a:ln>
+            <a:effectLst/>
+          </c:spPr>
+          <c:txPr>
+            <a:bodyPr rot="0" spcFirstLastPara="1" vertOverflow="ellipsis" vert="horz" wrap="square" lIns="38100" tIns="19050" rIns="38100" bIns="19050" anchor="ctr" anchorCtr="1">
+              <a:spAutoFit/>
+            </a:bodyPr>
+            <a:lstStyle/>
+            <a:p>
+              <a:pPr>
+                <a:defRPr sz="900" b="0" i="0" u="none" strike="noStrike" kern="1200" baseline="0">
+                  <a:solidFill>
+                    <a:schemeClr val="tx1">
+                      <a:lumMod val="75000"/>
+                      <a:lumOff val="25000"/>
+                    </a:schemeClr>
+                  </a:solidFill>
+                  <a:latin typeface="+mn-lt"/>
+                  <a:ea typeface="+mn-ea"/>
+                  <a:cs typeface="+mn-cs"/>
+                </a:defRPr>
+              </a:pPr>
+              <a:endParaRPr lang="es-UY"/>
+            </a:p>
+          </c:txPr>
+          <c:showLegendKey val="0"/>
+          <c:showVal val="0"/>
+          <c:showCatName val="0"/>
+          <c:showSerName val="0"/>
+          <c:showPercent val="0"/>
+          <c:showBubbleSize val="0"/>
+          <c:extLst>
+            <c:ext xmlns:c15="http://schemas.microsoft.com/office/drawing/2012/chart" uri="{CE6537A1-D6FC-4f65-9D91-7224C49458BB}"/>
+          </c:extLst>
+        </c:dLbl>
+      </c:pivotFmt>
+      <c:pivotFmt>
+        <c:idx val="20"/>
+        <c:spPr>
+          <a:solidFill>
+            <a:schemeClr val="accent1"/>
+          </a:solidFill>
+          <a:ln>
+            <a:noFill/>
+          </a:ln>
+          <a:effectLst/>
+        </c:spPr>
+        <c:marker>
+          <c:symbol val="none"/>
+        </c:marker>
+        <c:dLbl>
+          <c:idx val="0"/>
+          <c:spPr>
+            <a:noFill/>
+            <a:ln>
+              <a:noFill/>
+            </a:ln>
+            <a:effectLst/>
+          </c:spPr>
+          <c:txPr>
+            <a:bodyPr rot="0" spcFirstLastPara="1" vertOverflow="ellipsis" vert="horz" wrap="square" lIns="38100" tIns="19050" rIns="38100" bIns="19050" anchor="ctr" anchorCtr="1">
+              <a:spAutoFit/>
+            </a:bodyPr>
+            <a:lstStyle/>
+            <a:p>
+              <a:pPr>
+                <a:defRPr sz="900" b="0" i="0" u="none" strike="noStrike" kern="1200" baseline="0">
+                  <a:solidFill>
+                    <a:schemeClr val="tx1">
+                      <a:lumMod val="75000"/>
+                      <a:lumOff val="25000"/>
+                    </a:schemeClr>
+                  </a:solidFill>
+                  <a:latin typeface="+mn-lt"/>
+                  <a:ea typeface="+mn-ea"/>
+                  <a:cs typeface="+mn-cs"/>
+                </a:defRPr>
+              </a:pPr>
+              <a:endParaRPr lang="es-UY"/>
+            </a:p>
+          </c:txPr>
+          <c:showLegendKey val="0"/>
+          <c:showVal val="0"/>
+          <c:showCatName val="0"/>
+          <c:showSerName val="0"/>
+          <c:showPercent val="0"/>
+          <c:showBubbleSize val="0"/>
+          <c:extLst>
+            <c:ext xmlns:c15="http://schemas.microsoft.com/office/drawing/2012/chart" uri="{CE6537A1-D6FC-4f65-9D91-7224C49458BB}"/>
+          </c:extLst>
+        </c:dLbl>
+      </c:pivotFmt>
+      <c:pivotFmt>
+        <c:idx val="21"/>
+        <c:spPr>
+          <a:solidFill>
+            <a:schemeClr val="accent1"/>
+          </a:solidFill>
+          <a:ln>
+            <a:noFill/>
+          </a:ln>
+          <a:effectLst/>
+        </c:spPr>
+        <c:marker>
+          <c:symbol val="none"/>
+        </c:marker>
+        <c:dLbl>
+          <c:idx val="0"/>
+          <c:spPr>
+            <a:noFill/>
+            <a:ln>
+              <a:noFill/>
+            </a:ln>
+            <a:effectLst/>
+          </c:spPr>
+          <c:txPr>
+            <a:bodyPr rot="0" spcFirstLastPara="1" vertOverflow="ellipsis" vert="horz" wrap="square" lIns="38100" tIns="19050" rIns="38100" bIns="19050" anchor="ctr" anchorCtr="1">
+              <a:spAutoFit/>
+            </a:bodyPr>
+            <a:lstStyle/>
+            <a:p>
+              <a:pPr>
+                <a:defRPr sz="900" b="0" i="0" u="none" strike="noStrike" kern="1200" baseline="0">
+                  <a:solidFill>
+                    <a:schemeClr val="tx1">
+                      <a:lumMod val="75000"/>
+                      <a:lumOff val="25000"/>
+                    </a:schemeClr>
+                  </a:solidFill>
+                  <a:latin typeface="+mn-lt"/>
+                  <a:ea typeface="+mn-ea"/>
+                  <a:cs typeface="+mn-cs"/>
+                </a:defRPr>
+              </a:pPr>
+              <a:endParaRPr lang="es-UY"/>
+            </a:p>
+          </c:txPr>
+          <c:showLegendKey val="0"/>
+          <c:showVal val="0"/>
+          <c:showCatName val="0"/>
+          <c:showSerName val="0"/>
+          <c:showPercent val="0"/>
+          <c:showBubbleSize val="0"/>
+          <c:extLst>
+            <c:ext xmlns:c15="http://schemas.microsoft.com/office/drawing/2012/chart" uri="{CE6537A1-D6FC-4f65-9D91-7224C49458BB}"/>
+          </c:extLst>
+        </c:dLbl>
+      </c:pivotFmt>
+      <c:pivotFmt>
+        <c:idx val="22"/>
+        <c:spPr>
+          <a:solidFill>
+            <a:schemeClr val="accent1"/>
+          </a:solidFill>
+          <a:ln>
+            <a:noFill/>
+          </a:ln>
+          <a:effectLst/>
+        </c:spPr>
+        <c:marker>
+          <c:symbol val="none"/>
+        </c:marker>
+        <c:dLbl>
+          <c:idx val="0"/>
+          <c:spPr>
+            <a:noFill/>
+            <a:ln>
+              <a:noFill/>
+            </a:ln>
+            <a:effectLst/>
+          </c:spPr>
+          <c:txPr>
+            <a:bodyPr rot="0" spcFirstLastPara="1" vertOverflow="ellipsis" vert="horz" wrap="square" lIns="38100" tIns="19050" rIns="38100" bIns="19050" anchor="ctr" anchorCtr="1">
+              <a:spAutoFit/>
+            </a:bodyPr>
+            <a:lstStyle/>
+            <a:p>
+              <a:pPr>
+                <a:defRPr sz="900" b="0" i="0" u="none" strike="noStrike" kern="1200" baseline="0">
+                  <a:solidFill>
+                    <a:schemeClr val="tx1">
+                      <a:lumMod val="75000"/>
+                      <a:lumOff val="25000"/>
+                    </a:schemeClr>
+                  </a:solidFill>
+                  <a:latin typeface="+mn-lt"/>
+                  <a:ea typeface="+mn-ea"/>
+                  <a:cs typeface="+mn-cs"/>
+                </a:defRPr>
+              </a:pPr>
+              <a:endParaRPr lang="es-UY"/>
+            </a:p>
+          </c:txPr>
+          <c:showLegendKey val="0"/>
+          <c:showVal val="0"/>
+          <c:showCatName val="0"/>
+          <c:showSerName val="0"/>
+          <c:showPercent val="0"/>
+          <c:showBubbleSize val="0"/>
+          <c:extLst>
+            <c:ext xmlns:c15="http://schemas.microsoft.com/office/drawing/2012/chart" uri="{CE6537A1-D6FC-4f65-9D91-7224C49458BB}"/>
+          </c:extLst>
+        </c:dLbl>
+      </c:pivotFmt>
+      <c:pivotFmt>
+        <c:idx val="23"/>
+        <c:spPr>
+          <a:solidFill>
+            <a:schemeClr val="accent1"/>
+          </a:solidFill>
+          <a:ln>
+            <a:noFill/>
+          </a:ln>
+          <a:effectLst/>
+        </c:spPr>
+        <c:marker>
+          <c:symbol val="none"/>
+        </c:marker>
+        <c:dLbl>
+          <c:idx val="0"/>
+          <c:spPr>
+            <a:noFill/>
+            <a:ln>
+              <a:noFill/>
+            </a:ln>
+            <a:effectLst/>
+          </c:spPr>
+          <c:txPr>
+            <a:bodyPr rot="0" spcFirstLastPara="1" vertOverflow="ellipsis" vert="horz" wrap="square" lIns="38100" tIns="19050" rIns="38100" bIns="19050" anchor="ctr" anchorCtr="1">
+              <a:spAutoFit/>
+            </a:bodyPr>
+            <a:lstStyle/>
+            <a:p>
+              <a:pPr>
+                <a:defRPr sz="900" b="0" i="0" u="none" strike="noStrike" kern="1200" baseline="0">
+                  <a:solidFill>
+                    <a:schemeClr val="tx1">
+                      <a:lumMod val="75000"/>
+                      <a:lumOff val="25000"/>
+                    </a:schemeClr>
+                  </a:solidFill>
+                  <a:latin typeface="+mn-lt"/>
+                  <a:ea typeface="+mn-ea"/>
+                  <a:cs typeface="+mn-cs"/>
+                </a:defRPr>
+              </a:pPr>
+              <a:endParaRPr lang="es-UY"/>
+            </a:p>
+          </c:txPr>
+          <c:showLegendKey val="0"/>
+          <c:showVal val="0"/>
+          <c:showCatName val="0"/>
+          <c:showSerName val="0"/>
+          <c:showPercent val="0"/>
+          <c:showBubbleSize val="0"/>
+          <c:extLst>
+            <c:ext xmlns:c15="http://schemas.microsoft.com/office/drawing/2012/chart" uri="{CE6537A1-D6FC-4f65-9D91-7224C49458BB}"/>
+          </c:extLst>
+        </c:dLbl>
+      </c:pivotFmt>
+      <c:pivotFmt>
+        <c:idx val="24"/>
+        <c:spPr>
+          <a:solidFill>
+            <a:schemeClr val="accent1"/>
+          </a:solidFill>
+          <a:ln>
+            <a:noFill/>
+          </a:ln>
+          <a:effectLst/>
+        </c:spPr>
+        <c:marker>
+          <c:symbol val="none"/>
+        </c:marker>
+        <c:dLbl>
+          <c:idx val="0"/>
+          <c:spPr>
+            <a:noFill/>
+            <a:ln>
+              <a:noFill/>
+            </a:ln>
+            <a:effectLst/>
+          </c:spPr>
+          <c:txPr>
+            <a:bodyPr rot="0" spcFirstLastPara="1" vertOverflow="ellipsis" vert="horz" wrap="square" lIns="38100" tIns="19050" rIns="38100" bIns="19050" anchor="ctr" anchorCtr="1">
+              <a:spAutoFit/>
+            </a:bodyPr>
+            <a:lstStyle/>
+            <a:p>
+              <a:pPr>
+                <a:defRPr sz="900" b="0" i="0" u="none" strike="noStrike" kern="1200" baseline="0">
+                  <a:solidFill>
+                    <a:schemeClr val="tx1">
+                      <a:lumMod val="75000"/>
+                      <a:lumOff val="25000"/>
+                    </a:schemeClr>
+                  </a:solidFill>
+                  <a:latin typeface="+mn-lt"/>
+                  <a:ea typeface="+mn-ea"/>
+                  <a:cs typeface="+mn-cs"/>
+                </a:defRPr>
+              </a:pPr>
+              <a:endParaRPr lang="es-UY"/>
+            </a:p>
+          </c:txPr>
+          <c:showLegendKey val="0"/>
+          <c:showVal val="0"/>
+          <c:showCatName val="0"/>
+          <c:showSerName val="0"/>
+          <c:showPercent val="0"/>
+          <c:showBubbleSize val="0"/>
+          <c:extLst>
+            <c:ext xmlns:c15="http://schemas.microsoft.com/office/drawing/2012/chart" uri="{CE6537A1-D6FC-4f65-9D91-7224C49458BB}"/>
+          </c:extLst>
+        </c:dLbl>
+      </c:pivotFmt>
+      <c:pivotFmt>
+        <c:idx val="25"/>
+        <c:spPr>
+          <a:solidFill>
+            <a:schemeClr val="accent1"/>
+          </a:solidFill>
+          <a:ln>
+            <a:noFill/>
+          </a:ln>
+          <a:effectLst/>
+        </c:spPr>
+        <c:marker>
+          <c:symbol val="none"/>
+        </c:marker>
+        <c:dLbl>
+          <c:idx val="0"/>
+          <c:spPr>
+            <a:noFill/>
+            <a:ln>
+              <a:noFill/>
+            </a:ln>
+            <a:effectLst/>
+          </c:spPr>
+          <c:txPr>
+            <a:bodyPr rot="0" spcFirstLastPara="1" vertOverflow="ellipsis" vert="horz" wrap="square" lIns="38100" tIns="19050" rIns="38100" bIns="19050" anchor="ctr" anchorCtr="1">
+              <a:spAutoFit/>
+            </a:bodyPr>
+            <a:lstStyle/>
+            <a:p>
+              <a:pPr>
+                <a:defRPr sz="900" b="0" i="0" u="none" strike="noStrike" kern="1200" baseline="0">
+                  <a:solidFill>
+                    <a:schemeClr val="tx1">
+                      <a:lumMod val="75000"/>
+                      <a:lumOff val="25000"/>
+                    </a:schemeClr>
+                  </a:solidFill>
+                  <a:latin typeface="+mn-lt"/>
+                  <a:ea typeface="+mn-ea"/>
+                  <a:cs typeface="+mn-cs"/>
+                </a:defRPr>
+              </a:pPr>
+              <a:endParaRPr lang="es-UY"/>
+            </a:p>
+          </c:txPr>
+          <c:showLegendKey val="0"/>
+          <c:showVal val="0"/>
+          <c:showCatName val="0"/>
+          <c:showSerName val="0"/>
+          <c:showPercent val="0"/>
+          <c:showBubbleSize val="0"/>
+          <c:extLst>
+            <c:ext xmlns:c15="http://schemas.microsoft.com/office/drawing/2012/chart" uri="{CE6537A1-D6FC-4f65-9D91-7224C49458BB}"/>
+          </c:extLst>
+        </c:dLbl>
+      </c:pivotFmt>
+      <c:pivotFmt>
+        <c:idx val="26"/>
+        <c:spPr>
+          <a:solidFill>
+            <a:schemeClr val="accent1"/>
+          </a:solidFill>
+          <a:ln>
+            <a:noFill/>
+          </a:ln>
+          <a:effectLst/>
+        </c:spPr>
+        <c:marker>
+          <c:symbol val="none"/>
+        </c:marker>
+        <c:dLbl>
+          <c:idx val="0"/>
+          <c:spPr>
+            <a:noFill/>
+            <a:ln>
+              <a:noFill/>
+            </a:ln>
+            <a:effectLst/>
+          </c:spPr>
+          <c:txPr>
+            <a:bodyPr rot="0" spcFirstLastPara="1" vertOverflow="ellipsis" vert="horz" wrap="square" lIns="38100" tIns="19050" rIns="38100" bIns="19050" anchor="ctr" anchorCtr="1">
+              <a:spAutoFit/>
+            </a:bodyPr>
+            <a:lstStyle/>
+            <a:p>
+              <a:pPr>
+                <a:defRPr sz="900" b="0" i="0" u="none" strike="noStrike" kern="1200" baseline="0">
+                  <a:solidFill>
+                    <a:schemeClr val="tx1">
+                      <a:lumMod val="75000"/>
+                      <a:lumOff val="25000"/>
+                    </a:schemeClr>
+                  </a:solidFill>
+                  <a:latin typeface="+mn-lt"/>
+                  <a:ea typeface="+mn-ea"/>
+                  <a:cs typeface="+mn-cs"/>
+                </a:defRPr>
+              </a:pPr>
+              <a:endParaRPr lang="es-UY"/>
+            </a:p>
+          </c:txPr>
+          <c:showLegendKey val="0"/>
+          <c:showVal val="0"/>
+          <c:showCatName val="0"/>
+          <c:showSerName val="0"/>
+          <c:showPercent val="0"/>
+          <c:showBubbleSize val="0"/>
+          <c:extLst>
+            <c:ext xmlns:c15="http://schemas.microsoft.com/office/drawing/2012/chart" uri="{CE6537A1-D6FC-4f65-9D91-7224C49458BB}"/>
+          </c:extLst>
+        </c:dLbl>
+      </c:pivotFmt>
+      <c:pivotFmt>
+        <c:idx val="27"/>
+        <c:spPr>
+          <a:solidFill>
+            <a:schemeClr val="accent1"/>
+          </a:solidFill>
+          <a:ln>
+            <a:noFill/>
+          </a:ln>
+          <a:effectLst/>
+        </c:spPr>
+        <c:marker>
+          <c:symbol val="none"/>
+        </c:marker>
+        <c:dLbl>
+          <c:idx val="0"/>
+          <c:spPr>
+            <a:noFill/>
+            <a:ln>
+              <a:noFill/>
+            </a:ln>
+            <a:effectLst/>
+          </c:spPr>
+          <c:txPr>
+            <a:bodyPr rot="0" spcFirstLastPara="1" vertOverflow="ellipsis" vert="horz" wrap="square" lIns="38100" tIns="19050" rIns="38100" bIns="19050" anchor="ctr" anchorCtr="1">
+              <a:spAutoFit/>
+            </a:bodyPr>
+            <a:lstStyle/>
+            <a:p>
+              <a:pPr>
+                <a:defRPr sz="900" b="0" i="0" u="none" strike="noStrike" kern="1200" baseline="0">
+                  <a:solidFill>
+                    <a:schemeClr val="tx1">
+                      <a:lumMod val="75000"/>
+                      <a:lumOff val="25000"/>
+                    </a:schemeClr>
+                  </a:solidFill>
+                  <a:latin typeface="+mn-lt"/>
+                  <a:ea typeface="+mn-ea"/>
+                  <a:cs typeface="+mn-cs"/>
+                </a:defRPr>
+              </a:pPr>
+              <a:endParaRPr lang="es-UY"/>
+            </a:p>
+          </c:txPr>
+          <c:showLegendKey val="0"/>
+          <c:showVal val="0"/>
+          <c:showCatName val="0"/>
+          <c:showSerName val="0"/>
+          <c:showPercent val="0"/>
+          <c:showBubbleSize val="0"/>
+          <c:extLst>
+            <c:ext xmlns:c15="http://schemas.microsoft.com/office/drawing/2012/chart" uri="{CE6537A1-D6FC-4f65-9D91-7224C49458BB}"/>
+          </c:extLst>
+        </c:dLbl>
+      </c:pivotFmt>
+      <c:pivotFmt>
+        <c:idx val="28"/>
+        <c:spPr>
+          <a:solidFill>
+            <a:schemeClr val="accent1"/>
+          </a:solidFill>
+          <a:ln>
+            <a:noFill/>
+          </a:ln>
+          <a:effectLst/>
+        </c:spPr>
+        <c:marker>
+          <c:symbol val="none"/>
+        </c:marker>
+        <c:dLbl>
+          <c:idx val="0"/>
+          <c:spPr>
+            <a:noFill/>
+            <a:ln>
+              <a:noFill/>
+            </a:ln>
+            <a:effectLst/>
+          </c:spPr>
+          <c:txPr>
+            <a:bodyPr rot="0" spcFirstLastPara="1" vertOverflow="ellipsis" vert="horz" wrap="square" lIns="38100" tIns="19050" rIns="38100" bIns="19050" anchor="ctr" anchorCtr="1">
+              <a:spAutoFit/>
+            </a:bodyPr>
+            <a:lstStyle/>
+            <a:p>
+              <a:pPr>
+                <a:defRPr sz="900" b="0" i="0" u="none" strike="noStrike" kern="1200" baseline="0">
+                  <a:solidFill>
+                    <a:schemeClr val="tx1">
+                      <a:lumMod val="75000"/>
+                      <a:lumOff val="25000"/>
+                    </a:schemeClr>
+                  </a:solidFill>
+                  <a:latin typeface="+mn-lt"/>
+                  <a:ea typeface="+mn-ea"/>
+                  <a:cs typeface="+mn-cs"/>
+                </a:defRPr>
+              </a:pPr>
+              <a:endParaRPr lang="es-UY"/>
+            </a:p>
+          </c:txPr>
+          <c:showLegendKey val="0"/>
+          <c:showVal val="0"/>
+          <c:showCatName val="0"/>
+          <c:showSerName val="0"/>
+          <c:showPercent val="0"/>
+          <c:showBubbleSize val="0"/>
+          <c:extLst>
+            <c:ext xmlns:c15="http://schemas.microsoft.com/office/drawing/2012/chart" uri="{CE6537A1-D6FC-4f65-9D91-7224C49458BB}"/>
+          </c:extLst>
+        </c:dLbl>
+      </c:pivotFmt>
+      <c:pivotFmt>
+        <c:idx val="29"/>
+        <c:spPr>
+          <a:solidFill>
+            <a:schemeClr val="accent1"/>
+          </a:solidFill>
+          <a:ln>
+            <a:noFill/>
+          </a:ln>
+          <a:effectLst/>
+        </c:spPr>
+        <c:marker>
+          <c:symbol val="none"/>
+        </c:marker>
+        <c:dLbl>
+          <c:idx val="0"/>
+          <c:spPr>
+            <a:noFill/>
+            <a:ln>
+              <a:noFill/>
+            </a:ln>
+            <a:effectLst/>
+          </c:spPr>
+          <c:txPr>
+            <a:bodyPr rot="0" spcFirstLastPara="1" vertOverflow="ellipsis" vert="horz" wrap="square" lIns="38100" tIns="19050" rIns="38100" bIns="19050" anchor="ctr" anchorCtr="1">
+              <a:spAutoFit/>
+            </a:bodyPr>
+            <a:lstStyle/>
+            <a:p>
+              <a:pPr>
+                <a:defRPr sz="900" b="0" i="0" u="none" strike="noStrike" kern="1200" baseline="0">
+                  <a:solidFill>
+                    <a:schemeClr val="tx1">
+                      <a:lumMod val="75000"/>
+                      <a:lumOff val="25000"/>
+                    </a:schemeClr>
+                  </a:solidFill>
+                  <a:latin typeface="+mn-lt"/>
+                  <a:ea typeface="+mn-ea"/>
+                  <a:cs typeface="+mn-cs"/>
+                </a:defRPr>
+              </a:pPr>
+              <a:endParaRPr lang="es-UY"/>
+            </a:p>
+          </c:txPr>
+          <c:showLegendKey val="0"/>
+          <c:showVal val="0"/>
+          <c:showCatName val="0"/>
+          <c:showSerName val="0"/>
+          <c:showPercent val="0"/>
+          <c:showBubbleSize val="0"/>
+          <c:extLst>
+            <c:ext xmlns:c15="http://schemas.microsoft.com/office/drawing/2012/chart" uri="{CE6537A1-D6FC-4f65-9D91-7224C49458BB}"/>
+          </c:extLst>
+        </c:dLbl>
+      </c:pivotFmt>
+      <c:pivotFmt>
+        <c:idx val="30"/>
+        <c:spPr>
+          <a:solidFill>
+            <a:schemeClr val="accent1"/>
+          </a:solidFill>
+          <a:ln>
+            <a:noFill/>
+          </a:ln>
+          <a:effectLst/>
+        </c:spPr>
+        <c:marker>
+          <c:symbol val="none"/>
+        </c:marker>
+        <c:dLbl>
+          <c:idx val="0"/>
+          <c:spPr>
+            <a:noFill/>
+            <a:ln>
+              <a:noFill/>
+            </a:ln>
+            <a:effectLst/>
+          </c:spPr>
+          <c:txPr>
+            <a:bodyPr rot="0" spcFirstLastPara="1" vertOverflow="ellipsis" vert="horz" wrap="square" lIns="38100" tIns="19050" rIns="38100" bIns="19050" anchor="ctr" anchorCtr="1">
+              <a:spAutoFit/>
+            </a:bodyPr>
+            <a:lstStyle/>
+            <a:p>
+              <a:pPr>
+                <a:defRPr sz="900" b="0" i="0" u="none" strike="noStrike" kern="1200" baseline="0">
+                  <a:solidFill>
+                    <a:schemeClr val="tx1">
+                      <a:lumMod val="75000"/>
+                      <a:lumOff val="25000"/>
+                    </a:schemeClr>
+                  </a:solidFill>
+                  <a:latin typeface="+mn-lt"/>
+                  <a:ea typeface="+mn-ea"/>
+                  <a:cs typeface="+mn-cs"/>
+                </a:defRPr>
+              </a:pPr>
+              <a:endParaRPr lang="es-UY"/>
+            </a:p>
+          </c:txPr>
+          <c:showLegendKey val="0"/>
+          <c:showVal val="0"/>
+          <c:showCatName val="0"/>
+          <c:showSerName val="0"/>
+          <c:showPercent val="0"/>
+          <c:showBubbleSize val="0"/>
+          <c:extLst>
+            <c:ext xmlns:c15="http://schemas.microsoft.com/office/drawing/2012/chart" uri="{CE6537A1-D6FC-4f65-9D91-7224C49458BB}"/>
+          </c:extLst>
+        </c:dLbl>
+      </c:pivotFmt>
+      <c:pivotFmt>
+        <c:idx val="31"/>
+        <c:spPr>
+          <a:solidFill>
+            <a:schemeClr val="accent1"/>
+          </a:solidFill>
+          <a:ln>
+            <a:noFill/>
+          </a:ln>
+          <a:effectLst/>
+        </c:spPr>
+        <c:marker>
+          <c:symbol val="none"/>
+        </c:marker>
+        <c:dLbl>
+          <c:idx val="0"/>
+          <c:spPr>
+            <a:noFill/>
+            <a:ln>
+              <a:noFill/>
+            </a:ln>
+            <a:effectLst/>
+          </c:spPr>
+          <c:txPr>
+            <a:bodyPr rot="0" spcFirstLastPara="1" vertOverflow="ellipsis" vert="horz" wrap="square" lIns="38100" tIns="19050" rIns="38100" bIns="19050" anchor="ctr" anchorCtr="1">
+              <a:spAutoFit/>
+            </a:bodyPr>
+            <a:lstStyle/>
+            <a:p>
+              <a:pPr>
+                <a:defRPr sz="900" b="0" i="0" u="none" strike="noStrike" kern="1200" baseline="0">
+                  <a:solidFill>
+                    <a:schemeClr val="tx1">
+                      <a:lumMod val="75000"/>
+                      <a:lumOff val="25000"/>
+                    </a:schemeClr>
+                  </a:solidFill>
+                  <a:latin typeface="+mn-lt"/>
+                  <a:ea typeface="+mn-ea"/>
+                  <a:cs typeface="+mn-cs"/>
+                </a:defRPr>
+              </a:pPr>
+              <a:endParaRPr lang="es-UY"/>
+            </a:p>
+          </c:txPr>
+          <c:showLegendKey val="0"/>
+          <c:showVal val="0"/>
+          <c:showCatName val="0"/>
+          <c:showSerName val="0"/>
+          <c:showPercent val="0"/>
+          <c:showBubbleSize val="0"/>
+          <c:extLst>
+            <c:ext xmlns:c15="http://schemas.microsoft.com/office/drawing/2012/chart" uri="{CE6537A1-D6FC-4f65-9D91-7224C49458BB}"/>
+          </c:extLst>
+        </c:dLbl>
+      </c:pivotFmt>
+      <c:pivotFmt>
+        <c:idx val="32"/>
+        <c:spPr>
+          <a:solidFill>
+            <a:schemeClr val="accent1"/>
+          </a:solidFill>
+          <a:ln>
+            <a:noFill/>
+          </a:ln>
+          <a:effectLst/>
+        </c:spPr>
+        <c:marker>
+          <c:symbol val="none"/>
+        </c:marker>
+        <c:dLbl>
+          <c:idx val="0"/>
+          <c:spPr>
+            <a:noFill/>
+            <a:ln>
+              <a:noFill/>
+            </a:ln>
+            <a:effectLst/>
+          </c:spPr>
+          <c:txPr>
+            <a:bodyPr rot="0" spcFirstLastPara="1" vertOverflow="ellipsis" vert="horz" wrap="square" lIns="38100" tIns="19050" rIns="38100" bIns="19050" anchor="ctr" anchorCtr="1">
+              <a:spAutoFit/>
+            </a:bodyPr>
+            <a:lstStyle/>
+            <a:p>
+              <a:pPr>
+                <a:defRPr sz="900" b="0" i="0" u="none" strike="noStrike" kern="1200" baseline="0">
+                  <a:solidFill>
+                    <a:schemeClr val="tx1">
+                      <a:lumMod val="75000"/>
+                      <a:lumOff val="25000"/>
+                    </a:schemeClr>
+                  </a:solidFill>
+                  <a:latin typeface="+mn-lt"/>
+                  <a:ea typeface="+mn-ea"/>
+                  <a:cs typeface="+mn-cs"/>
+                </a:defRPr>
+              </a:pPr>
+              <a:endParaRPr lang="es-UY"/>
+            </a:p>
+          </c:txPr>
+          <c:showLegendKey val="0"/>
+          <c:showVal val="0"/>
+          <c:showCatName val="0"/>
+          <c:showSerName val="0"/>
+          <c:showPercent val="0"/>
+          <c:showBubbleSize val="0"/>
+          <c:extLst>
+            <c:ext xmlns:c15="http://schemas.microsoft.com/office/drawing/2012/chart" uri="{CE6537A1-D6FC-4f65-9D91-7224C49458BB}"/>
+          </c:extLst>
+        </c:dLbl>
+      </c:pivotFmt>
+      <c:pivotFmt>
+        <c:idx val="33"/>
+        <c:spPr>
+          <a:solidFill>
+            <a:schemeClr val="accent1"/>
+          </a:solidFill>
+          <a:ln>
+            <a:noFill/>
+          </a:ln>
+          <a:effectLst/>
+        </c:spPr>
+        <c:marker>
+          <c:symbol val="none"/>
+        </c:marker>
+        <c:dLbl>
+          <c:idx val="0"/>
+          <c:showLegendKey val="0"/>
+          <c:showVal val="0"/>
+          <c:showCatName val="0"/>
+          <c:showSerName val="0"/>
+          <c:showPercent val="0"/>
+          <c:showBubbleSize val="0"/>
+          <c:extLst>
+            <c:ext xmlns:c15="http://schemas.microsoft.com/office/drawing/2012/chart" uri="{CE6537A1-D6FC-4f65-9D91-7224C49458BB}"/>
+          </c:extLst>
+        </c:dLbl>
+      </c:pivotFmt>
+      <c:pivotFmt>
+        <c:idx val="34"/>
+        <c:spPr>
+          <a:solidFill>
+            <a:schemeClr val="accent1"/>
+          </a:solidFill>
+          <a:ln>
+            <a:noFill/>
+          </a:ln>
+          <a:effectLst/>
+        </c:spPr>
+        <c:marker>
+          <c:symbol val="none"/>
+        </c:marker>
+        <c:dLbl>
+          <c:idx val="0"/>
+          <c:showLegendKey val="0"/>
+          <c:showVal val="0"/>
+          <c:showCatName val="0"/>
+          <c:showSerName val="0"/>
+          <c:showPercent val="0"/>
+          <c:showBubbleSize val="0"/>
+          <c:extLst>
+            <c:ext xmlns:c15="http://schemas.microsoft.com/office/drawing/2012/chart" uri="{CE6537A1-D6FC-4f65-9D91-7224C49458BB}"/>
+          </c:extLst>
+        </c:dLbl>
+      </c:pivotFmt>
+      <c:pivotFmt>
+        <c:idx val="35"/>
+        <c:spPr>
+          <a:solidFill>
+            <a:schemeClr val="accent1"/>
+          </a:solidFill>
+          <a:ln>
+            <a:noFill/>
+          </a:ln>
+          <a:effectLst/>
+        </c:spPr>
+        <c:marker>
+          <c:symbol val="none"/>
+        </c:marker>
+        <c:dLbl>
+          <c:idx val="0"/>
+          <c:showLegendKey val="0"/>
+          <c:showVal val="0"/>
+          <c:showCatName val="0"/>
+          <c:showSerName val="0"/>
+          <c:showPercent val="0"/>
+          <c:showBubbleSize val="0"/>
+          <c:extLst>
+            <c:ext xmlns:c15="http://schemas.microsoft.com/office/drawing/2012/chart" uri="{CE6537A1-D6FC-4f65-9D91-7224C49458BB}"/>
+          </c:extLst>
+        </c:dLbl>
+      </c:pivotFmt>
+      <c:pivotFmt>
+        <c:idx val="36"/>
+        <c:spPr>
+          <a:solidFill>
+            <a:schemeClr val="accent1"/>
+          </a:solidFill>
+          <a:ln>
+            <a:noFill/>
+          </a:ln>
+          <a:effectLst/>
+        </c:spPr>
+        <c:marker>
+          <c:symbol val="none"/>
+        </c:marker>
+        <c:dLbl>
+          <c:idx val="0"/>
+          <c:showLegendKey val="0"/>
+          <c:showVal val="0"/>
+          <c:showCatName val="0"/>
+          <c:showSerName val="0"/>
+          <c:showPercent val="0"/>
+          <c:showBubbleSize val="0"/>
+          <c:extLst>
+            <c:ext xmlns:c15="http://schemas.microsoft.com/office/drawing/2012/chart" uri="{CE6537A1-D6FC-4f65-9D91-7224C49458BB}"/>
+          </c:extLst>
+        </c:dLbl>
+      </c:pivotFmt>
+      <c:pivotFmt>
+        <c:idx val="37"/>
+        <c:spPr>
+          <a:solidFill>
+            <a:schemeClr val="accent1"/>
+          </a:solidFill>
+          <a:ln>
+            <a:noFill/>
+          </a:ln>
+          <a:effectLst/>
+        </c:spPr>
+        <c:marker>
+          <c:symbol val="none"/>
+        </c:marker>
+        <c:dLbl>
+          <c:idx val="0"/>
+          <c:showLegendKey val="0"/>
+          <c:showVal val="0"/>
+          <c:showCatName val="0"/>
+          <c:showSerName val="0"/>
+          <c:showPercent val="0"/>
+          <c:showBubbleSize val="0"/>
+          <c:extLst>
+            <c:ext xmlns:c15="http://schemas.microsoft.com/office/drawing/2012/chart" uri="{CE6537A1-D6FC-4f65-9D91-7224C49458BB}"/>
+          </c:extLst>
+        </c:dLbl>
+      </c:pivotFmt>
+      <c:pivotFmt>
+        <c:idx val="38"/>
+        <c:spPr>
+          <a:solidFill>
+            <a:schemeClr val="accent1"/>
+          </a:solidFill>
+          <a:ln>
+            <a:noFill/>
+          </a:ln>
+          <a:effectLst/>
+        </c:spPr>
+        <c:marker>
+          <c:symbol val="none"/>
+        </c:marker>
+        <c:dLbl>
+          <c:idx val="0"/>
+          <c:showLegendKey val="0"/>
+          <c:showVal val="0"/>
+          <c:showCatName val="0"/>
+          <c:showSerName val="0"/>
+          <c:showPercent val="0"/>
+          <c:showBubbleSize val="0"/>
+          <c:extLst>
+            <c:ext xmlns:c15="http://schemas.microsoft.com/office/drawing/2012/chart" uri="{CE6537A1-D6FC-4f65-9D91-7224C49458BB}"/>
+          </c:extLst>
+        </c:dLbl>
+      </c:pivotFmt>
+      <c:pivotFmt>
+        <c:idx val="39"/>
+        <c:spPr>
+          <a:solidFill>
+            <a:schemeClr val="accent1"/>
+          </a:solidFill>
+          <a:ln>
+            <a:noFill/>
+          </a:ln>
+          <a:effectLst/>
+        </c:spPr>
+        <c:marker>
+          <c:symbol val="none"/>
+        </c:marker>
+        <c:dLbl>
+          <c:idx val="0"/>
+          <c:showLegendKey val="0"/>
+          <c:showVal val="0"/>
+          <c:showCatName val="0"/>
+          <c:showSerName val="0"/>
+          <c:showPercent val="0"/>
+          <c:showBubbleSize val="0"/>
+          <c:extLst>
+            <c:ext xmlns:c15="http://schemas.microsoft.com/office/drawing/2012/chart" uri="{CE6537A1-D6FC-4f65-9D91-7224C49458BB}"/>
+          </c:extLst>
+        </c:dLbl>
+      </c:pivotFmt>
+      <c:pivotFmt>
+        <c:idx val="40"/>
+        <c:spPr>
+          <a:solidFill>
+            <a:schemeClr val="accent1"/>
+          </a:solidFill>
+          <a:ln>
+            <a:noFill/>
+          </a:ln>
+          <a:effectLst/>
+        </c:spPr>
+        <c:marker>
+          <c:symbol val="none"/>
+        </c:marker>
+        <c:dLbl>
+          <c:idx val="0"/>
+          <c:showLegendKey val="0"/>
+          <c:showVal val="0"/>
+          <c:showCatName val="0"/>
+          <c:showSerName val="0"/>
+          <c:showPercent val="0"/>
+          <c:showBubbleSize val="0"/>
+          <c:extLst>
+            <c:ext xmlns:c15="http://schemas.microsoft.com/office/drawing/2012/chart" uri="{CE6537A1-D6FC-4f65-9D91-7224C49458BB}"/>
+          </c:extLst>
+        </c:dLbl>
+      </c:pivotFmt>
+      <c:pivotFmt>
+        <c:idx val="41"/>
+        <c:spPr>
+          <a:solidFill>
+            <a:schemeClr val="accent1"/>
+          </a:solidFill>
+          <a:ln>
+            <a:noFill/>
+          </a:ln>
+          <a:effectLst/>
+        </c:spPr>
+        <c:marker>
+          <c:symbol val="none"/>
+        </c:marker>
+        <c:dLbl>
+          <c:idx val="0"/>
+          <c:showLegendKey val="0"/>
+          <c:showVal val="0"/>
+          <c:showCatName val="0"/>
+          <c:showSerName val="0"/>
+          <c:showPercent val="0"/>
+          <c:showBubbleSize val="0"/>
+          <c:extLst>
+            <c:ext xmlns:c15="http://schemas.microsoft.com/office/drawing/2012/chart" uri="{CE6537A1-D6FC-4f65-9D91-7224C49458BB}"/>
+          </c:extLst>
+        </c:dLbl>
+      </c:pivotFmt>
+      <c:pivotFmt>
+        <c:idx val="42"/>
+        <c:spPr>
+          <a:solidFill>
+            <a:schemeClr val="accent1"/>
+          </a:solidFill>
+          <a:ln>
+            <a:noFill/>
+          </a:ln>
+          <a:effectLst/>
+        </c:spPr>
+        <c:marker>
+          <c:symbol val="none"/>
+        </c:marker>
+        <c:dLbl>
+          <c:idx val="0"/>
+          <c:showLegendKey val="0"/>
+          <c:showVal val="0"/>
+          <c:showCatName val="0"/>
+          <c:showSerName val="0"/>
+          <c:showPercent val="0"/>
+          <c:showBubbleSize val="0"/>
+          <c:extLst>
+            <c:ext xmlns:c15="http://schemas.microsoft.com/office/drawing/2012/chart" uri="{CE6537A1-D6FC-4f65-9D91-7224C49458BB}"/>
+          </c:extLst>
+        </c:dLbl>
+      </c:pivotFmt>
+      <c:pivotFmt>
+        <c:idx val="43"/>
+        <c:spPr>
+          <a:solidFill>
+            <a:schemeClr val="accent1"/>
+          </a:solidFill>
+          <a:ln>
+            <a:noFill/>
+          </a:ln>
+          <a:effectLst/>
+        </c:spPr>
+        <c:marker>
+          <c:symbol val="none"/>
+        </c:marker>
+        <c:dLbl>
+          <c:idx val="0"/>
+          <c:showLegendKey val="0"/>
+          <c:showVal val="0"/>
+          <c:showCatName val="0"/>
+          <c:showSerName val="0"/>
+          <c:showPercent val="0"/>
+          <c:showBubbleSize val="0"/>
+          <c:extLst>
+            <c:ext xmlns:c15="http://schemas.microsoft.com/office/drawing/2012/chart" uri="{CE6537A1-D6FC-4f65-9D91-7224C49458BB}"/>
+          </c:extLst>
+        </c:dLbl>
+      </c:pivotFmt>
+      <c:pivotFmt>
+        <c:idx val="44"/>
+        <c:spPr>
+          <a:solidFill>
+            <a:schemeClr val="accent1"/>
+          </a:solidFill>
+          <a:ln>
+            <a:noFill/>
+          </a:ln>
+          <a:effectLst/>
+        </c:spPr>
+        <c:marker>
+          <c:symbol val="none"/>
+        </c:marker>
+        <c:dLbl>
+          <c:idx val="0"/>
+          <c:spPr>
+            <a:noFill/>
+            <a:ln>
+              <a:noFill/>
+            </a:ln>
+            <a:effectLst/>
+          </c:spPr>
+          <c:txPr>
+            <a:bodyPr rot="0" spcFirstLastPara="1" vertOverflow="ellipsis" vert="horz" wrap="square" lIns="38100" tIns="19050" rIns="38100" bIns="19050" anchor="ctr" anchorCtr="1">
+              <a:spAutoFit/>
+            </a:bodyPr>
+            <a:lstStyle/>
+            <a:p>
+              <a:pPr>
+                <a:defRPr sz="900" b="0" i="0" u="none" strike="noStrike" kern="1200" baseline="0">
+                  <a:solidFill>
+                    <a:schemeClr val="tx1">
+                      <a:lumMod val="75000"/>
+                      <a:lumOff val="25000"/>
+                    </a:schemeClr>
+                  </a:solidFill>
+                  <a:latin typeface="+mn-lt"/>
+                  <a:ea typeface="+mn-ea"/>
+                  <a:cs typeface="+mn-cs"/>
+                </a:defRPr>
+              </a:pPr>
+              <a:endParaRPr lang="es-UY"/>
+            </a:p>
+          </c:txPr>
+          <c:showLegendKey val="0"/>
+          <c:showVal val="0"/>
+          <c:showCatName val="0"/>
+          <c:showSerName val="0"/>
+          <c:showPercent val="0"/>
+          <c:showBubbleSize val="0"/>
+          <c:extLst>
+            <c:ext xmlns:c15="http://schemas.microsoft.com/office/drawing/2012/chart" uri="{CE6537A1-D6FC-4f65-9D91-7224C49458BB}"/>
+          </c:extLst>
+        </c:dLbl>
+      </c:pivotFmt>
+      <c:pivotFmt>
+        <c:idx val="45"/>
+        <c:spPr>
+          <a:solidFill>
+            <a:schemeClr val="accent1"/>
+          </a:solidFill>
+          <a:ln>
+            <a:noFill/>
+          </a:ln>
+          <a:effectLst/>
+        </c:spPr>
+        <c:marker>
+          <c:symbol val="none"/>
+        </c:marker>
+        <c:dLbl>
+          <c:idx val="0"/>
+          <c:spPr>
+            <a:noFill/>
+            <a:ln>
+              <a:noFill/>
+            </a:ln>
+            <a:effectLst/>
+          </c:spPr>
+          <c:txPr>
+            <a:bodyPr rot="0" spcFirstLastPara="1" vertOverflow="ellipsis" vert="horz" wrap="square" lIns="38100" tIns="19050" rIns="38100" bIns="19050" anchor="ctr" anchorCtr="1">
+              <a:spAutoFit/>
+            </a:bodyPr>
+            <a:lstStyle/>
+            <a:p>
+              <a:pPr>
+                <a:defRPr sz="900" b="0" i="0" u="none" strike="noStrike" kern="1200" baseline="0">
+                  <a:solidFill>
+                    <a:schemeClr val="tx1">
+                      <a:lumMod val="75000"/>
+                      <a:lumOff val="25000"/>
+                    </a:schemeClr>
+                  </a:solidFill>
+                  <a:latin typeface="+mn-lt"/>
+                  <a:ea typeface="+mn-ea"/>
+                  <a:cs typeface="+mn-cs"/>
+                </a:defRPr>
+              </a:pPr>
+              <a:endParaRPr lang="es-UY"/>
+            </a:p>
+          </c:txPr>
+          <c:showLegendKey val="0"/>
+          <c:showVal val="0"/>
+          <c:showCatName val="0"/>
+          <c:showSerName val="0"/>
+          <c:showPercent val="0"/>
+          <c:showBubbleSize val="0"/>
+          <c:extLst>
+            <c:ext xmlns:c15="http://schemas.microsoft.com/office/drawing/2012/chart" uri="{CE6537A1-D6FC-4f65-9D91-7224C49458BB}"/>
+          </c:extLst>
+        </c:dLbl>
+      </c:pivotFmt>
+      <c:pivotFmt>
+        <c:idx val="46"/>
+        <c:spPr>
+          <a:solidFill>
+            <a:schemeClr val="accent1"/>
+          </a:solidFill>
+          <a:ln>
+            <a:noFill/>
+          </a:ln>
+          <a:effectLst/>
+        </c:spPr>
+        <c:marker>
+          <c:symbol val="none"/>
+        </c:marker>
+        <c:dLbl>
+          <c:idx val="0"/>
+          <c:spPr>
+            <a:noFill/>
+            <a:ln>
+              <a:noFill/>
+            </a:ln>
+            <a:effectLst/>
+          </c:spPr>
+          <c:txPr>
+            <a:bodyPr rot="0" spcFirstLastPara="1" vertOverflow="ellipsis" vert="horz" wrap="square" lIns="38100" tIns="19050" rIns="38100" bIns="19050" anchor="ctr" anchorCtr="1">
+              <a:spAutoFit/>
+            </a:bodyPr>
+            <a:lstStyle/>
+            <a:p>
+              <a:pPr>
+                <a:defRPr sz="900" b="0" i="0" u="none" strike="noStrike" kern="1200" baseline="0">
+                  <a:solidFill>
+                    <a:schemeClr val="tx1">
+                      <a:lumMod val="75000"/>
+                      <a:lumOff val="25000"/>
+                    </a:schemeClr>
+                  </a:solidFill>
+                  <a:latin typeface="+mn-lt"/>
+                  <a:ea typeface="+mn-ea"/>
+                  <a:cs typeface="+mn-cs"/>
+                </a:defRPr>
+              </a:pPr>
+              <a:endParaRPr lang="es-UY"/>
+            </a:p>
+          </c:txPr>
+          <c:showLegendKey val="0"/>
+          <c:showVal val="0"/>
+          <c:showCatName val="0"/>
+          <c:showSerName val="0"/>
+          <c:showPercent val="0"/>
+          <c:showBubbleSize val="0"/>
+          <c:extLst>
+            <c:ext xmlns:c15="http://schemas.microsoft.com/office/drawing/2012/chart" uri="{CE6537A1-D6FC-4f65-9D91-7224C49458BB}"/>
+          </c:extLst>
+        </c:dLbl>
+      </c:pivotFmt>
+      <c:pivotFmt>
+        <c:idx val="47"/>
+        <c:spPr>
+          <a:solidFill>
+            <a:schemeClr val="accent1"/>
+          </a:solidFill>
+          <a:ln>
+            <a:noFill/>
+          </a:ln>
+          <a:effectLst/>
+        </c:spPr>
+        <c:marker>
+          <c:symbol val="none"/>
+        </c:marker>
+        <c:dLbl>
+          <c:idx val="0"/>
+          <c:spPr>
+            <a:noFill/>
+            <a:ln>
+              <a:noFill/>
+            </a:ln>
+            <a:effectLst/>
+          </c:spPr>
+          <c:txPr>
+            <a:bodyPr rot="0" spcFirstLastPara="1" vertOverflow="ellipsis" vert="horz" wrap="square" lIns="38100" tIns="19050" rIns="38100" bIns="19050" anchor="ctr" anchorCtr="1">
+              <a:spAutoFit/>
+            </a:bodyPr>
+            <a:lstStyle/>
+            <a:p>
+              <a:pPr>
+                <a:defRPr sz="900" b="0" i="0" u="none" strike="noStrike" kern="1200" baseline="0">
+                  <a:solidFill>
+                    <a:schemeClr val="tx1">
+                      <a:lumMod val="75000"/>
+                      <a:lumOff val="25000"/>
+                    </a:schemeClr>
+                  </a:solidFill>
+                  <a:latin typeface="+mn-lt"/>
+                  <a:ea typeface="+mn-ea"/>
+                  <a:cs typeface="+mn-cs"/>
+                </a:defRPr>
+              </a:pPr>
+              <a:endParaRPr lang="es-UY"/>
+            </a:p>
+          </c:txPr>
+          <c:showLegendKey val="0"/>
+          <c:showVal val="0"/>
+          <c:showCatName val="0"/>
+          <c:showSerName val="0"/>
+          <c:showPercent val="0"/>
+          <c:showBubbleSize val="0"/>
+          <c:extLst>
+            <c:ext xmlns:c15="http://schemas.microsoft.com/office/drawing/2012/chart" uri="{CE6537A1-D6FC-4f65-9D91-7224C49458BB}"/>
+          </c:extLst>
+        </c:dLbl>
+      </c:pivotFmt>
+      <c:pivotFmt>
+        <c:idx val="48"/>
+        <c:spPr>
+          <a:solidFill>
+            <a:schemeClr val="accent1"/>
+          </a:solidFill>
+          <a:ln>
+            <a:noFill/>
+          </a:ln>
+          <a:effectLst/>
+        </c:spPr>
+        <c:marker>
+          <c:symbol val="none"/>
+        </c:marker>
+        <c:dLbl>
+          <c:idx val="0"/>
+          <c:spPr>
+            <a:noFill/>
+            <a:ln>
+              <a:noFill/>
+            </a:ln>
+            <a:effectLst/>
+          </c:spPr>
+          <c:txPr>
+            <a:bodyPr rot="0" spcFirstLastPara="1" vertOverflow="ellipsis" vert="horz" wrap="square" lIns="38100" tIns="19050" rIns="38100" bIns="19050" anchor="ctr" anchorCtr="1">
+              <a:spAutoFit/>
+            </a:bodyPr>
+            <a:lstStyle/>
+            <a:p>
+              <a:pPr>
+                <a:defRPr sz="900" b="0" i="0" u="none" strike="noStrike" kern="1200" baseline="0">
+                  <a:solidFill>
+                    <a:schemeClr val="tx1">
+                      <a:lumMod val="75000"/>
+                      <a:lumOff val="25000"/>
+                    </a:schemeClr>
+                  </a:solidFill>
+                  <a:latin typeface="+mn-lt"/>
+                  <a:ea typeface="+mn-ea"/>
+                  <a:cs typeface="+mn-cs"/>
+                </a:defRPr>
+              </a:pPr>
+              <a:endParaRPr lang="es-UY"/>
+            </a:p>
+          </c:txPr>
+          <c:showLegendKey val="0"/>
+          <c:showVal val="0"/>
+          <c:showCatName val="0"/>
+          <c:showSerName val="0"/>
+          <c:showPercent val="0"/>
+          <c:showBubbleSize val="0"/>
+          <c:extLst>
+            <c:ext xmlns:c15="http://schemas.microsoft.com/office/drawing/2012/chart" uri="{CE6537A1-D6FC-4f65-9D91-7224C49458BB}"/>
+          </c:extLst>
+        </c:dLbl>
+      </c:pivotFmt>
+      <c:pivotFmt>
+        <c:idx val="49"/>
+        <c:spPr>
+          <a:solidFill>
+            <a:schemeClr val="accent1"/>
+          </a:solidFill>
+          <a:ln>
+            <a:noFill/>
+          </a:ln>
+          <a:effectLst/>
+        </c:spPr>
+        <c:marker>
+          <c:symbol val="none"/>
+        </c:marker>
+        <c:dLbl>
+          <c:idx val="0"/>
+          <c:spPr>
+            <a:noFill/>
+            <a:ln>
+              <a:noFill/>
+            </a:ln>
+            <a:effectLst/>
+          </c:spPr>
+          <c:txPr>
+            <a:bodyPr rot="0" spcFirstLastPara="1" vertOverflow="ellipsis" vert="horz" wrap="square" lIns="38100" tIns="19050" rIns="38100" bIns="19050" anchor="ctr" anchorCtr="1">
+              <a:spAutoFit/>
+            </a:bodyPr>
+            <a:lstStyle/>
+            <a:p>
+              <a:pPr>
+                <a:defRPr sz="900" b="0" i="0" u="none" strike="noStrike" kern="1200" baseline="0">
+                  <a:solidFill>
+                    <a:schemeClr val="tx1">
+                      <a:lumMod val="75000"/>
+                      <a:lumOff val="25000"/>
+                    </a:schemeClr>
+                  </a:solidFill>
+                  <a:latin typeface="+mn-lt"/>
+                  <a:ea typeface="+mn-ea"/>
+                  <a:cs typeface="+mn-cs"/>
+                </a:defRPr>
+              </a:pPr>
+              <a:endParaRPr lang="es-UY"/>
+            </a:p>
+          </c:txPr>
+          <c:showLegendKey val="0"/>
+          <c:showVal val="0"/>
+          <c:showCatName val="0"/>
+          <c:showSerName val="0"/>
+          <c:showPercent val="0"/>
+          <c:showBubbleSize val="0"/>
+          <c:extLst>
+            <c:ext xmlns:c15="http://schemas.microsoft.com/office/drawing/2012/chart" uri="{CE6537A1-D6FC-4f65-9D91-7224C49458BB}"/>
+          </c:extLst>
+        </c:dLbl>
+      </c:pivotFmt>
+      <c:pivotFmt>
+        <c:idx val="50"/>
+        <c:spPr>
+          <a:solidFill>
+            <a:schemeClr val="accent1"/>
+          </a:solidFill>
+          <a:ln>
+            <a:noFill/>
+          </a:ln>
+          <a:effectLst/>
+        </c:spPr>
+        <c:marker>
+          <c:symbol val="none"/>
+        </c:marker>
+        <c:dLbl>
+          <c:idx val="0"/>
+          <c:spPr>
+            <a:noFill/>
+            <a:ln>
+              <a:noFill/>
+            </a:ln>
+            <a:effectLst/>
+          </c:spPr>
+          <c:txPr>
+            <a:bodyPr rot="0" spcFirstLastPara="1" vertOverflow="ellipsis" vert="horz" wrap="square" lIns="38100" tIns="19050" rIns="38100" bIns="19050" anchor="ctr" anchorCtr="1">
+              <a:spAutoFit/>
+            </a:bodyPr>
+            <a:lstStyle/>
+            <a:p>
+              <a:pPr>
+                <a:defRPr sz="900" b="0" i="0" u="none" strike="noStrike" kern="1200" baseline="0">
+                  <a:solidFill>
+                    <a:schemeClr val="tx1">
+                      <a:lumMod val="75000"/>
+                      <a:lumOff val="25000"/>
+                    </a:schemeClr>
+                  </a:solidFill>
+                  <a:latin typeface="+mn-lt"/>
+                  <a:ea typeface="+mn-ea"/>
+                  <a:cs typeface="+mn-cs"/>
+                </a:defRPr>
+              </a:pPr>
+              <a:endParaRPr lang="es-UY"/>
+            </a:p>
+          </c:txPr>
+          <c:showLegendKey val="0"/>
+          <c:showVal val="0"/>
+          <c:showCatName val="0"/>
+          <c:showSerName val="0"/>
+          <c:showPercent val="0"/>
+          <c:showBubbleSize val="0"/>
+          <c:extLst>
+            <c:ext xmlns:c15="http://schemas.microsoft.com/office/drawing/2012/chart" uri="{CE6537A1-D6FC-4f65-9D91-7224C49458BB}"/>
+          </c:extLst>
+        </c:dLbl>
+      </c:pivotFmt>
+      <c:pivotFmt>
+        <c:idx val="51"/>
+        <c:spPr>
+          <a:solidFill>
+            <a:schemeClr val="accent1"/>
+          </a:solidFill>
+          <a:ln>
+            <a:noFill/>
+          </a:ln>
+          <a:effectLst/>
+        </c:spPr>
+        <c:marker>
+          <c:symbol val="none"/>
+        </c:marker>
+        <c:dLbl>
+          <c:idx val="0"/>
+          <c:spPr>
+            <a:noFill/>
+            <a:ln>
+              <a:noFill/>
+            </a:ln>
+            <a:effectLst/>
+          </c:spPr>
+          <c:txPr>
+            <a:bodyPr rot="0" spcFirstLastPara="1" vertOverflow="ellipsis" vert="horz" wrap="square" lIns="38100" tIns="19050" rIns="38100" bIns="19050" anchor="ctr" anchorCtr="1">
+              <a:spAutoFit/>
+            </a:bodyPr>
+            <a:lstStyle/>
+            <a:p>
+              <a:pPr>
+                <a:defRPr sz="900" b="0" i="0" u="none" strike="noStrike" kern="1200" baseline="0">
+                  <a:solidFill>
+                    <a:schemeClr val="tx1">
+                      <a:lumMod val="75000"/>
+                      <a:lumOff val="25000"/>
+                    </a:schemeClr>
+                  </a:solidFill>
+                  <a:latin typeface="+mn-lt"/>
+                  <a:ea typeface="+mn-ea"/>
+                  <a:cs typeface="+mn-cs"/>
+                </a:defRPr>
+              </a:pPr>
+              <a:endParaRPr lang="es-UY"/>
+            </a:p>
+          </c:txPr>
+          <c:showLegendKey val="0"/>
+          <c:showVal val="0"/>
+          <c:showCatName val="0"/>
+          <c:showSerName val="0"/>
+          <c:showPercent val="0"/>
+          <c:showBubbleSize val="0"/>
+          <c:extLst>
+            <c:ext xmlns:c15="http://schemas.microsoft.com/office/drawing/2012/chart" uri="{CE6537A1-D6FC-4f65-9D91-7224C49458BB}"/>
+          </c:extLst>
+        </c:dLbl>
+      </c:pivotFmt>
+      <c:pivotFmt>
+        <c:idx val="52"/>
+        <c:spPr>
+          <a:solidFill>
+            <a:schemeClr val="accent1"/>
+          </a:solidFill>
+          <a:ln>
+            <a:noFill/>
+          </a:ln>
+          <a:effectLst/>
+        </c:spPr>
+        <c:marker>
+          <c:symbol val="none"/>
+        </c:marker>
+        <c:dLbl>
+          <c:idx val="0"/>
+          <c:spPr>
+            <a:noFill/>
+            <a:ln>
+              <a:noFill/>
+            </a:ln>
+            <a:effectLst/>
+          </c:spPr>
+          <c:txPr>
+            <a:bodyPr rot="0" spcFirstLastPara="1" vertOverflow="ellipsis" vert="horz" wrap="square" lIns="38100" tIns="19050" rIns="38100" bIns="19050" anchor="ctr" anchorCtr="1">
+              <a:spAutoFit/>
+            </a:bodyPr>
+            <a:lstStyle/>
+            <a:p>
+              <a:pPr>
+                <a:defRPr sz="900" b="0" i="0" u="none" strike="noStrike" kern="1200" baseline="0">
+                  <a:solidFill>
+                    <a:schemeClr val="tx1">
+                      <a:lumMod val="75000"/>
+                      <a:lumOff val="25000"/>
+                    </a:schemeClr>
+                  </a:solidFill>
+                  <a:latin typeface="+mn-lt"/>
+                  <a:ea typeface="+mn-ea"/>
+                  <a:cs typeface="+mn-cs"/>
+                </a:defRPr>
+              </a:pPr>
+              <a:endParaRPr lang="es-UY"/>
+            </a:p>
+          </c:txPr>
+          <c:showLegendKey val="0"/>
+          <c:showVal val="0"/>
+          <c:showCatName val="0"/>
+          <c:showSerName val="0"/>
+          <c:showPercent val="0"/>
+          <c:showBubbleSize val="0"/>
+          <c:extLst>
+            <c:ext xmlns:c15="http://schemas.microsoft.com/office/drawing/2012/chart" uri="{CE6537A1-D6FC-4f65-9D91-7224C49458BB}"/>
+          </c:extLst>
+        </c:dLbl>
+      </c:pivotFmt>
+      <c:pivotFmt>
+        <c:idx val="53"/>
+        <c:spPr>
+          <a:solidFill>
+            <a:schemeClr val="accent1"/>
+          </a:solidFill>
+          <a:ln>
+            <a:noFill/>
+          </a:ln>
+          <a:effectLst/>
+        </c:spPr>
+        <c:marker>
+          <c:symbol val="none"/>
+        </c:marker>
+        <c:dLbl>
+          <c:idx val="0"/>
+          <c:spPr>
+            <a:noFill/>
+            <a:ln>
+              <a:noFill/>
+            </a:ln>
+            <a:effectLst/>
+          </c:spPr>
+          <c:txPr>
+            <a:bodyPr rot="0" spcFirstLastPara="1" vertOverflow="ellipsis" vert="horz" wrap="square" lIns="38100" tIns="19050" rIns="38100" bIns="19050" anchor="ctr" anchorCtr="1">
+              <a:spAutoFit/>
+            </a:bodyPr>
+            <a:lstStyle/>
+            <a:p>
+              <a:pPr>
+                <a:defRPr sz="900" b="0" i="0" u="none" strike="noStrike" kern="1200" baseline="0">
+                  <a:solidFill>
+                    <a:schemeClr val="tx1">
+                      <a:lumMod val="75000"/>
+                      <a:lumOff val="25000"/>
+                    </a:schemeClr>
+                  </a:solidFill>
+                  <a:latin typeface="+mn-lt"/>
+                  <a:ea typeface="+mn-ea"/>
+                  <a:cs typeface="+mn-cs"/>
+                </a:defRPr>
+              </a:pPr>
+              <a:endParaRPr lang="es-UY"/>
+            </a:p>
+          </c:txPr>
+          <c:showLegendKey val="0"/>
+          <c:showVal val="0"/>
+          <c:showCatName val="0"/>
+          <c:showSerName val="0"/>
+          <c:showPercent val="0"/>
+          <c:showBubbleSize val="0"/>
+          <c:extLst>
+            <c:ext xmlns:c15="http://schemas.microsoft.com/office/drawing/2012/chart" uri="{CE6537A1-D6FC-4f65-9D91-7224C49458BB}"/>
+          </c:extLst>
+        </c:dLbl>
+      </c:pivotFmt>
+      <c:pivotFmt>
+        <c:idx val="54"/>
+        <c:spPr>
+          <a:solidFill>
+            <a:schemeClr val="accent1"/>
+          </a:solidFill>
+          <a:ln>
+            <a:noFill/>
+          </a:ln>
+          <a:effectLst/>
+        </c:spPr>
+        <c:marker>
+          <c:symbol val="none"/>
+        </c:marker>
+        <c:dLbl>
+          <c:idx val="0"/>
+          <c:spPr>
+            <a:noFill/>
+            <a:ln>
+              <a:noFill/>
+            </a:ln>
+            <a:effectLst/>
+          </c:spPr>
+          <c:txPr>
+            <a:bodyPr rot="0" spcFirstLastPara="1" vertOverflow="ellipsis" vert="horz" wrap="square" lIns="38100" tIns="19050" rIns="38100" bIns="19050" anchor="ctr" anchorCtr="1">
+              <a:spAutoFit/>
+            </a:bodyPr>
+            <a:lstStyle/>
+            <a:p>
+              <a:pPr>
+                <a:defRPr sz="900" b="0" i="0" u="none" strike="noStrike" kern="1200" baseline="0">
+                  <a:solidFill>
+                    <a:schemeClr val="tx1">
+                      <a:lumMod val="75000"/>
+                      <a:lumOff val="25000"/>
+                    </a:schemeClr>
+                  </a:solidFill>
+                  <a:latin typeface="+mn-lt"/>
+                  <a:ea typeface="+mn-ea"/>
+                  <a:cs typeface="+mn-cs"/>
+                </a:defRPr>
+              </a:pPr>
+              <a:endParaRPr lang="es-UY"/>
+            </a:p>
+          </c:txPr>
+          <c:showLegendKey val="0"/>
+          <c:showVal val="0"/>
+          <c:showCatName val="0"/>
+          <c:showSerName val="0"/>
+          <c:showPercent val="0"/>
+          <c:showBubbleSize val="0"/>
+          <c:extLst>
+            <c:ext xmlns:c15="http://schemas.microsoft.com/office/drawing/2012/chart" uri="{CE6537A1-D6FC-4f65-9D91-7224C49458BB}"/>
+          </c:extLst>
+        </c:dLbl>
+      </c:pivotFmt>
+      <c:pivotFmt>
+        <c:idx val="55"/>
+        <c:spPr>
+          <a:solidFill>
+            <a:schemeClr val="accent1"/>
+          </a:solidFill>
+          <a:ln>
+            <a:noFill/>
+          </a:ln>
+          <a:effectLst/>
+        </c:spPr>
+        <c:marker>
+          <c:symbol val="none"/>
+        </c:marker>
+        <c:dLbl>
+          <c:idx val="0"/>
+          <c:spPr>
+            <a:noFill/>
+            <a:ln>
+              <a:noFill/>
+            </a:ln>
+            <a:effectLst/>
+          </c:spPr>
+          <c:txPr>
+            <a:bodyPr rot="0" spcFirstLastPara="1" vertOverflow="ellipsis" vert="horz" wrap="square" lIns="38100" tIns="19050" rIns="38100" bIns="19050" anchor="ctr" anchorCtr="1">
+              <a:spAutoFit/>
+            </a:bodyPr>
+            <a:lstStyle/>
+            <a:p>
+              <a:pPr>
+                <a:defRPr sz="900" b="0" i="0" u="none" strike="noStrike" kern="1200" baseline="0">
+                  <a:solidFill>
+                    <a:schemeClr val="tx1">
+                      <a:lumMod val="75000"/>
+                      <a:lumOff val="25000"/>
+                    </a:schemeClr>
+                  </a:solidFill>
+                  <a:latin typeface="+mn-lt"/>
+                  <a:ea typeface="+mn-ea"/>
+                  <a:cs typeface="+mn-cs"/>
+                </a:defRPr>
+              </a:pPr>
+              <a:endParaRPr lang="es-UY"/>
+            </a:p>
+          </c:txPr>
+          <c:showLegendKey val="0"/>
+          <c:showVal val="0"/>
+          <c:showCatName val="0"/>
+          <c:showSerName val="0"/>
+          <c:showPercent val="0"/>
+          <c:showBubbleSize val="0"/>
+          <c:extLst>
+            <c:ext xmlns:c15="http://schemas.microsoft.com/office/drawing/2012/chart" uri="{CE6537A1-D6FC-4f65-9D91-7224C49458BB}"/>
+          </c:extLst>
+        </c:dLbl>
+      </c:pivotFmt>
+      <c:pivotFmt>
+        <c:idx val="56"/>
+        <c:spPr>
+          <a:solidFill>
+            <a:schemeClr val="accent1"/>
+          </a:solidFill>
+          <a:ln>
+            <a:noFill/>
+          </a:ln>
+          <a:effectLst/>
+        </c:spPr>
+        <c:marker>
+          <c:symbol val="none"/>
+        </c:marker>
+        <c:dLbl>
+          <c:idx val="0"/>
+          <c:spPr>
+            <a:noFill/>
+            <a:ln>
+              <a:noFill/>
+            </a:ln>
+            <a:effectLst/>
+          </c:spPr>
+          <c:txPr>
+            <a:bodyPr rot="0" spcFirstLastPara="1" vertOverflow="ellipsis" vert="horz" wrap="square" lIns="38100" tIns="19050" rIns="38100" bIns="19050" anchor="ctr" anchorCtr="1">
+              <a:spAutoFit/>
+            </a:bodyPr>
+            <a:lstStyle/>
+            <a:p>
+              <a:pPr>
+                <a:defRPr sz="900" b="0" i="0" u="none" strike="noStrike" kern="1200" baseline="0">
+                  <a:solidFill>
+                    <a:schemeClr val="tx1">
+                      <a:lumMod val="75000"/>
+                      <a:lumOff val="25000"/>
+                    </a:schemeClr>
+                  </a:solidFill>
+                  <a:latin typeface="+mn-lt"/>
+                  <a:ea typeface="+mn-ea"/>
+                  <a:cs typeface="+mn-cs"/>
+                </a:defRPr>
+              </a:pPr>
+              <a:endParaRPr lang="es-UY"/>
+            </a:p>
+          </c:txPr>
+          <c:showLegendKey val="0"/>
+          <c:showVal val="0"/>
+          <c:showCatName val="0"/>
+          <c:showSerName val="0"/>
+          <c:showPercent val="0"/>
+          <c:showBubbleSize val="0"/>
+          <c:extLst>
+            <c:ext xmlns:c15="http://schemas.microsoft.com/office/drawing/2012/chart" uri="{CE6537A1-D6FC-4f65-9D91-7224C49458BB}"/>
+          </c:extLst>
+        </c:dLbl>
+      </c:pivotFmt>
+    </c:pivotFmts>
+    <c:plotArea>
+      <c:layout>
+        <c:manualLayout>
+          <c:layoutTarget val="inner"/>
+          <c:xMode val="edge"/>
+          <c:yMode val="edge"/>
+          <c:x val="8.3012428324508211E-2"/>
+          <c:y val="5.0632911392405063E-2"/>
+          <c:w val="0.73570358583225881"/>
+          <c:h val="0.83893501445230734"/>
+        </c:manualLayout>
+      </c:layout>
+      <c:barChart>
+        <c:barDir val="bar"/>
+        <c:grouping val="stacked"/>
+        <c:varyColors val="0"/>
+        <c:ser>
+          <c:idx val="0"/>
+          <c:order val="0"/>
+          <c:tx>
+            <c:strRef>
+              <c:f>'1'!$B$4:$B$5</c:f>
+              <c:strCache>
+                <c:ptCount val="1"/>
+                <c:pt idx="0">
+                  <c:v>Electronic accessories</c:v>
+                </c:pt>
+              </c:strCache>
+            </c:strRef>
+          </c:tx>
+          <c:spPr>
+            <a:solidFill>
+              <a:schemeClr val="accent1"/>
+            </a:solidFill>
+            <a:ln>
+              <a:noFill/>
+            </a:ln>
+            <a:effectLst/>
+          </c:spPr>
+          <c:invertIfNegative val="0"/>
+          <c:cat>
+            <c:strRef>
+              <c:f>'1'!$A$6:$A$8</c:f>
+              <c:strCache>
+                <c:ptCount val="2"/>
+                <c:pt idx="0">
+                  <c:v>Female</c:v>
+                </c:pt>
+                <c:pt idx="1">
+                  <c:v>Male</c:v>
+                </c:pt>
+              </c:strCache>
+            </c:strRef>
+          </c:cat>
+          <c:val>
+            <c:numRef>
+              <c:f>'1'!$B$6:$B$8</c:f>
+              <c:numCache>
+                <c:formatCode>General</c:formatCode>
+                <c:ptCount val="2"/>
+                <c:pt idx="0">
+                  <c:v>27102.022499999999</c:v>
+                </c:pt>
+                <c:pt idx="1">
+                  <c:v>27235.508999999998</c:v>
+                </c:pt>
+              </c:numCache>
+            </c:numRef>
+          </c:val>
+          <c:extLst>
+            <c:ext xmlns:c16="http://schemas.microsoft.com/office/drawing/2014/chart" uri="{C3380CC4-5D6E-409C-BE32-E72D297353CC}">
+              <c16:uniqueId val="{00000000-9EC5-0E45-B928-7D44DF8426CC}"/>
+            </c:ext>
+          </c:extLst>
+        </c:ser>
+        <c:ser>
+          <c:idx val="1"/>
+          <c:order val="1"/>
+          <c:tx>
+            <c:strRef>
+              <c:f>'1'!$C$4:$C$5</c:f>
+              <c:strCache>
+                <c:ptCount val="1"/>
+                <c:pt idx="0">
+                  <c:v>Fashion accessories</c:v>
+                </c:pt>
+              </c:strCache>
+            </c:strRef>
+          </c:tx>
+          <c:spPr>
+            <a:solidFill>
+              <a:schemeClr val="accent2"/>
+            </a:solidFill>
+            <a:ln>
+              <a:noFill/>
+            </a:ln>
+            <a:effectLst/>
+          </c:spPr>
+          <c:invertIfNegative val="0"/>
+          <c:cat>
+            <c:strRef>
+              <c:f>'1'!$A$6:$A$8</c:f>
+              <c:strCache>
+                <c:ptCount val="2"/>
+                <c:pt idx="0">
+                  <c:v>Female</c:v>
+                </c:pt>
+                <c:pt idx="1">
+                  <c:v>Male</c:v>
+                </c:pt>
+              </c:strCache>
+            </c:strRef>
+          </c:cat>
+          <c:val>
+            <c:numRef>
+              <c:f>'1'!$C$6:$C$8</c:f>
+              <c:numCache>
+                <c:formatCode>General</c:formatCode>
+                <c:ptCount val="2"/>
+                <c:pt idx="0">
+                  <c:v>30437.400000000009</c:v>
+                </c:pt>
+                <c:pt idx="1">
+                  <c:v>23868.494999999999</c:v>
+                </c:pt>
+              </c:numCache>
+            </c:numRef>
+          </c:val>
+          <c:extLst>
+            <c:ext xmlns:c16="http://schemas.microsoft.com/office/drawing/2014/chart" uri="{C3380CC4-5D6E-409C-BE32-E72D297353CC}">
+              <c16:uniqueId val="{00000001-9EC5-0E45-B928-7D44DF8426CC}"/>
+            </c:ext>
+          </c:extLst>
+        </c:ser>
+        <c:ser>
+          <c:idx val="2"/>
+          <c:order val="2"/>
+          <c:tx>
+            <c:strRef>
+              <c:f>'1'!$D$4:$D$5</c:f>
+              <c:strCache>
+                <c:ptCount val="1"/>
+                <c:pt idx="0">
+                  <c:v>Food and beverages</c:v>
+                </c:pt>
+              </c:strCache>
+            </c:strRef>
+          </c:tx>
+          <c:spPr>
+            <a:solidFill>
+              <a:schemeClr val="accent3"/>
+            </a:solidFill>
+            <a:ln>
+              <a:noFill/>
+            </a:ln>
+            <a:effectLst/>
+          </c:spPr>
+          <c:invertIfNegative val="0"/>
+          <c:cat>
+            <c:strRef>
+              <c:f>'1'!$A$6:$A$8</c:f>
+              <c:strCache>
+                <c:ptCount val="2"/>
+                <c:pt idx="0">
+                  <c:v>Female</c:v>
+                </c:pt>
+                <c:pt idx="1">
+                  <c:v>Male</c:v>
+                </c:pt>
+              </c:strCache>
+            </c:strRef>
+          </c:cat>
+          <c:val>
+            <c:numRef>
+              <c:f>'1'!$D$6:$D$8</c:f>
+              <c:numCache>
+                <c:formatCode>General</c:formatCode>
+                <c:ptCount val="2"/>
+                <c:pt idx="0">
+                  <c:v>33170.917499999996</c:v>
+                </c:pt>
+                <c:pt idx="1">
+                  <c:v>22973.92649999999</c:v>
+                </c:pt>
+              </c:numCache>
+            </c:numRef>
+          </c:val>
+          <c:extLst>
+            <c:ext xmlns:c16="http://schemas.microsoft.com/office/drawing/2014/chart" uri="{C3380CC4-5D6E-409C-BE32-E72D297353CC}">
+              <c16:uniqueId val="{00000002-9EC5-0E45-B928-7D44DF8426CC}"/>
+            </c:ext>
+          </c:extLst>
+        </c:ser>
+        <c:ser>
+          <c:idx val="3"/>
+          <c:order val="3"/>
+          <c:tx>
+            <c:strRef>
+              <c:f>'1'!$E$4:$E$5</c:f>
+              <c:strCache>
+                <c:ptCount val="1"/>
+                <c:pt idx="0">
+                  <c:v>Health and beauty</c:v>
+                </c:pt>
+              </c:strCache>
+            </c:strRef>
+          </c:tx>
+          <c:spPr>
+            <a:solidFill>
+              <a:schemeClr val="accent4"/>
+            </a:solidFill>
+            <a:ln>
+              <a:noFill/>
+            </a:ln>
+            <a:effectLst/>
+          </c:spPr>
+          <c:invertIfNegative val="0"/>
+          <c:cat>
+            <c:strRef>
+              <c:f>'1'!$A$6:$A$8</c:f>
+              <c:strCache>
+                <c:ptCount val="2"/>
+                <c:pt idx="0">
+                  <c:v>Female</c:v>
+                </c:pt>
+                <c:pt idx="1">
+                  <c:v>Male</c:v>
+                </c:pt>
+              </c:strCache>
+            </c:strRef>
+          </c:cat>
+          <c:val>
+            <c:numRef>
+              <c:f>'1'!$E$6:$E$8</c:f>
+              <c:numCache>
+                <c:formatCode>General</c:formatCode>
+                <c:ptCount val="2"/>
+                <c:pt idx="0">
+                  <c:v>18560.986499999995</c:v>
+                </c:pt>
+                <c:pt idx="1">
+                  <c:v>30632.752499999995</c:v>
+                </c:pt>
+              </c:numCache>
+            </c:numRef>
+          </c:val>
+          <c:extLst>
+            <c:ext xmlns:c16="http://schemas.microsoft.com/office/drawing/2014/chart" uri="{C3380CC4-5D6E-409C-BE32-E72D297353CC}">
+              <c16:uniqueId val="{00000003-9EC5-0E45-B928-7D44DF8426CC}"/>
+            </c:ext>
+          </c:extLst>
+        </c:ser>
+        <c:ser>
+          <c:idx val="4"/>
+          <c:order val="4"/>
+          <c:tx>
+            <c:strRef>
+              <c:f>'1'!$F$4:$F$5</c:f>
+              <c:strCache>
+                <c:ptCount val="1"/>
+                <c:pt idx="0">
+                  <c:v>Home and lifestyle</c:v>
+                </c:pt>
+              </c:strCache>
+            </c:strRef>
+          </c:tx>
+          <c:spPr>
+            <a:solidFill>
+              <a:schemeClr val="accent5"/>
+            </a:solidFill>
+            <a:ln>
+              <a:noFill/>
+            </a:ln>
+            <a:effectLst/>
+          </c:spPr>
+          <c:invertIfNegative val="0"/>
+          <c:cat>
+            <c:strRef>
+              <c:f>'1'!$A$6:$A$8</c:f>
+              <c:strCache>
+                <c:ptCount val="2"/>
+                <c:pt idx="0">
+                  <c:v>Female</c:v>
+                </c:pt>
+                <c:pt idx="1">
+                  <c:v>Male</c:v>
+                </c:pt>
+              </c:strCache>
+            </c:strRef>
+          </c:cat>
+          <c:val>
+            <c:numRef>
+              <c:f>'1'!$F$6:$F$8</c:f>
+              <c:numCache>
+                <c:formatCode>General</c:formatCode>
+                <c:ptCount val="2"/>
+                <c:pt idx="0">
+                  <c:v>30036.877500000006</c:v>
+                </c:pt>
+                <c:pt idx="1">
+                  <c:v>23825.035499999998</c:v>
+                </c:pt>
+              </c:numCache>
+            </c:numRef>
+          </c:val>
+          <c:extLst>
+            <c:ext xmlns:c16="http://schemas.microsoft.com/office/drawing/2014/chart" uri="{C3380CC4-5D6E-409C-BE32-E72D297353CC}">
+              <c16:uniqueId val="{00000004-9EC5-0E45-B928-7D44DF8426CC}"/>
+            </c:ext>
+          </c:extLst>
+        </c:ser>
+        <c:ser>
+          <c:idx val="5"/>
+          <c:order val="5"/>
+          <c:tx>
+            <c:strRef>
+              <c:f>'1'!$G$4:$G$5</c:f>
+              <c:strCache>
+                <c:ptCount val="1"/>
+                <c:pt idx="0">
+                  <c:v>Sports and travel</c:v>
+                </c:pt>
+              </c:strCache>
+            </c:strRef>
+          </c:tx>
+          <c:spPr>
+            <a:solidFill>
+              <a:schemeClr val="accent6"/>
+            </a:solidFill>
+            <a:ln>
+              <a:noFill/>
+            </a:ln>
+            <a:effectLst/>
+          </c:spPr>
+          <c:invertIfNegative val="0"/>
+          <c:cat>
+            <c:strRef>
+              <c:f>'1'!$A$6:$A$8</c:f>
+              <c:strCache>
+                <c:ptCount val="2"/>
+                <c:pt idx="0">
+                  <c:v>Female</c:v>
+                </c:pt>
+                <c:pt idx="1">
+                  <c:v>Male</c:v>
+                </c:pt>
+              </c:strCache>
+            </c:strRef>
+          </c:cat>
+          <c:val>
+            <c:numRef>
+              <c:f>'1'!$G$6:$G$8</c:f>
+              <c:numCache>
+                <c:formatCode>General</c:formatCode>
+                <c:ptCount val="2"/>
+                <c:pt idx="0">
+                  <c:v>28574.72099999999</c:v>
+                </c:pt>
+                <c:pt idx="1">
+                  <c:v>26548.105500000001</c:v>
+                </c:pt>
+              </c:numCache>
+            </c:numRef>
+          </c:val>
+          <c:extLst>
+            <c:ext xmlns:c16="http://schemas.microsoft.com/office/drawing/2014/chart" uri="{C3380CC4-5D6E-409C-BE32-E72D297353CC}">
+              <c16:uniqueId val="{00000005-9EC5-0E45-B928-7D44DF8426CC}"/>
+            </c:ext>
+          </c:extLst>
+        </c:ser>
+        <c:dLbls>
+          <c:showLegendKey val="0"/>
+          <c:showVal val="0"/>
+          <c:showCatName val="0"/>
+          <c:showSerName val="0"/>
+          <c:showPercent val="0"/>
+          <c:showBubbleSize val="0"/>
+        </c:dLbls>
+        <c:gapWidth val="219"/>
+        <c:overlap val="100"/>
+        <c:axId val="417411327"/>
+        <c:axId val="417413119"/>
+      </c:barChart>
+      <c:catAx>
+        <c:axId val="417411327"/>
+        <c:scaling>
+          <c:orientation val="minMax"/>
+        </c:scaling>
+        <c:delete val="0"/>
+        <c:axPos val="l"/>
+        <c:numFmt formatCode="General" sourceLinked="1"/>
+        <c:majorTickMark val="none"/>
+        <c:minorTickMark val="none"/>
+        <c:tickLblPos val="nextTo"/>
+        <c:spPr>
+          <a:noFill/>
+          <a:ln w="9525" cap="flat" cmpd="sng" algn="ctr">
+            <a:solidFill>
+              <a:schemeClr val="tx1">
+                <a:lumMod val="15000"/>
+                <a:lumOff val="85000"/>
+              </a:schemeClr>
+            </a:solidFill>
+            <a:round/>
+          </a:ln>
+          <a:effectLst/>
+        </c:spPr>
+        <c:txPr>
+          <a:bodyPr rot="-60000000" spcFirstLastPara="1" vertOverflow="ellipsis" vert="horz" wrap="square" anchor="ctr" anchorCtr="1"/>
+          <a:lstStyle/>
+          <a:p>
+            <a:pPr>
+              <a:defRPr sz="900" b="0" i="0" u="none" strike="noStrike" kern="1200" baseline="0">
+                <a:solidFill>
+                  <a:schemeClr val="tx1">
+                    <a:lumMod val="65000"/>
+                    <a:lumOff val="35000"/>
+                  </a:schemeClr>
+                </a:solidFill>
+                <a:latin typeface="+mn-lt"/>
+                <a:ea typeface="+mn-ea"/>
+                <a:cs typeface="+mn-cs"/>
+              </a:defRPr>
+            </a:pPr>
+            <a:endParaRPr lang="es-UY"/>
+          </a:p>
+        </c:txPr>
+        <c:crossAx val="417413119"/>
+        <c:crosses val="autoZero"/>
+        <c:auto val="1"/>
+        <c:lblAlgn val="ctr"/>
+        <c:lblOffset val="100"/>
+        <c:noMultiLvlLbl val="0"/>
+      </c:catAx>
+      <c:valAx>
+        <c:axId val="417413119"/>
+        <c:scaling>
+          <c:orientation val="minMax"/>
+          <c:min val="0"/>
+        </c:scaling>
+        <c:delete val="0"/>
+        <c:axPos val="b"/>
+        <c:majorGridlines>
+          <c:spPr>
+            <a:ln w="9525" cap="flat" cmpd="sng" algn="ctr">
+              <a:solidFill>
+                <a:schemeClr val="tx1">
+                  <a:lumMod val="15000"/>
+                  <a:lumOff val="85000"/>
+                </a:schemeClr>
+              </a:solidFill>
+              <a:round/>
+            </a:ln>
+            <a:effectLst/>
+          </c:spPr>
+        </c:majorGridlines>
+        <c:numFmt formatCode="General" sourceLinked="1"/>
+        <c:majorTickMark val="none"/>
+        <c:minorTickMark val="none"/>
+        <c:tickLblPos val="nextTo"/>
+        <c:spPr>
+          <a:noFill/>
+          <a:ln>
+            <a:noFill/>
+          </a:ln>
+          <a:effectLst/>
+        </c:spPr>
+        <c:txPr>
+          <a:bodyPr rot="-60000000" spcFirstLastPara="1" vertOverflow="ellipsis" vert="horz" wrap="square" anchor="ctr" anchorCtr="1"/>
+          <a:lstStyle/>
+          <a:p>
+            <a:pPr>
+              <a:defRPr sz="900" b="0" i="0" u="none" strike="noStrike" kern="1200" baseline="0">
+                <a:solidFill>
+                  <a:schemeClr val="tx1">
+                    <a:lumMod val="65000"/>
+                    <a:lumOff val="35000"/>
+                  </a:schemeClr>
+                </a:solidFill>
+                <a:latin typeface="+mn-lt"/>
+                <a:ea typeface="+mn-ea"/>
+                <a:cs typeface="+mn-cs"/>
+              </a:defRPr>
+            </a:pPr>
+            <a:endParaRPr lang="es-UY"/>
+          </a:p>
+        </c:txPr>
+        <c:crossAx val="417411327"/>
+        <c:crosses val="autoZero"/>
+        <c:crossBetween val="between"/>
+      </c:valAx>
+      <c:spPr>
+        <a:noFill/>
+        <a:ln>
+          <a:noFill/>
+        </a:ln>
+        <a:effectLst/>
+      </c:spPr>
+    </c:plotArea>
+    <c:legend>
+      <c:legendPos val="r"/>
+      <c:overlay val="0"/>
+      <c:spPr>
+        <a:noFill/>
+        <a:ln>
+          <a:noFill/>
+        </a:ln>
+        <a:effectLst/>
+      </c:spPr>
+      <c:txPr>
+        <a:bodyPr rot="0" spcFirstLastPara="1" vertOverflow="ellipsis" vert="horz" wrap="square" anchor="ctr" anchorCtr="1"/>
+        <a:lstStyle/>
+        <a:p>
+          <a:pPr>
+            <a:defRPr sz="900" b="0" i="0" u="none" strike="noStrike" kern="1200" baseline="0">
+              <a:solidFill>
+                <a:schemeClr val="tx1">
+                  <a:lumMod val="65000"/>
+                  <a:lumOff val="35000"/>
+                </a:schemeClr>
+              </a:solidFill>
+              <a:latin typeface="+mn-lt"/>
+              <a:ea typeface="+mn-ea"/>
+              <a:cs typeface="+mn-cs"/>
+            </a:defRPr>
+          </a:pPr>
+          <a:endParaRPr lang="es-UY"/>
+        </a:p>
+      </c:txPr>
+    </c:legend>
+    <c:plotVisOnly val="1"/>
+    <c:dispBlanksAs val="gap"/>
+    <c:showDLblsOverMax val="0"/>
+    <c:extLst>
+      <c:ext xmlns:c16r3="http://schemas.microsoft.com/office/drawing/2017/03/chart" uri="{56B9EC1D-385E-4148-901F-78D8002777C0}">
+        <c16r3:dataDisplayOptions16>
+          <c16r3:dispNaAsBlank val="1"/>
+        </c16r3:dataDisplayOptions16>
+      </c:ext>
+    </c:extLst>
+  </c:chart>
+  <c:spPr>
+    <a:noFill/>
+    <a:ln>
+      <a:noFill/>
+    </a:ln>
+    <a:effectLst/>
+  </c:spPr>
+  <c:txPr>
+    <a:bodyPr/>
+    <a:lstStyle/>
+    <a:p>
+      <a:pPr>
+        <a:defRPr/>
+      </a:pPr>
+      <a:endParaRPr lang="es-UY"/>
+    </a:p>
+  </c:txPr>
+  <c:externalData r:id="rId3">
+    <c:autoUpdate val="0"/>
+  </c:externalData>
+  <c:extLst>
+    <c:ext xmlns:c14="http://schemas.microsoft.com/office/drawing/2007/8/2/chart" uri="{781A3756-C4B2-4CAC-9D66-4F8BD8637D16}">
+      <c14:pivotOptions>
+        <c14:dropZoneFilter val="1"/>
+        <c14:dropZoneCategories val="1"/>
+        <c14:dropZoneData val="1"/>
+        <c14:dropZoneSeries val="1"/>
+        <c14:dropZonesVisible val="1"/>
+      </c14:pivotOptions>
+    </c:ext>
+    <c:ext xmlns:c16="http://schemas.microsoft.com/office/drawing/2014/chart" uri="{E28EC0CA-F0BB-4C9C-879D-F8772B89E7AC}">
+      <c16:pivotOptions16>
+        <c16:showExpandCollapseFieldButtons val="1"/>
+      </c16:pivotOptions16>
+    </c:ext>
+  </c:extLst>
+</c:chartSpace>
+</file>
+
+<file path=ppt/charts/chart2.xml><?xml version="1.0" encoding="utf-8"?>
+<c:chartSpace xmlns:c="http://schemas.openxmlformats.org/drawingml/2006/chart" xmlns:a="http://schemas.openxmlformats.org/drawingml/2006/main" xmlns:r="http://schemas.openxmlformats.org/officeDocument/2006/relationships" xmlns:c16r2="http://schemas.microsoft.com/office/drawing/2015/06/chart">
+  <c:date1904 val="0"/>
+  <c:lang val="es-ES"/>
+  <c:roundedCorners val="0"/>
+  <mc:AlternateContent xmlns:mc="http://schemas.openxmlformats.org/markup-compatibility/2006">
+    <mc:Choice xmlns:c14="http://schemas.microsoft.com/office/drawing/2007/8/2/chart" Requires="c14">
+      <c14:style val="102"/>
+    </mc:Choice>
+    <mc:Fallback>
+      <c:style val="2"/>
+    </mc:Fallback>
+  </mc:AlternateContent>
+  <c:chart>
+    <c:title>
+      <c:tx>
+        <c:rich>
+          <a:bodyPr rot="0" spcFirstLastPara="1" vertOverflow="ellipsis" vert="horz" wrap="square" anchor="ctr" anchorCtr="1"/>
+          <a:lstStyle/>
+          <a:p>
+            <a:pPr>
+              <a:defRPr sz="1400" b="0" i="0" u="none" strike="noStrike" kern="1200" spc="0" baseline="0">
+                <a:solidFill>
+                  <a:schemeClr val="tx1">
+                    <a:lumMod val="65000"/>
+                    <a:lumOff val="35000"/>
+                  </a:schemeClr>
+                </a:solidFill>
+                <a:latin typeface="+mn-lt"/>
+                <a:ea typeface="+mn-ea"/>
+                <a:cs typeface="+mn-cs"/>
+              </a:defRPr>
+            </a:pPr>
+            <a:r>
+              <a:rPr lang="es-ES_tradnl"/>
+              <a:t>Total de ventas en $</a:t>
+            </a:r>
+          </a:p>
+        </c:rich>
+      </c:tx>
+      <c:overlay val="0"/>
+      <c:spPr>
+        <a:noFill/>
+        <a:ln>
+          <a:noFill/>
+        </a:ln>
+        <a:effectLst/>
+      </c:spPr>
+      <c:txPr>
+        <a:bodyPr rot="0" spcFirstLastPara="1" vertOverflow="ellipsis" vert="horz" wrap="square" anchor="ctr" anchorCtr="1"/>
+        <a:lstStyle/>
+        <a:p>
+          <a:pPr>
+            <a:defRPr sz="1400" b="0" i="0" u="none" strike="noStrike" kern="1200" spc="0" baseline="0">
+              <a:solidFill>
+                <a:schemeClr val="tx1">
+                  <a:lumMod val="65000"/>
+                  <a:lumOff val="35000"/>
+                </a:schemeClr>
+              </a:solidFill>
+              <a:latin typeface="+mn-lt"/>
+              <a:ea typeface="+mn-ea"/>
+              <a:cs typeface="+mn-cs"/>
+            </a:defRPr>
+          </a:pPr>
+          <a:endParaRPr lang="es-UY"/>
+        </a:p>
+      </c:txPr>
+    </c:title>
+    <c:autoTitleDeleted val="0"/>
+    <c:plotArea>
+      <c:layout/>
+      <c:lineChart>
+        <c:grouping val="standard"/>
+        <c:varyColors val="0"/>
+        <c:ser>
+          <c:idx val="0"/>
+          <c:order val="0"/>
+          <c:spPr>
+            <a:ln w="28575" cap="rnd">
+              <a:solidFill>
+                <a:schemeClr val="accent1"/>
+              </a:solidFill>
+              <a:round/>
+            </a:ln>
+            <a:effectLst/>
+          </c:spPr>
+          <c:marker>
+            <c:symbol val="none"/>
+          </c:marker>
+          <c:cat>
+            <c:numRef>
+              <c:f>'2.1'!$A$3:$A$13</c:f>
+              <c:numCache>
+                <c:formatCode>[$-F400]h:mm:ss\ AM/PM</c:formatCode>
+                <c:ptCount val="11"/>
+                <c:pt idx="0">
+                  <c:v>0.41666666666666669</c:v>
+                </c:pt>
+                <c:pt idx="1">
+                  <c:v>0.45833333333333331</c:v>
+                </c:pt>
+                <c:pt idx="2">
+                  <c:v>0.5</c:v>
+                </c:pt>
+                <c:pt idx="3">
+                  <c:v>0.54166666666666663</c:v>
+                </c:pt>
+                <c:pt idx="4">
+                  <c:v>0.58333333333333337</c:v>
+                </c:pt>
+                <c:pt idx="5">
+                  <c:v>0.625</c:v>
+                </c:pt>
+                <c:pt idx="6">
+                  <c:v>0.66666666666666663</c:v>
+                </c:pt>
+                <c:pt idx="7">
+                  <c:v>0.70833333333333337</c:v>
+                </c:pt>
+                <c:pt idx="8">
+                  <c:v>0.75</c:v>
+                </c:pt>
+                <c:pt idx="9">
+                  <c:v>0.79166666666666663</c:v>
+                </c:pt>
+                <c:pt idx="10">
+                  <c:v>0.83333333333333337</c:v>
+                </c:pt>
+              </c:numCache>
+            </c:numRef>
+          </c:cat>
+          <c:val>
+            <c:numRef>
+              <c:f>'2.1'!$B$3:$B$13</c:f>
+              <c:numCache>
+                <c:formatCode>0</c:formatCode>
+                <c:ptCount val="11"/>
+                <c:pt idx="0">
+                  <c:v>31421</c:v>
+                </c:pt>
+                <c:pt idx="1">
+                  <c:v>30377</c:v>
+                </c:pt>
+                <c:pt idx="2">
+                  <c:v>26066</c:v>
+                </c:pt>
+                <c:pt idx="3">
+                  <c:v>34723</c:v>
+                </c:pt>
+                <c:pt idx="4">
+                  <c:v>30828</c:v>
+                </c:pt>
+                <c:pt idx="5">
+                  <c:v>31180</c:v>
+                </c:pt>
+                <c:pt idx="6">
+                  <c:v>25226</c:v>
+                </c:pt>
+                <c:pt idx="7">
+                  <c:v>24445</c:v>
+                </c:pt>
+                <c:pt idx="8">
+                  <c:v>26030</c:v>
+                </c:pt>
+                <c:pt idx="9">
+                  <c:v>39700</c:v>
+                </c:pt>
+                <c:pt idx="10">
+                  <c:v>22970</c:v>
+                </c:pt>
+              </c:numCache>
+            </c:numRef>
+          </c:val>
+          <c:smooth val="0"/>
+          <c:extLst>
+            <c:ext xmlns:c16="http://schemas.microsoft.com/office/drawing/2014/chart" uri="{C3380CC4-5D6E-409C-BE32-E72D297353CC}">
+              <c16:uniqueId val="{00000000-7816-0641-9E85-8BB4CAB6E080}"/>
+            </c:ext>
+          </c:extLst>
+        </c:ser>
+        <c:dLbls>
+          <c:showLegendKey val="0"/>
+          <c:showVal val="0"/>
+          <c:showCatName val="0"/>
+          <c:showSerName val="0"/>
+          <c:showPercent val="0"/>
+          <c:showBubbleSize val="0"/>
+        </c:dLbls>
+        <c:smooth val="0"/>
+        <c:axId val="2031211328"/>
+        <c:axId val="2052093056"/>
+      </c:lineChart>
+      <c:catAx>
+        <c:axId val="2031211328"/>
+        <c:scaling>
+          <c:orientation val="minMax"/>
+        </c:scaling>
+        <c:delete val="0"/>
+        <c:axPos val="b"/>
+        <c:numFmt formatCode="[$-F400]h:mm:ss\ AM/PM" sourceLinked="1"/>
+        <c:majorTickMark val="none"/>
+        <c:minorTickMark val="none"/>
+        <c:tickLblPos val="nextTo"/>
+        <c:spPr>
+          <a:noFill/>
+          <a:ln w="9525" cap="flat" cmpd="sng" algn="ctr">
+            <a:solidFill>
+              <a:schemeClr val="tx1">
+                <a:lumMod val="15000"/>
+                <a:lumOff val="85000"/>
+              </a:schemeClr>
+            </a:solidFill>
+            <a:round/>
+          </a:ln>
+          <a:effectLst/>
+        </c:spPr>
+        <c:txPr>
+          <a:bodyPr rot="-60000000" spcFirstLastPara="1" vertOverflow="ellipsis" vert="horz" wrap="square" anchor="ctr" anchorCtr="1"/>
+          <a:lstStyle/>
+          <a:p>
+            <a:pPr>
+              <a:defRPr sz="900" b="0" i="0" u="none" strike="noStrike" kern="1200" baseline="0">
+                <a:solidFill>
+                  <a:schemeClr val="tx1">
+                    <a:lumMod val="65000"/>
+                    <a:lumOff val="35000"/>
+                  </a:schemeClr>
+                </a:solidFill>
+                <a:latin typeface="+mn-lt"/>
+                <a:ea typeface="+mn-ea"/>
+                <a:cs typeface="+mn-cs"/>
+              </a:defRPr>
+            </a:pPr>
+            <a:endParaRPr lang="es-UY"/>
+          </a:p>
+        </c:txPr>
+        <c:crossAx val="2052093056"/>
+        <c:crosses val="autoZero"/>
+        <c:auto val="1"/>
+        <c:lblAlgn val="ctr"/>
+        <c:lblOffset val="100"/>
+        <c:noMultiLvlLbl val="0"/>
+      </c:catAx>
+      <c:valAx>
+        <c:axId val="2052093056"/>
+        <c:scaling>
+          <c:orientation val="minMax"/>
+        </c:scaling>
+        <c:delete val="0"/>
+        <c:axPos val="l"/>
+        <c:numFmt formatCode="0" sourceLinked="1"/>
+        <c:majorTickMark val="none"/>
+        <c:minorTickMark val="none"/>
+        <c:tickLblPos val="nextTo"/>
+        <c:spPr>
+          <a:noFill/>
+          <a:ln>
+            <a:noFill/>
+          </a:ln>
+          <a:effectLst/>
+        </c:spPr>
+        <c:txPr>
+          <a:bodyPr rot="-60000000" spcFirstLastPara="1" vertOverflow="ellipsis" vert="horz" wrap="square" anchor="ctr" anchorCtr="1"/>
+          <a:lstStyle/>
+          <a:p>
+            <a:pPr>
+              <a:defRPr sz="900" b="0" i="0" u="none" strike="noStrike" kern="1200" baseline="0">
+                <a:solidFill>
+                  <a:schemeClr val="tx1">
+                    <a:lumMod val="65000"/>
+                    <a:lumOff val="35000"/>
+                  </a:schemeClr>
+                </a:solidFill>
+                <a:latin typeface="+mn-lt"/>
+                <a:ea typeface="+mn-ea"/>
+                <a:cs typeface="+mn-cs"/>
+              </a:defRPr>
+            </a:pPr>
+            <a:endParaRPr lang="es-UY"/>
+          </a:p>
+        </c:txPr>
+        <c:crossAx val="2031211328"/>
+        <c:crosses val="autoZero"/>
+        <c:crossBetween val="between"/>
+      </c:valAx>
+      <c:spPr>
+        <a:noFill/>
+        <a:ln>
+          <a:noFill/>
+        </a:ln>
+        <a:effectLst/>
+      </c:spPr>
+    </c:plotArea>
+    <c:plotVisOnly val="1"/>
+    <c:dispBlanksAs val="gap"/>
+    <c:showDLblsOverMax val="0"/>
+    <c:extLst>
+      <c:ext xmlns:c16r3="http://schemas.microsoft.com/office/drawing/2017/03/chart" uri="{56B9EC1D-385E-4148-901F-78D8002777C0}">
+        <c16r3:dataDisplayOptions16>
+          <c16r3:dispNaAsBlank val="1"/>
+        </c16r3:dataDisplayOptions16>
+      </c:ext>
+    </c:extLst>
+  </c:chart>
+  <c:spPr>
+    <a:noFill/>
+    <a:ln>
+      <a:noFill/>
+    </a:ln>
+    <a:effectLst/>
+  </c:spPr>
+  <c:txPr>
+    <a:bodyPr/>
+    <a:lstStyle/>
+    <a:p>
+      <a:pPr>
+        <a:defRPr/>
+      </a:pPr>
+      <a:endParaRPr lang="es-UY"/>
+    </a:p>
+  </c:txPr>
+  <c:externalData r:id="rId3">
+    <c:autoUpdate val="0"/>
+  </c:externalData>
+</c:chartSpace>
+</file>
+
+<file path=ppt/charts/chart3.xml><?xml version="1.0" encoding="utf-8"?>
+<c:chartSpace xmlns:c="http://schemas.openxmlformats.org/drawingml/2006/chart" xmlns:a="http://schemas.openxmlformats.org/drawingml/2006/main" xmlns:r="http://schemas.openxmlformats.org/officeDocument/2006/relationships" xmlns:c16r2="http://schemas.microsoft.com/office/drawing/2015/06/chart">
+  <c:date1904 val="0"/>
+  <c:lang val="es-ES"/>
+  <c:roundedCorners val="0"/>
+  <mc:AlternateContent xmlns:mc="http://schemas.openxmlformats.org/markup-compatibility/2006">
+    <mc:Choice xmlns:c14="http://schemas.microsoft.com/office/drawing/2007/8/2/chart" Requires="c14">
+      <c14:style val="102"/>
+    </mc:Choice>
+    <mc:Fallback>
+      <c:style val="2"/>
+    </mc:Fallback>
+  </mc:AlternateContent>
+  <c:pivotSource>
+    <c:name>[Supermarket Sales Dataset v1.0.xlsx]Hoja2!TablaDinámica2</c:name>
+    <c:fmtId val="3"/>
+  </c:pivotSource>
+  <c:chart>
+    <c:autoTitleDeleted val="0"/>
+    <c:pivotFmts>
+      <c:pivotFmt>
+        <c:idx val="0"/>
+        <c:spPr>
+          <a:solidFill>
+            <a:schemeClr val="accent1"/>
+          </a:solidFill>
+          <a:ln>
+            <a:noFill/>
+          </a:ln>
+          <a:effectLst/>
+        </c:spPr>
+        <c:marker>
+          <c:symbol val="none"/>
+        </c:marker>
+        <c:dLbl>
+          <c:idx val="0"/>
+          <c:spPr>
+            <a:noFill/>
+            <a:ln>
+              <a:noFill/>
+            </a:ln>
+            <a:effectLst/>
+          </c:spPr>
+          <c:txPr>
+            <a:bodyPr rot="0" spcFirstLastPara="1" vertOverflow="ellipsis" vert="horz" wrap="square" lIns="38100" tIns="19050" rIns="38100" bIns="19050" anchor="ctr" anchorCtr="1">
+              <a:spAutoFit/>
+            </a:bodyPr>
+            <a:lstStyle/>
+            <a:p>
+              <a:pPr>
+                <a:defRPr sz="900" b="0" i="0" u="none" strike="noStrike" kern="1200" baseline="0">
+                  <a:solidFill>
+                    <a:schemeClr val="tx1">
+                      <a:lumMod val="75000"/>
+                      <a:lumOff val="25000"/>
+                    </a:schemeClr>
+                  </a:solidFill>
+                  <a:latin typeface="+mn-lt"/>
+                  <a:ea typeface="+mn-ea"/>
+                  <a:cs typeface="+mn-cs"/>
+                </a:defRPr>
+              </a:pPr>
+              <a:endParaRPr lang="es-UY"/>
+            </a:p>
+          </c:txPr>
+          <c:showLegendKey val="0"/>
+          <c:showVal val="0"/>
+          <c:showCatName val="0"/>
+          <c:showSerName val="0"/>
+          <c:showPercent val="0"/>
+          <c:showBubbleSize val="0"/>
+          <c:extLst>
+            <c:ext xmlns:c15="http://schemas.microsoft.com/office/drawing/2012/chart" uri="{CE6537A1-D6FC-4f65-9D91-7224C49458BB}"/>
+          </c:extLst>
+        </c:dLbl>
+      </c:pivotFmt>
+      <c:pivotFmt>
+        <c:idx val="1"/>
+        <c:spPr>
+          <a:solidFill>
+            <a:schemeClr val="accent1"/>
+          </a:solidFill>
+          <a:ln>
+            <a:noFill/>
+          </a:ln>
+          <a:effectLst/>
+        </c:spPr>
+        <c:marker>
+          <c:symbol val="none"/>
+        </c:marker>
+        <c:dLbl>
+          <c:idx val="0"/>
+          <c:spPr>
+            <a:noFill/>
+            <a:ln>
+              <a:noFill/>
+            </a:ln>
+            <a:effectLst/>
+          </c:spPr>
+          <c:txPr>
+            <a:bodyPr rot="0" spcFirstLastPara="1" vertOverflow="ellipsis" vert="horz" wrap="square" lIns="38100" tIns="19050" rIns="38100" bIns="19050" anchor="ctr" anchorCtr="1">
+              <a:spAutoFit/>
+            </a:bodyPr>
+            <a:lstStyle/>
+            <a:p>
+              <a:pPr>
+                <a:defRPr sz="900" b="0" i="0" u="none" strike="noStrike" kern="1200" baseline="0">
+                  <a:solidFill>
+                    <a:schemeClr val="tx1">
+                      <a:lumMod val="75000"/>
+                      <a:lumOff val="25000"/>
+                    </a:schemeClr>
+                  </a:solidFill>
+                  <a:latin typeface="+mn-lt"/>
+                  <a:ea typeface="+mn-ea"/>
+                  <a:cs typeface="+mn-cs"/>
+                </a:defRPr>
+              </a:pPr>
+              <a:endParaRPr lang="es-UY"/>
+            </a:p>
+          </c:txPr>
+          <c:showLegendKey val="0"/>
+          <c:showVal val="0"/>
+          <c:showCatName val="0"/>
+          <c:showSerName val="0"/>
+          <c:showPercent val="0"/>
+          <c:showBubbleSize val="0"/>
+          <c:extLst>
+            <c:ext xmlns:c15="http://schemas.microsoft.com/office/drawing/2012/chart" uri="{CE6537A1-D6FC-4f65-9D91-7224C49458BB}"/>
+          </c:extLst>
+        </c:dLbl>
+      </c:pivotFmt>
+      <c:pivotFmt>
+        <c:idx val="2"/>
+        <c:spPr>
+          <a:solidFill>
+            <a:schemeClr val="accent1"/>
+          </a:solidFill>
+          <a:ln>
+            <a:noFill/>
+          </a:ln>
+          <a:effectLst/>
+        </c:spPr>
+        <c:marker>
+          <c:symbol val="none"/>
+        </c:marker>
+        <c:dLbl>
+          <c:idx val="0"/>
+          <c:spPr>
+            <a:noFill/>
+            <a:ln>
+              <a:noFill/>
+            </a:ln>
+            <a:effectLst/>
+          </c:spPr>
+          <c:txPr>
+            <a:bodyPr rot="0" spcFirstLastPara="1" vertOverflow="ellipsis" vert="horz" wrap="square" lIns="38100" tIns="19050" rIns="38100" bIns="19050" anchor="ctr" anchorCtr="1">
+              <a:spAutoFit/>
+            </a:bodyPr>
+            <a:lstStyle/>
+            <a:p>
+              <a:pPr>
+                <a:defRPr sz="900" b="0" i="0" u="none" strike="noStrike" kern="1200" baseline="0">
+                  <a:solidFill>
+                    <a:schemeClr val="tx1">
+                      <a:lumMod val="75000"/>
+                      <a:lumOff val="25000"/>
+                    </a:schemeClr>
+                  </a:solidFill>
+                  <a:latin typeface="+mn-lt"/>
+                  <a:ea typeface="+mn-ea"/>
+                  <a:cs typeface="+mn-cs"/>
+                </a:defRPr>
+              </a:pPr>
+              <a:endParaRPr lang="es-UY"/>
+            </a:p>
+          </c:txPr>
+          <c:showLegendKey val="0"/>
+          <c:showVal val="0"/>
+          <c:showCatName val="0"/>
+          <c:showSerName val="0"/>
+          <c:showPercent val="0"/>
+          <c:showBubbleSize val="0"/>
+          <c:extLst>
+            <c:ext xmlns:c15="http://schemas.microsoft.com/office/drawing/2012/chart" uri="{CE6537A1-D6FC-4f65-9D91-7224C49458BB}"/>
+          </c:extLst>
+        </c:dLbl>
+      </c:pivotFmt>
+      <c:pivotFmt>
+        <c:idx val="3"/>
+        <c:spPr>
+          <a:solidFill>
+            <a:schemeClr val="accent1"/>
+          </a:solidFill>
+          <a:ln>
+            <a:noFill/>
+          </a:ln>
+          <a:effectLst/>
+        </c:spPr>
+        <c:marker>
+          <c:symbol val="none"/>
+        </c:marker>
+        <c:dLbl>
+          <c:idx val="0"/>
+          <c:spPr>
+            <a:noFill/>
+            <a:ln>
+              <a:noFill/>
+            </a:ln>
+            <a:effectLst/>
+          </c:spPr>
+          <c:txPr>
+            <a:bodyPr rot="0" spcFirstLastPara="1" vertOverflow="ellipsis" vert="horz" wrap="square" lIns="38100" tIns="19050" rIns="38100" bIns="19050" anchor="ctr" anchorCtr="1">
+              <a:spAutoFit/>
+            </a:bodyPr>
+            <a:lstStyle/>
+            <a:p>
+              <a:pPr>
+                <a:defRPr sz="900" b="0" i="0" u="none" strike="noStrike" kern="1200" baseline="0">
+                  <a:solidFill>
+                    <a:schemeClr val="tx1">
+                      <a:lumMod val="75000"/>
+                      <a:lumOff val="25000"/>
+                    </a:schemeClr>
+                  </a:solidFill>
+                  <a:latin typeface="+mn-lt"/>
+                  <a:ea typeface="+mn-ea"/>
+                  <a:cs typeface="+mn-cs"/>
+                </a:defRPr>
+              </a:pPr>
+              <a:endParaRPr lang="es-UY"/>
+            </a:p>
+          </c:txPr>
+          <c:showLegendKey val="0"/>
+          <c:showVal val="0"/>
+          <c:showCatName val="0"/>
+          <c:showSerName val="0"/>
+          <c:showPercent val="0"/>
+          <c:showBubbleSize val="0"/>
+          <c:extLst>
+            <c:ext xmlns:c15="http://schemas.microsoft.com/office/drawing/2012/chart" uri="{CE6537A1-D6FC-4f65-9D91-7224C49458BB}"/>
+          </c:extLst>
+        </c:dLbl>
+      </c:pivotFmt>
+      <c:pivotFmt>
+        <c:idx val="4"/>
+        <c:spPr>
+          <a:solidFill>
+            <a:schemeClr val="accent1"/>
+          </a:solidFill>
+          <a:ln>
+            <a:noFill/>
+          </a:ln>
+          <a:effectLst/>
+        </c:spPr>
+        <c:marker>
+          <c:symbol val="none"/>
+        </c:marker>
+        <c:dLbl>
+          <c:idx val="0"/>
+          <c:spPr>
+            <a:noFill/>
+            <a:ln>
+              <a:noFill/>
+            </a:ln>
+            <a:effectLst/>
+          </c:spPr>
+          <c:txPr>
+            <a:bodyPr rot="0" spcFirstLastPara="1" vertOverflow="ellipsis" vert="horz" wrap="square" lIns="38100" tIns="19050" rIns="38100" bIns="19050" anchor="ctr" anchorCtr="1">
+              <a:spAutoFit/>
+            </a:bodyPr>
+            <a:lstStyle/>
+            <a:p>
+              <a:pPr>
+                <a:defRPr sz="900" b="0" i="0" u="none" strike="noStrike" kern="1200" baseline="0">
+                  <a:solidFill>
+                    <a:schemeClr val="tx1">
+                      <a:lumMod val="75000"/>
+                      <a:lumOff val="25000"/>
+                    </a:schemeClr>
+                  </a:solidFill>
+                  <a:latin typeface="+mn-lt"/>
+                  <a:ea typeface="+mn-ea"/>
+                  <a:cs typeface="+mn-cs"/>
+                </a:defRPr>
+              </a:pPr>
+              <a:endParaRPr lang="es-UY"/>
+            </a:p>
+          </c:txPr>
+          <c:showLegendKey val="0"/>
+          <c:showVal val="0"/>
+          <c:showCatName val="0"/>
+          <c:showSerName val="0"/>
+          <c:showPercent val="0"/>
+          <c:showBubbleSize val="0"/>
+          <c:extLst>
+            <c:ext xmlns:c15="http://schemas.microsoft.com/office/drawing/2012/chart" uri="{CE6537A1-D6FC-4f65-9D91-7224C49458BB}"/>
+          </c:extLst>
+        </c:dLbl>
+      </c:pivotFmt>
+      <c:pivotFmt>
+        <c:idx val="5"/>
+        <c:spPr>
+          <a:solidFill>
+            <a:schemeClr val="accent1"/>
+          </a:solidFill>
+          <a:ln>
+            <a:noFill/>
+          </a:ln>
+          <a:effectLst/>
+        </c:spPr>
+        <c:marker>
+          <c:symbol val="none"/>
+        </c:marker>
+        <c:dLbl>
+          <c:idx val="0"/>
+          <c:spPr>
+            <a:noFill/>
+            <a:ln>
+              <a:noFill/>
+            </a:ln>
+            <a:effectLst/>
+          </c:spPr>
+          <c:txPr>
+            <a:bodyPr rot="0" spcFirstLastPara="1" vertOverflow="ellipsis" vert="horz" wrap="square" lIns="38100" tIns="19050" rIns="38100" bIns="19050" anchor="ctr" anchorCtr="1">
+              <a:spAutoFit/>
+            </a:bodyPr>
+            <a:lstStyle/>
+            <a:p>
+              <a:pPr>
+                <a:defRPr sz="900" b="0" i="0" u="none" strike="noStrike" kern="1200" baseline="0">
+                  <a:solidFill>
+                    <a:schemeClr val="tx1">
+                      <a:lumMod val="75000"/>
+                      <a:lumOff val="25000"/>
+                    </a:schemeClr>
+                  </a:solidFill>
+                  <a:latin typeface="+mn-lt"/>
+                  <a:ea typeface="+mn-ea"/>
+                  <a:cs typeface="+mn-cs"/>
+                </a:defRPr>
+              </a:pPr>
+              <a:endParaRPr lang="es-UY"/>
+            </a:p>
+          </c:txPr>
+          <c:showLegendKey val="0"/>
+          <c:showVal val="0"/>
+          <c:showCatName val="0"/>
+          <c:showSerName val="0"/>
+          <c:showPercent val="0"/>
+          <c:showBubbleSize val="0"/>
+          <c:extLst>
+            <c:ext xmlns:c15="http://schemas.microsoft.com/office/drawing/2012/chart" uri="{CE6537A1-D6FC-4f65-9D91-7224C49458BB}"/>
+          </c:extLst>
+        </c:dLbl>
+      </c:pivotFmt>
+      <c:pivotFmt>
+        <c:idx val="6"/>
+        <c:spPr>
+          <a:solidFill>
+            <a:schemeClr val="accent1"/>
+          </a:solidFill>
+          <a:ln>
+            <a:noFill/>
+          </a:ln>
+          <a:effectLst/>
+        </c:spPr>
+        <c:marker>
+          <c:symbol val="none"/>
+        </c:marker>
+        <c:dLbl>
+          <c:idx val="0"/>
+          <c:spPr>
+            <a:noFill/>
+            <a:ln>
+              <a:noFill/>
+            </a:ln>
+            <a:effectLst/>
+          </c:spPr>
+          <c:txPr>
+            <a:bodyPr rot="0" spcFirstLastPara="1" vertOverflow="ellipsis" vert="horz" wrap="square" lIns="38100" tIns="19050" rIns="38100" bIns="19050" anchor="ctr" anchorCtr="1">
+              <a:spAutoFit/>
+            </a:bodyPr>
+            <a:lstStyle/>
+            <a:p>
+              <a:pPr>
+                <a:defRPr sz="900" b="0" i="0" u="none" strike="noStrike" kern="1200" baseline="0">
+                  <a:solidFill>
+                    <a:schemeClr val="tx1">
+                      <a:lumMod val="75000"/>
+                      <a:lumOff val="25000"/>
+                    </a:schemeClr>
+                  </a:solidFill>
+                  <a:latin typeface="+mn-lt"/>
+                  <a:ea typeface="+mn-ea"/>
+                  <a:cs typeface="+mn-cs"/>
+                </a:defRPr>
+              </a:pPr>
+              <a:endParaRPr lang="es-UY"/>
+            </a:p>
+          </c:txPr>
+          <c:showLegendKey val="0"/>
+          <c:showVal val="0"/>
+          <c:showCatName val="0"/>
+          <c:showSerName val="0"/>
+          <c:showPercent val="0"/>
+          <c:showBubbleSize val="0"/>
+          <c:extLst>
+            <c:ext xmlns:c15="http://schemas.microsoft.com/office/drawing/2012/chart" uri="{CE6537A1-D6FC-4f65-9D91-7224C49458BB}"/>
+          </c:extLst>
+        </c:dLbl>
+      </c:pivotFmt>
+      <c:pivotFmt>
+        <c:idx val="7"/>
+        <c:spPr>
+          <a:solidFill>
+            <a:schemeClr val="accent1"/>
+          </a:solidFill>
+          <a:ln>
+            <a:noFill/>
+          </a:ln>
+          <a:effectLst/>
+        </c:spPr>
+        <c:marker>
+          <c:symbol val="none"/>
+        </c:marker>
+        <c:dLbl>
+          <c:idx val="0"/>
+          <c:spPr>
+            <a:noFill/>
+            <a:ln>
+              <a:noFill/>
+            </a:ln>
+            <a:effectLst/>
+          </c:spPr>
+          <c:txPr>
+            <a:bodyPr rot="0" spcFirstLastPara="1" vertOverflow="ellipsis" vert="horz" wrap="square" lIns="38100" tIns="19050" rIns="38100" bIns="19050" anchor="ctr" anchorCtr="1">
+              <a:spAutoFit/>
+            </a:bodyPr>
+            <a:lstStyle/>
+            <a:p>
+              <a:pPr>
+                <a:defRPr sz="900" b="0" i="0" u="none" strike="noStrike" kern="1200" baseline="0">
+                  <a:solidFill>
+                    <a:schemeClr val="tx1">
+                      <a:lumMod val="75000"/>
+                      <a:lumOff val="25000"/>
+                    </a:schemeClr>
+                  </a:solidFill>
+                  <a:latin typeface="+mn-lt"/>
+                  <a:ea typeface="+mn-ea"/>
+                  <a:cs typeface="+mn-cs"/>
+                </a:defRPr>
+              </a:pPr>
+              <a:endParaRPr lang="es-UY"/>
+            </a:p>
+          </c:txPr>
+          <c:showLegendKey val="0"/>
+          <c:showVal val="0"/>
+          <c:showCatName val="0"/>
+          <c:showSerName val="0"/>
+          <c:showPercent val="0"/>
+          <c:showBubbleSize val="0"/>
+          <c:extLst>
+            <c:ext xmlns:c15="http://schemas.microsoft.com/office/drawing/2012/chart" uri="{CE6537A1-D6FC-4f65-9D91-7224C49458BB}"/>
+          </c:extLst>
+        </c:dLbl>
+      </c:pivotFmt>
+      <c:pivotFmt>
+        <c:idx val="8"/>
+        <c:spPr>
+          <a:solidFill>
+            <a:schemeClr val="accent1"/>
+          </a:solidFill>
+          <a:ln>
+            <a:noFill/>
+          </a:ln>
+          <a:effectLst/>
+        </c:spPr>
+        <c:marker>
+          <c:symbol val="none"/>
+        </c:marker>
+        <c:dLbl>
+          <c:idx val="0"/>
+          <c:spPr>
+            <a:noFill/>
+            <a:ln>
+              <a:noFill/>
+            </a:ln>
+            <a:effectLst/>
+          </c:spPr>
+          <c:txPr>
+            <a:bodyPr rot="0" spcFirstLastPara="1" vertOverflow="ellipsis" vert="horz" wrap="square" lIns="38100" tIns="19050" rIns="38100" bIns="19050" anchor="ctr" anchorCtr="1">
+              <a:spAutoFit/>
+            </a:bodyPr>
+            <a:lstStyle/>
+            <a:p>
+              <a:pPr>
+                <a:defRPr sz="900" b="0" i="0" u="none" strike="noStrike" kern="1200" baseline="0">
+                  <a:solidFill>
+                    <a:schemeClr val="tx1">
+                      <a:lumMod val="75000"/>
+                      <a:lumOff val="25000"/>
+                    </a:schemeClr>
+                  </a:solidFill>
+                  <a:latin typeface="+mn-lt"/>
+                  <a:ea typeface="+mn-ea"/>
+                  <a:cs typeface="+mn-cs"/>
+                </a:defRPr>
+              </a:pPr>
+              <a:endParaRPr lang="es-UY"/>
+            </a:p>
+          </c:txPr>
+          <c:showLegendKey val="0"/>
+          <c:showVal val="0"/>
+          <c:showCatName val="0"/>
+          <c:showSerName val="0"/>
+          <c:showPercent val="0"/>
+          <c:showBubbleSize val="0"/>
+          <c:extLst>
+            <c:ext xmlns:c15="http://schemas.microsoft.com/office/drawing/2012/chart" uri="{CE6537A1-D6FC-4f65-9D91-7224C49458BB}"/>
+          </c:extLst>
+        </c:dLbl>
+      </c:pivotFmt>
+      <c:pivotFmt>
+        <c:idx val="9"/>
+        <c:spPr>
+          <a:solidFill>
+            <a:schemeClr val="accent1"/>
+          </a:solidFill>
+          <a:ln>
+            <a:noFill/>
+          </a:ln>
+          <a:effectLst/>
+        </c:spPr>
+        <c:marker>
+          <c:symbol val="none"/>
+        </c:marker>
+        <c:dLbl>
+          <c:idx val="0"/>
+          <c:spPr>
+            <a:noFill/>
+            <a:ln>
+              <a:noFill/>
+            </a:ln>
+            <a:effectLst/>
+          </c:spPr>
+          <c:txPr>
+            <a:bodyPr rot="0" spcFirstLastPara="1" vertOverflow="ellipsis" vert="horz" wrap="square" lIns="38100" tIns="19050" rIns="38100" bIns="19050" anchor="ctr" anchorCtr="1">
+              <a:spAutoFit/>
+            </a:bodyPr>
+            <a:lstStyle/>
+            <a:p>
+              <a:pPr>
+                <a:defRPr sz="900" b="0" i="0" u="none" strike="noStrike" kern="1200" baseline="0">
+                  <a:solidFill>
+                    <a:schemeClr val="tx1">
+                      <a:lumMod val="75000"/>
+                      <a:lumOff val="25000"/>
+                    </a:schemeClr>
+                  </a:solidFill>
+                  <a:latin typeface="+mn-lt"/>
+                  <a:ea typeface="+mn-ea"/>
+                  <a:cs typeface="+mn-cs"/>
+                </a:defRPr>
+              </a:pPr>
+              <a:endParaRPr lang="es-UY"/>
+            </a:p>
+          </c:txPr>
+          <c:showLegendKey val="0"/>
+          <c:showVal val="0"/>
+          <c:showCatName val="0"/>
+          <c:showSerName val="0"/>
+          <c:showPercent val="0"/>
+          <c:showBubbleSize val="0"/>
+          <c:extLst>
+            <c:ext xmlns:c15="http://schemas.microsoft.com/office/drawing/2012/chart" uri="{CE6537A1-D6FC-4f65-9D91-7224C49458BB}"/>
+          </c:extLst>
+        </c:dLbl>
+      </c:pivotFmt>
+      <c:pivotFmt>
+        <c:idx val="10"/>
+        <c:spPr>
+          <a:solidFill>
+            <a:schemeClr val="accent1"/>
+          </a:solidFill>
+          <a:ln>
+            <a:noFill/>
+          </a:ln>
+          <a:effectLst/>
+        </c:spPr>
+        <c:marker>
+          <c:symbol val="none"/>
+        </c:marker>
+        <c:dLbl>
+          <c:idx val="0"/>
+          <c:spPr>
+            <a:noFill/>
+            <a:ln>
+              <a:noFill/>
+            </a:ln>
+            <a:effectLst/>
+          </c:spPr>
+          <c:txPr>
+            <a:bodyPr rot="0" spcFirstLastPara="1" vertOverflow="ellipsis" vert="horz" wrap="square" lIns="38100" tIns="19050" rIns="38100" bIns="19050" anchor="ctr" anchorCtr="1">
+              <a:spAutoFit/>
+            </a:bodyPr>
+            <a:lstStyle/>
+            <a:p>
+              <a:pPr>
+                <a:defRPr sz="900" b="0" i="0" u="none" strike="noStrike" kern="1200" baseline="0">
+                  <a:solidFill>
+                    <a:schemeClr val="tx1">
+                      <a:lumMod val="75000"/>
+                      <a:lumOff val="25000"/>
+                    </a:schemeClr>
+                  </a:solidFill>
+                  <a:latin typeface="+mn-lt"/>
+                  <a:ea typeface="+mn-ea"/>
+                  <a:cs typeface="+mn-cs"/>
+                </a:defRPr>
+              </a:pPr>
+              <a:endParaRPr lang="es-UY"/>
+            </a:p>
+          </c:txPr>
+          <c:showLegendKey val="0"/>
+          <c:showVal val="0"/>
+          <c:showCatName val="0"/>
+          <c:showSerName val="0"/>
+          <c:showPercent val="0"/>
+          <c:showBubbleSize val="0"/>
+          <c:extLst>
+            <c:ext xmlns:c15="http://schemas.microsoft.com/office/drawing/2012/chart" uri="{CE6537A1-D6FC-4f65-9D91-7224C49458BB}"/>
+          </c:extLst>
+        </c:dLbl>
+      </c:pivotFmt>
+    </c:pivotFmts>
+    <c:plotArea>
+      <c:layout>
+        <c:manualLayout>
+          <c:layoutTarget val="inner"/>
+          <c:xMode val="edge"/>
+          <c:yMode val="edge"/>
+          <c:x val="0.16582387070037297"/>
+          <c:y val="0.15602836879432624"/>
+          <c:w val="0.68573449371460149"/>
+          <c:h val="0.7781609426481263"/>
+        </c:manualLayout>
+      </c:layout>
+      <c:barChart>
+        <c:barDir val="bar"/>
+        <c:grouping val="clustered"/>
+        <c:varyColors val="0"/>
+        <c:ser>
+          <c:idx val="0"/>
+          <c:order val="0"/>
+          <c:tx>
+            <c:strRef>
+              <c:f>Hoja2!$B$3:$B$4</c:f>
+              <c:strCache>
+                <c:ptCount val="1"/>
+                <c:pt idx="0">
+                  <c:v>Mandalay</c:v>
+                </c:pt>
+              </c:strCache>
+            </c:strRef>
+          </c:tx>
+          <c:spPr>
+            <a:solidFill>
+              <a:schemeClr val="accent1"/>
+            </a:solidFill>
+            <a:ln>
+              <a:noFill/>
+            </a:ln>
+            <a:effectLst/>
+          </c:spPr>
+          <c:invertIfNegative val="0"/>
+          <c:cat>
+            <c:strRef>
+              <c:f>Hoja2!$A$5:$A$11</c:f>
+              <c:strCache>
+                <c:ptCount val="6"/>
+                <c:pt idx="0">
+                  <c:v>Electronic accessories</c:v>
+                </c:pt>
+                <c:pt idx="1">
+                  <c:v>Fashion accessories</c:v>
+                </c:pt>
+                <c:pt idx="2">
+                  <c:v>Food and beverages</c:v>
+                </c:pt>
+                <c:pt idx="3">
+                  <c:v>Health and beauty</c:v>
+                </c:pt>
+                <c:pt idx="4">
+                  <c:v>Home and lifestyle</c:v>
+                </c:pt>
+                <c:pt idx="5">
+                  <c:v>Sports and travel</c:v>
+                </c:pt>
+              </c:strCache>
+            </c:strRef>
+          </c:cat>
+          <c:val>
+            <c:numRef>
+              <c:f>Hoja2!$B$5:$B$11</c:f>
+              <c:numCache>
+                <c:formatCode>General</c:formatCode>
+                <c:ptCount val="6"/>
+                <c:pt idx="0">
+                  <c:v>17051.443499999998</c:v>
+                </c:pt>
+                <c:pt idx="1">
+                  <c:v>16413.316499999997</c:v>
+                </c:pt>
+                <c:pt idx="2">
+                  <c:v>15214.888500000001</c:v>
+                </c:pt>
+                <c:pt idx="3">
+                  <c:v>19980.659999999996</c:v>
+                </c:pt>
+                <c:pt idx="4">
+                  <c:v>17549.164499999999</c:v>
+                </c:pt>
+                <c:pt idx="5">
+                  <c:v>19988.198999999997</c:v>
+                </c:pt>
+              </c:numCache>
+            </c:numRef>
+          </c:val>
+          <c:extLst>
+            <c:ext xmlns:c16="http://schemas.microsoft.com/office/drawing/2014/chart" uri="{C3380CC4-5D6E-409C-BE32-E72D297353CC}">
+              <c16:uniqueId val="{00000000-84A2-864F-89E3-8222238B1753}"/>
+            </c:ext>
+          </c:extLst>
+        </c:ser>
+        <c:ser>
+          <c:idx val="1"/>
+          <c:order val="1"/>
+          <c:tx>
+            <c:strRef>
+              <c:f>Hoja2!$C$3:$C$4</c:f>
+              <c:strCache>
+                <c:ptCount val="1"/>
+                <c:pt idx="0">
+                  <c:v>Naypyitaw</c:v>
+                </c:pt>
+              </c:strCache>
+            </c:strRef>
+          </c:tx>
+          <c:spPr>
+            <a:solidFill>
+              <a:schemeClr val="accent2"/>
+            </a:solidFill>
+            <a:ln>
+              <a:noFill/>
+            </a:ln>
+            <a:effectLst/>
+          </c:spPr>
+          <c:invertIfNegative val="0"/>
+          <c:cat>
+            <c:strRef>
+              <c:f>Hoja2!$A$5:$A$11</c:f>
+              <c:strCache>
+                <c:ptCount val="6"/>
+                <c:pt idx="0">
+                  <c:v>Electronic accessories</c:v>
+                </c:pt>
+                <c:pt idx="1">
+                  <c:v>Fashion accessories</c:v>
+                </c:pt>
+                <c:pt idx="2">
+                  <c:v>Food and beverages</c:v>
+                </c:pt>
+                <c:pt idx="3">
+                  <c:v>Health and beauty</c:v>
+                </c:pt>
+                <c:pt idx="4">
+                  <c:v>Home and lifestyle</c:v>
+                </c:pt>
+                <c:pt idx="5">
+                  <c:v>Sports and travel</c:v>
+                </c:pt>
+              </c:strCache>
+            </c:strRef>
+          </c:cat>
+          <c:val>
+            <c:numRef>
+              <c:f>Hoja2!$C$5:$C$11</c:f>
+              <c:numCache>
+                <c:formatCode>General</c:formatCode>
+                <c:ptCount val="6"/>
+                <c:pt idx="0">
+                  <c:v>18968.9745</c:v>
+                </c:pt>
+                <c:pt idx="1">
+                  <c:v>21560.069999999996</c:v>
+                </c:pt>
+                <c:pt idx="2">
+                  <c:v>23766.854999999992</c:v>
+                </c:pt>
+                <c:pt idx="3">
+                  <c:v>16615.326000000001</c:v>
+                </c:pt>
+                <c:pt idx="4">
+                  <c:v>13895.553</c:v>
+                </c:pt>
+                <c:pt idx="5">
+                  <c:v>15761.928000000002</c:v>
+                </c:pt>
+              </c:numCache>
+            </c:numRef>
+          </c:val>
+          <c:extLst>
+            <c:ext xmlns:c16="http://schemas.microsoft.com/office/drawing/2014/chart" uri="{C3380CC4-5D6E-409C-BE32-E72D297353CC}">
+              <c16:uniqueId val="{00000001-84A2-864F-89E3-8222238B1753}"/>
+            </c:ext>
+          </c:extLst>
+        </c:ser>
+        <c:ser>
+          <c:idx val="2"/>
+          <c:order val="2"/>
+          <c:tx>
+            <c:strRef>
+              <c:f>Hoja2!$D$3:$D$4</c:f>
+              <c:strCache>
+                <c:ptCount val="1"/>
+                <c:pt idx="0">
+                  <c:v>Yangon</c:v>
+                </c:pt>
+              </c:strCache>
+            </c:strRef>
+          </c:tx>
+          <c:spPr>
+            <a:solidFill>
+              <a:schemeClr val="accent3"/>
+            </a:solidFill>
+            <a:ln>
+              <a:noFill/>
+            </a:ln>
+            <a:effectLst/>
+          </c:spPr>
+          <c:invertIfNegative val="0"/>
+          <c:cat>
+            <c:strRef>
+              <c:f>Hoja2!$A$5:$A$11</c:f>
+              <c:strCache>
+                <c:ptCount val="6"/>
+                <c:pt idx="0">
+                  <c:v>Electronic accessories</c:v>
+                </c:pt>
+                <c:pt idx="1">
+                  <c:v>Fashion accessories</c:v>
+                </c:pt>
+                <c:pt idx="2">
+                  <c:v>Food and beverages</c:v>
+                </c:pt>
+                <c:pt idx="3">
+                  <c:v>Health and beauty</c:v>
+                </c:pt>
+                <c:pt idx="4">
+                  <c:v>Home and lifestyle</c:v>
+                </c:pt>
+                <c:pt idx="5">
+                  <c:v>Sports and travel</c:v>
+                </c:pt>
+              </c:strCache>
+            </c:strRef>
+          </c:cat>
+          <c:val>
+            <c:numRef>
+              <c:f>Hoja2!$D$5:$D$11</c:f>
+              <c:numCache>
+                <c:formatCode>General</c:formatCode>
+                <c:ptCount val="6"/>
+                <c:pt idx="0">
+                  <c:v>18317.113500000003</c:v>
+                </c:pt>
+                <c:pt idx="1">
+                  <c:v>16332.508499999996</c:v>
+                </c:pt>
+                <c:pt idx="2">
+                  <c:v>17163.1005</c:v>
+                </c:pt>
+                <c:pt idx="3">
+                  <c:v>12597.752999999995</c:v>
+                </c:pt>
+                <c:pt idx="4">
+                  <c:v>22417.195499999998</c:v>
+                </c:pt>
+                <c:pt idx="5">
+                  <c:v>19372.699500000002</c:v>
+                </c:pt>
+              </c:numCache>
+            </c:numRef>
+          </c:val>
+          <c:extLst>
+            <c:ext xmlns:c16="http://schemas.microsoft.com/office/drawing/2014/chart" uri="{C3380CC4-5D6E-409C-BE32-E72D297353CC}">
+              <c16:uniqueId val="{00000002-84A2-864F-89E3-8222238B1753}"/>
+            </c:ext>
+          </c:extLst>
+        </c:ser>
+        <c:dLbls>
+          <c:showLegendKey val="0"/>
+          <c:showVal val="0"/>
+          <c:showCatName val="0"/>
+          <c:showSerName val="0"/>
+          <c:showPercent val="0"/>
+          <c:showBubbleSize val="0"/>
+        </c:dLbls>
+        <c:gapWidth val="182"/>
+        <c:axId val="2076058367"/>
+        <c:axId val="2076051199"/>
+      </c:barChart>
+      <c:catAx>
+        <c:axId val="2076058367"/>
+        <c:scaling>
+          <c:orientation val="minMax"/>
+        </c:scaling>
+        <c:delete val="0"/>
+        <c:axPos val="l"/>
+        <c:numFmt formatCode="General" sourceLinked="1"/>
+        <c:majorTickMark val="none"/>
+        <c:minorTickMark val="none"/>
+        <c:tickLblPos val="nextTo"/>
+        <c:spPr>
+          <a:noFill/>
+          <a:ln w="9525" cap="flat" cmpd="sng" algn="ctr">
+            <a:solidFill>
+              <a:schemeClr val="tx1">
+                <a:lumMod val="15000"/>
+                <a:lumOff val="85000"/>
+              </a:schemeClr>
+            </a:solidFill>
+            <a:round/>
+          </a:ln>
+          <a:effectLst/>
+        </c:spPr>
+        <c:txPr>
+          <a:bodyPr rot="-60000000" spcFirstLastPara="1" vertOverflow="ellipsis" vert="horz" wrap="square" anchor="ctr" anchorCtr="1"/>
+          <a:lstStyle/>
+          <a:p>
+            <a:pPr>
+              <a:defRPr sz="900" b="0" i="0" u="none" strike="noStrike" kern="1200" baseline="0">
+                <a:solidFill>
+                  <a:schemeClr val="tx1">
+                    <a:lumMod val="65000"/>
+                    <a:lumOff val="35000"/>
+                  </a:schemeClr>
+                </a:solidFill>
+                <a:latin typeface="+mn-lt"/>
+                <a:ea typeface="+mn-ea"/>
+                <a:cs typeface="+mn-cs"/>
+              </a:defRPr>
+            </a:pPr>
+            <a:endParaRPr lang="es-UY"/>
+          </a:p>
+        </c:txPr>
+        <c:crossAx val="2076051199"/>
+        <c:crosses val="autoZero"/>
+        <c:auto val="1"/>
+        <c:lblAlgn val="ctr"/>
+        <c:lblOffset val="100"/>
+        <c:noMultiLvlLbl val="0"/>
+      </c:catAx>
+      <c:valAx>
+        <c:axId val="2076051199"/>
+        <c:scaling>
+          <c:orientation val="minMax"/>
+        </c:scaling>
+        <c:delete val="0"/>
+        <c:axPos val="b"/>
+        <c:numFmt formatCode="General" sourceLinked="1"/>
+        <c:majorTickMark val="none"/>
+        <c:minorTickMark val="none"/>
+        <c:tickLblPos val="nextTo"/>
+        <c:spPr>
+          <a:noFill/>
+          <a:ln>
+            <a:noFill/>
+          </a:ln>
+          <a:effectLst/>
+        </c:spPr>
+        <c:txPr>
+          <a:bodyPr rot="-60000000" spcFirstLastPara="1" vertOverflow="ellipsis" vert="horz" wrap="square" anchor="ctr" anchorCtr="1"/>
+          <a:lstStyle/>
+          <a:p>
+            <a:pPr>
+              <a:defRPr sz="900" b="0" i="0" u="none" strike="noStrike" kern="1200" baseline="0">
+                <a:solidFill>
+                  <a:schemeClr val="tx1">
+                    <a:lumMod val="65000"/>
+                    <a:lumOff val="35000"/>
+                  </a:schemeClr>
+                </a:solidFill>
+                <a:latin typeface="+mn-lt"/>
+                <a:ea typeface="+mn-ea"/>
+                <a:cs typeface="+mn-cs"/>
+              </a:defRPr>
+            </a:pPr>
+            <a:endParaRPr lang="es-UY"/>
+          </a:p>
+        </c:txPr>
+        <c:crossAx val="2076058367"/>
+        <c:crosses val="autoZero"/>
+        <c:crossBetween val="between"/>
+      </c:valAx>
+      <c:spPr>
+        <a:noFill/>
+        <a:ln w="25400">
+          <a:noFill/>
+        </a:ln>
+        <a:effectLst/>
+      </c:spPr>
+    </c:plotArea>
+    <c:legend>
+      <c:legendPos val="r"/>
+      <c:layout>
+        <c:manualLayout>
+          <c:xMode val="edge"/>
+          <c:yMode val="edge"/>
+          <c:x val="0.80050573283602711"/>
+          <c:y val="0.40549595130395932"/>
+          <c:w val="9.5985495234148357E-2"/>
+          <c:h val="0.1436180264700955"/>
+        </c:manualLayout>
+      </c:layout>
+      <c:overlay val="0"/>
+      <c:spPr>
+        <a:noFill/>
+        <a:ln>
+          <a:noFill/>
+        </a:ln>
+        <a:effectLst/>
+      </c:spPr>
+      <c:txPr>
+        <a:bodyPr rot="0" spcFirstLastPara="1" vertOverflow="ellipsis" vert="horz" wrap="square" anchor="ctr" anchorCtr="1"/>
+        <a:lstStyle/>
+        <a:p>
+          <a:pPr>
+            <a:defRPr sz="900" b="0" i="0" u="none" strike="noStrike" kern="1200" baseline="0">
+              <a:solidFill>
+                <a:schemeClr val="tx1">
+                  <a:lumMod val="65000"/>
+                  <a:lumOff val="35000"/>
+                </a:schemeClr>
+              </a:solidFill>
+              <a:latin typeface="+mn-lt"/>
+              <a:ea typeface="+mn-ea"/>
+              <a:cs typeface="+mn-cs"/>
+            </a:defRPr>
+          </a:pPr>
+          <a:endParaRPr lang="es-UY"/>
+        </a:p>
+      </c:txPr>
+    </c:legend>
+    <c:plotVisOnly val="1"/>
+    <c:dispBlanksAs val="gap"/>
+    <c:showDLblsOverMax val="0"/>
+    <c:extLst>
+      <c:ext xmlns:c16r3="http://schemas.microsoft.com/office/drawing/2017/03/chart" uri="{56B9EC1D-385E-4148-901F-78D8002777C0}">
+        <c16r3:dataDisplayOptions16>
+          <c16r3:dispNaAsBlank val="1"/>
+        </c16r3:dataDisplayOptions16>
+      </c:ext>
+    </c:extLst>
+  </c:chart>
+  <c:spPr>
+    <a:noFill/>
+    <a:ln>
+      <a:noFill/>
+    </a:ln>
+    <a:effectLst/>
+  </c:spPr>
+  <c:txPr>
+    <a:bodyPr/>
+    <a:lstStyle/>
+    <a:p>
+      <a:pPr>
+        <a:defRPr/>
+      </a:pPr>
+      <a:endParaRPr lang="es-UY"/>
+    </a:p>
+  </c:txPr>
+  <c:externalData r:id="rId3">
+    <c:autoUpdate val="0"/>
+  </c:externalData>
+  <c:userShapes r:id="rId4"/>
+  <c:extLst>
+    <c:ext xmlns:c14="http://schemas.microsoft.com/office/drawing/2007/8/2/chart" uri="{781A3756-C4B2-4CAC-9D66-4F8BD8637D16}">
+      <c14:pivotOptions>
+        <c14:dropZoneFilter val="1"/>
+        <c14:dropZoneCategories val="1"/>
+        <c14:dropZoneData val="1"/>
+        <c14:dropZoneSeries val="1"/>
+        <c14:dropZonesVisible val="1"/>
+      </c14:pivotOptions>
+    </c:ext>
+    <c:ext xmlns:c16="http://schemas.microsoft.com/office/drawing/2014/chart" uri="{E28EC0CA-F0BB-4C9C-879D-F8772B89E7AC}">
+      <c16:pivotOptions16>
+        <c16:showExpandCollapseFieldButtons val="1"/>
+      </c16:pivotOptions16>
+    </c:ext>
+  </c:extLst>
+</c:chartSpace>
+</file>
+
+<file path=ppt/charts/colors1.xml><?xml version="1.0" encoding="utf-8"?>
+<cs:colorStyle xmlns:cs="http://schemas.microsoft.com/office/drawing/2012/chartStyle" xmlns:a="http://schemas.openxmlformats.org/drawingml/2006/main" meth="cycle" id="10">
+  <a:schemeClr val="accent1"/>
+  <a:schemeClr val="accent2"/>
+  <a:schemeClr val="accent3"/>
+  <a:schemeClr val="accent4"/>
+  <a:schemeClr val="accent5"/>
+  <a:schemeClr val="accent6"/>
+  <cs:variation/>
+  <cs:variation>
+    <a:lumMod val="60000"/>
+  </cs:variation>
+  <cs:variation>
+    <a:lumMod val="80000"/>
+    <a:lumOff val="20000"/>
+  </cs:variation>
+  <cs:variation>
+    <a:lumMod val="80000"/>
+  </cs:variation>
+  <cs:variation>
+    <a:lumMod val="60000"/>
+    <a:lumOff val="40000"/>
+  </cs:variation>
+  <cs:variation>
+    <a:lumMod val="50000"/>
+  </cs:variation>
+  <cs:variation>
+    <a:lumMod val="70000"/>
+    <a:lumOff val="30000"/>
+  </cs:variation>
+  <cs:variation>
+    <a:lumMod val="70000"/>
+  </cs:variation>
+  <cs:variation>
+    <a:lumMod val="50000"/>
+    <a:lumOff val="50000"/>
+  </cs:variation>
+</cs:colorStyle>
+</file>
+
+<file path=ppt/charts/colors2.xml><?xml version="1.0" encoding="utf-8"?>
+<cs:colorStyle xmlns:cs="http://schemas.microsoft.com/office/drawing/2012/chartStyle" xmlns:a="http://schemas.openxmlformats.org/drawingml/2006/main" meth="cycle" id="10">
+  <a:schemeClr val="accent1"/>
+  <a:schemeClr val="accent2"/>
+  <a:schemeClr val="accent3"/>
+  <a:schemeClr val="accent4"/>
+  <a:schemeClr val="accent5"/>
+  <a:schemeClr val="accent6"/>
+  <cs:variation/>
+  <cs:variation>
+    <a:lumMod val="60000"/>
+  </cs:variation>
+  <cs:variation>
+    <a:lumMod val="80000"/>
+    <a:lumOff val="20000"/>
+  </cs:variation>
+  <cs:variation>
+    <a:lumMod val="80000"/>
+  </cs:variation>
+  <cs:variation>
+    <a:lumMod val="60000"/>
+    <a:lumOff val="40000"/>
+  </cs:variation>
+  <cs:variation>
+    <a:lumMod val="50000"/>
+  </cs:variation>
+  <cs:variation>
+    <a:lumMod val="70000"/>
+    <a:lumOff val="30000"/>
+  </cs:variation>
+  <cs:variation>
+    <a:lumMod val="70000"/>
+  </cs:variation>
+  <cs:variation>
+    <a:lumMod val="50000"/>
+    <a:lumOff val="50000"/>
+  </cs:variation>
+</cs:colorStyle>
+</file>
+
+<file path=ppt/charts/colors3.xml><?xml version="1.0" encoding="utf-8"?>
+<cs:colorStyle xmlns:cs="http://schemas.microsoft.com/office/drawing/2012/chartStyle" xmlns:a="http://schemas.openxmlformats.org/drawingml/2006/main" meth="cycle" id="10">
+  <a:schemeClr val="accent1"/>
+  <a:schemeClr val="accent2"/>
+  <a:schemeClr val="accent3"/>
+  <a:schemeClr val="accent4"/>
+  <a:schemeClr val="accent5"/>
+  <a:schemeClr val="accent6"/>
+  <cs:variation/>
+  <cs:variation>
+    <a:lumMod val="60000"/>
+  </cs:variation>
+  <cs:variation>
+    <a:lumMod val="80000"/>
+    <a:lumOff val="20000"/>
+  </cs:variation>
+  <cs:variation>
+    <a:lumMod val="80000"/>
+  </cs:variation>
+  <cs:variation>
+    <a:lumMod val="60000"/>
+    <a:lumOff val="40000"/>
+  </cs:variation>
+  <cs:variation>
+    <a:lumMod val="50000"/>
+  </cs:variation>
+  <cs:variation>
+    <a:lumMod val="70000"/>
+    <a:lumOff val="30000"/>
+  </cs:variation>
+  <cs:variation>
+    <a:lumMod val="70000"/>
+  </cs:variation>
+  <cs:variation>
+    <a:lumMod val="50000"/>
+    <a:lumOff val="50000"/>
+  </cs:variation>
+</cs:colorStyle>
+</file>
+
+<file path=ppt/charts/style1.xml><?xml version="1.0" encoding="utf-8"?>
+<cs:chartStyle xmlns:cs="http://schemas.microsoft.com/office/drawing/2012/chartStyle" xmlns:a="http://schemas.openxmlformats.org/drawingml/2006/main" id="201">
+  <cs:axisTitle>
+    <cs:lnRef idx="0"/>
+    <cs:fillRef idx="0"/>
+    <cs:effectRef idx="0"/>
+    <cs:fontRef idx="minor">
+      <a:schemeClr val="tx1">
+        <a:lumMod val="65000"/>
+        <a:lumOff val="35000"/>
+      </a:schemeClr>
+    </cs:fontRef>
+    <cs:defRPr sz="1000" kern="1200"/>
+  </cs:axisTitle>
+  <cs:categoryAxis>
+    <cs:lnRef idx="0"/>
+    <cs:fillRef idx="0"/>
+    <cs:effectRef idx="0"/>
+    <cs:fontRef idx="minor">
+      <a:schemeClr val="tx1">
+        <a:lumMod val="65000"/>
+        <a:lumOff val="35000"/>
+      </a:schemeClr>
+    </cs:fontRef>
+    <cs:spPr>
+      <a:ln w="9525" cap="flat" cmpd="sng" algn="ctr">
+        <a:solidFill>
+          <a:schemeClr val="tx1">
+            <a:lumMod val="15000"/>
+            <a:lumOff val="85000"/>
+          </a:schemeClr>
+        </a:solidFill>
+        <a:round/>
+      </a:ln>
+    </cs:spPr>
+    <cs:defRPr sz="900" kern="1200"/>
+  </cs:categoryAxis>
+  <cs:chartArea mods="allowNoFillOverride allowNoLineOverride">
+    <cs:lnRef idx="0"/>
+    <cs:fillRef idx="0"/>
+    <cs:effectRef idx="0"/>
+    <cs:fontRef idx="minor">
+      <a:schemeClr val="tx1"/>
+    </cs:fontRef>
+    <cs:spPr>
+      <a:solidFill>
+        <a:schemeClr val="bg1"/>
+      </a:solidFill>
+      <a:ln w="9525" cap="flat" cmpd="sng" algn="ctr">
+        <a:solidFill>
+          <a:schemeClr val="tx1">
+            <a:lumMod val="15000"/>
+            <a:lumOff val="85000"/>
+          </a:schemeClr>
+        </a:solidFill>
+        <a:round/>
+      </a:ln>
+    </cs:spPr>
+    <cs:defRPr sz="1000" kern="1200"/>
+  </cs:chartArea>
+  <cs:dataLabel>
+    <cs:lnRef idx="0"/>
+    <cs:fillRef idx="0"/>
+    <cs:effectRef idx="0"/>
+    <cs:fontRef idx="minor">
+      <a:schemeClr val="tx1">
+        <a:lumMod val="75000"/>
+        <a:lumOff val="25000"/>
+      </a:schemeClr>
+    </cs:fontRef>
+    <cs:defRPr sz="900" kern="1200"/>
+  </cs:dataLabel>
+  <cs:dataLabelCallout>
+    <cs:lnRef idx="0"/>
+    <cs:fillRef idx="0"/>
+    <cs:effectRef idx="0"/>
+    <cs:fontRef idx="minor">
+      <a:schemeClr val="dk1">
+        <a:lumMod val="65000"/>
+        <a:lumOff val="35000"/>
+      </a:schemeClr>
+    </cs:fontRef>
+    <cs:spPr>
+      <a:solidFill>
+        <a:schemeClr val="lt1"/>
+      </a:solidFill>
+      <a:ln>
+        <a:solidFill>
+          <a:schemeClr val="dk1">
+            <a:lumMod val="25000"/>
+            <a:lumOff val="75000"/>
+          </a:schemeClr>
+        </a:solidFill>
+      </a:ln>
+    </cs:spPr>
+    <cs:defRPr sz="900" kern="1200"/>
+    <cs:bodyPr rot="0" spcFirstLastPara="1" vertOverflow="clip" horzOverflow="clip" vert="horz" wrap="square" lIns="36576" tIns="18288" rIns="36576" bIns="18288" anchor="ctr" anchorCtr="1">
+      <a:spAutoFit/>
+    </cs:bodyPr>
+  </cs:dataLabelCallout>
+  <cs:dataPoint>
+    <cs:lnRef idx="0"/>
+    <cs:fillRef idx="1">
+      <cs:styleClr val="auto"/>
+    </cs:fillRef>
+    <cs:effectRef idx="0"/>
+    <cs:fontRef idx="minor">
+      <a:schemeClr val="tx1"/>
+    </cs:fontRef>
+  </cs:dataPoint>
+  <cs:dataPoint3D>
+    <cs:lnRef idx="0"/>
+    <cs:fillRef idx="1">
+      <cs:styleClr val="auto"/>
+    </cs:fillRef>
+    <cs:effectRef idx="0"/>
+    <cs:fontRef idx="minor">
+      <a:schemeClr val="tx1"/>
+    </cs:fontRef>
+  </cs:dataPoint3D>
+  <cs:dataPointLine>
+    <cs:lnRef idx="0">
+      <cs:styleClr val="auto"/>
+    </cs:lnRef>
+    <cs:fillRef idx="1"/>
+    <cs:effectRef idx="0"/>
+    <cs:fontRef idx="minor">
+      <a:schemeClr val="tx1"/>
+    </cs:fontRef>
+    <cs:spPr>
+      <a:ln w="28575" cap="rnd">
+        <a:solidFill>
+          <a:schemeClr val="phClr"/>
+        </a:solidFill>
+        <a:round/>
+      </a:ln>
+    </cs:spPr>
+  </cs:dataPointLine>
+  <cs:dataPointMarker>
+    <cs:lnRef idx="0">
+      <cs:styleClr val="auto"/>
+    </cs:lnRef>
+    <cs:fillRef idx="1">
+      <cs:styleClr val="auto"/>
+    </cs:fillRef>
+    <cs:effectRef idx="0"/>
+    <cs:fontRef idx="minor">
+      <a:schemeClr val="tx1"/>
+    </cs:fontRef>
+    <cs:spPr>
+      <a:ln w="9525">
+        <a:solidFill>
+          <a:schemeClr val="phClr"/>
+        </a:solidFill>
+      </a:ln>
+    </cs:spPr>
+  </cs:dataPointMarker>
+  <cs:dataPointMarkerLayout symbol="circle" size="5"/>
+  <cs:dataPointWireframe>
+    <cs:lnRef idx="0">
+      <cs:styleClr val="auto"/>
+    </cs:lnRef>
+    <cs:fillRef idx="1"/>
+    <cs:effectRef idx="0"/>
+    <cs:fontRef idx="minor">
+      <a:schemeClr val="tx1"/>
+    </cs:fontRef>
+    <cs:spPr>
+      <a:ln w="9525" cap="rnd">
+        <a:solidFill>
+          <a:schemeClr val="phClr"/>
+        </a:solidFill>
+        <a:round/>
+      </a:ln>
+    </cs:spPr>
+  </cs:dataPointWireframe>
+  <cs:dataTable>
+    <cs:lnRef idx="0"/>
+    <cs:fillRef idx="0"/>
+    <cs:effectRef idx="0"/>
+    <cs:fontRef idx="minor">
+      <a:schemeClr val="tx1">
+        <a:lumMod val="65000"/>
+        <a:lumOff val="35000"/>
+      </a:schemeClr>
+    </cs:fontRef>
+    <cs:spPr>
+      <a:noFill/>
+      <a:ln w="9525" cap="flat" cmpd="sng" algn="ctr">
+        <a:solidFill>
+          <a:schemeClr val="tx1">
+            <a:lumMod val="15000"/>
+            <a:lumOff val="85000"/>
+          </a:schemeClr>
+        </a:solidFill>
+        <a:round/>
+      </a:ln>
+    </cs:spPr>
+    <cs:defRPr sz="900" kern="1200"/>
+  </cs:dataTable>
+  <cs:downBar>
+    <cs:lnRef idx="0"/>
+    <cs:fillRef idx="0"/>
+    <cs:effectRef idx="0"/>
+    <cs:fontRef idx="minor">
+      <a:schemeClr val="dk1"/>
+    </cs:fontRef>
+    <cs:spPr>
+      <a:solidFill>
+        <a:schemeClr val="dk1">
+          <a:lumMod val="65000"/>
+          <a:lumOff val="35000"/>
+        </a:schemeClr>
+      </a:solidFill>
+      <a:ln w="9525">
+        <a:solidFill>
+          <a:schemeClr val="tx1">
+            <a:lumMod val="65000"/>
+            <a:lumOff val="35000"/>
+          </a:schemeClr>
+        </a:solidFill>
+      </a:ln>
+    </cs:spPr>
+  </cs:downBar>
+  <cs:dropLine>
+    <cs:lnRef idx="0"/>
+    <cs:fillRef idx="0"/>
+    <cs:effectRef idx="0"/>
+    <cs:fontRef idx="minor">
+      <a:schemeClr val="tx1"/>
+    </cs:fontRef>
+    <cs:spPr>
+      <a:ln w="9525" cap="flat" cmpd="sng" algn="ctr">
+        <a:solidFill>
+          <a:schemeClr val="tx1">
+            <a:lumMod val="35000"/>
+            <a:lumOff val="65000"/>
+          </a:schemeClr>
+        </a:solidFill>
+        <a:round/>
+      </a:ln>
+    </cs:spPr>
+  </cs:dropLine>
+  <cs:errorBar>
+    <cs:lnRef idx="0"/>
+    <cs:fillRef idx="0"/>
+    <cs:effectRef idx="0"/>
+    <cs:fontRef idx="minor">
+      <a:schemeClr val="tx1"/>
+    </cs:fontRef>
+    <cs:spPr>
+      <a:ln w="9525" cap="flat" cmpd="sng" algn="ctr">
+        <a:solidFill>
+          <a:schemeClr val="tx1">
+            <a:lumMod val="65000"/>
+            <a:lumOff val="35000"/>
+          </a:schemeClr>
+        </a:solidFill>
+        <a:round/>
+      </a:ln>
+    </cs:spPr>
+  </cs:errorBar>
+  <cs:floor>
+    <cs:lnRef idx="0"/>
+    <cs:fillRef idx="0"/>
+    <cs:effectRef idx="0"/>
+    <cs:fontRef idx="minor">
+      <a:schemeClr val="tx1"/>
+    </cs:fontRef>
+    <cs:spPr>
+      <a:noFill/>
+      <a:ln>
+        <a:noFill/>
+      </a:ln>
+    </cs:spPr>
+  </cs:floor>
+  <cs:gridlineMajor>
+    <cs:lnRef idx="0"/>
+    <cs:fillRef idx="0"/>
+    <cs:effectRef idx="0"/>
+    <cs:fontRef idx="minor">
+      <a:schemeClr val="tx1"/>
+    </cs:fontRef>
+    <cs:spPr>
+      <a:ln w="9525" cap="flat" cmpd="sng" algn="ctr">
+        <a:solidFill>
+          <a:schemeClr val="tx1">
+            <a:lumMod val="15000"/>
+            <a:lumOff val="85000"/>
+          </a:schemeClr>
+        </a:solidFill>
+        <a:round/>
+      </a:ln>
+    </cs:spPr>
+  </cs:gridlineMajor>
+  <cs:gridlineMinor>
+    <cs:lnRef idx="0"/>
+    <cs:fillRef idx="0"/>
+    <cs:effectRef idx="0"/>
+    <cs:fontRef idx="minor">
+      <a:schemeClr val="tx1"/>
+    </cs:fontRef>
+    <cs:spPr>
+      <a:ln w="9525" cap="flat" cmpd="sng" algn="ctr">
+        <a:solidFill>
+          <a:schemeClr val="tx1">
+            <a:lumMod val="5000"/>
+            <a:lumOff val="95000"/>
+          </a:schemeClr>
+        </a:solidFill>
+        <a:round/>
+      </a:ln>
+    </cs:spPr>
+  </cs:gridlineMinor>
+  <cs:hiLoLine>
+    <cs:lnRef idx="0"/>
+    <cs:fillRef idx="0"/>
+    <cs:effectRef idx="0"/>
+    <cs:fontRef idx="minor">
+      <a:schemeClr val="tx1"/>
+    </cs:fontRef>
+    <cs:spPr>
+      <a:ln w="9525" cap="flat" cmpd="sng" algn="ctr">
+        <a:solidFill>
+          <a:schemeClr val="tx1">
+            <a:lumMod val="75000"/>
+            <a:lumOff val="25000"/>
+          </a:schemeClr>
+        </a:solidFill>
+        <a:round/>
+      </a:ln>
+    </cs:spPr>
+  </cs:hiLoLine>
+  <cs:leaderLine>
+    <cs:lnRef idx="0"/>
+    <cs:fillRef idx="0"/>
+    <cs:effectRef idx="0"/>
+    <cs:fontRef idx="minor">
+      <a:schemeClr val="tx1"/>
+    </cs:fontRef>
+    <cs:spPr>
+      <a:ln w="9525" cap="flat" cmpd="sng" algn="ctr">
+        <a:solidFill>
+          <a:schemeClr val="tx1">
+            <a:lumMod val="35000"/>
+            <a:lumOff val="65000"/>
+          </a:schemeClr>
+        </a:solidFill>
+        <a:round/>
+      </a:ln>
+    </cs:spPr>
+  </cs:leaderLine>
+  <cs:legend>
+    <cs:lnRef idx="0"/>
+    <cs:fillRef idx="0"/>
+    <cs:effectRef idx="0"/>
+    <cs:fontRef idx="minor">
+      <a:schemeClr val="tx1">
+        <a:lumMod val="65000"/>
+        <a:lumOff val="35000"/>
+      </a:schemeClr>
+    </cs:fontRef>
+    <cs:defRPr sz="900" kern="1200"/>
+  </cs:legend>
+  <cs:plotArea mods="allowNoFillOverride allowNoLineOverride">
+    <cs:lnRef idx="0"/>
+    <cs:fillRef idx="0"/>
+    <cs:effectRef idx="0"/>
+    <cs:fontRef idx="minor">
+      <a:schemeClr val="tx1"/>
+    </cs:fontRef>
+  </cs:plotArea>
+  <cs:plotArea3D mods="allowNoFillOverride allowNoLineOverride">
+    <cs:lnRef idx="0"/>
+    <cs:fillRef idx="0"/>
+    <cs:effectRef idx="0"/>
+    <cs:fontRef idx="minor">
+      <a:schemeClr val="tx1"/>
+    </cs:fontRef>
+  </cs:plotArea3D>
+  <cs:seriesAxis>
+    <cs:lnRef idx="0"/>
+    <cs:fillRef idx="0"/>
+    <cs:effectRef idx="0"/>
+    <cs:fontRef idx="minor">
+      <a:schemeClr val="tx1">
+        <a:lumMod val="65000"/>
+        <a:lumOff val="35000"/>
+      </a:schemeClr>
+    </cs:fontRef>
+    <cs:defRPr sz="900" kern="1200"/>
+  </cs:seriesAxis>
+  <cs:seriesLine>
+    <cs:lnRef idx="0"/>
+    <cs:fillRef idx="0"/>
+    <cs:effectRef idx="0"/>
+    <cs:fontRef idx="minor">
+      <a:schemeClr val="tx1"/>
+    </cs:fontRef>
+    <cs:spPr>
+      <a:ln w="9525" cap="flat" cmpd="sng" algn="ctr">
+        <a:solidFill>
+          <a:schemeClr val="tx1">
+            <a:lumMod val="35000"/>
+            <a:lumOff val="65000"/>
+          </a:schemeClr>
+        </a:solidFill>
+        <a:round/>
+      </a:ln>
+    </cs:spPr>
+  </cs:seriesLine>
+  <cs:title>
+    <cs:lnRef idx="0"/>
+    <cs:fillRef idx="0"/>
+    <cs:effectRef idx="0"/>
+    <cs:fontRef idx="minor">
+      <a:schemeClr val="tx1">
+        <a:lumMod val="65000"/>
+        <a:lumOff val="35000"/>
+      </a:schemeClr>
+    </cs:fontRef>
+    <cs:defRPr sz="1400" b="0" kern="1200" spc="0" baseline="0"/>
+  </cs:title>
+  <cs:trendline>
+    <cs:lnRef idx="0">
+      <cs:styleClr val="auto"/>
+    </cs:lnRef>
+    <cs:fillRef idx="0"/>
+    <cs:effectRef idx="0"/>
+    <cs:fontRef idx="minor">
+      <a:schemeClr val="tx1"/>
+    </cs:fontRef>
+    <cs:spPr>
+      <a:ln w="19050" cap="rnd">
+        <a:solidFill>
+          <a:schemeClr val="phClr"/>
+        </a:solidFill>
+        <a:prstDash val="sysDot"/>
+      </a:ln>
+    </cs:spPr>
+  </cs:trendline>
+  <cs:trendlineLabel>
+    <cs:lnRef idx="0"/>
+    <cs:fillRef idx="0"/>
+    <cs:effectRef idx="0"/>
+    <cs:fontRef idx="minor">
+      <a:schemeClr val="tx1">
+        <a:lumMod val="65000"/>
+        <a:lumOff val="35000"/>
+      </a:schemeClr>
+    </cs:fontRef>
+    <cs:defRPr sz="900" kern="1200"/>
+  </cs:trendlineLabel>
+  <cs:upBar>
+    <cs:lnRef idx="0"/>
+    <cs:fillRef idx="0"/>
+    <cs:effectRef idx="0"/>
+    <cs:fontRef idx="minor">
+      <a:schemeClr val="dk1"/>
+    </cs:fontRef>
+    <cs:spPr>
+      <a:solidFill>
+        <a:schemeClr val="lt1"/>
+      </a:solidFill>
+      <a:ln w="9525">
+        <a:solidFill>
+          <a:schemeClr val="tx1">
+            <a:lumMod val="15000"/>
+            <a:lumOff val="85000"/>
+          </a:schemeClr>
+        </a:solidFill>
+      </a:ln>
+    </cs:spPr>
+  </cs:upBar>
+  <cs:valueAxis>
+    <cs:lnRef idx="0"/>
+    <cs:fillRef idx="0"/>
+    <cs:effectRef idx="0"/>
+    <cs:fontRef idx="minor">
+      <a:schemeClr val="tx1">
+        <a:lumMod val="65000"/>
+        <a:lumOff val="35000"/>
+      </a:schemeClr>
+    </cs:fontRef>
+    <cs:defRPr sz="900" kern="1200"/>
+  </cs:valueAxis>
+  <cs:wall>
+    <cs:lnRef idx="0"/>
+    <cs:fillRef idx="0"/>
+    <cs:effectRef idx="0"/>
+    <cs:fontRef idx="minor">
+      <a:schemeClr val="tx1"/>
+    </cs:fontRef>
+    <cs:spPr>
+      <a:noFill/>
+      <a:ln>
+        <a:noFill/>
+      </a:ln>
+    </cs:spPr>
+  </cs:wall>
+</cs:chartStyle>
+</file>
+
+<file path=ppt/charts/style2.xml><?xml version="1.0" encoding="utf-8"?>
+<cs:chartStyle xmlns:cs="http://schemas.microsoft.com/office/drawing/2012/chartStyle" xmlns:a="http://schemas.openxmlformats.org/drawingml/2006/main" id="227">
+  <cs:axisTitle>
+    <cs:lnRef idx="0"/>
+    <cs:fillRef idx="0"/>
+    <cs:effectRef idx="0"/>
+    <cs:fontRef idx="minor">
+      <a:schemeClr val="tx1">
+        <a:lumMod val="65000"/>
+        <a:lumOff val="35000"/>
+      </a:schemeClr>
+    </cs:fontRef>
+    <cs:defRPr sz="1000" kern="1200"/>
+  </cs:axisTitle>
+  <cs:categoryAxis>
+    <cs:lnRef idx="0"/>
+    <cs:fillRef idx="0"/>
+    <cs:effectRef idx="0"/>
+    <cs:fontRef idx="minor">
+      <a:schemeClr val="tx1">
+        <a:lumMod val="65000"/>
+        <a:lumOff val="35000"/>
+      </a:schemeClr>
+    </cs:fontRef>
+    <cs:spPr>
+      <a:ln w="9525" cap="flat" cmpd="sng" algn="ctr">
+        <a:solidFill>
+          <a:schemeClr val="tx1">
+            <a:lumMod val="15000"/>
+            <a:lumOff val="85000"/>
+          </a:schemeClr>
+        </a:solidFill>
+        <a:round/>
+      </a:ln>
+    </cs:spPr>
+    <cs:defRPr sz="900" kern="1200"/>
+  </cs:categoryAxis>
+  <cs:chartArea mods="allowNoFillOverride allowNoLineOverride">
+    <cs:lnRef idx="0"/>
+    <cs:fillRef idx="0"/>
+    <cs:effectRef idx="0"/>
+    <cs:fontRef idx="minor">
+      <a:schemeClr val="tx1"/>
+    </cs:fontRef>
+    <cs:spPr>
+      <a:solidFill>
+        <a:schemeClr val="bg1"/>
+      </a:solidFill>
+      <a:ln w="9525" cap="flat" cmpd="sng" algn="ctr">
+        <a:solidFill>
+          <a:schemeClr val="tx1">
+            <a:lumMod val="15000"/>
+            <a:lumOff val="85000"/>
+          </a:schemeClr>
+        </a:solidFill>
+        <a:round/>
+      </a:ln>
+    </cs:spPr>
+    <cs:defRPr sz="1000" kern="1200"/>
+  </cs:chartArea>
+  <cs:dataLabel>
+    <cs:lnRef idx="0"/>
+    <cs:fillRef idx="0"/>
+    <cs:effectRef idx="0"/>
+    <cs:fontRef idx="minor">
+      <a:schemeClr val="tx1">
+        <a:lumMod val="75000"/>
+        <a:lumOff val="25000"/>
+      </a:schemeClr>
+    </cs:fontRef>
+    <cs:defRPr sz="900" kern="1200"/>
+  </cs:dataLabel>
+  <cs:dataLabelCallout>
+    <cs:lnRef idx="0"/>
+    <cs:fillRef idx="0"/>
+    <cs:effectRef idx="0"/>
+    <cs:fontRef idx="minor">
+      <a:schemeClr val="dk1">
+        <a:lumMod val="65000"/>
+        <a:lumOff val="35000"/>
+      </a:schemeClr>
+    </cs:fontRef>
+    <cs:spPr>
+      <a:solidFill>
+        <a:schemeClr val="lt1"/>
+      </a:solidFill>
+      <a:ln>
+        <a:solidFill>
+          <a:schemeClr val="dk1">
+            <a:lumMod val="25000"/>
+            <a:lumOff val="75000"/>
+          </a:schemeClr>
+        </a:solidFill>
+      </a:ln>
+    </cs:spPr>
+    <cs:defRPr sz="900" kern="1200"/>
+    <cs:bodyPr rot="0" spcFirstLastPara="1" vertOverflow="clip" horzOverflow="clip" vert="horz" wrap="square" lIns="36576" tIns="18288" rIns="36576" bIns="18288" anchor="ctr" anchorCtr="1">
+      <a:spAutoFit/>
+    </cs:bodyPr>
+  </cs:dataLabelCallout>
+  <cs:dataPoint>
+    <cs:lnRef idx="0"/>
+    <cs:fillRef idx="1">
+      <cs:styleClr val="auto"/>
+    </cs:fillRef>
+    <cs:effectRef idx="0"/>
+    <cs:fontRef idx="minor">
+      <a:schemeClr val="tx1"/>
+    </cs:fontRef>
+    <cs:spPr>
+      <a:solidFill>
+        <a:schemeClr val="phClr"/>
+      </a:solidFill>
+    </cs:spPr>
+  </cs:dataPoint>
+  <cs:dataPoint3D>
+    <cs:lnRef idx="0"/>
+    <cs:fillRef idx="1">
+      <cs:styleClr val="auto"/>
+    </cs:fillRef>
+    <cs:effectRef idx="0"/>
+    <cs:fontRef idx="minor">
+      <a:schemeClr val="tx1"/>
+    </cs:fontRef>
+    <cs:spPr>
+      <a:solidFill>
+        <a:schemeClr val="phClr"/>
+      </a:solidFill>
+    </cs:spPr>
+  </cs:dataPoint3D>
+  <cs:dataPointLine>
+    <cs:lnRef idx="0">
+      <cs:styleClr val="auto"/>
+    </cs:lnRef>
+    <cs:fillRef idx="1"/>
+    <cs:effectRef idx="0"/>
+    <cs:fontRef idx="minor">
+      <a:schemeClr val="tx1"/>
+    </cs:fontRef>
+    <cs:spPr>
+      <a:ln w="28575" cap="rnd">
+        <a:solidFill>
+          <a:schemeClr val="phClr"/>
+        </a:solidFill>
+        <a:round/>
+      </a:ln>
+    </cs:spPr>
+  </cs:dataPointLine>
+  <cs:dataPointMarker>
+    <cs:lnRef idx="0">
+      <cs:styleClr val="auto"/>
+    </cs:lnRef>
+    <cs:fillRef idx="1">
+      <cs:styleClr val="auto"/>
+    </cs:fillRef>
+    <cs:effectRef idx="0"/>
+    <cs:fontRef idx="minor">
+      <a:schemeClr val="tx1"/>
+    </cs:fontRef>
+    <cs:spPr>
+      <a:solidFill>
+        <a:schemeClr val="phClr"/>
+      </a:solidFill>
+      <a:ln w="9525">
+        <a:solidFill>
+          <a:schemeClr val="phClr"/>
+        </a:solidFill>
+      </a:ln>
+    </cs:spPr>
+  </cs:dataPointMarker>
+  <cs:dataPointMarkerLayout symbol="circle" size="5"/>
+  <cs:dataPointWireframe>
+    <cs:lnRef idx="0">
+      <cs:styleClr val="auto"/>
+    </cs:lnRef>
+    <cs:fillRef idx="1"/>
+    <cs:effectRef idx="0"/>
+    <cs:fontRef idx="minor">
+      <a:schemeClr val="tx1"/>
+    </cs:fontRef>
+    <cs:spPr>
+      <a:ln w="9525" cap="rnd">
+        <a:solidFill>
+          <a:schemeClr val="phClr"/>
+        </a:solidFill>
+        <a:round/>
+      </a:ln>
+    </cs:spPr>
+  </cs:dataPointWireframe>
+  <cs:dataTable>
+    <cs:lnRef idx="0"/>
+    <cs:fillRef idx="0"/>
+    <cs:effectRef idx="0"/>
+    <cs:fontRef idx="minor">
+      <a:schemeClr val="tx1">
+        <a:lumMod val="65000"/>
+        <a:lumOff val="35000"/>
+      </a:schemeClr>
+    </cs:fontRef>
+    <cs:spPr>
+      <a:noFill/>
+      <a:ln w="9525" cap="flat" cmpd="sng" algn="ctr">
+        <a:solidFill>
+          <a:schemeClr val="tx1">
+            <a:lumMod val="15000"/>
+            <a:lumOff val="85000"/>
+          </a:schemeClr>
+        </a:solidFill>
+        <a:round/>
+      </a:ln>
+    </cs:spPr>
+    <cs:defRPr sz="900" kern="1200"/>
+  </cs:dataTable>
+  <cs:downBar>
+    <cs:lnRef idx="0"/>
+    <cs:fillRef idx="0"/>
+    <cs:effectRef idx="0"/>
+    <cs:fontRef idx="minor">
+      <a:schemeClr val="dk1"/>
+    </cs:fontRef>
+    <cs:spPr>
+      <a:solidFill>
+        <a:schemeClr val="dk1">
+          <a:lumMod val="65000"/>
+          <a:lumOff val="35000"/>
+        </a:schemeClr>
+      </a:solidFill>
+      <a:ln w="9525">
+        <a:solidFill>
+          <a:schemeClr val="tx1">
+            <a:lumMod val="65000"/>
+            <a:lumOff val="35000"/>
+          </a:schemeClr>
+        </a:solidFill>
+      </a:ln>
+    </cs:spPr>
+  </cs:downBar>
+  <cs:dropLine>
+    <cs:lnRef idx="0"/>
+    <cs:fillRef idx="0"/>
+    <cs:effectRef idx="0"/>
+    <cs:fontRef idx="minor">
+      <a:schemeClr val="tx1"/>
+    </cs:fontRef>
+    <cs:spPr>
+      <a:ln w="9525" cap="flat" cmpd="sng" algn="ctr">
+        <a:solidFill>
+          <a:schemeClr val="tx1">
+            <a:lumMod val="35000"/>
+            <a:lumOff val="65000"/>
+          </a:schemeClr>
+        </a:solidFill>
+        <a:round/>
+      </a:ln>
+    </cs:spPr>
+  </cs:dropLine>
+  <cs:errorBar>
+    <cs:lnRef idx="0"/>
+    <cs:fillRef idx="0"/>
+    <cs:effectRef idx="0"/>
+    <cs:fontRef idx="minor">
+      <a:schemeClr val="tx1"/>
+    </cs:fontRef>
+    <cs:spPr>
+      <a:ln w="9525" cap="flat" cmpd="sng" algn="ctr">
+        <a:solidFill>
+          <a:schemeClr val="tx1">
+            <a:lumMod val="65000"/>
+            <a:lumOff val="35000"/>
+          </a:schemeClr>
+        </a:solidFill>
+        <a:round/>
+      </a:ln>
+    </cs:spPr>
+  </cs:errorBar>
+  <cs:floor>
+    <cs:lnRef idx="0"/>
+    <cs:fillRef idx="0"/>
+    <cs:effectRef idx="0"/>
+    <cs:fontRef idx="minor">
+      <a:schemeClr val="tx1"/>
+    </cs:fontRef>
+    <cs:spPr>
+      <a:noFill/>
+      <a:ln>
+        <a:noFill/>
+      </a:ln>
+    </cs:spPr>
+  </cs:floor>
+  <cs:gridlineMajor>
+    <cs:lnRef idx="0"/>
+    <cs:fillRef idx="0"/>
+    <cs:effectRef idx="0"/>
+    <cs:fontRef idx="minor">
+      <a:schemeClr val="tx1"/>
+    </cs:fontRef>
+    <cs:spPr>
+      <a:ln w="9525" cap="flat" cmpd="sng" algn="ctr">
+        <a:solidFill>
+          <a:schemeClr val="tx1">
+            <a:lumMod val="15000"/>
+            <a:lumOff val="85000"/>
+          </a:schemeClr>
+        </a:solidFill>
+        <a:round/>
+      </a:ln>
+    </cs:spPr>
+  </cs:gridlineMajor>
+  <cs:gridlineMinor>
+    <cs:lnRef idx="0"/>
+    <cs:fillRef idx="0"/>
+    <cs:effectRef idx="0"/>
+    <cs:fontRef idx="minor">
+      <a:schemeClr val="tx1"/>
+    </cs:fontRef>
+    <cs:spPr>
+      <a:ln w="9525" cap="flat" cmpd="sng" algn="ctr">
+        <a:solidFill>
+          <a:schemeClr val="tx1">
+            <a:lumMod val="5000"/>
+            <a:lumOff val="95000"/>
+          </a:schemeClr>
+        </a:solidFill>
+        <a:round/>
+      </a:ln>
+    </cs:spPr>
+  </cs:gridlineMinor>
+  <cs:hiLoLine>
+    <cs:lnRef idx="0"/>
+    <cs:fillRef idx="0"/>
+    <cs:effectRef idx="0"/>
+    <cs:fontRef idx="minor">
+      <a:schemeClr val="tx1"/>
+    </cs:fontRef>
+    <cs:spPr>
+      <a:ln w="9525" cap="flat" cmpd="sng" algn="ctr">
+        <a:solidFill>
+          <a:schemeClr val="tx1">
+            <a:lumMod val="75000"/>
+            <a:lumOff val="25000"/>
+          </a:schemeClr>
+        </a:solidFill>
+        <a:round/>
+      </a:ln>
+    </cs:spPr>
+  </cs:hiLoLine>
+  <cs:leaderLine>
+    <cs:lnRef idx="0"/>
+    <cs:fillRef idx="0"/>
+    <cs:effectRef idx="0"/>
+    <cs:fontRef idx="minor">
+      <a:schemeClr val="tx1"/>
+    </cs:fontRef>
+    <cs:spPr>
+      <a:ln w="9525" cap="flat" cmpd="sng" algn="ctr">
+        <a:solidFill>
+          <a:schemeClr val="tx1">
+            <a:lumMod val="35000"/>
+            <a:lumOff val="65000"/>
+          </a:schemeClr>
+        </a:solidFill>
+        <a:round/>
+      </a:ln>
+    </cs:spPr>
+  </cs:leaderLine>
+  <cs:legend>
+    <cs:lnRef idx="0"/>
+    <cs:fillRef idx="0"/>
+    <cs:effectRef idx="0"/>
+    <cs:fontRef idx="minor">
+      <a:schemeClr val="tx1">
+        <a:lumMod val="65000"/>
+        <a:lumOff val="35000"/>
+      </a:schemeClr>
+    </cs:fontRef>
+    <cs:defRPr sz="900" kern="1200"/>
+  </cs:legend>
+  <cs:plotArea mods="allowNoFillOverride allowNoLineOverride">
+    <cs:lnRef idx="0"/>
+    <cs:fillRef idx="0"/>
+    <cs:effectRef idx="0"/>
+    <cs:fontRef idx="minor">
+      <a:schemeClr val="tx1"/>
+    </cs:fontRef>
+  </cs:plotArea>
+  <cs:plotArea3D mods="allowNoFillOverride allowNoLineOverride">
+    <cs:lnRef idx="0"/>
+    <cs:fillRef idx="0"/>
+    <cs:effectRef idx="0"/>
+    <cs:fontRef idx="minor">
+      <a:schemeClr val="tx1"/>
+    </cs:fontRef>
+  </cs:plotArea3D>
+  <cs:seriesAxis>
+    <cs:lnRef idx="0"/>
+    <cs:fillRef idx="0"/>
+    <cs:effectRef idx="0"/>
+    <cs:fontRef idx="minor">
+      <a:schemeClr val="tx1">
+        <a:lumMod val="65000"/>
+        <a:lumOff val="35000"/>
+      </a:schemeClr>
+    </cs:fontRef>
+    <cs:defRPr sz="900" kern="1200"/>
+  </cs:seriesAxis>
+  <cs:seriesLine>
+    <cs:lnRef idx="0"/>
+    <cs:fillRef idx="0"/>
+    <cs:effectRef idx="0"/>
+    <cs:fontRef idx="minor">
+      <a:schemeClr val="tx1"/>
+    </cs:fontRef>
+    <cs:spPr>
+      <a:ln w="9525" cap="flat" cmpd="sng" algn="ctr">
+        <a:solidFill>
+          <a:schemeClr val="tx1">
+            <a:lumMod val="35000"/>
+            <a:lumOff val="65000"/>
+          </a:schemeClr>
+        </a:solidFill>
+        <a:round/>
+      </a:ln>
+    </cs:spPr>
+  </cs:seriesLine>
+  <cs:title>
+    <cs:lnRef idx="0"/>
+    <cs:fillRef idx="0"/>
+    <cs:effectRef idx="0"/>
+    <cs:fontRef idx="minor">
+      <a:schemeClr val="tx1">
+        <a:lumMod val="65000"/>
+        <a:lumOff val="35000"/>
+      </a:schemeClr>
+    </cs:fontRef>
+    <cs:defRPr sz="1400" b="0" kern="1200" spc="0" baseline="0"/>
+  </cs:title>
+  <cs:trendline>
+    <cs:lnRef idx="0">
+      <cs:styleClr val="auto"/>
+    </cs:lnRef>
+    <cs:fillRef idx="0"/>
+    <cs:effectRef idx="0"/>
+    <cs:fontRef idx="minor">
+      <a:schemeClr val="tx1"/>
+    </cs:fontRef>
+    <cs:spPr>
+      <a:ln w="19050" cap="rnd">
+        <a:solidFill>
+          <a:schemeClr val="phClr"/>
+        </a:solidFill>
+        <a:prstDash val="sysDot"/>
+      </a:ln>
+    </cs:spPr>
+  </cs:trendline>
+  <cs:trendlineLabel>
+    <cs:lnRef idx="0"/>
+    <cs:fillRef idx="0"/>
+    <cs:effectRef idx="0"/>
+    <cs:fontRef idx="minor">
+      <a:schemeClr val="tx1">
+        <a:lumMod val="65000"/>
+        <a:lumOff val="35000"/>
+      </a:schemeClr>
+    </cs:fontRef>
+    <cs:defRPr sz="900" kern="1200"/>
+  </cs:trendlineLabel>
+  <cs:upBar>
+    <cs:lnRef idx="0"/>
+    <cs:fillRef idx="0"/>
+    <cs:effectRef idx="0"/>
+    <cs:fontRef idx="minor">
+      <a:schemeClr val="dk1"/>
+    </cs:fontRef>
+    <cs:spPr>
+      <a:solidFill>
+        <a:schemeClr val="lt1"/>
+      </a:solidFill>
+      <a:ln w="9525">
+        <a:solidFill>
+          <a:schemeClr val="tx1">
+            <a:lumMod val="15000"/>
+            <a:lumOff val="85000"/>
+          </a:schemeClr>
+        </a:solidFill>
+      </a:ln>
+    </cs:spPr>
+  </cs:upBar>
+  <cs:valueAxis>
+    <cs:lnRef idx="0"/>
+    <cs:fillRef idx="0"/>
+    <cs:effectRef idx="0"/>
+    <cs:fontRef idx="minor">
+      <a:schemeClr val="tx1">
+        <a:lumMod val="65000"/>
+        <a:lumOff val="35000"/>
+      </a:schemeClr>
+    </cs:fontRef>
+    <cs:defRPr sz="900" kern="1200"/>
+  </cs:valueAxis>
+  <cs:wall>
+    <cs:lnRef idx="0"/>
+    <cs:fillRef idx="0"/>
+    <cs:effectRef idx="0"/>
+    <cs:fontRef idx="minor">
+      <a:schemeClr val="tx1"/>
+    </cs:fontRef>
+    <cs:spPr>
+      <a:noFill/>
+      <a:ln>
+        <a:noFill/>
+      </a:ln>
+    </cs:spPr>
+  </cs:wall>
+</cs:chartStyle>
+</file>
+
+<file path=ppt/charts/style3.xml><?xml version="1.0" encoding="utf-8"?>
+<cs:chartStyle xmlns:cs="http://schemas.microsoft.com/office/drawing/2012/chartStyle" xmlns:a="http://schemas.openxmlformats.org/drawingml/2006/main" id="216">
+  <cs:axisTitle>
+    <cs:lnRef idx="0"/>
+    <cs:fillRef idx="0"/>
+    <cs:effectRef idx="0"/>
+    <cs:fontRef idx="minor">
+      <a:schemeClr val="tx1">
+        <a:lumMod val="65000"/>
+        <a:lumOff val="35000"/>
+      </a:schemeClr>
+    </cs:fontRef>
+    <cs:defRPr sz="1000" kern="1200"/>
+  </cs:axisTitle>
+  <cs:categoryAxis>
+    <cs:lnRef idx="0"/>
+    <cs:fillRef idx="0"/>
+    <cs:effectRef idx="0"/>
+    <cs:fontRef idx="minor">
+      <a:schemeClr val="tx1">
+        <a:lumMod val="65000"/>
+        <a:lumOff val="35000"/>
+      </a:schemeClr>
+    </cs:fontRef>
+    <cs:spPr>
+      <a:ln w="9525" cap="flat" cmpd="sng" algn="ctr">
+        <a:solidFill>
+          <a:schemeClr val="tx1">
+            <a:lumMod val="15000"/>
+            <a:lumOff val="85000"/>
+          </a:schemeClr>
+        </a:solidFill>
+        <a:round/>
+      </a:ln>
+    </cs:spPr>
+    <cs:defRPr sz="900" kern="1200"/>
+  </cs:categoryAxis>
+  <cs:chartArea mods="allowNoFillOverride allowNoLineOverride">
+    <cs:lnRef idx="0"/>
+    <cs:fillRef idx="0"/>
+    <cs:effectRef idx="0"/>
+    <cs:fontRef idx="minor">
+      <a:schemeClr val="tx1"/>
+    </cs:fontRef>
+    <cs:spPr>
+      <a:solidFill>
+        <a:schemeClr val="bg1"/>
+      </a:solidFill>
+      <a:ln w="9525" cap="flat" cmpd="sng" algn="ctr">
+        <a:solidFill>
+          <a:schemeClr val="tx1">
+            <a:lumMod val="15000"/>
+            <a:lumOff val="85000"/>
+          </a:schemeClr>
+        </a:solidFill>
+        <a:round/>
+      </a:ln>
+    </cs:spPr>
+    <cs:defRPr sz="1000" kern="1200"/>
+  </cs:chartArea>
+  <cs:dataLabel>
+    <cs:lnRef idx="0"/>
+    <cs:fillRef idx="0"/>
+    <cs:effectRef idx="0"/>
+    <cs:fontRef idx="minor">
+      <a:schemeClr val="tx1">
+        <a:lumMod val="75000"/>
+        <a:lumOff val="25000"/>
+      </a:schemeClr>
+    </cs:fontRef>
+    <cs:defRPr sz="900" kern="1200"/>
+  </cs:dataLabel>
+  <cs:dataLabelCallout>
+    <cs:lnRef idx="0"/>
+    <cs:fillRef idx="0"/>
+    <cs:effectRef idx="0"/>
+    <cs:fontRef idx="minor">
+      <a:schemeClr val="dk1">
+        <a:lumMod val="65000"/>
+        <a:lumOff val="35000"/>
+      </a:schemeClr>
+    </cs:fontRef>
+    <cs:spPr>
+      <a:solidFill>
+        <a:schemeClr val="lt1"/>
+      </a:solidFill>
+      <a:ln>
+        <a:solidFill>
+          <a:schemeClr val="dk1">
+            <a:lumMod val="25000"/>
+            <a:lumOff val="75000"/>
+          </a:schemeClr>
+        </a:solidFill>
+      </a:ln>
+    </cs:spPr>
+    <cs:defRPr sz="900" kern="1200"/>
+    <cs:bodyPr rot="0" spcFirstLastPara="1" vertOverflow="clip" horzOverflow="clip" vert="horz" wrap="square" lIns="36576" tIns="18288" rIns="36576" bIns="18288" anchor="ctr" anchorCtr="1">
+      <a:spAutoFit/>
+    </cs:bodyPr>
+  </cs:dataLabelCallout>
+  <cs:dataPoint>
+    <cs:lnRef idx="0"/>
+    <cs:fillRef idx="1">
+      <cs:styleClr val="auto"/>
+    </cs:fillRef>
+    <cs:effectRef idx="0"/>
+    <cs:fontRef idx="minor">
+      <a:schemeClr val="tx1"/>
+    </cs:fontRef>
+  </cs:dataPoint>
+  <cs:dataPoint3D>
+    <cs:lnRef idx="0"/>
+    <cs:fillRef idx="1">
+      <cs:styleClr val="auto"/>
+    </cs:fillRef>
+    <cs:effectRef idx="0"/>
+    <cs:fontRef idx="minor">
+      <a:schemeClr val="tx1"/>
+    </cs:fontRef>
+  </cs:dataPoint3D>
+  <cs:dataPointLine>
+    <cs:lnRef idx="0">
+      <cs:styleClr val="auto"/>
+    </cs:lnRef>
+    <cs:fillRef idx="1"/>
+    <cs:effectRef idx="0"/>
+    <cs:fontRef idx="minor">
+      <a:schemeClr val="tx1"/>
+    </cs:fontRef>
+    <cs:spPr>
+      <a:ln w="28575" cap="rnd">
+        <a:solidFill>
+          <a:schemeClr val="phClr"/>
+        </a:solidFill>
+        <a:round/>
+      </a:ln>
+    </cs:spPr>
+  </cs:dataPointLine>
+  <cs:dataPointMarker>
+    <cs:lnRef idx="0">
+      <cs:styleClr val="auto"/>
+    </cs:lnRef>
+    <cs:fillRef idx="1">
+      <cs:styleClr val="auto"/>
+    </cs:fillRef>
+    <cs:effectRef idx="0"/>
+    <cs:fontRef idx="minor">
+      <a:schemeClr val="tx1"/>
+    </cs:fontRef>
+    <cs:spPr>
+      <a:ln w="9525">
+        <a:solidFill>
+          <a:schemeClr val="phClr"/>
+        </a:solidFill>
+      </a:ln>
+    </cs:spPr>
+  </cs:dataPointMarker>
+  <cs:dataPointMarkerLayout symbol="circle" size="5"/>
+  <cs:dataPointWireframe>
+    <cs:lnRef idx="0">
+      <cs:styleClr val="auto"/>
+    </cs:lnRef>
+    <cs:fillRef idx="1"/>
+    <cs:effectRef idx="0"/>
+    <cs:fontRef idx="minor">
+      <a:schemeClr val="tx1"/>
+    </cs:fontRef>
+    <cs:spPr>
+      <a:ln w="9525" cap="rnd">
+        <a:solidFill>
+          <a:schemeClr val="phClr"/>
+        </a:solidFill>
+        <a:round/>
+      </a:ln>
+    </cs:spPr>
+  </cs:dataPointWireframe>
+  <cs:dataTable>
+    <cs:lnRef idx="0"/>
+    <cs:fillRef idx="0"/>
+    <cs:effectRef idx="0"/>
+    <cs:fontRef idx="minor">
+      <a:schemeClr val="tx1">
+        <a:lumMod val="65000"/>
+        <a:lumOff val="35000"/>
+      </a:schemeClr>
+    </cs:fontRef>
+    <cs:spPr>
+      <a:noFill/>
+      <a:ln w="9525" cap="flat" cmpd="sng" algn="ctr">
+        <a:solidFill>
+          <a:schemeClr val="tx1">
+            <a:lumMod val="15000"/>
+            <a:lumOff val="85000"/>
+          </a:schemeClr>
+        </a:solidFill>
+        <a:round/>
+      </a:ln>
+    </cs:spPr>
+    <cs:defRPr sz="900" kern="1200"/>
+  </cs:dataTable>
+  <cs:downBar>
+    <cs:lnRef idx="0"/>
+    <cs:fillRef idx="0"/>
+    <cs:effectRef idx="0"/>
+    <cs:fontRef idx="minor">
+      <a:schemeClr val="tx1"/>
+    </cs:fontRef>
+    <cs:spPr>
+      <a:solidFill>
+        <a:schemeClr val="dk1">
+          <a:lumMod val="75000"/>
+          <a:lumOff val="25000"/>
+        </a:schemeClr>
+      </a:solidFill>
+      <a:ln w="9525" cap="flat" cmpd="sng" algn="ctr">
+        <a:solidFill>
+          <a:schemeClr val="tx1">
+            <a:lumMod val="65000"/>
+            <a:lumOff val="35000"/>
+          </a:schemeClr>
+        </a:solidFill>
+        <a:round/>
+      </a:ln>
+    </cs:spPr>
+  </cs:downBar>
+  <cs:dropLine>
+    <cs:lnRef idx="0"/>
+    <cs:fillRef idx="0"/>
+    <cs:effectRef idx="0"/>
+    <cs:fontRef idx="minor">
+      <a:schemeClr val="tx1"/>
+    </cs:fontRef>
+    <cs:spPr>
+      <a:ln w="9525" cap="flat" cmpd="sng" algn="ctr">
+        <a:solidFill>
+          <a:schemeClr val="tx1">
+            <a:lumMod val="35000"/>
+            <a:lumOff val="65000"/>
+          </a:schemeClr>
+        </a:solidFill>
+        <a:round/>
+      </a:ln>
+    </cs:spPr>
+  </cs:dropLine>
+  <cs:errorBar>
+    <cs:lnRef idx="0"/>
+    <cs:fillRef idx="0"/>
+    <cs:effectRef idx="0"/>
+    <cs:fontRef idx="minor">
+      <a:schemeClr val="tx1"/>
+    </cs:fontRef>
+    <cs:spPr>
+      <a:ln w="9525" cap="flat" cmpd="sng" algn="ctr">
+        <a:solidFill>
+          <a:schemeClr val="tx1">
+            <a:lumMod val="65000"/>
+            <a:lumOff val="35000"/>
+          </a:schemeClr>
+        </a:solidFill>
+        <a:round/>
+      </a:ln>
+    </cs:spPr>
+  </cs:errorBar>
+  <cs:floor>
+    <cs:lnRef idx="0"/>
+    <cs:fillRef idx="0"/>
+    <cs:effectRef idx="0"/>
+    <cs:fontRef idx="minor">
+      <a:schemeClr val="tx1"/>
+    </cs:fontRef>
+    <cs:spPr>
+      <a:noFill/>
+      <a:ln>
+        <a:noFill/>
+      </a:ln>
+    </cs:spPr>
+  </cs:floor>
+  <cs:gridlineMajor>
+    <cs:lnRef idx="0"/>
+    <cs:fillRef idx="0"/>
+    <cs:effectRef idx="0"/>
+    <cs:fontRef idx="minor">
+      <a:schemeClr val="tx1"/>
+    </cs:fontRef>
+    <cs:spPr>
+      <a:ln w="9525" cap="flat" cmpd="sng" algn="ctr">
+        <a:solidFill>
+          <a:schemeClr val="tx1">
+            <a:lumMod val="15000"/>
+            <a:lumOff val="85000"/>
+          </a:schemeClr>
+        </a:solidFill>
+        <a:round/>
+      </a:ln>
+    </cs:spPr>
+  </cs:gridlineMajor>
+  <cs:gridlineMinor>
+    <cs:lnRef idx="0"/>
+    <cs:fillRef idx="0"/>
+    <cs:effectRef idx="0"/>
+    <cs:fontRef idx="minor">
+      <a:schemeClr val="tx1"/>
+    </cs:fontRef>
+    <cs:spPr>
+      <a:ln w="9525" cap="flat" cmpd="sng" algn="ctr">
+        <a:solidFill>
+          <a:schemeClr val="tx1">
+            <a:lumMod val="5000"/>
+            <a:lumOff val="95000"/>
+          </a:schemeClr>
+        </a:solidFill>
+        <a:round/>
+      </a:ln>
+    </cs:spPr>
+  </cs:gridlineMinor>
+  <cs:hiLoLine>
+    <cs:lnRef idx="0"/>
+    <cs:fillRef idx="0"/>
+    <cs:effectRef idx="0"/>
+    <cs:fontRef idx="minor">
+      <a:schemeClr val="tx1"/>
+    </cs:fontRef>
+    <cs:spPr>
+      <a:ln w="9525" cap="flat" cmpd="sng" algn="ctr">
+        <a:solidFill>
+          <a:schemeClr val="tx1">
+            <a:lumMod val="50000"/>
+            <a:lumOff val="50000"/>
+          </a:schemeClr>
+        </a:solidFill>
+        <a:round/>
+      </a:ln>
+    </cs:spPr>
+  </cs:hiLoLine>
+  <cs:leaderLine>
+    <cs:lnRef idx="0"/>
+    <cs:fillRef idx="0"/>
+    <cs:effectRef idx="0"/>
+    <cs:fontRef idx="minor">
+      <a:schemeClr val="tx1"/>
+    </cs:fontRef>
+    <cs:spPr>
+      <a:ln w="9525" cap="flat" cmpd="sng" algn="ctr">
+        <a:solidFill>
+          <a:schemeClr val="tx1">
+            <a:lumMod val="35000"/>
+            <a:lumOff val="65000"/>
+          </a:schemeClr>
+        </a:solidFill>
+        <a:round/>
+      </a:ln>
+    </cs:spPr>
+  </cs:leaderLine>
+  <cs:legend>
+    <cs:lnRef idx="0"/>
+    <cs:fillRef idx="0"/>
+    <cs:effectRef idx="0"/>
+    <cs:fontRef idx="minor">
+      <a:schemeClr val="tx1">
+        <a:lumMod val="65000"/>
+        <a:lumOff val="35000"/>
+      </a:schemeClr>
+    </cs:fontRef>
+    <cs:defRPr sz="900" kern="1200"/>
+  </cs:legend>
+  <cs:plotArea mods="allowNoFillOverride allowNoLineOverride">
+    <cs:lnRef idx="0"/>
+    <cs:fillRef idx="0"/>
+    <cs:effectRef idx="0"/>
+    <cs:fontRef idx="minor">
+      <a:schemeClr val="tx1"/>
+    </cs:fontRef>
+  </cs:plotArea>
+  <cs:plotArea3D mods="allowNoFillOverride allowNoLineOverride">
+    <cs:lnRef idx="0"/>
+    <cs:fillRef idx="0"/>
+    <cs:effectRef idx="0"/>
+    <cs:fontRef idx="minor">
+      <a:schemeClr val="tx1"/>
+    </cs:fontRef>
+  </cs:plotArea3D>
+  <cs:seriesAxis>
+    <cs:lnRef idx="0"/>
+    <cs:fillRef idx="0"/>
+    <cs:effectRef idx="0"/>
+    <cs:fontRef idx="minor">
+      <a:schemeClr val="tx1">
+        <a:lumMod val="65000"/>
+        <a:lumOff val="35000"/>
+      </a:schemeClr>
+    </cs:fontRef>
+    <cs:defRPr sz="900" kern="1200"/>
+  </cs:seriesAxis>
+  <cs:seriesLine>
+    <cs:lnRef idx="0"/>
+    <cs:fillRef idx="0"/>
+    <cs:effectRef idx="0"/>
+    <cs:fontRef idx="minor">
+      <a:schemeClr val="tx1"/>
+    </cs:fontRef>
+    <cs:spPr>
+      <a:ln w="9525" cap="flat" cmpd="sng" algn="ctr">
+        <a:solidFill>
+          <a:schemeClr val="tx1">
+            <a:lumMod val="35000"/>
+            <a:lumOff val="65000"/>
+          </a:schemeClr>
+        </a:solidFill>
+        <a:round/>
+      </a:ln>
+    </cs:spPr>
+  </cs:seriesLine>
+  <cs:title>
+    <cs:lnRef idx="0"/>
+    <cs:fillRef idx="0"/>
+    <cs:effectRef idx="0"/>
+    <cs:fontRef idx="minor">
+      <a:schemeClr val="tx1">
+        <a:lumMod val="65000"/>
+        <a:lumOff val="35000"/>
+      </a:schemeClr>
+    </cs:fontRef>
+    <cs:defRPr sz="1400" b="0" kern="1200" spc="0" baseline="0"/>
+  </cs:title>
+  <cs:trendline>
+    <cs:lnRef idx="0">
+      <cs:styleClr val="auto"/>
+    </cs:lnRef>
+    <cs:fillRef idx="0"/>
+    <cs:effectRef idx="0"/>
+    <cs:fontRef idx="minor">
+      <a:schemeClr val="tx1"/>
+    </cs:fontRef>
+    <cs:spPr>
+      <a:ln w="19050" cap="rnd">
+        <a:solidFill>
+          <a:schemeClr val="phClr"/>
+        </a:solidFill>
+        <a:prstDash val="sysDot"/>
+      </a:ln>
+    </cs:spPr>
+  </cs:trendline>
+  <cs:trendlineLabel>
+    <cs:lnRef idx="0"/>
+    <cs:fillRef idx="0"/>
+    <cs:effectRef idx="0"/>
+    <cs:fontRef idx="minor">
+      <a:schemeClr val="tx1">
+        <a:lumMod val="65000"/>
+        <a:lumOff val="35000"/>
+      </a:schemeClr>
+    </cs:fontRef>
+    <cs:defRPr sz="900" kern="1200"/>
+  </cs:trendlineLabel>
+  <cs:upBar>
+    <cs:lnRef idx="0"/>
+    <cs:fillRef idx="0"/>
+    <cs:effectRef idx="0"/>
+    <cs:fontRef idx="minor">
+      <a:schemeClr val="tx1"/>
+    </cs:fontRef>
+    <cs:spPr>
+      <a:solidFill>
+        <a:schemeClr val="lt1"/>
+      </a:solidFill>
+      <a:ln w="9525" cap="flat" cmpd="sng" algn="ctr">
+        <a:solidFill>
+          <a:schemeClr val="tx1">
+            <a:lumMod val="65000"/>
+            <a:lumOff val="35000"/>
+          </a:schemeClr>
+        </a:solidFill>
+        <a:round/>
+      </a:ln>
+    </cs:spPr>
+  </cs:upBar>
+  <cs:valueAxis>
+    <cs:lnRef idx="0"/>
+    <cs:fillRef idx="0"/>
+    <cs:effectRef idx="0"/>
+    <cs:fontRef idx="minor">
+      <a:schemeClr val="tx1">
+        <a:lumMod val="65000"/>
+        <a:lumOff val="35000"/>
+      </a:schemeClr>
+    </cs:fontRef>
+    <cs:defRPr sz="900" kern="1200"/>
+  </cs:valueAxis>
+  <cs:wall>
+    <cs:lnRef idx="0"/>
+    <cs:fillRef idx="0"/>
+    <cs:effectRef idx="0"/>
+    <cs:fontRef idx="minor">
+      <a:schemeClr val="tx1"/>
+    </cs:fontRef>
+    <cs:spPr>
+      <a:noFill/>
+      <a:ln>
+        <a:noFill/>
+      </a:ln>
+    </cs:spPr>
+  </cs:wall>
+</cs:chartStyle>
+</file>
+
+<file path=ppt/drawings/drawing1.xml><?xml version="1.0" encoding="utf-8"?>
+<c:userShapes xmlns:c="http://schemas.openxmlformats.org/drawingml/2006/chart">
+  <cdr:relSizeAnchor xmlns:cdr="http://schemas.openxmlformats.org/drawingml/2006/chartDrawing">
+    <cdr:from>
+      <cdr:x>0.33333</cdr:x>
+      <cdr:y>0.03121</cdr:y>
+    </cdr:from>
+    <cdr:to>
+      <cdr:x>0.75263</cdr:x>
+      <cdr:y>0.11631</cdr:y>
+    </cdr:to>
+    <cdr:sp macro="" textlink="">
+      <cdr:nvSpPr>
+        <cdr:cNvPr id="2" name="CuadroTexto 1">
+          <a:extLst xmlns:a="http://schemas.openxmlformats.org/drawingml/2006/main">
+            <a:ext uri="{FF2B5EF4-FFF2-40B4-BE49-F238E27FC236}">
+              <a16:creationId xmlns:a16="http://schemas.microsoft.com/office/drawing/2014/main" id="{A015688C-CF2A-34E0-07BF-EC5D1C7C4CD2}"/>
+            </a:ext>
+          </a:extLst>
+        </cdr:cNvPr>
+        <cdr:cNvSpPr txBox="1"/>
+      </cdr:nvSpPr>
+      <cdr:spPr>
+        <a:xfrm xmlns:a="http://schemas.openxmlformats.org/drawingml/2006/main">
+          <a:off x="2413000" y="139700"/>
+          <a:ext cx="3035300" cy="381000"/>
+        </a:xfrm>
+        <a:prstGeom xmlns:a="http://schemas.openxmlformats.org/drawingml/2006/main" prst="rect">
+          <a:avLst/>
+        </a:prstGeom>
+      </cdr:spPr>
+      <cdr:txBody>
+        <a:bodyPr xmlns:a="http://schemas.openxmlformats.org/drawingml/2006/main" vertOverflow="clip" wrap="square" rtlCol="0"/>
+        <a:lstStyle xmlns:a="http://schemas.openxmlformats.org/drawingml/2006/main"/>
+        <a:p xmlns:a="http://schemas.openxmlformats.org/drawingml/2006/main">
+          <a:r>
+            <a:rPr lang="es-ES_tradnl" sz="2000" kern="1200"/>
+            <a:t>Ingresos por ciudad</a:t>
+          </a:r>
+        </a:p>
+      </cdr:txBody>
+    </cdr:sp>
+  </cdr:relSizeAnchor>
+</c:userShapes>
 </file>
 
 <file path=ppt/slideLayouts/slideLayout1.xml><?xml version="1.0" encoding="utf-8"?>
@@ -153,10 +6623,9 @@
           <a:lstStyle/>
           <a:p>
             <a:r>
-              <a:rPr lang="en-US" smtClean="0"/>
+              <a:rPr lang="en-US"/>
               <a:t>Click to edit Master title style</a:t>
             </a:r>
-            <a:endParaRPr lang="en-US"/>
           </a:p>
         </p:txBody>
       </p:sp>
@@ -272,10 +6741,9 @@
           </a:lstStyle>
           <a:p>
             <a:r>
-              <a:rPr lang="en-US" smtClean="0"/>
+              <a:rPr lang="en-US"/>
               <a:t>Click to edit Master subtitle style</a:t>
             </a:r>
-            <a:endParaRPr lang="en-US"/>
           </a:p>
         </p:txBody>
       </p:sp>
@@ -296,7 +6764,7 @@
           <a:p>
             <a:fld id="{5BCAD085-E8A6-8845-BD4E-CB4CCA059FC4}" type="datetimeFigureOut">
               <a:rPr lang="en-US" smtClean="0"/>
-              <a:t>1/27/13</a:t>
+              <a:t>2/23/26</a:t>
             </a:fld>
             <a:endParaRPr lang="en-US"/>
           </a:p>
@@ -338,7 +6806,7 @@
           <a:p>
             <a:fld id="{C1FF6DA9-008F-8B48-92A6-B652298478BF}" type="slidenum">
               <a:rPr lang="en-US" smtClean="0"/>
-              <a:t>‹#›</a:t>
+              <a:t>‹Nº›</a:t>
             </a:fld>
             <a:endParaRPr lang="en-US"/>
           </a:p>
@@ -390,10 +6858,9 @@
           <a:lstStyle/>
           <a:p>
             <a:r>
-              <a:rPr lang="en-US" smtClean="0"/>
+              <a:rPr lang="en-US"/>
               <a:t>Click to edit Master title style</a:t>
             </a:r>
-            <a:endParaRPr lang="en-US"/>
           </a:p>
         </p:txBody>
       </p:sp>
@@ -414,38 +6881,37 @@
           <a:p>
             <a:pPr lvl="0"/>
             <a:r>
-              <a:rPr lang="en-US" smtClean="0"/>
+              <a:rPr lang="en-US"/>
               <a:t>Click to edit Master text styles</a:t>
             </a:r>
           </a:p>
           <a:p>
             <a:pPr lvl="1"/>
             <a:r>
-              <a:rPr lang="en-US" smtClean="0"/>
+              <a:rPr lang="en-US"/>
               <a:t>Second level</a:t>
             </a:r>
           </a:p>
           <a:p>
             <a:pPr lvl="2"/>
             <a:r>
-              <a:rPr lang="en-US" smtClean="0"/>
+              <a:rPr lang="en-US"/>
               <a:t>Third level</a:t>
             </a:r>
           </a:p>
           <a:p>
             <a:pPr lvl="3"/>
             <a:r>
-              <a:rPr lang="en-US" smtClean="0"/>
+              <a:rPr lang="en-US"/>
               <a:t>Fourth level</a:t>
             </a:r>
           </a:p>
           <a:p>
             <a:pPr lvl="4"/>
             <a:r>
-              <a:rPr lang="en-US" smtClean="0"/>
+              <a:rPr lang="en-US"/>
               <a:t>Fifth level</a:t>
             </a:r>
-            <a:endParaRPr lang="en-US"/>
           </a:p>
         </p:txBody>
       </p:sp>
@@ -466,7 +6932,7 @@
           <a:p>
             <a:fld id="{5BCAD085-E8A6-8845-BD4E-CB4CCA059FC4}" type="datetimeFigureOut">
               <a:rPr lang="en-US" smtClean="0"/>
-              <a:t>1/27/13</a:t>
+              <a:t>2/23/26</a:t>
             </a:fld>
             <a:endParaRPr lang="en-US"/>
           </a:p>
@@ -508,7 +6974,7 @@
           <a:p>
             <a:fld id="{C1FF6DA9-008F-8B48-92A6-B652298478BF}" type="slidenum">
               <a:rPr lang="en-US" smtClean="0"/>
-              <a:t>‹#›</a:t>
+              <a:t>‹Nº›</a:t>
             </a:fld>
             <a:endParaRPr lang="en-US"/>
           </a:p>
@@ -565,10 +7031,9 @@
           <a:lstStyle/>
           <a:p>
             <a:r>
-              <a:rPr lang="en-US" smtClean="0"/>
+              <a:rPr lang="en-US"/>
               <a:t>Click to edit Master title style</a:t>
             </a:r>
-            <a:endParaRPr lang="en-US"/>
           </a:p>
         </p:txBody>
       </p:sp>
@@ -594,38 +7059,37 @@
           <a:p>
             <a:pPr lvl="0"/>
             <a:r>
-              <a:rPr lang="en-US" smtClean="0"/>
+              <a:rPr lang="en-US"/>
               <a:t>Click to edit Master text styles</a:t>
             </a:r>
           </a:p>
           <a:p>
             <a:pPr lvl="1"/>
             <a:r>
-              <a:rPr lang="en-US" smtClean="0"/>
+              <a:rPr lang="en-US"/>
               <a:t>Second level</a:t>
             </a:r>
           </a:p>
           <a:p>
             <a:pPr lvl="2"/>
             <a:r>
-              <a:rPr lang="en-US" smtClean="0"/>
+              <a:rPr lang="en-US"/>
               <a:t>Third level</a:t>
             </a:r>
           </a:p>
           <a:p>
             <a:pPr lvl="3"/>
             <a:r>
-              <a:rPr lang="en-US" smtClean="0"/>
+              <a:rPr lang="en-US"/>
               <a:t>Fourth level</a:t>
             </a:r>
           </a:p>
           <a:p>
             <a:pPr lvl="4"/>
             <a:r>
-              <a:rPr lang="en-US" smtClean="0"/>
+              <a:rPr lang="en-US"/>
               <a:t>Fifth level</a:t>
             </a:r>
-            <a:endParaRPr lang="en-US"/>
           </a:p>
         </p:txBody>
       </p:sp>
@@ -646,7 +7110,7 @@
           <a:p>
             <a:fld id="{5BCAD085-E8A6-8845-BD4E-CB4CCA059FC4}" type="datetimeFigureOut">
               <a:rPr lang="en-US" smtClean="0"/>
-              <a:t>1/27/13</a:t>
+              <a:t>2/23/26</a:t>
             </a:fld>
             <a:endParaRPr lang="en-US"/>
           </a:p>
@@ -688,7 +7152,7 @@
           <a:p>
             <a:fld id="{C1FF6DA9-008F-8B48-92A6-B652298478BF}" type="slidenum">
               <a:rPr lang="en-US" smtClean="0"/>
-              <a:t>‹#›</a:t>
+              <a:t>‹Nº›</a:t>
             </a:fld>
             <a:endParaRPr lang="en-US"/>
           </a:p>
@@ -740,10 +7204,9 @@
           <a:lstStyle/>
           <a:p>
             <a:r>
-              <a:rPr lang="en-US" smtClean="0"/>
+              <a:rPr lang="en-US"/>
               <a:t>Click to edit Master title style</a:t>
             </a:r>
-            <a:endParaRPr lang="en-US"/>
           </a:p>
         </p:txBody>
       </p:sp>
@@ -764,38 +7227,37 @@
           <a:p>
             <a:pPr lvl="0"/>
             <a:r>
-              <a:rPr lang="en-US" smtClean="0"/>
+              <a:rPr lang="en-US"/>
               <a:t>Click to edit Master text styles</a:t>
             </a:r>
           </a:p>
           <a:p>
             <a:pPr lvl="1"/>
             <a:r>
-              <a:rPr lang="en-US" smtClean="0"/>
+              <a:rPr lang="en-US"/>
               <a:t>Second level</a:t>
             </a:r>
           </a:p>
           <a:p>
             <a:pPr lvl="2"/>
             <a:r>
-              <a:rPr lang="en-US" smtClean="0"/>
+              <a:rPr lang="en-US"/>
               <a:t>Third level</a:t>
             </a:r>
           </a:p>
           <a:p>
             <a:pPr lvl="3"/>
             <a:r>
-              <a:rPr lang="en-US" smtClean="0"/>
+              <a:rPr lang="en-US"/>
               <a:t>Fourth level</a:t>
             </a:r>
           </a:p>
           <a:p>
             <a:pPr lvl="4"/>
             <a:r>
-              <a:rPr lang="en-US" smtClean="0"/>
+              <a:rPr lang="en-US"/>
               <a:t>Fifth level</a:t>
             </a:r>
-            <a:endParaRPr lang="en-US"/>
           </a:p>
         </p:txBody>
       </p:sp>
@@ -816,7 +7278,7 @@
           <a:p>
             <a:fld id="{5BCAD085-E8A6-8845-BD4E-CB4CCA059FC4}" type="datetimeFigureOut">
               <a:rPr lang="en-US" smtClean="0"/>
-              <a:t>1/27/13</a:t>
+              <a:t>2/23/26</a:t>
             </a:fld>
             <a:endParaRPr lang="en-US"/>
           </a:p>
@@ -858,7 +7320,7 @@
           <a:p>
             <a:fld id="{C1FF6DA9-008F-8B48-92A6-B652298478BF}" type="slidenum">
               <a:rPr lang="en-US" smtClean="0"/>
-              <a:t>‹#›</a:t>
+              <a:t>‹Nº›</a:t>
             </a:fld>
             <a:endParaRPr lang="en-US"/>
           </a:p>
@@ -919,10 +7381,9 @@
           </a:lstStyle>
           <a:p>
             <a:r>
-              <a:rPr lang="en-US" smtClean="0"/>
+              <a:rPr lang="en-US"/>
               <a:t>Click to edit Master title style</a:t>
             </a:r>
-            <a:endParaRPr lang="en-US"/>
           </a:p>
         </p:txBody>
       </p:sp>
@@ -1039,7 +7500,7 @@
           <a:p>
             <a:pPr lvl="0"/>
             <a:r>
-              <a:rPr lang="en-US" smtClean="0"/>
+              <a:rPr lang="en-US"/>
               <a:t>Click to edit Master text styles</a:t>
             </a:r>
           </a:p>
@@ -1062,7 +7523,7 @@
           <a:p>
             <a:fld id="{5BCAD085-E8A6-8845-BD4E-CB4CCA059FC4}" type="datetimeFigureOut">
               <a:rPr lang="en-US" smtClean="0"/>
-              <a:t>1/27/13</a:t>
+              <a:t>2/23/26</a:t>
             </a:fld>
             <a:endParaRPr lang="en-US"/>
           </a:p>
@@ -1104,7 +7565,7 @@
           <a:p>
             <a:fld id="{C1FF6DA9-008F-8B48-92A6-B652298478BF}" type="slidenum">
               <a:rPr lang="en-US" smtClean="0"/>
-              <a:t>‹#›</a:t>
+              <a:t>‹Nº›</a:t>
             </a:fld>
             <a:endParaRPr lang="en-US"/>
           </a:p>
@@ -1156,10 +7617,9 @@
           <a:lstStyle/>
           <a:p>
             <a:r>
-              <a:rPr lang="en-US" smtClean="0"/>
+              <a:rPr lang="en-US"/>
               <a:t>Click to edit Master title style</a:t>
             </a:r>
-            <a:endParaRPr lang="en-US"/>
           </a:p>
         </p:txBody>
       </p:sp>
@@ -1213,38 +7673,37 @@
           <a:p>
             <a:pPr lvl="0"/>
             <a:r>
-              <a:rPr lang="en-US" smtClean="0"/>
+              <a:rPr lang="en-US"/>
               <a:t>Click to edit Master text styles</a:t>
             </a:r>
           </a:p>
           <a:p>
             <a:pPr lvl="1"/>
             <a:r>
-              <a:rPr lang="en-US" smtClean="0"/>
+              <a:rPr lang="en-US"/>
               <a:t>Second level</a:t>
             </a:r>
           </a:p>
           <a:p>
             <a:pPr lvl="2"/>
             <a:r>
-              <a:rPr lang="en-US" smtClean="0"/>
+              <a:rPr lang="en-US"/>
               <a:t>Third level</a:t>
             </a:r>
           </a:p>
           <a:p>
             <a:pPr lvl="3"/>
             <a:r>
-              <a:rPr lang="en-US" smtClean="0"/>
+              <a:rPr lang="en-US"/>
               <a:t>Fourth level</a:t>
             </a:r>
           </a:p>
           <a:p>
             <a:pPr lvl="4"/>
             <a:r>
-              <a:rPr lang="en-US" smtClean="0"/>
+              <a:rPr lang="en-US"/>
               <a:t>Fifth level</a:t>
             </a:r>
-            <a:endParaRPr lang="en-US"/>
           </a:p>
         </p:txBody>
       </p:sp>
@@ -1298,38 +7757,37 @@
           <a:p>
             <a:pPr lvl="0"/>
             <a:r>
-              <a:rPr lang="en-US" smtClean="0"/>
+              <a:rPr lang="en-US"/>
               <a:t>Click to edit Master text styles</a:t>
             </a:r>
           </a:p>
           <a:p>
             <a:pPr lvl="1"/>
             <a:r>
-              <a:rPr lang="en-US" smtClean="0"/>
+              <a:rPr lang="en-US"/>
               <a:t>Second level</a:t>
             </a:r>
           </a:p>
           <a:p>
             <a:pPr lvl="2"/>
             <a:r>
-              <a:rPr lang="en-US" smtClean="0"/>
+              <a:rPr lang="en-US"/>
               <a:t>Third level</a:t>
             </a:r>
           </a:p>
           <a:p>
             <a:pPr lvl="3"/>
             <a:r>
-              <a:rPr lang="en-US" smtClean="0"/>
+              <a:rPr lang="en-US"/>
               <a:t>Fourth level</a:t>
             </a:r>
           </a:p>
           <a:p>
             <a:pPr lvl="4"/>
             <a:r>
-              <a:rPr lang="en-US" smtClean="0"/>
+              <a:rPr lang="en-US"/>
               <a:t>Fifth level</a:t>
             </a:r>
-            <a:endParaRPr lang="en-US"/>
           </a:p>
         </p:txBody>
       </p:sp>
@@ -1350,7 +7808,7 @@
           <a:p>
             <a:fld id="{5BCAD085-E8A6-8845-BD4E-CB4CCA059FC4}" type="datetimeFigureOut">
               <a:rPr lang="en-US" smtClean="0"/>
-              <a:t>1/27/13</a:t>
+              <a:t>2/23/26</a:t>
             </a:fld>
             <a:endParaRPr lang="en-US"/>
           </a:p>
@@ -1392,7 +7850,7 @@
           <a:p>
             <a:fld id="{C1FF6DA9-008F-8B48-92A6-B652298478BF}" type="slidenum">
               <a:rPr lang="en-US" smtClean="0"/>
-              <a:t>‹#›</a:t>
+              <a:t>‹Nº›</a:t>
             </a:fld>
             <a:endParaRPr lang="en-US"/>
           </a:p>
@@ -1448,10 +7906,9 @@
           </a:lstStyle>
           <a:p>
             <a:r>
-              <a:rPr lang="en-US" smtClean="0"/>
+              <a:rPr lang="en-US"/>
               <a:t>Click to edit Master title style</a:t>
             </a:r>
-            <a:endParaRPr lang="en-US"/>
           </a:p>
         </p:txBody>
       </p:sp>
@@ -1514,7 +7971,7 @@
           <a:p>
             <a:pPr lvl="0"/>
             <a:r>
-              <a:rPr lang="en-US" smtClean="0"/>
+              <a:rPr lang="en-US"/>
               <a:t>Click to edit Master text styles</a:t>
             </a:r>
           </a:p>
@@ -1570,38 +8027,37 @@
           <a:p>
             <a:pPr lvl="0"/>
             <a:r>
-              <a:rPr lang="en-US" smtClean="0"/>
+              <a:rPr lang="en-US"/>
               <a:t>Click to edit Master text styles</a:t>
             </a:r>
           </a:p>
           <a:p>
             <a:pPr lvl="1"/>
             <a:r>
-              <a:rPr lang="en-US" smtClean="0"/>
+              <a:rPr lang="en-US"/>
               <a:t>Second level</a:t>
             </a:r>
           </a:p>
           <a:p>
             <a:pPr lvl="2"/>
             <a:r>
-              <a:rPr lang="en-US" smtClean="0"/>
+              <a:rPr lang="en-US"/>
               <a:t>Third level</a:t>
             </a:r>
           </a:p>
           <a:p>
             <a:pPr lvl="3"/>
             <a:r>
-              <a:rPr lang="en-US" smtClean="0"/>
+              <a:rPr lang="en-US"/>
               <a:t>Fourth level</a:t>
             </a:r>
           </a:p>
           <a:p>
             <a:pPr lvl="4"/>
             <a:r>
-              <a:rPr lang="en-US" smtClean="0"/>
+              <a:rPr lang="en-US"/>
               <a:t>Fifth level</a:t>
             </a:r>
-            <a:endParaRPr lang="en-US"/>
           </a:p>
         </p:txBody>
       </p:sp>
@@ -1664,7 +8120,7 @@
           <a:p>
             <a:pPr lvl="0"/>
             <a:r>
-              <a:rPr lang="en-US" smtClean="0"/>
+              <a:rPr lang="en-US"/>
               <a:t>Click to edit Master text styles</a:t>
             </a:r>
           </a:p>
@@ -1720,38 +8176,37 @@
           <a:p>
             <a:pPr lvl="0"/>
             <a:r>
-              <a:rPr lang="en-US" smtClean="0"/>
+              <a:rPr lang="en-US"/>
               <a:t>Click to edit Master text styles</a:t>
             </a:r>
           </a:p>
           <a:p>
             <a:pPr lvl="1"/>
             <a:r>
-              <a:rPr lang="en-US" smtClean="0"/>
+              <a:rPr lang="en-US"/>
               <a:t>Second level</a:t>
             </a:r>
           </a:p>
           <a:p>
             <a:pPr lvl="2"/>
             <a:r>
-              <a:rPr lang="en-US" smtClean="0"/>
+              <a:rPr lang="en-US"/>
               <a:t>Third level</a:t>
             </a:r>
           </a:p>
           <a:p>
             <a:pPr lvl="3"/>
             <a:r>
-              <a:rPr lang="en-US" smtClean="0"/>
+              <a:rPr lang="en-US"/>
               <a:t>Fourth level</a:t>
             </a:r>
           </a:p>
           <a:p>
             <a:pPr lvl="4"/>
             <a:r>
-              <a:rPr lang="en-US" smtClean="0"/>
+              <a:rPr lang="en-US"/>
               <a:t>Fifth level</a:t>
             </a:r>
-            <a:endParaRPr lang="en-US"/>
           </a:p>
         </p:txBody>
       </p:sp>
@@ -1772,7 +8227,7 @@
           <a:p>
             <a:fld id="{5BCAD085-E8A6-8845-BD4E-CB4CCA059FC4}" type="datetimeFigureOut">
               <a:rPr lang="en-US" smtClean="0"/>
-              <a:t>1/27/13</a:t>
+              <a:t>2/23/26</a:t>
             </a:fld>
             <a:endParaRPr lang="en-US"/>
           </a:p>
@@ -1814,7 +8269,7 @@
           <a:p>
             <a:fld id="{C1FF6DA9-008F-8B48-92A6-B652298478BF}" type="slidenum">
               <a:rPr lang="en-US" smtClean="0"/>
-              <a:t>‹#›</a:t>
+              <a:t>‹Nº›</a:t>
             </a:fld>
             <a:endParaRPr lang="en-US"/>
           </a:p>
@@ -1866,10 +8321,9 @@
           <a:lstStyle/>
           <a:p>
             <a:r>
-              <a:rPr lang="en-US" smtClean="0"/>
+              <a:rPr lang="en-US"/>
               <a:t>Click to edit Master title style</a:t>
             </a:r>
-            <a:endParaRPr lang="en-US"/>
           </a:p>
         </p:txBody>
       </p:sp>
@@ -1890,7 +8344,7 @@
           <a:p>
             <a:fld id="{5BCAD085-E8A6-8845-BD4E-CB4CCA059FC4}" type="datetimeFigureOut">
               <a:rPr lang="en-US" smtClean="0"/>
-              <a:t>1/27/13</a:t>
+              <a:t>2/23/26</a:t>
             </a:fld>
             <a:endParaRPr lang="en-US"/>
           </a:p>
@@ -1932,7 +8386,7 @@
           <a:p>
             <a:fld id="{C1FF6DA9-008F-8B48-92A6-B652298478BF}" type="slidenum">
               <a:rPr lang="en-US" smtClean="0"/>
-              <a:t>‹#›</a:t>
+              <a:t>‹Nº›</a:t>
             </a:fld>
             <a:endParaRPr lang="en-US"/>
           </a:p>
@@ -1985,7 +8439,7 @@
           <a:p>
             <a:fld id="{5BCAD085-E8A6-8845-BD4E-CB4CCA059FC4}" type="datetimeFigureOut">
               <a:rPr lang="en-US" smtClean="0"/>
-              <a:t>1/27/13</a:t>
+              <a:t>2/23/26</a:t>
             </a:fld>
             <a:endParaRPr lang="en-US"/>
           </a:p>
@@ -2027,7 +8481,7 @@
           <a:p>
             <a:fld id="{C1FF6DA9-008F-8B48-92A6-B652298478BF}" type="slidenum">
               <a:rPr lang="en-US" smtClean="0"/>
-              <a:t>‹#›</a:t>
+              <a:t>‹Nº›</a:t>
             </a:fld>
             <a:endParaRPr lang="en-US"/>
           </a:p>
@@ -2088,10 +8542,9 @@
           </a:lstStyle>
           <a:p>
             <a:r>
-              <a:rPr lang="en-US" smtClean="0"/>
+              <a:rPr lang="en-US"/>
               <a:t>Click to edit Master title style</a:t>
             </a:r>
-            <a:endParaRPr lang="en-US"/>
           </a:p>
         </p:txBody>
       </p:sp>
@@ -2145,38 +8598,37 @@
           <a:p>
             <a:pPr lvl="0"/>
             <a:r>
-              <a:rPr lang="en-US" smtClean="0"/>
+              <a:rPr lang="en-US"/>
               <a:t>Click to edit Master text styles</a:t>
             </a:r>
           </a:p>
           <a:p>
             <a:pPr lvl="1"/>
             <a:r>
-              <a:rPr lang="en-US" smtClean="0"/>
+              <a:rPr lang="en-US"/>
               <a:t>Second level</a:t>
             </a:r>
           </a:p>
           <a:p>
             <a:pPr lvl="2"/>
             <a:r>
-              <a:rPr lang="en-US" smtClean="0"/>
+              <a:rPr lang="en-US"/>
               <a:t>Third level</a:t>
             </a:r>
           </a:p>
           <a:p>
             <a:pPr lvl="3"/>
             <a:r>
-              <a:rPr lang="en-US" smtClean="0"/>
+              <a:rPr lang="en-US"/>
               <a:t>Fourth level</a:t>
             </a:r>
           </a:p>
           <a:p>
             <a:pPr lvl="4"/>
             <a:r>
-              <a:rPr lang="en-US" smtClean="0"/>
+              <a:rPr lang="en-US"/>
               <a:t>Fifth level</a:t>
             </a:r>
-            <a:endParaRPr lang="en-US"/>
           </a:p>
         </p:txBody>
       </p:sp>
@@ -2239,7 +8691,7 @@
           <a:p>
             <a:pPr lvl="0"/>
             <a:r>
-              <a:rPr lang="en-US" smtClean="0"/>
+              <a:rPr lang="en-US"/>
               <a:t>Click to edit Master text styles</a:t>
             </a:r>
           </a:p>
@@ -2262,7 +8714,7 @@
           <a:p>
             <a:fld id="{5BCAD085-E8A6-8845-BD4E-CB4CCA059FC4}" type="datetimeFigureOut">
               <a:rPr lang="en-US" smtClean="0"/>
-              <a:t>1/27/13</a:t>
+              <a:t>2/23/26</a:t>
             </a:fld>
             <a:endParaRPr lang="en-US"/>
           </a:p>
@@ -2304,7 +8756,7 @@
           <a:p>
             <a:fld id="{C1FF6DA9-008F-8B48-92A6-B652298478BF}" type="slidenum">
               <a:rPr lang="en-US" smtClean="0"/>
-              <a:t>‹#›</a:t>
+              <a:t>‹Nº›</a:t>
             </a:fld>
             <a:endParaRPr lang="en-US"/>
           </a:p>
@@ -2365,10 +8817,9 @@
           </a:lstStyle>
           <a:p>
             <a:r>
-              <a:rPr lang="en-US" smtClean="0"/>
+              <a:rPr lang="en-US"/>
               <a:t>Click to edit Master title style</a:t>
             </a:r>
-            <a:endParaRPr lang="en-US"/>
           </a:p>
         </p:txBody>
       </p:sp>
@@ -2492,7 +8943,7 @@
           <a:p>
             <a:pPr lvl="0"/>
             <a:r>
-              <a:rPr lang="en-US" smtClean="0"/>
+              <a:rPr lang="en-US"/>
               <a:t>Click to edit Master text styles</a:t>
             </a:r>
           </a:p>
@@ -2515,7 +8966,7 @@
           <a:p>
             <a:fld id="{5BCAD085-E8A6-8845-BD4E-CB4CCA059FC4}" type="datetimeFigureOut">
               <a:rPr lang="en-US" smtClean="0"/>
-              <a:t>1/27/13</a:t>
+              <a:t>2/23/26</a:t>
             </a:fld>
             <a:endParaRPr lang="en-US"/>
           </a:p>
@@ -2557,7 +9008,7 @@
           <a:p>
             <a:fld id="{C1FF6DA9-008F-8B48-92A6-B652298478BF}" type="slidenum">
               <a:rPr lang="en-US" smtClean="0"/>
-              <a:t>‹#›</a:t>
+              <a:t>‹Nº›</a:t>
             </a:fld>
             <a:endParaRPr lang="en-US"/>
           </a:p>
@@ -2624,10 +9075,9 @@
           <a:lstStyle/>
           <a:p>
             <a:r>
-              <a:rPr lang="en-US" smtClean="0"/>
+              <a:rPr lang="en-US"/>
               <a:t>Click to edit Master title style</a:t>
             </a:r>
-            <a:endParaRPr lang="en-US"/>
           </a:p>
         </p:txBody>
       </p:sp>
@@ -2658,38 +9108,37 @@
           <a:p>
             <a:pPr lvl="0"/>
             <a:r>
-              <a:rPr lang="en-US" smtClean="0"/>
+              <a:rPr lang="en-US"/>
               <a:t>Click to edit Master text styles</a:t>
             </a:r>
           </a:p>
           <a:p>
             <a:pPr lvl="1"/>
             <a:r>
-              <a:rPr lang="en-US" smtClean="0"/>
+              <a:rPr lang="en-US"/>
               <a:t>Second level</a:t>
             </a:r>
           </a:p>
           <a:p>
             <a:pPr lvl="2"/>
             <a:r>
-              <a:rPr lang="en-US" smtClean="0"/>
+              <a:rPr lang="en-US"/>
               <a:t>Third level</a:t>
             </a:r>
           </a:p>
           <a:p>
             <a:pPr lvl="3"/>
             <a:r>
-              <a:rPr lang="en-US" smtClean="0"/>
+              <a:rPr lang="en-US"/>
               <a:t>Fourth level</a:t>
             </a:r>
           </a:p>
           <a:p>
             <a:pPr lvl="4"/>
             <a:r>
-              <a:rPr lang="en-US" smtClean="0"/>
+              <a:rPr lang="en-US"/>
               <a:t>Fifth level</a:t>
             </a:r>
-            <a:endParaRPr lang="en-US"/>
           </a:p>
         </p:txBody>
       </p:sp>
@@ -2728,7 +9177,7 @@
           <a:p>
             <a:fld id="{5BCAD085-E8A6-8845-BD4E-CB4CCA059FC4}" type="datetimeFigureOut">
               <a:rPr lang="en-US" smtClean="0"/>
-              <a:t>1/27/13</a:t>
+              <a:t>2/23/26</a:t>
             </a:fld>
             <a:endParaRPr lang="en-US"/>
           </a:p>
@@ -2806,7 +9255,7 @@
           <a:p>
             <a:fld id="{C1FF6DA9-008F-8B48-92A6-B652298478BF}" type="slidenum">
               <a:rPr lang="en-US" smtClean="0"/>
-              <a:t>‹#›</a:t>
+              <a:t>‹Nº›</a:t>
             </a:fld>
             <a:endParaRPr lang="en-US"/>
           </a:p>
@@ -3087,7 +9536,7 @@
 </file>
 
 <file path=ppt/slides/slide1.xml><?xml version="1.0" encoding="utf-8"?>
-<p:sld xmlns:a="http://schemas.openxmlformats.org/drawingml/2006/main" xmlns:p="http://schemas.openxmlformats.org/presentationml/2006/main" xmlns:r="http://schemas.openxmlformats.org/officeDocument/2006/relationships">
+<p:sld xmlns:a="http://schemas.openxmlformats.org/drawingml/2006/main" xmlns:r="http://schemas.openxmlformats.org/officeDocument/2006/relationships" xmlns:p="http://schemas.openxmlformats.org/presentationml/2006/main">
   <p:cSld>
     <p:bg>
       <p:bgPr>
@@ -3103,7 +9552,14 @@
         <p:cNvGrpSpPr/>
         <p:nvPr/>
       </p:nvGrpSpPr>
-      <p:grpSpPr/>
+      <p:grpSpPr>
+        <a:xfrm>
+          <a:off x="0" y="0"/>
+          <a:ext cx="0" cy="0"/>
+          <a:chOff x="0" y="0"/>
+          <a:chExt cx="0" cy="0"/>
+        </a:xfrm>
+      </p:grpSpPr>
       <p:sp>
         <p:nvSpPr>
           <p:cNvPr id="2" name="Rectangle 1"/>
@@ -3144,6 +9600,7 @@
           <a:lstStyle/>
           <a:p>
             <a:pPr algn="ctr"/>
+            <a:endParaRPr/>
           </a:p>
         </p:txBody>
       </p:sp>
@@ -3187,6 +9644,7 @@
           <a:lstStyle/>
           <a:p>
             <a:pPr algn="ctr"/>
+            <a:endParaRPr/>
           </a:p>
         </p:txBody>
       </p:sp>
@@ -3342,6 +9800,7 @@
           <a:lstStyle/>
           <a:p>
             <a:pPr algn="ctr"/>
+            <a:endParaRPr/>
           </a:p>
         </p:txBody>
       </p:sp>
@@ -3421,6 +9880,7 @@
           <a:lstStyle/>
           <a:p>
             <a:pPr algn="ctr"/>
+            <a:endParaRPr/>
           </a:p>
         </p:txBody>
       </p:sp>
@@ -3536,6 +9996,7 @@
           <a:lstStyle/>
           <a:p>
             <a:pPr algn="ctr"/>
+            <a:endParaRPr/>
           </a:p>
         </p:txBody>
       </p:sp>
@@ -3651,6 +10112,7 @@
           <a:lstStyle/>
           <a:p>
             <a:pPr algn="ctr"/>
+            <a:endParaRPr/>
           </a:p>
         </p:txBody>
       </p:sp>
@@ -3735,7 +10197,7 @@
 </file>
 
 <file path=ppt/slides/slide2.xml><?xml version="1.0" encoding="utf-8"?>
-<p:sld xmlns:a="http://schemas.openxmlformats.org/drawingml/2006/main" xmlns:p="http://schemas.openxmlformats.org/presentationml/2006/main" xmlns:r="http://schemas.openxmlformats.org/officeDocument/2006/relationships">
+<p:sld xmlns:a="http://schemas.openxmlformats.org/drawingml/2006/main" xmlns:r="http://schemas.openxmlformats.org/officeDocument/2006/relationships" xmlns:p="http://schemas.openxmlformats.org/presentationml/2006/main">
   <p:cSld>
     <p:bg>
       <p:bgPr>
@@ -3751,7 +10213,14 @@
         <p:cNvGrpSpPr/>
         <p:nvPr/>
       </p:nvGrpSpPr>
-      <p:grpSpPr/>
+      <p:grpSpPr>
+        <a:xfrm>
+          <a:off x="0" y="0"/>
+          <a:ext cx="0" cy="0"/>
+          <a:chOff x="0" y="0"/>
+          <a:chExt cx="0" cy="0"/>
+        </a:xfrm>
+      </p:grpSpPr>
       <p:sp>
         <p:nvSpPr>
           <p:cNvPr id="2" name="Rectangle 1"/>
@@ -3792,6 +10261,7 @@
           <a:lstStyle/>
           <a:p>
             <a:pPr algn="ctr"/>
+            <a:endParaRPr/>
           </a:p>
         </p:txBody>
       </p:sp>
@@ -3909,6 +10379,7 @@
           <a:lstStyle/>
           <a:p>
             <a:pPr algn="ctr"/>
+            <a:endParaRPr/>
           </a:p>
         </p:txBody>
       </p:sp>
@@ -3952,6 +10423,7 @@
           <a:lstStyle/>
           <a:p>
             <a:pPr algn="ctr"/>
+            <a:endParaRPr/>
           </a:p>
         </p:txBody>
       </p:sp>
@@ -4139,6 +10611,7 @@
           <a:lstStyle/>
           <a:p>
             <a:pPr algn="ctr"/>
+            <a:endParaRPr/>
           </a:p>
         </p:txBody>
       </p:sp>
@@ -4256,6 +10729,7 @@
           <a:lstStyle/>
           <a:p>
             <a:pPr algn="ctr"/>
+            <a:endParaRPr/>
           </a:p>
         </p:txBody>
       </p:sp>
@@ -4299,6 +10773,7 @@
           <a:lstStyle/>
           <a:p>
             <a:pPr algn="ctr"/>
+            <a:endParaRPr/>
           </a:p>
         </p:txBody>
       </p:sp>
@@ -4486,6 +10961,7 @@
           <a:lstStyle/>
           <a:p>
             <a:pPr algn="ctr"/>
+            <a:endParaRPr/>
           </a:p>
         </p:txBody>
       </p:sp>
@@ -4603,6 +11079,7 @@
           <a:lstStyle/>
           <a:p>
             <a:pPr algn="ctr"/>
+            <a:endParaRPr/>
           </a:p>
         </p:txBody>
       </p:sp>
@@ -4646,6 +11123,7 @@
           <a:lstStyle/>
           <a:p>
             <a:pPr algn="ctr"/>
+            <a:endParaRPr/>
           </a:p>
         </p:txBody>
       </p:sp>
@@ -4833,6 +11311,7 @@
           <a:lstStyle/>
           <a:p>
             <a:pPr algn="ctr"/>
+            <a:endParaRPr/>
           </a:p>
         </p:txBody>
       </p:sp>
@@ -4953,7 +11432,7 @@
 </file>
 
 <file path=ppt/slides/slide3.xml><?xml version="1.0" encoding="utf-8"?>
-<p:sld xmlns:a="http://schemas.openxmlformats.org/drawingml/2006/main" xmlns:p="http://schemas.openxmlformats.org/presentationml/2006/main" xmlns:r="http://schemas.openxmlformats.org/officeDocument/2006/relationships">
+<p:sld xmlns:a="http://schemas.openxmlformats.org/drawingml/2006/main" xmlns:r="http://schemas.openxmlformats.org/officeDocument/2006/relationships" xmlns:p="http://schemas.openxmlformats.org/presentationml/2006/main">
   <p:cSld>
     <p:bg>
       <p:bgPr>
@@ -4969,7 +11448,14 @@
         <p:cNvGrpSpPr/>
         <p:nvPr/>
       </p:nvGrpSpPr>
-      <p:grpSpPr/>
+      <p:grpSpPr>
+        <a:xfrm>
+          <a:off x="0" y="0"/>
+          <a:ext cx="0" cy="0"/>
+          <a:chOff x="0" y="0"/>
+          <a:chExt cx="0" cy="0"/>
+        </a:xfrm>
+      </p:grpSpPr>
       <p:sp>
         <p:nvSpPr>
           <p:cNvPr id="2" name="Rectangle 1"/>
@@ -5010,6 +11496,7 @@
           <a:lstStyle/>
           <a:p>
             <a:pPr algn="ctr"/>
+            <a:endParaRPr/>
           </a:p>
         </p:txBody>
       </p:sp>
@@ -5094,7 +11581,7 @@
         <p:spPr>
           <a:xfrm>
             <a:off x="548640" y="1444752"/>
-            <a:ext cx="5394960" cy="2286000"/>
+            <a:ext cx="4775200" cy="1728216"/>
           </a:xfrm>
           <a:prstGeom prst="rect">
             <a:avLst/>
@@ -5127,6 +11614,7 @@
           <a:lstStyle/>
           <a:p>
             <a:pPr algn="ctr"/>
+            <a:endParaRPr/>
           </a:p>
         </p:txBody>
       </p:sp>
@@ -5139,7 +11627,7 @@
         <p:spPr>
           <a:xfrm>
             <a:off x="548640" y="1444752"/>
-            <a:ext cx="5394960" cy="54864"/>
+            <a:ext cx="4775200" cy="54864"/>
           </a:xfrm>
           <a:prstGeom prst="rect">
             <a:avLst/>
@@ -5170,6 +11658,7 @@
           <a:lstStyle/>
           <a:p>
             <a:pPr algn="ctr"/>
+            <a:endParaRPr/>
           </a:p>
         </p:txBody>
       </p:sp>
@@ -5290,7 +11779,7 @@
         <p:spPr>
           <a:xfrm>
             <a:off x="6400800" y="1444752"/>
-            <a:ext cx="5394960" cy="2286000"/>
+            <a:ext cx="4937760" cy="1728216"/>
           </a:xfrm>
           <a:prstGeom prst="rect">
             <a:avLst/>
@@ -5323,6 +11812,7 @@
           <a:lstStyle/>
           <a:p>
             <a:pPr algn="ctr"/>
+            <a:endParaRPr/>
           </a:p>
         </p:txBody>
       </p:sp>
@@ -5335,7 +11825,7 @@
         <p:spPr>
           <a:xfrm>
             <a:off x="6400800" y="1444752"/>
-            <a:ext cx="5394960" cy="54864"/>
+            <a:ext cx="4937760" cy="45719"/>
           </a:xfrm>
           <a:prstGeom prst="rect">
             <a:avLst/>
@@ -5366,6 +11856,7 @@
           <a:lstStyle/>
           <a:p>
             <a:pPr algn="ctr"/>
+            <a:endParaRPr/>
           </a:p>
         </p:txBody>
       </p:sp>
@@ -5485,7 +11976,7 @@
         </p:nvSpPr>
         <p:spPr>
           <a:xfrm>
-            <a:off x="548640" y="3886200"/>
+            <a:off x="548640" y="3447288"/>
             <a:ext cx="11064240" cy="658368"/>
           </a:xfrm>
           <a:prstGeom prst="rect">
@@ -5517,6 +12008,7 @@
           <a:lstStyle/>
           <a:p>
             <a:pPr algn="ctr"/>
+            <a:endParaRPr/>
           </a:p>
         </p:txBody>
       </p:sp>
@@ -5528,7 +12020,7 @@
         </p:nvSpPr>
         <p:spPr>
           <a:xfrm>
-            <a:off x="822960" y="4005072"/>
+            <a:off x="1173480" y="3602736"/>
             <a:ext cx="10515600" cy="438912"/>
           </a:xfrm>
           <a:prstGeom prst="rect">
@@ -5551,7 +12043,72 @@
               </a:defRPr>
             </a:pPr>
             <a:r>
-              <a:t>Insight: En Health &amp; Beauty, los hombres gastan un 65% más que las mujeres — la mayor brecha de todo el dataset.</a:t>
+              <a:rPr dirty="0"/>
+              <a:t>Insight: En Health &amp; Beauty, </a:t>
+            </a:r>
+            <a:r>
+              <a:rPr dirty="0" err="1"/>
+              <a:t>los</a:t>
+            </a:r>
+            <a:r>
+              <a:rPr dirty="0"/>
+              <a:t> hombres </a:t>
+            </a:r>
+            <a:r>
+              <a:rPr dirty="0" err="1"/>
+              <a:t>gastan</a:t>
+            </a:r>
+            <a:r>
+              <a:rPr dirty="0"/>
+              <a:t> un 65% </a:t>
+            </a:r>
+            <a:r>
+              <a:rPr dirty="0" err="1"/>
+              <a:t>más</a:t>
+            </a:r>
+            <a:r>
+              <a:rPr dirty="0"/>
+              <a:t> </a:t>
+            </a:r>
+            <a:r>
+              <a:rPr dirty="0" err="1"/>
+              <a:t>que</a:t>
+            </a:r>
+            <a:r>
+              <a:rPr dirty="0"/>
+              <a:t> las </a:t>
+            </a:r>
+            <a:r>
+              <a:rPr dirty="0" err="1"/>
+              <a:t>mujeres</a:t>
+            </a:r>
+            <a:r>
+              <a:rPr dirty="0"/>
+              <a:t> — la mayor </a:t>
+            </a:r>
+            <a:r>
+              <a:rPr dirty="0" err="1"/>
+              <a:t>brecha</a:t>
+            </a:r>
+            <a:r>
+              <a:rPr dirty="0"/>
+              <a:t> de </a:t>
+            </a:r>
+            <a:r>
+              <a:rPr dirty="0" err="1"/>
+              <a:t>todo</a:t>
+            </a:r>
+            <a:r>
+              <a:rPr dirty="0"/>
+              <a:t> </a:t>
+            </a:r>
+            <a:r>
+              <a:rPr dirty="0" err="1"/>
+              <a:t>el</a:t>
+            </a:r>
+            <a:r>
+              <a:rPr dirty="0"/>
+              <a:t> dataset.</a:t>
             </a:r>
           </a:p>
         </p:txBody>
@@ -5564,8 +12121,8 @@
         </p:nvSpPr>
         <p:spPr>
           <a:xfrm>
-            <a:off x="548640" y="4663440"/>
-            <a:ext cx="11064240" cy="1600200"/>
+            <a:off x="548640" y="4261104"/>
+            <a:ext cx="11064240" cy="2002536"/>
           </a:xfrm>
           <a:prstGeom prst="roundRect">
             <a:avLst/>
@@ -5605,9 +12162,7 @@
                 <a:latin typeface="Calibri"/>
               </a:defRPr>
             </a:pPr>
-            <a:r>
-              <a:t>Insertar gráfico: ventas y ticket promedio por género</a:t>
-            </a:r>
+            <a:endParaRPr dirty="0"/>
           </a:p>
         </p:txBody>
       </p:sp>
@@ -5647,6 +12202,36 @@
           </a:p>
         </p:txBody>
       </p:sp>
+      <p:graphicFrame>
+        <p:nvGraphicFramePr>
+          <p:cNvPr id="19" name="Gráfico 18">
+            <a:extLst>
+              <a:ext uri="{FF2B5EF4-FFF2-40B4-BE49-F238E27FC236}">
+                <a16:creationId xmlns:a16="http://schemas.microsoft.com/office/drawing/2014/main" id="{4CFB5E2D-E3B2-BF8D-09B4-26FC330596DF}"/>
+              </a:ext>
+            </a:extLst>
+          </p:cNvPr>
+          <p:cNvGraphicFramePr>
+            <a:graphicFrameLocks/>
+          </p:cNvGraphicFramePr>
+          <p:nvPr>
+            <p:extLst>
+              <p:ext uri="{D42A27DB-BD31-4B8C-83A1-F6EECF244321}">
+                <p14:modId xmlns:p14="http://schemas.microsoft.com/office/powerpoint/2010/main" val="2522206501"/>
+              </p:ext>
+            </p:extLst>
+          </p:nvPr>
+        </p:nvGraphicFramePr>
+        <p:xfrm>
+          <a:off x="777240" y="4379976"/>
+          <a:ext cx="10515601" cy="1808735"/>
+        </p:xfrm>
+        <a:graphic>
+          <a:graphicData uri="http://schemas.openxmlformats.org/drawingml/2006/chart">
+            <c:chart xmlns:c="http://schemas.openxmlformats.org/drawingml/2006/chart" xmlns:r="http://schemas.openxmlformats.org/officeDocument/2006/relationships" r:id="rId2"/>
+          </a:graphicData>
+        </a:graphic>
+      </p:graphicFrame>
     </p:spTree>
   </p:cSld>
   <p:clrMapOvr>
@@ -5656,7 +12241,7 @@
 </file>
 
 <file path=ppt/slides/slide4.xml><?xml version="1.0" encoding="utf-8"?>
-<p:sld xmlns:a="http://schemas.openxmlformats.org/drawingml/2006/main" xmlns:p="http://schemas.openxmlformats.org/presentationml/2006/main" xmlns:r="http://schemas.openxmlformats.org/officeDocument/2006/relationships">
+<p:sld xmlns:a="http://schemas.openxmlformats.org/drawingml/2006/main" xmlns:r="http://schemas.openxmlformats.org/officeDocument/2006/relationships" xmlns:p="http://schemas.openxmlformats.org/presentationml/2006/main">
   <p:cSld>
     <p:bg>
       <p:bgPr>
@@ -5672,7 +12257,14 @@
         <p:cNvGrpSpPr/>
         <p:nvPr/>
       </p:nvGrpSpPr>
-      <p:grpSpPr/>
+      <p:grpSpPr>
+        <a:xfrm>
+          <a:off x="0" y="0"/>
+          <a:ext cx="0" cy="0"/>
+          <a:chOff x="0" y="0"/>
+          <a:chExt cx="0" cy="0"/>
+        </a:xfrm>
+      </p:grpSpPr>
       <p:sp>
         <p:nvSpPr>
           <p:cNvPr id="2" name="Rectangle 1"/>
@@ -5713,6 +12305,7 @@
           <a:lstStyle/>
           <a:p>
             <a:pPr algn="ctr"/>
+            <a:endParaRPr/>
           </a:p>
         </p:txBody>
       </p:sp>
@@ -5837,9 +12430,7 @@
                 <a:latin typeface="Calibri"/>
               </a:defRPr>
             </a:pPr>
-            <a:r>
-              <a:t>Insertar gráfico: ventas y transacciones por hora (10h – 20h)</a:t>
-            </a:r>
+            <a:endParaRPr dirty="0"/>
           </a:p>
         </p:txBody>
       </p:sp>
@@ -5883,6 +12474,7 @@
           <a:lstStyle/>
           <a:p>
             <a:pPr algn="ctr"/>
+            <a:endParaRPr/>
           </a:p>
         </p:txBody>
       </p:sp>
@@ -5926,6 +12518,7 @@
           <a:lstStyle/>
           <a:p>
             <a:pPr algn="ctr"/>
+            <a:endParaRPr/>
           </a:p>
         </p:txBody>
       </p:sp>
@@ -6077,6 +12670,7 @@
           <a:lstStyle/>
           <a:p>
             <a:pPr algn="ctr"/>
+            <a:endParaRPr/>
           </a:p>
         </p:txBody>
       </p:sp>
@@ -6192,6 +12786,7 @@
           <a:lstStyle/>
           <a:p>
             <a:pPr algn="ctr"/>
+            <a:endParaRPr/>
           </a:p>
         </p:txBody>
       </p:sp>
@@ -6267,6 +12862,36 @@
           </a:p>
         </p:txBody>
       </p:sp>
+      <p:graphicFrame>
+        <p:nvGraphicFramePr>
+          <p:cNvPr id="21" name="Gráfico 20">
+            <a:extLst>
+              <a:ext uri="{FF2B5EF4-FFF2-40B4-BE49-F238E27FC236}">
+                <a16:creationId xmlns:a16="http://schemas.microsoft.com/office/drawing/2014/main" id="{CCDEDE4C-FCB6-E82B-83EF-D4AA2CAE147F}"/>
+              </a:ext>
+            </a:extLst>
+          </p:cNvPr>
+          <p:cNvGraphicFramePr>
+            <a:graphicFrameLocks/>
+          </p:cNvGraphicFramePr>
+          <p:nvPr>
+            <p:extLst>
+              <p:ext uri="{D42A27DB-BD31-4B8C-83A1-F6EECF244321}">
+                <p14:modId xmlns:p14="http://schemas.microsoft.com/office/powerpoint/2010/main" val="3451778801"/>
+              </p:ext>
+            </p:extLst>
+          </p:nvPr>
+        </p:nvGraphicFramePr>
+        <p:xfrm>
+          <a:off x="617220" y="1834769"/>
+          <a:ext cx="7132320" cy="3828542"/>
+        </p:xfrm>
+        <a:graphic>
+          <a:graphicData uri="http://schemas.openxmlformats.org/drawingml/2006/chart">
+            <c:chart xmlns:c="http://schemas.openxmlformats.org/drawingml/2006/chart" xmlns:r="http://schemas.openxmlformats.org/officeDocument/2006/relationships" r:id="rId2"/>
+          </a:graphicData>
+        </a:graphic>
+      </p:graphicFrame>
     </p:spTree>
   </p:cSld>
   <p:clrMapOvr>
@@ -6276,7 +12901,7 @@
 </file>
 
 <file path=ppt/slides/slide5.xml><?xml version="1.0" encoding="utf-8"?>
-<p:sld xmlns:a="http://schemas.openxmlformats.org/drawingml/2006/main" xmlns:p="http://schemas.openxmlformats.org/presentationml/2006/main" xmlns:r="http://schemas.openxmlformats.org/officeDocument/2006/relationships">
+<p:sld xmlns:a="http://schemas.openxmlformats.org/drawingml/2006/main" xmlns:r="http://schemas.openxmlformats.org/officeDocument/2006/relationships" xmlns:p="http://schemas.openxmlformats.org/presentationml/2006/main">
   <p:cSld>
     <p:bg>
       <p:bgPr>
@@ -6292,7 +12917,14 @@
         <p:cNvGrpSpPr/>
         <p:nvPr/>
       </p:nvGrpSpPr>
-      <p:grpSpPr/>
+      <p:grpSpPr>
+        <a:xfrm>
+          <a:off x="0" y="0"/>
+          <a:ext cx="0" cy="0"/>
+          <a:chOff x="0" y="0"/>
+          <a:chExt cx="0" cy="0"/>
+        </a:xfrm>
+      </p:grpSpPr>
       <p:sp>
         <p:nvSpPr>
           <p:cNvPr id="2" name="Rectangle 1"/>
@@ -6333,6 +12965,7 @@
           <a:lstStyle/>
           <a:p>
             <a:pPr algn="ctr"/>
+            <a:endParaRPr/>
           </a:p>
         </p:txBody>
       </p:sp>
@@ -6457,9 +13090,7 @@
                 <a:latin typeface="Calibri"/>
               </a:defRPr>
             </a:pPr>
-            <a:r>
-              <a:t>Insertar gráfico: ingresos por línea de producto (barras horizontales)</a:t>
-            </a:r>
+            <a:endParaRPr dirty="0"/>
           </a:p>
         </p:txBody>
       </p:sp>
@@ -6505,6 +13136,7 @@
           <a:lstStyle/>
           <a:p>
             <a:pPr algn="ctr"/>
+            <a:endParaRPr/>
           </a:p>
         </p:txBody>
       </p:sp>
@@ -6586,6 +13218,7 @@
           <a:lstStyle/>
           <a:p>
             <a:pPr algn="ctr"/>
+            <a:endParaRPr/>
           </a:p>
         </p:txBody>
       </p:sp>
@@ -6739,6 +13372,7 @@
           <a:lstStyle/>
           <a:p>
             <a:pPr algn="ctr"/>
+            <a:endParaRPr/>
           </a:p>
         </p:txBody>
       </p:sp>
@@ -6892,6 +13526,7 @@
           <a:lstStyle/>
           <a:p>
             <a:pPr algn="ctr"/>
+            <a:endParaRPr/>
           </a:p>
         </p:txBody>
       </p:sp>
@@ -7045,6 +13680,7 @@
           <a:lstStyle/>
           <a:p>
             <a:pPr algn="ctr"/>
+            <a:endParaRPr/>
           </a:p>
         </p:txBody>
       </p:sp>
@@ -7198,6 +13834,7 @@
           <a:lstStyle/>
           <a:p>
             <a:pPr algn="ctr"/>
+            <a:endParaRPr/>
           </a:p>
         </p:txBody>
       </p:sp>
@@ -7351,6 +13988,7 @@
           <a:lstStyle/>
           <a:p>
             <a:pPr algn="ctr"/>
+            <a:endParaRPr/>
           </a:p>
         </p:txBody>
       </p:sp>
@@ -7498,6 +14136,36 @@
           </a:p>
         </p:txBody>
       </p:sp>
+      <p:graphicFrame>
+        <p:nvGraphicFramePr>
+          <p:cNvPr id="33" name="Gráfico 32">
+            <a:extLst>
+              <a:ext uri="{FF2B5EF4-FFF2-40B4-BE49-F238E27FC236}">
+                <a16:creationId xmlns:a16="http://schemas.microsoft.com/office/drawing/2014/main" id="{7AE74936-928D-0D9F-7ECC-62D1BEA3207C}"/>
+              </a:ext>
+            </a:extLst>
+          </p:cNvPr>
+          <p:cNvGraphicFramePr>
+            <a:graphicFrameLocks/>
+          </p:cNvGraphicFramePr>
+          <p:nvPr>
+            <p:extLst>
+              <p:ext uri="{D42A27DB-BD31-4B8C-83A1-F6EECF244321}">
+                <p14:modId xmlns:p14="http://schemas.microsoft.com/office/powerpoint/2010/main" val="3264857689"/>
+              </p:ext>
+            </p:extLst>
+          </p:nvPr>
+        </p:nvGraphicFramePr>
+        <p:xfrm>
+          <a:off x="617219" y="1491548"/>
+          <a:ext cx="7239000" cy="4476750"/>
+        </p:xfrm>
+        <a:graphic>
+          <a:graphicData uri="http://schemas.openxmlformats.org/drawingml/2006/chart">
+            <c:chart xmlns:c="http://schemas.openxmlformats.org/drawingml/2006/chart" xmlns:r="http://schemas.openxmlformats.org/officeDocument/2006/relationships" r:id="rId2"/>
+          </a:graphicData>
+        </a:graphic>
+      </p:graphicFrame>
     </p:spTree>
   </p:cSld>
   <p:clrMapOvr>
@@ -7507,7 +14175,7 @@
 </file>
 
 <file path=ppt/slides/slide6.xml><?xml version="1.0" encoding="utf-8"?>
-<p:sld xmlns:a="http://schemas.openxmlformats.org/drawingml/2006/main" xmlns:p="http://schemas.openxmlformats.org/presentationml/2006/main" xmlns:r="http://schemas.openxmlformats.org/officeDocument/2006/relationships">
+<p:sld xmlns:a="http://schemas.openxmlformats.org/drawingml/2006/main" xmlns:r="http://schemas.openxmlformats.org/officeDocument/2006/relationships" xmlns:p="http://schemas.openxmlformats.org/presentationml/2006/main">
   <p:cSld>
     <p:bg>
       <p:bgPr>
@@ -7523,7 +14191,14 @@
         <p:cNvGrpSpPr/>
         <p:nvPr/>
       </p:nvGrpSpPr>
-      <p:grpSpPr/>
+      <p:grpSpPr>
+        <a:xfrm>
+          <a:off x="0" y="0"/>
+          <a:ext cx="0" cy="0"/>
+          <a:chOff x="0" y="0"/>
+          <a:chExt cx="0" cy="0"/>
+        </a:xfrm>
+      </p:grpSpPr>
       <p:sp>
         <p:nvSpPr>
           <p:cNvPr id="2" name="Rectangle 1"/>
@@ -7564,6 +14239,7 @@
           <a:lstStyle/>
           <a:p>
             <a:pPr algn="ctr"/>
+            <a:endParaRPr/>
           </a:p>
         </p:txBody>
       </p:sp>
@@ -7689,7 +14365,68 @@
               </a:defRPr>
             </a:pPr>
             <a:r>
-              <a:t>Insertar gráfico: % por género en cada línea de producto (barras 100% apiladas)</a:t>
+              <a:rPr lang="es-419" dirty="0"/>
+              <a:t>Grafico </a:t>
+            </a:r>
+            <a:r>
+              <a:rPr dirty="0"/>
+              <a:t>% </a:t>
+            </a:r>
+            <a:r>
+              <a:rPr dirty="0" err="1"/>
+              <a:t>por</a:t>
+            </a:r>
+            <a:r>
+              <a:rPr dirty="0"/>
+              <a:t> </a:t>
+            </a:r>
+            <a:r>
+              <a:rPr dirty="0" err="1"/>
+              <a:t>género</a:t>
+            </a:r>
+            <a:r>
+              <a:rPr dirty="0"/>
+              <a:t> </a:t>
+            </a:r>
+            <a:r>
+              <a:rPr dirty="0" err="1"/>
+              <a:t>en</a:t>
+            </a:r>
+            <a:r>
+              <a:rPr dirty="0"/>
+              <a:t> </a:t>
+            </a:r>
+            <a:r>
+              <a:rPr dirty="0" err="1"/>
+              <a:t>cada</a:t>
+            </a:r>
+            <a:r>
+              <a:rPr dirty="0"/>
+              <a:t> </a:t>
+            </a:r>
+            <a:r>
+              <a:rPr dirty="0" err="1"/>
+              <a:t>línea</a:t>
+            </a:r>
+            <a:r>
+              <a:rPr dirty="0"/>
+              <a:t> de </a:t>
+            </a:r>
+            <a:r>
+              <a:rPr dirty="0" err="1"/>
+              <a:t>producto</a:t>
+            </a:r>
+            <a:r>
+              <a:rPr dirty="0"/>
+              <a:t> (barras 100% </a:t>
+            </a:r>
+            <a:r>
+              <a:rPr dirty="0" err="1"/>
+              <a:t>apiladas</a:t>
+            </a:r>
+            <a:r>
+              <a:rPr dirty="0"/>
+              <a:t>)</a:t>
             </a:r>
           </a:p>
         </p:txBody>
@@ -7736,6 +14473,7 @@
           <a:lstStyle/>
           <a:p>
             <a:pPr algn="ctr"/>
+            <a:endParaRPr/>
           </a:p>
         </p:txBody>
       </p:sp>
@@ -7779,6 +14517,7 @@
           <a:lstStyle/>
           <a:p>
             <a:pPr algn="ctr"/>
+            <a:endParaRPr/>
           </a:p>
         </p:txBody>
       </p:sp>
@@ -7932,6 +14671,7 @@
           <a:lstStyle/>
           <a:p>
             <a:pPr algn="ctr"/>
+            <a:endParaRPr/>
           </a:p>
         </p:txBody>
       </p:sp>
@@ -7975,6 +14715,7 @@
           <a:lstStyle/>
           <a:p>
             <a:pPr algn="ctr"/>
+            <a:endParaRPr/>
           </a:p>
         </p:txBody>
       </p:sp>
@@ -8128,6 +14869,7 @@
           <a:lstStyle/>
           <a:p>
             <a:pPr algn="ctr"/>
+            <a:endParaRPr/>
           </a:p>
         </p:txBody>
       </p:sp>
@@ -8171,6 +14913,7 @@
           <a:lstStyle/>
           <a:p>
             <a:pPr algn="ctr"/>
+            <a:endParaRPr/>
           </a:p>
         </p:txBody>
       </p:sp>
@@ -8324,6 +15067,7 @@
           <a:lstStyle/>
           <a:p>
             <a:pPr algn="ctr"/>
+            <a:endParaRPr/>
           </a:p>
         </p:txBody>
       </p:sp>
@@ -8367,6 +15111,7 @@
           <a:lstStyle/>
           <a:p>
             <a:pPr algn="ctr"/>
+            <a:endParaRPr/>
           </a:p>
         </p:txBody>
       </p:sp>
@@ -8518,6 +15263,7 @@
           <a:lstStyle/>
           <a:p>
             <a:pPr algn="ctr"/>
+            <a:endParaRPr/>
           </a:p>
         </p:txBody>
       </p:sp>
@@ -8566,7 +15312,7 @@
 </file>
 
 <file path=ppt/slides/slide7.xml><?xml version="1.0" encoding="utf-8"?>
-<p:sld xmlns:a="http://schemas.openxmlformats.org/drawingml/2006/main" xmlns:p="http://schemas.openxmlformats.org/presentationml/2006/main" xmlns:r="http://schemas.openxmlformats.org/officeDocument/2006/relationships">
+<p:sld xmlns:a="http://schemas.openxmlformats.org/drawingml/2006/main" xmlns:r="http://schemas.openxmlformats.org/officeDocument/2006/relationships" xmlns:p="http://schemas.openxmlformats.org/presentationml/2006/main">
   <p:cSld>
     <p:bg>
       <p:bgPr>
@@ -8582,7 +15328,14 @@
         <p:cNvGrpSpPr/>
         <p:nvPr/>
       </p:nvGrpSpPr>
-      <p:grpSpPr/>
+      <p:grpSpPr>
+        <a:xfrm>
+          <a:off x="0" y="0"/>
+          <a:ext cx="0" cy="0"/>
+          <a:chOff x="0" y="0"/>
+          <a:chExt cx="0" cy="0"/>
+        </a:xfrm>
+      </p:grpSpPr>
       <p:sp>
         <p:nvSpPr>
           <p:cNvPr id="2" name="Rectangle 1"/>
@@ -8623,6 +15376,7 @@
           <a:lstStyle/>
           <a:p>
             <a:pPr algn="ctr"/>
+            <a:endParaRPr/>
           </a:p>
         </p:txBody>
       </p:sp>
@@ -8740,6 +15494,7 @@
           <a:lstStyle/>
           <a:p>
             <a:pPr algn="ctr"/>
+            <a:endParaRPr/>
           </a:p>
         </p:txBody>
       </p:sp>
@@ -8783,6 +15538,7 @@
           <a:lstStyle/>
           <a:p>
             <a:pPr algn="ctr"/>
+            <a:endParaRPr/>
           </a:p>
         </p:txBody>
       </p:sp>
@@ -8972,6 +15728,7 @@
           <a:lstStyle/>
           <a:p>
             <a:pPr algn="ctr"/>
+            <a:endParaRPr/>
           </a:p>
         </p:txBody>
       </p:sp>
@@ -9015,6 +15772,7 @@
           <a:lstStyle/>
           <a:p>
             <a:pPr algn="ctr"/>
+            <a:endParaRPr/>
           </a:p>
         </p:txBody>
       </p:sp>
@@ -9204,6 +15962,7 @@
           <a:lstStyle/>
           <a:p>
             <a:pPr algn="ctr"/>
+            <a:endParaRPr/>
           </a:p>
         </p:txBody>
       </p:sp>
@@ -9247,6 +16006,7 @@
           <a:lstStyle/>
           <a:p>
             <a:pPr algn="ctr"/>
+            <a:endParaRPr/>
           </a:p>
         </p:txBody>
       </p:sp>
@@ -9444,8 +16204,38 @@
               </a:defRPr>
             </a:pPr>
             <a:r>
-              <a:t>Insertar gráfico: ventas y transacciones por sucursal</a:t>
-            </a:r>
+              <a:rPr lang="es-419" dirty="0"/>
+              <a:t>Grafico </a:t>
+            </a:r>
+            <a:r>
+              <a:rPr dirty="0" err="1"/>
+              <a:t>ventas</a:t>
+            </a:r>
+            <a:r>
+              <a:rPr dirty="0"/>
+              <a:t> y </a:t>
+            </a:r>
+            <a:r>
+              <a:rPr dirty="0" err="1"/>
+              <a:t>transacciones</a:t>
+            </a:r>
+            <a:r>
+              <a:rPr dirty="0"/>
+              <a:t> </a:t>
+            </a:r>
+            <a:r>
+              <a:rPr dirty="0" err="1"/>
+              <a:t>por</a:t>
+            </a:r>
+            <a:r>
+              <a:rPr dirty="0"/>
+              <a:t> </a:t>
+            </a:r>
+            <a:r>
+              <a:rPr dirty="0" err="1"/>
+              <a:t>sucursal</a:t>
+            </a:r>
+            <a:endParaRPr dirty="0"/>
           </a:p>
         </p:txBody>
       </p:sp>
@@ -9494,7 +16284,7 @@
 </file>
 
 <file path=ppt/slides/slide8.xml><?xml version="1.0" encoding="utf-8"?>
-<p:sld xmlns:a="http://schemas.openxmlformats.org/drawingml/2006/main" xmlns:p="http://schemas.openxmlformats.org/presentationml/2006/main" xmlns:r="http://schemas.openxmlformats.org/officeDocument/2006/relationships">
+<p:sld xmlns:a="http://schemas.openxmlformats.org/drawingml/2006/main" xmlns:r="http://schemas.openxmlformats.org/officeDocument/2006/relationships" xmlns:p="http://schemas.openxmlformats.org/presentationml/2006/main">
   <p:cSld>
     <p:bg>
       <p:bgPr>
@@ -9510,7 +16300,14 @@
         <p:cNvGrpSpPr/>
         <p:nvPr/>
       </p:nvGrpSpPr>
-      <p:grpSpPr/>
+      <p:grpSpPr>
+        <a:xfrm>
+          <a:off x="0" y="0"/>
+          <a:ext cx="0" cy="0"/>
+          <a:chOff x="0" y="0"/>
+          <a:chExt cx="0" cy="0"/>
+        </a:xfrm>
+      </p:grpSpPr>
       <p:sp>
         <p:nvSpPr>
           <p:cNvPr id="2" name="Rectangle 1"/>
@@ -9551,6 +16348,7 @@
           <a:lstStyle/>
           <a:p>
             <a:pPr algn="ctr"/>
+            <a:endParaRPr/>
           </a:p>
         </p:txBody>
       </p:sp>
@@ -9668,6 +16466,7 @@
           <a:lstStyle/>
           <a:p>
             <a:pPr algn="ctr"/>
+            <a:endParaRPr/>
           </a:p>
         </p:txBody>
       </p:sp>
@@ -9711,6 +16510,7 @@
           <a:lstStyle/>
           <a:p>
             <a:pPr algn="ctr"/>
+            <a:endParaRPr/>
           </a:p>
         </p:txBody>
       </p:sp>
@@ -9723,7 +16523,7 @@
         <p:spPr>
           <a:xfrm>
             <a:off x="640080" y="1508760"/>
-            <a:ext cx="3383280" cy="320040"/>
+            <a:ext cx="3383280" cy="400110"/>
           </a:xfrm>
           <a:prstGeom prst="rect">
             <a:avLst/>
@@ -9745,43 +16545,8 @@
               </a:defRPr>
             </a:pPr>
             <a:r>
+              <a:rPr sz="2000" dirty="0"/>
               <a:t>MES 1 · ENERO</a:t>
-            </a:r>
-          </a:p>
-        </p:txBody>
-      </p:sp>
-      <p:sp>
-        <p:nvSpPr>
-          <p:cNvPr id="8" name="TextBox 7"/>
-          <p:cNvSpPr txBox="1"/>
-          <p:nvPr/>
-        </p:nvSpPr>
-        <p:spPr>
-          <a:xfrm>
-            <a:off x="640080" y="1828800"/>
-            <a:ext cx="3383280" cy="457200"/>
-          </a:xfrm>
-          <a:prstGeom prst="rect">
-            <a:avLst/>
-          </a:prstGeom>
-          <a:noFill/>
-        </p:spPr>
-        <p:txBody>
-          <a:bodyPr wrap="square">
-            <a:spAutoFit/>
-          </a:bodyPr>
-          <a:lstStyle/>
-          <a:p>
-            <a:pPr algn="l">
-              <a:defRPr sz="1800" b="1" i="0">
-                <a:solidFill>
-                  <a:srgbClr val="FFFFFF"/>
-                </a:solidFill>
-                <a:latin typeface="Calibri"/>
-              </a:defRPr>
-            </a:pPr>
-            <a:r>
-              <a:t>Sabores y Familia</a:t>
             </a:r>
           </a:p>
         </p:txBody>
@@ -10116,6 +16881,7 @@
           <a:lstStyle/>
           <a:p>
             <a:pPr algn="ctr"/>
+            <a:endParaRPr/>
           </a:p>
         </p:txBody>
       </p:sp>
@@ -10159,6 +16925,7 @@
           <a:lstStyle/>
           <a:p>
             <a:pPr algn="ctr"/>
+            <a:endParaRPr/>
           </a:p>
         </p:txBody>
       </p:sp>
@@ -10171,7 +16938,7 @@
         <p:spPr>
           <a:xfrm>
             <a:off x="4526280" y="1508760"/>
-            <a:ext cx="3383280" cy="320040"/>
+            <a:ext cx="3383280" cy="400110"/>
           </a:xfrm>
           <a:prstGeom prst="rect">
             <a:avLst/>
@@ -10193,43 +16960,8 @@
               </a:defRPr>
             </a:pPr>
             <a:r>
+              <a:rPr sz="2000" dirty="0"/>
               <a:t>MES 2 · FEBRERO</a:t>
-            </a:r>
-          </a:p>
-        </p:txBody>
-      </p:sp>
-      <p:sp>
-        <p:nvSpPr>
-          <p:cNvPr id="20" name="TextBox 19"/>
-          <p:cNvSpPr txBox="1"/>
-          <p:nvPr/>
-        </p:nvSpPr>
-        <p:spPr>
-          <a:xfrm>
-            <a:off x="4526280" y="1828800"/>
-            <a:ext cx="3383280" cy="457200"/>
-          </a:xfrm>
-          <a:prstGeom prst="rect">
-            <a:avLst/>
-          </a:prstGeom>
-          <a:noFill/>
-        </p:spPr>
-        <p:txBody>
-          <a:bodyPr wrap="square">
-            <a:spAutoFit/>
-          </a:bodyPr>
-          <a:lstStyle/>
-          <a:p>
-            <a:pPr algn="l">
-              <a:defRPr sz="1800" b="1" i="0">
-                <a:solidFill>
-                  <a:srgbClr val="FFFFFF"/>
-                </a:solidFill>
-                <a:latin typeface="Calibri"/>
-              </a:defRPr>
-            </a:pPr>
-            <a:r>
-              <a:t>Bienestar para Él</a:t>
             </a:r>
           </a:p>
         </p:txBody>
@@ -10564,6 +17296,7 @@
           <a:lstStyle/>
           <a:p>
             <a:pPr algn="ctr"/>
+            <a:endParaRPr/>
           </a:p>
         </p:txBody>
       </p:sp>
@@ -10607,6 +17340,7 @@
           <a:lstStyle/>
           <a:p>
             <a:pPr algn="ctr"/>
+            <a:endParaRPr/>
           </a:p>
         </p:txBody>
       </p:sp>
@@ -10619,7 +17353,7 @@
         <p:spPr>
           <a:xfrm>
             <a:off x="8412480" y="1508760"/>
-            <a:ext cx="3383280" cy="320040"/>
+            <a:ext cx="3383280" cy="400110"/>
           </a:xfrm>
           <a:prstGeom prst="rect">
             <a:avLst/>
@@ -10641,43 +17375,8 @@
               </a:defRPr>
             </a:pPr>
             <a:r>
+              <a:rPr sz="2000" dirty="0"/>
               <a:t>MES 3 · MARZO</a:t>
-            </a:r>
-          </a:p>
-        </p:txBody>
-      </p:sp>
-      <p:sp>
-        <p:nvSpPr>
-          <p:cNvPr id="32" name="TextBox 31"/>
-          <p:cNvSpPr txBox="1"/>
-          <p:nvPr/>
-        </p:nvSpPr>
-        <p:spPr>
-          <a:xfrm>
-            <a:off x="8412480" y="1828800"/>
-            <a:ext cx="3383280" cy="457200"/>
-          </a:xfrm>
-          <a:prstGeom prst="rect">
-            <a:avLst/>
-          </a:prstGeom>
-          <a:noFill/>
-        </p:spPr>
-        <p:txBody>
-          <a:bodyPr wrap="square">
-            <a:spAutoFit/>
-          </a:bodyPr>
-          <a:lstStyle/>
-          <a:p>
-            <a:pPr algn="l">
-              <a:defRPr sz="1800" b="1" i="0">
-                <a:solidFill>
-                  <a:srgbClr val="193223"/>
-                </a:solidFill>
-                <a:latin typeface="Calibri"/>
-              </a:defRPr>
-            </a:pPr>
-            <a:r>
-              <a:t>Hogar y Estilo</a:t>
             </a:r>
           </a:p>
         </p:txBody>
@@ -11015,7 +17714,7 @@
 </file>
 
 <file path=ppt/slides/slide9.xml><?xml version="1.0" encoding="utf-8"?>
-<p:sld xmlns:a="http://schemas.openxmlformats.org/drawingml/2006/main" xmlns:p="http://schemas.openxmlformats.org/presentationml/2006/main" xmlns:r="http://schemas.openxmlformats.org/officeDocument/2006/relationships">
+<p:sld xmlns:a="http://schemas.openxmlformats.org/drawingml/2006/main" xmlns:r="http://schemas.openxmlformats.org/officeDocument/2006/relationships" xmlns:p="http://schemas.openxmlformats.org/presentationml/2006/main">
   <p:cSld>
     <p:bg>
       <p:bgPr>
@@ -11031,7 +17730,14 @@
         <p:cNvGrpSpPr/>
         <p:nvPr/>
       </p:nvGrpSpPr>
-      <p:grpSpPr/>
+      <p:grpSpPr>
+        <a:xfrm>
+          <a:off x="0" y="0"/>
+          <a:ext cx="0" cy="0"/>
+          <a:chOff x="0" y="0"/>
+          <a:chExt cx="0" cy="0"/>
+        </a:xfrm>
+      </p:grpSpPr>
       <p:sp>
         <p:nvSpPr>
           <p:cNvPr id="2" name="Rectangle 1"/>
@@ -11072,6 +17778,7 @@
           <a:lstStyle/>
           <a:p>
             <a:pPr algn="ctr"/>
+            <a:endParaRPr/>
           </a:p>
         </p:txBody>
       </p:sp>
@@ -11115,6 +17822,7 @@
           <a:lstStyle/>
           <a:p>
             <a:pPr algn="ctr"/>
+            <a:endParaRPr/>
           </a:p>
         </p:txBody>
       </p:sp>
@@ -11230,6 +17938,7 @@
           <a:lstStyle/>
           <a:p>
             <a:pPr algn="ctr"/>
+            <a:endParaRPr/>
           </a:p>
         </p:txBody>
       </p:sp>
@@ -11273,6 +17982,7 @@
           <a:lstStyle/>
           <a:p>
             <a:pPr algn="ctr"/>
+            <a:endParaRPr/>
           </a:p>
         </p:txBody>
       </p:sp>
@@ -11352,6 +18062,7 @@
           <a:lstStyle/>
           <a:p>
             <a:pPr algn="ctr"/>
+            <a:endParaRPr/>
           </a:p>
         </p:txBody>
       </p:sp>
@@ -11431,6 +18142,7 @@
           <a:lstStyle/>
           <a:p>
             <a:pPr algn="ctr"/>
+            <a:endParaRPr/>
           </a:p>
         </p:txBody>
       </p:sp>
@@ -11510,6 +18222,7 @@
           <a:lstStyle/>
           <a:p>
             <a:pPr algn="ctr"/>
+            <a:endParaRPr/>
           </a:p>
         </p:txBody>
       </p:sp>
@@ -11589,6 +18302,7 @@
           <a:lstStyle/>
           <a:p>
             <a:pPr algn="ctr"/>
+            <a:endParaRPr/>
           </a:p>
         </p:txBody>
       </p:sp>

--- a/Taller/Archivos notables/Desafio3_Presentacion_v3.pptx
+++ b/Taller/Archivos notables/Desafio3_Presentacion_v3.pptx
@@ -4895,6 +4895,1968 @@
 </c:chartSpace>
 </file>
 
+<file path=ppt/charts/chart4.xml><?xml version="1.0" encoding="utf-8"?>
+<c:chartSpace xmlns:c="http://schemas.openxmlformats.org/drawingml/2006/chart" xmlns:a="http://schemas.openxmlformats.org/drawingml/2006/main" xmlns:r="http://schemas.openxmlformats.org/officeDocument/2006/relationships" xmlns:c16r2="http://schemas.microsoft.com/office/drawing/2015/06/chart">
+  <c:date1904 val="0"/>
+  <c:lang val="es-ES"/>
+  <c:roundedCorners val="0"/>
+  <mc:AlternateContent xmlns:mc="http://schemas.openxmlformats.org/markup-compatibility/2006">
+    <mc:Choice xmlns:c14="http://schemas.microsoft.com/office/drawing/2007/8/2/chart" Requires="c14">
+      <c14:style val="102"/>
+    </mc:Choice>
+    <mc:Fallback>
+      <c:style val="2"/>
+    </mc:Fallback>
+  </mc:AlternateContent>
+  <c:pivotSource>
+    <c:name>[Supermarket Sales Dataset v1.0.xlsx]4!TablaDinámica2</c:name>
+    <c:fmtId val="6"/>
+  </c:pivotSource>
+  <c:chart>
+    <c:autoTitleDeleted val="0"/>
+    <c:pivotFmts>
+      <c:pivotFmt>
+        <c:idx val="0"/>
+        <c:spPr>
+          <a:solidFill>
+            <a:schemeClr val="accent1"/>
+          </a:solidFill>
+          <a:ln>
+            <a:noFill/>
+          </a:ln>
+          <a:effectLst/>
+        </c:spPr>
+        <c:marker>
+          <c:symbol val="none"/>
+        </c:marker>
+        <c:dLbl>
+          <c:idx val="0"/>
+          <c:spPr>
+            <a:noFill/>
+            <a:ln>
+              <a:noFill/>
+            </a:ln>
+            <a:effectLst/>
+          </c:spPr>
+          <c:txPr>
+            <a:bodyPr rot="0" spcFirstLastPara="1" vertOverflow="ellipsis" vert="horz" wrap="square" lIns="38100" tIns="19050" rIns="38100" bIns="19050" anchor="ctr" anchorCtr="1">
+              <a:spAutoFit/>
+            </a:bodyPr>
+            <a:lstStyle/>
+            <a:p>
+              <a:pPr>
+                <a:defRPr sz="900" b="0" i="0" u="none" strike="noStrike" kern="1200" baseline="0">
+                  <a:solidFill>
+                    <a:schemeClr val="tx1">
+                      <a:lumMod val="75000"/>
+                      <a:lumOff val="25000"/>
+                    </a:schemeClr>
+                  </a:solidFill>
+                  <a:latin typeface="+mn-lt"/>
+                  <a:ea typeface="+mn-ea"/>
+                  <a:cs typeface="+mn-cs"/>
+                </a:defRPr>
+              </a:pPr>
+              <a:endParaRPr lang="es-UY"/>
+            </a:p>
+          </c:txPr>
+          <c:showLegendKey val="0"/>
+          <c:showVal val="0"/>
+          <c:showCatName val="0"/>
+          <c:showSerName val="0"/>
+          <c:showPercent val="0"/>
+          <c:showBubbleSize val="0"/>
+          <c:extLst>
+            <c:ext xmlns:c15="http://schemas.microsoft.com/office/drawing/2012/chart" uri="{CE6537A1-D6FC-4f65-9D91-7224C49458BB}"/>
+          </c:extLst>
+        </c:dLbl>
+      </c:pivotFmt>
+      <c:pivotFmt>
+        <c:idx val="1"/>
+        <c:spPr>
+          <a:solidFill>
+            <a:schemeClr val="accent1"/>
+          </a:solidFill>
+          <a:ln>
+            <a:noFill/>
+          </a:ln>
+          <a:effectLst/>
+        </c:spPr>
+        <c:marker>
+          <c:symbol val="none"/>
+        </c:marker>
+        <c:dLbl>
+          <c:idx val="0"/>
+          <c:spPr>
+            <a:noFill/>
+            <a:ln>
+              <a:noFill/>
+            </a:ln>
+            <a:effectLst/>
+          </c:spPr>
+          <c:txPr>
+            <a:bodyPr rot="0" spcFirstLastPara="1" vertOverflow="ellipsis" vert="horz" wrap="square" lIns="38100" tIns="19050" rIns="38100" bIns="19050" anchor="ctr" anchorCtr="1">
+              <a:spAutoFit/>
+            </a:bodyPr>
+            <a:lstStyle/>
+            <a:p>
+              <a:pPr>
+                <a:defRPr sz="900" b="0" i="0" u="none" strike="noStrike" kern="1200" baseline="0">
+                  <a:solidFill>
+                    <a:schemeClr val="tx1">
+                      <a:lumMod val="75000"/>
+                      <a:lumOff val="25000"/>
+                    </a:schemeClr>
+                  </a:solidFill>
+                  <a:latin typeface="+mn-lt"/>
+                  <a:ea typeface="+mn-ea"/>
+                  <a:cs typeface="+mn-cs"/>
+                </a:defRPr>
+              </a:pPr>
+              <a:endParaRPr lang="es-UY"/>
+            </a:p>
+          </c:txPr>
+          <c:showLegendKey val="0"/>
+          <c:showVal val="0"/>
+          <c:showCatName val="0"/>
+          <c:showSerName val="0"/>
+          <c:showPercent val="0"/>
+          <c:showBubbleSize val="0"/>
+          <c:extLst>
+            <c:ext xmlns:c15="http://schemas.microsoft.com/office/drawing/2012/chart" uri="{CE6537A1-D6FC-4f65-9D91-7224C49458BB}"/>
+          </c:extLst>
+        </c:dLbl>
+      </c:pivotFmt>
+      <c:pivotFmt>
+        <c:idx val="2"/>
+        <c:spPr>
+          <a:solidFill>
+            <a:schemeClr val="accent1"/>
+          </a:solidFill>
+          <a:ln>
+            <a:noFill/>
+          </a:ln>
+          <a:effectLst/>
+        </c:spPr>
+        <c:marker>
+          <c:symbol val="none"/>
+        </c:marker>
+        <c:dLbl>
+          <c:idx val="0"/>
+          <c:spPr>
+            <a:noFill/>
+            <a:ln>
+              <a:noFill/>
+            </a:ln>
+            <a:effectLst/>
+          </c:spPr>
+          <c:txPr>
+            <a:bodyPr rot="0" spcFirstLastPara="1" vertOverflow="ellipsis" vert="horz" wrap="square" lIns="38100" tIns="19050" rIns="38100" bIns="19050" anchor="ctr" anchorCtr="1">
+              <a:spAutoFit/>
+            </a:bodyPr>
+            <a:lstStyle/>
+            <a:p>
+              <a:pPr>
+                <a:defRPr sz="900" b="0" i="0" u="none" strike="noStrike" kern="1200" baseline="0">
+                  <a:solidFill>
+                    <a:schemeClr val="tx1">
+                      <a:lumMod val="75000"/>
+                      <a:lumOff val="25000"/>
+                    </a:schemeClr>
+                  </a:solidFill>
+                  <a:latin typeface="+mn-lt"/>
+                  <a:ea typeface="+mn-ea"/>
+                  <a:cs typeface="+mn-cs"/>
+                </a:defRPr>
+              </a:pPr>
+              <a:endParaRPr lang="es-UY"/>
+            </a:p>
+          </c:txPr>
+          <c:showLegendKey val="0"/>
+          <c:showVal val="0"/>
+          <c:showCatName val="0"/>
+          <c:showSerName val="0"/>
+          <c:showPercent val="0"/>
+          <c:showBubbleSize val="0"/>
+          <c:extLst>
+            <c:ext xmlns:c15="http://schemas.microsoft.com/office/drawing/2012/chart" uri="{CE6537A1-D6FC-4f65-9D91-7224C49458BB}"/>
+          </c:extLst>
+        </c:dLbl>
+      </c:pivotFmt>
+      <c:pivotFmt>
+        <c:idx val="3"/>
+        <c:spPr>
+          <a:solidFill>
+            <a:schemeClr val="accent1"/>
+          </a:solidFill>
+          <a:ln>
+            <a:noFill/>
+          </a:ln>
+          <a:effectLst/>
+        </c:spPr>
+        <c:marker>
+          <c:symbol val="none"/>
+        </c:marker>
+        <c:dLbl>
+          <c:idx val="0"/>
+          <c:spPr>
+            <a:noFill/>
+            <a:ln>
+              <a:noFill/>
+            </a:ln>
+            <a:effectLst/>
+          </c:spPr>
+          <c:txPr>
+            <a:bodyPr rot="0" spcFirstLastPara="1" vertOverflow="ellipsis" vert="horz" wrap="square" lIns="38100" tIns="19050" rIns="38100" bIns="19050" anchor="ctr" anchorCtr="1">
+              <a:spAutoFit/>
+            </a:bodyPr>
+            <a:lstStyle/>
+            <a:p>
+              <a:pPr>
+                <a:defRPr sz="900" b="0" i="0" u="none" strike="noStrike" kern="1200" baseline="0">
+                  <a:solidFill>
+                    <a:schemeClr val="tx1">
+                      <a:lumMod val="75000"/>
+                      <a:lumOff val="25000"/>
+                    </a:schemeClr>
+                  </a:solidFill>
+                  <a:latin typeface="+mn-lt"/>
+                  <a:ea typeface="+mn-ea"/>
+                  <a:cs typeface="+mn-cs"/>
+                </a:defRPr>
+              </a:pPr>
+              <a:endParaRPr lang="es-UY"/>
+            </a:p>
+          </c:txPr>
+          <c:showLegendKey val="0"/>
+          <c:showVal val="0"/>
+          <c:showCatName val="0"/>
+          <c:showSerName val="0"/>
+          <c:showPercent val="0"/>
+          <c:showBubbleSize val="0"/>
+          <c:extLst>
+            <c:ext xmlns:c15="http://schemas.microsoft.com/office/drawing/2012/chart" uri="{CE6537A1-D6FC-4f65-9D91-7224C49458BB}"/>
+          </c:extLst>
+        </c:dLbl>
+      </c:pivotFmt>
+      <c:pivotFmt>
+        <c:idx val="4"/>
+        <c:spPr>
+          <a:solidFill>
+            <a:schemeClr val="accent1"/>
+          </a:solidFill>
+          <a:ln>
+            <a:noFill/>
+          </a:ln>
+          <a:effectLst/>
+        </c:spPr>
+        <c:marker>
+          <c:symbol val="none"/>
+        </c:marker>
+        <c:dLbl>
+          <c:idx val="0"/>
+          <c:spPr>
+            <a:noFill/>
+            <a:ln>
+              <a:noFill/>
+            </a:ln>
+            <a:effectLst/>
+          </c:spPr>
+          <c:txPr>
+            <a:bodyPr rot="0" spcFirstLastPara="1" vertOverflow="ellipsis" vert="horz" wrap="square" lIns="38100" tIns="19050" rIns="38100" bIns="19050" anchor="ctr" anchorCtr="1">
+              <a:spAutoFit/>
+            </a:bodyPr>
+            <a:lstStyle/>
+            <a:p>
+              <a:pPr>
+                <a:defRPr sz="900" b="0" i="0" u="none" strike="noStrike" kern="1200" baseline="0">
+                  <a:solidFill>
+                    <a:schemeClr val="tx1">
+                      <a:lumMod val="75000"/>
+                      <a:lumOff val="25000"/>
+                    </a:schemeClr>
+                  </a:solidFill>
+                  <a:latin typeface="+mn-lt"/>
+                  <a:ea typeface="+mn-ea"/>
+                  <a:cs typeface="+mn-cs"/>
+                </a:defRPr>
+              </a:pPr>
+              <a:endParaRPr lang="es-UY"/>
+            </a:p>
+          </c:txPr>
+          <c:showLegendKey val="0"/>
+          <c:showVal val="0"/>
+          <c:showCatName val="0"/>
+          <c:showSerName val="0"/>
+          <c:showPercent val="0"/>
+          <c:showBubbleSize val="0"/>
+          <c:extLst>
+            <c:ext xmlns:c15="http://schemas.microsoft.com/office/drawing/2012/chart" uri="{CE6537A1-D6FC-4f65-9D91-7224C49458BB}"/>
+          </c:extLst>
+        </c:dLbl>
+      </c:pivotFmt>
+      <c:pivotFmt>
+        <c:idx val="5"/>
+        <c:spPr>
+          <a:solidFill>
+            <a:schemeClr val="accent1"/>
+          </a:solidFill>
+          <a:ln>
+            <a:noFill/>
+          </a:ln>
+          <a:effectLst/>
+        </c:spPr>
+        <c:marker>
+          <c:symbol val="none"/>
+        </c:marker>
+        <c:dLbl>
+          <c:idx val="0"/>
+          <c:spPr>
+            <a:noFill/>
+            <a:ln>
+              <a:noFill/>
+            </a:ln>
+            <a:effectLst/>
+          </c:spPr>
+          <c:txPr>
+            <a:bodyPr rot="0" spcFirstLastPara="1" vertOverflow="ellipsis" vert="horz" wrap="square" lIns="38100" tIns="19050" rIns="38100" bIns="19050" anchor="ctr" anchorCtr="1">
+              <a:spAutoFit/>
+            </a:bodyPr>
+            <a:lstStyle/>
+            <a:p>
+              <a:pPr>
+                <a:defRPr sz="900" b="0" i="0" u="none" strike="noStrike" kern="1200" baseline="0">
+                  <a:solidFill>
+                    <a:schemeClr val="tx1">
+                      <a:lumMod val="75000"/>
+                      <a:lumOff val="25000"/>
+                    </a:schemeClr>
+                  </a:solidFill>
+                  <a:latin typeface="+mn-lt"/>
+                  <a:ea typeface="+mn-ea"/>
+                  <a:cs typeface="+mn-cs"/>
+                </a:defRPr>
+              </a:pPr>
+              <a:endParaRPr lang="es-UY"/>
+            </a:p>
+          </c:txPr>
+          <c:showLegendKey val="0"/>
+          <c:showVal val="0"/>
+          <c:showCatName val="0"/>
+          <c:showSerName val="0"/>
+          <c:showPercent val="0"/>
+          <c:showBubbleSize val="0"/>
+          <c:extLst>
+            <c:ext xmlns:c15="http://schemas.microsoft.com/office/drawing/2012/chart" uri="{CE6537A1-D6FC-4f65-9D91-7224C49458BB}"/>
+          </c:extLst>
+        </c:dLbl>
+      </c:pivotFmt>
+      <c:pivotFmt>
+        <c:idx val="6"/>
+        <c:spPr>
+          <a:solidFill>
+            <a:schemeClr val="accent1"/>
+          </a:solidFill>
+          <a:ln>
+            <a:noFill/>
+          </a:ln>
+          <a:effectLst/>
+        </c:spPr>
+        <c:marker>
+          <c:symbol val="none"/>
+        </c:marker>
+        <c:dLbl>
+          <c:idx val="0"/>
+          <c:showLegendKey val="0"/>
+          <c:showVal val="0"/>
+          <c:showCatName val="0"/>
+          <c:showSerName val="0"/>
+          <c:showPercent val="0"/>
+          <c:showBubbleSize val="0"/>
+          <c:extLst>
+            <c:ext xmlns:c15="http://schemas.microsoft.com/office/drawing/2012/chart" uri="{CE6537A1-D6FC-4f65-9D91-7224C49458BB}"/>
+          </c:extLst>
+        </c:dLbl>
+      </c:pivotFmt>
+      <c:pivotFmt>
+        <c:idx val="7"/>
+        <c:spPr>
+          <a:solidFill>
+            <a:schemeClr val="accent1"/>
+          </a:solidFill>
+          <a:ln>
+            <a:noFill/>
+          </a:ln>
+          <a:effectLst/>
+        </c:spPr>
+        <c:marker>
+          <c:symbol val="none"/>
+        </c:marker>
+        <c:dLbl>
+          <c:idx val="0"/>
+          <c:spPr>
+            <a:noFill/>
+            <a:ln>
+              <a:noFill/>
+            </a:ln>
+            <a:effectLst/>
+          </c:spPr>
+          <c:txPr>
+            <a:bodyPr rot="0" spcFirstLastPara="1" vertOverflow="ellipsis" vert="horz" wrap="square" lIns="38100" tIns="19050" rIns="38100" bIns="19050" anchor="ctr" anchorCtr="1">
+              <a:spAutoFit/>
+            </a:bodyPr>
+            <a:lstStyle/>
+            <a:p>
+              <a:pPr>
+                <a:defRPr sz="900" b="0" i="0" u="none" strike="noStrike" kern="1200" baseline="0">
+                  <a:solidFill>
+                    <a:schemeClr val="tx1">
+                      <a:lumMod val="75000"/>
+                      <a:lumOff val="25000"/>
+                    </a:schemeClr>
+                  </a:solidFill>
+                  <a:latin typeface="+mn-lt"/>
+                  <a:ea typeface="+mn-ea"/>
+                  <a:cs typeface="+mn-cs"/>
+                </a:defRPr>
+              </a:pPr>
+              <a:endParaRPr lang="es-UY"/>
+            </a:p>
+          </c:txPr>
+          <c:showLegendKey val="0"/>
+          <c:showVal val="0"/>
+          <c:showCatName val="0"/>
+          <c:showSerName val="0"/>
+          <c:showPercent val="0"/>
+          <c:showBubbleSize val="0"/>
+          <c:extLst>
+            <c:ext xmlns:c15="http://schemas.microsoft.com/office/drawing/2012/chart" uri="{CE6537A1-D6FC-4f65-9D91-7224C49458BB}"/>
+          </c:extLst>
+        </c:dLbl>
+      </c:pivotFmt>
+      <c:pivotFmt>
+        <c:idx val="8"/>
+        <c:spPr>
+          <a:solidFill>
+            <a:schemeClr val="accent1"/>
+          </a:solidFill>
+          <a:ln>
+            <a:noFill/>
+          </a:ln>
+          <a:effectLst/>
+        </c:spPr>
+        <c:marker>
+          <c:symbol val="none"/>
+        </c:marker>
+        <c:dLbl>
+          <c:idx val="0"/>
+          <c:showLegendKey val="0"/>
+          <c:showVal val="0"/>
+          <c:showCatName val="0"/>
+          <c:showSerName val="0"/>
+          <c:showPercent val="0"/>
+          <c:showBubbleSize val="0"/>
+          <c:extLst>
+            <c:ext xmlns:c15="http://schemas.microsoft.com/office/drawing/2012/chart" uri="{CE6537A1-D6FC-4f65-9D91-7224C49458BB}"/>
+          </c:extLst>
+        </c:dLbl>
+      </c:pivotFmt>
+      <c:pivotFmt>
+        <c:idx val="9"/>
+        <c:spPr>
+          <a:solidFill>
+            <a:schemeClr val="accent1"/>
+          </a:solidFill>
+          <a:ln>
+            <a:noFill/>
+          </a:ln>
+          <a:effectLst/>
+        </c:spPr>
+        <c:marker>
+          <c:symbol val="none"/>
+        </c:marker>
+        <c:dLbl>
+          <c:idx val="0"/>
+          <c:showLegendKey val="0"/>
+          <c:showVal val="0"/>
+          <c:showCatName val="0"/>
+          <c:showSerName val="0"/>
+          <c:showPercent val="0"/>
+          <c:showBubbleSize val="0"/>
+          <c:extLst>
+            <c:ext xmlns:c15="http://schemas.microsoft.com/office/drawing/2012/chart" uri="{CE6537A1-D6FC-4f65-9D91-7224C49458BB}"/>
+          </c:extLst>
+        </c:dLbl>
+      </c:pivotFmt>
+      <c:pivotFmt>
+        <c:idx val="10"/>
+        <c:spPr>
+          <a:solidFill>
+            <a:schemeClr val="accent1"/>
+          </a:solidFill>
+          <a:ln>
+            <a:noFill/>
+          </a:ln>
+          <a:effectLst/>
+        </c:spPr>
+        <c:marker>
+          <c:symbol val="none"/>
+        </c:marker>
+        <c:dLbl>
+          <c:idx val="0"/>
+          <c:showLegendKey val="0"/>
+          <c:showVal val="0"/>
+          <c:showCatName val="0"/>
+          <c:showSerName val="0"/>
+          <c:showPercent val="0"/>
+          <c:showBubbleSize val="0"/>
+          <c:extLst>
+            <c:ext xmlns:c15="http://schemas.microsoft.com/office/drawing/2012/chart" uri="{CE6537A1-D6FC-4f65-9D91-7224C49458BB}"/>
+          </c:extLst>
+        </c:dLbl>
+      </c:pivotFmt>
+      <c:pivotFmt>
+        <c:idx val="11"/>
+        <c:spPr>
+          <a:solidFill>
+            <a:schemeClr val="accent1"/>
+          </a:solidFill>
+          <a:ln>
+            <a:noFill/>
+          </a:ln>
+          <a:effectLst/>
+        </c:spPr>
+        <c:marker>
+          <c:symbol val="none"/>
+        </c:marker>
+        <c:dLbl>
+          <c:idx val="0"/>
+          <c:showLegendKey val="0"/>
+          <c:showVal val="0"/>
+          <c:showCatName val="0"/>
+          <c:showSerName val="0"/>
+          <c:showPercent val="0"/>
+          <c:showBubbleSize val="0"/>
+          <c:extLst>
+            <c:ext xmlns:c15="http://schemas.microsoft.com/office/drawing/2012/chart" uri="{CE6537A1-D6FC-4f65-9D91-7224C49458BB}"/>
+          </c:extLst>
+        </c:dLbl>
+      </c:pivotFmt>
+      <c:pivotFmt>
+        <c:idx val="12"/>
+        <c:spPr>
+          <a:solidFill>
+            <a:schemeClr val="accent1"/>
+          </a:solidFill>
+          <a:ln>
+            <a:noFill/>
+          </a:ln>
+          <a:effectLst/>
+        </c:spPr>
+        <c:marker>
+          <c:symbol val="none"/>
+        </c:marker>
+        <c:dLbl>
+          <c:idx val="0"/>
+          <c:showLegendKey val="0"/>
+          <c:showVal val="0"/>
+          <c:showCatName val="0"/>
+          <c:showSerName val="0"/>
+          <c:showPercent val="0"/>
+          <c:showBubbleSize val="0"/>
+          <c:extLst>
+            <c:ext xmlns:c15="http://schemas.microsoft.com/office/drawing/2012/chart" uri="{CE6537A1-D6FC-4f65-9D91-7224C49458BB}"/>
+          </c:extLst>
+        </c:dLbl>
+      </c:pivotFmt>
+      <c:pivotFmt>
+        <c:idx val="13"/>
+        <c:spPr>
+          <a:solidFill>
+            <a:schemeClr val="accent1"/>
+          </a:solidFill>
+          <a:ln>
+            <a:noFill/>
+          </a:ln>
+          <a:effectLst/>
+        </c:spPr>
+        <c:marker>
+          <c:symbol val="none"/>
+        </c:marker>
+        <c:dLbl>
+          <c:idx val="0"/>
+          <c:showLegendKey val="0"/>
+          <c:showVal val="0"/>
+          <c:showCatName val="0"/>
+          <c:showSerName val="0"/>
+          <c:showPercent val="0"/>
+          <c:showBubbleSize val="0"/>
+          <c:extLst>
+            <c:ext xmlns:c15="http://schemas.microsoft.com/office/drawing/2012/chart" uri="{CE6537A1-D6FC-4f65-9D91-7224C49458BB}"/>
+          </c:extLst>
+        </c:dLbl>
+      </c:pivotFmt>
+      <c:pivotFmt>
+        <c:idx val="14"/>
+        <c:spPr>
+          <a:solidFill>
+            <a:schemeClr val="accent1"/>
+          </a:solidFill>
+          <a:ln>
+            <a:noFill/>
+          </a:ln>
+          <a:effectLst/>
+        </c:spPr>
+        <c:marker>
+          <c:symbol val="none"/>
+        </c:marker>
+        <c:dLbl>
+          <c:idx val="0"/>
+          <c:spPr>
+            <a:noFill/>
+            <a:ln>
+              <a:noFill/>
+            </a:ln>
+            <a:effectLst/>
+          </c:spPr>
+          <c:txPr>
+            <a:bodyPr rot="0" spcFirstLastPara="1" vertOverflow="ellipsis" vert="horz" wrap="square" lIns="38100" tIns="19050" rIns="38100" bIns="19050" anchor="ctr" anchorCtr="1">
+              <a:spAutoFit/>
+            </a:bodyPr>
+            <a:lstStyle/>
+            <a:p>
+              <a:pPr>
+                <a:defRPr sz="900" b="0" i="0" u="none" strike="noStrike" kern="1200" baseline="0">
+                  <a:solidFill>
+                    <a:schemeClr val="tx1">
+                      <a:lumMod val="75000"/>
+                      <a:lumOff val="25000"/>
+                    </a:schemeClr>
+                  </a:solidFill>
+                  <a:latin typeface="+mn-lt"/>
+                  <a:ea typeface="+mn-ea"/>
+                  <a:cs typeface="+mn-cs"/>
+                </a:defRPr>
+              </a:pPr>
+              <a:endParaRPr lang="es-UY"/>
+            </a:p>
+          </c:txPr>
+          <c:showLegendKey val="0"/>
+          <c:showVal val="0"/>
+          <c:showCatName val="0"/>
+          <c:showSerName val="0"/>
+          <c:showPercent val="0"/>
+          <c:showBubbleSize val="0"/>
+          <c:extLst>
+            <c:ext xmlns:c15="http://schemas.microsoft.com/office/drawing/2012/chart" uri="{CE6537A1-D6FC-4f65-9D91-7224C49458BB}"/>
+          </c:extLst>
+        </c:dLbl>
+      </c:pivotFmt>
+      <c:pivotFmt>
+        <c:idx val="15"/>
+        <c:spPr>
+          <a:solidFill>
+            <a:schemeClr val="accent1"/>
+          </a:solidFill>
+          <a:ln>
+            <a:noFill/>
+          </a:ln>
+          <a:effectLst/>
+        </c:spPr>
+        <c:marker>
+          <c:symbol val="none"/>
+        </c:marker>
+        <c:dLbl>
+          <c:idx val="0"/>
+          <c:spPr>
+            <a:noFill/>
+            <a:ln>
+              <a:noFill/>
+            </a:ln>
+            <a:effectLst/>
+          </c:spPr>
+          <c:txPr>
+            <a:bodyPr rot="0" spcFirstLastPara="1" vertOverflow="ellipsis" vert="horz" wrap="square" lIns="38100" tIns="19050" rIns="38100" bIns="19050" anchor="ctr" anchorCtr="1">
+              <a:spAutoFit/>
+            </a:bodyPr>
+            <a:lstStyle/>
+            <a:p>
+              <a:pPr>
+                <a:defRPr sz="900" b="0" i="0" u="none" strike="noStrike" kern="1200" baseline="0">
+                  <a:solidFill>
+                    <a:schemeClr val="tx1">
+                      <a:lumMod val="75000"/>
+                      <a:lumOff val="25000"/>
+                    </a:schemeClr>
+                  </a:solidFill>
+                  <a:latin typeface="+mn-lt"/>
+                  <a:ea typeface="+mn-ea"/>
+                  <a:cs typeface="+mn-cs"/>
+                </a:defRPr>
+              </a:pPr>
+              <a:endParaRPr lang="es-UY"/>
+            </a:p>
+          </c:txPr>
+          <c:showLegendKey val="0"/>
+          <c:showVal val="0"/>
+          <c:showCatName val="0"/>
+          <c:showSerName val="0"/>
+          <c:showPercent val="0"/>
+          <c:showBubbleSize val="0"/>
+          <c:extLst>
+            <c:ext xmlns:c15="http://schemas.microsoft.com/office/drawing/2012/chart" uri="{CE6537A1-D6FC-4f65-9D91-7224C49458BB}"/>
+          </c:extLst>
+        </c:dLbl>
+      </c:pivotFmt>
+      <c:pivotFmt>
+        <c:idx val="16"/>
+        <c:spPr>
+          <a:solidFill>
+            <a:schemeClr val="accent1"/>
+          </a:solidFill>
+          <a:ln>
+            <a:noFill/>
+          </a:ln>
+          <a:effectLst/>
+        </c:spPr>
+        <c:marker>
+          <c:symbol val="none"/>
+        </c:marker>
+        <c:dLbl>
+          <c:idx val="0"/>
+          <c:spPr>
+            <a:noFill/>
+            <a:ln>
+              <a:noFill/>
+            </a:ln>
+            <a:effectLst/>
+          </c:spPr>
+          <c:txPr>
+            <a:bodyPr rot="0" spcFirstLastPara="1" vertOverflow="ellipsis" vert="horz" wrap="square" lIns="38100" tIns="19050" rIns="38100" bIns="19050" anchor="ctr" anchorCtr="1">
+              <a:spAutoFit/>
+            </a:bodyPr>
+            <a:lstStyle/>
+            <a:p>
+              <a:pPr>
+                <a:defRPr sz="900" b="0" i="0" u="none" strike="noStrike" kern="1200" baseline="0">
+                  <a:solidFill>
+                    <a:schemeClr val="tx1">
+                      <a:lumMod val="75000"/>
+                      <a:lumOff val="25000"/>
+                    </a:schemeClr>
+                  </a:solidFill>
+                  <a:latin typeface="+mn-lt"/>
+                  <a:ea typeface="+mn-ea"/>
+                  <a:cs typeface="+mn-cs"/>
+                </a:defRPr>
+              </a:pPr>
+              <a:endParaRPr lang="es-UY"/>
+            </a:p>
+          </c:txPr>
+          <c:showLegendKey val="0"/>
+          <c:showVal val="0"/>
+          <c:showCatName val="0"/>
+          <c:showSerName val="0"/>
+          <c:showPercent val="0"/>
+          <c:showBubbleSize val="0"/>
+          <c:extLst>
+            <c:ext xmlns:c15="http://schemas.microsoft.com/office/drawing/2012/chart" uri="{CE6537A1-D6FC-4f65-9D91-7224C49458BB}"/>
+          </c:extLst>
+        </c:dLbl>
+      </c:pivotFmt>
+      <c:pivotFmt>
+        <c:idx val="17"/>
+        <c:spPr>
+          <a:solidFill>
+            <a:schemeClr val="accent1"/>
+          </a:solidFill>
+          <a:ln>
+            <a:noFill/>
+          </a:ln>
+          <a:effectLst/>
+        </c:spPr>
+        <c:marker>
+          <c:symbol val="none"/>
+        </c:marker>
+        <c:dLbl>
+          <c:idx val="0"/>
+          <c:spPr>
+            <a:noFill/>
+            <a:ln>
+              <a:noFill/>
+            </a:ln>
+            <a:effectLst/>
+          </c:spPr>
+          <c:txPr>
+            <a:bodyPr rot="0" spcFirstLastPara="1" vertOverflow="ellipsis" vert="horz" wrap="square" lIns="38100" tIns="19050" rIns="38100" bIns="19050" anchor="ctr" anchorCtr="1">
+              <a:spAutoFit/>
+            </a:bodyPr>
+            <a:lstStyle/>
+            <a:p>
+              <a:pPr>
+                <a:defRPr sz="900" b="0" i="0" u="none" strike="noStrike" kern="1200" baseline="0">
+                  <a:solidFill>
+                    <a:schemeClr val="tx1">
+                      <a:lumMod val="75000"/>
+                      <a:lumOff val="25000"/>
+                    </a:schemeClr>
+                  </a:solidFill>
+                  <a:latin typeface="+mn-lt"/>
+                  <a:ea typeface="+mn-ea"/>
+                  <a:cs typeface="+mn-cs"/>
+                </a:defRPr>
+              </a:pPr>
+              <a:endParaRPr lang="es-UY"/>
+            </a:p>
+          </c:txPr>
+          <c:showLegendKey val="0"/>
+          <c:showVal val="0"/>
+          <c:showCatName val="0"/>
+          <c:showSerName val="0"/>
+          <c:showPercent val="0"/>
+          <c:showBubbleSize val="0"/>
+          <c:extLst>
+            <c:ext xmlns:c15="http://schemas.microsoft.com/office/drawing/2012/chart" uri="{CE6537A1-D6FC-4f65-9D91-7224C49458BB}"/>
+          </c:extLst>
+        </c:dLbl>
+      </c:pivotFmt>
+      <c:pivotFmt>
+        <c:idx val="18"/>
+        <c:spPr>
+          <a:solidFill>
+            <a:schemeClr val="accent1"/>
+          </a:solidFill>
+          <a:ln>
+            <a:noFill/>
+          </a:ln>
+          <a:effectLst/>
+        </c:spPr>
+        <c:marker>
+          <c:symbol val="none"/>
+        </c:marker>
+        <c:dLbl>
+          <c:idx val="0"/>
+          <c:spPr>
+            <a:noFill/>
+            <a:ln>
+              <a:noFill/>
+            </a:ln>
+            <a:effectLst/>
+          </c:spPr>
+          <c:txPr>
+            <a:bodyPr rot="0" spcFirstLastPara="1" vertOverflow="ellipsis" vert="horz" wrap="square" lIns="38100" tIns="19050" rIns="38100" bIns="19050" anchor="ctr" anchorCtr="1">
+              <a:spAutoFit/>
+            </a:bodyPr>
+            <a:lstStyle/>
+            <a:p>
+              <a:pPr>
+                <a:defRPr sz="900" b="0" i="0" u="none" strike="noStrike" kern="1200" baseline="0">
+                  <a:solidFill>
+                    <a:schemeClr val="tx1">
+                      <a:lumMod val="75000"/>
+                      <a:lumOff val="25000"/>
+                    </a:schemeClr>
+                  </a:solidFill>
+                  <a:latin typeface="+mn-lt"/>
+                  <a:ea typeface="+mn-ea"/>
+                  <a:cs typeface="+mn-cs"/>
+                </a:defRPr>
+              </a:pPr>
+              <a:endParaRPr lang="es-UY"/>
+            </a:p>
+          </c:txPr>
+          <c:showLegendKey val="0"/>
+          <c:showVal val="0"/>
+          <c:showCatName val="0"/>
+          <c:showSerName val="0"/>
+          <c:showPercent val="0"/>
+          <c:showBubbleSize val="0"/>
+          <c:extLst>
+            <c:ext xmlns:c15="http://schemas.microsoft.com/office/drawing/2012/chart" uri="{CE6537A1-D6FC-4f65-9D91-7224C49458BB}"/>
+          </c:extLst>
+        </c:dLbl>
+      </c:pivotFmt>
+      <c:pivotFmt>
+        <c:idx val="19"/>
+        <c:spPr>
+          <a:solidFill>
+            <a:schemeClr val="accent1"/>
+          </a:solidFill>
+          <a:ln>
+            <a:noFill/>
+          </a:ln>
+          <a:effectLst/>
+        </c:spPr>
+        <c:marker>
+          <c:symbol val="none"/>
+        </c:marker>
+        <c:dLbl>
+          <c:idx val="0"/>
+          <c:spPr>
+            <a:noFill/>
+            <a:ln>
+              <a:noFill/>
+            </a:ln>
+            <a:effectLst/>
+          </c:spPr>
+          <c:txPr>
+            <a:bodyPr rot="0" spcFirstLastPara="1" vertOverflow="ellipsis" vert="horz" wrap="square" lIns="38100" tIns="19050" rIns="38100" bIns="19050" anchor="ctr" anchorCtr="1">
+              <a:spAutoFit/>
+            </a:bodyPr>
+            <a:lstStyle/>
+            <a:p>
+              <a:pPr>
+                <a:defRPr sz="900" b="0" i="0" u="none" strike="noStrike" kern="1200" baseline="0">
+                  <a:solidFill>
+                    <a:schemeClr val="tx1">
+                      <a:lumMod val="75000"/>
+                      <a:lumOff val="25000"/>
+                    </a:schemeClr>
+                  </a:solidFill>
+                  <a:latin typeface="+mn-lt"/>
+                  <a:ea typeface="+mn-ea"/>
+                  <a:cs typeface="+mn-cs"/>
+                </a:defRPr>
+              </a:pPr>
+              <a:endParaRPr lang="es-UY"/>
+            </a:p>
+          </c:txPr>
+          <c:showLegendKey val="0"/>
+          <c:showVal val="0"/>
+          <c:showCatName val="0"/>
+          <c:showSerName val="0"/>
+          <c:showPercent val="0"/>
+          <c:showBubbleSize val="0"/>
+          <c:extLst>
+            <c:ext xmlns:c15="http://schemas.microsoft.com/office/drawing/2012/chart" uri="{CE6537A1-D6FC-4f65-9D91-7224C49458BB}"/>
+          </c:extLst>
+        </c:dLbl>
+      </c:pivotFmt>
+    </c:pivotFmts>
+    <c:plotArea>
+      <c:layout>
+        <c:manualLayout>
+          <c:layoutTarget val="inner"/>
+          <c:xMode val="edge"/>
+          <c:yMode val="edge"/>
+          <c:x val="9.8075474679377453E-2"/>
+          <c:y val="7.914826498422714E-2"/>
+          <c:w val="0.84856885155241879"/>
+          <c:h val="0.75714026677264712"/>
+        </c:manualLayout>
+      </c:layout>
+      <c:barChart>
+        <c:barDir val="col"/>
+        <c:grouping val="percentStacked"/>
+        <c:varyColors val="0"/>
+        <c:ser>
+          <c:idx val="0"/>
+          <c:order val="0"/>
+          <c:tx>
+            <c:strRef>
+              <c:f>'4'!$B$1:$B$2</c:f>
+              <c:strCache>
+                <c:ptCount val="1"/>
+                <c:pt idx="0">
+                  <c:v>Female</c:v>
+                </c:pt>
+              </c:strCache>
+            </c:strRef>
+          </c:tx>
+          <c:spPr>
+            <a:solidFill>
+              <a:schemeClr val="accent1"/>
+            </a:solidFill>
+            <a:ln>
+              <a:noFill/>
+            </a:ln>
+            <a:effectLst/>
+          </c:spPr>
+          <c:invertIfNegative val="0"/>
+          <c:cat>
+            <c:strRef>
+              <c:f>'4'!$A$3:$A$9</c:f>
+              <c:strCache>
+                <c:ptCount val="6"/>
+                <c:pt idx="0">
+                  <c:v>Electronic accessories</c:v>
+                </c:pt>
+                <c:pt idx="1">
+                  <c:v>Fashion accessories</c:v>
+                </c:pt>
+                <c:pt idx="2">
+                  <c:v>Food and beverages</c:v>
+                </c:pt>
+                <c:pt idx="3">
+                  <c:v>Health and beauty</c:v>
+                </c:pt>
+                <c:pt idx="4">
+                  <c:v>Home and lifestyle</c:v>
+                </c:pt>
+                <c:pt idx="5">
+                  <c:v>Sports and travel</c:v>
+                </c:pt>
+              </c:strCache>
+            </c:strRef>
+          </c:cat>
+          <c:val>
+            <c:numRef>
+              <c:f>'4'!$B$3:$B$9</c:f>
+              <c:numCache>
+                <c:formatCode>General</c:formatCode>
+                <c:ptCount val="6"/>
+                <c:pt idx="0">
+                  <c:v>61040.741848872705</c:v>
+                </c:pt>
+                <c:pt idx="1">
+                  <c:v>53795.60444778933</c:v>
+                </c:pt>
+                <c:pt idx="2">
+                  <c:v>73564.155417905946</c:v>
+                </c:pt>
+                <c:pt idx="3">
+                  <c:v>46333.560671972715</c:v>
+                </c:pt>
+                <c:pt idx="4">
+                  <c:v>73050.587042320083</c:v>
+                </c:pt>
+                <c:pt idx="5">
+                  <c:v>60859.104218321736</c:v>
+                </c:pt>
+              </c:numCache>
+            </c:numRef>
+          </c:val>
+          <c:extLst>
+            <c:ext xmlns:c16="http://schemas.microsoft.com/office/drawing/2014/chart" uri="{C3380CC4-5D6E-409C-BE32-E72D297353CC}">
+              <c16:uniqueId val="{00000000-39E6-3247-98A6-F1FC545AE0AD}"/>
+            </c:ext>
+          </c:extLst>
+        </c:ser>
+        <c:ser>
+          <c:idx val="1"/>
+          <c:order val="1"/>
+          <c:tx>
+            <c:strRef>
+              <c:f>'4'!$C$1:$C$2</c:f>
+              <c:strCache>
+                <c:ptCount val="1"/>
+                <c:pt idx="0">
+                  <c:v>Male</c:v>
+                </c:pt>
+              </c:strCache>
+            </c:strRef>
+          </c:tx>
+          <c:spPr>
+            <a:solidFill>
+              <a:schemeClr val="accent2"/>
+            </a:solidFill>
+            <a:ln>
+              <a:noFill/>
+            </a:ln>
+            <a:effectLst/>
+          </c:spPr>
+          <c:invertIfNegative val="0"/>
+          <c:cat>
+            <c:strRef>
+              <c:f>'4'!$A$3:$A$9</c:f>
+              <c:strCache>
+                <c:ptCount val="6"/>
+                <c:pt idx="0">
+                  <c:v>Electronic accessories</c:v>
+                </c:pt>
+                <c:pt idx="1">
+                  <c:v>Fashion accessories</c:v>
+                </c:pt>
+                <c:pt idx="2">
+                  <c:v>Food and beverages</c:v>
+                </c:pt>
+                <c:pt idx="3">
+                  <c:v>Health and beauty</c:v>
+                </c:pt>
+                <c:pt idx="4">
+                  <c:v>Home and lifestyle</c:v>
+                </c:pt>
+                <c:pt idx="5">
+                  <c:v>Sports and travel</c:v>
+                </c:pt>
+              </c:strCache>
+            </c:strRef>
+          </c:cat>
+          <c:val>
+            <c:numRef>
+              <c:f>'4'!$C$3:$C$9</c:f>
+              <c:numCache>
+                <c:formatCode>General</c:formatCode>
+                <c:ptCount val="6"/>
+                <c:pt idx="0">
+                  <c:v>60644.669259598784</c:v>
+                </c:pt>
+                <c:pt idx="1">
+                  <c:v>66170.757180746601</c:v>
+                </c:pt>
+                <c:pt idx="2">
+                  <c:v>43712.829019077595</c:v>
+                </c:pt>
+                <c:pt idx="3">
+                  <c:v>62943.759867070199</c:v>
+                </c:pt>
+                <c:pt idx="4">
+                  <c:v>53904.33227766319</c:v>
+                </c:pt>
+                <c:pt idx="5">
+                  <c:v>63299.139053200211</c:v>
+                </c:pt>
+              </c:numCache>
+            </c:numRef>
+          </c:val>
+          <c:extLst>
+            <c:ext xmlns:c16="http://schemas.microsoft.com/office/drawing/2014/chart" uri="{C3380CC4-5D6E-409C-BE32-E72D297353CC}">
+              <c16:uniqueId val="{00000001-39E6-3247-98A6-F1FC545AE0AD}"/>
+            </c:ext>
+          </c:extLst>
+        </c:ser>
+        <c:dLbls>
+          <c:showLegendKey val="0"/>
+          <c:showVal val="0"/>
+          <c:showCatName val="0"/>
+          <c:showSerName val="0"/>
+          <c:showPercent val="0"/>
+          <c:showBubbleSize val="0"/>
+        </c:dLbls>
+        <c:gapWidth val="219"/>
+        <c:overlap val="100"/>
+        <c:axId val="370959999"/>
+        <c:axId val="371231807"/>
+      </c:barChart>
+      <c:catAx>
+        <c:axId val="370959999"/>
+        <c:scaling>
+          <c:orientation val="minMax"/>
+        </c:scaling>
+        <c:delete val="0"/>
+        <c:axPos val="b"/>
+        <c:numFmt formatCode="General" sourceLinked="1"/>
+        <c:majorTickMark val="none"/>
+        <c:minorTickMark val="none"/>
+        <c:tickLblPos val="nextTo"/>
+        <c:spPr>
+          <a:noFill/>
+          <a:ln w="9525" cap="flat" cmpd="sng" algn="ctr">
+            <a:solidFill>
+              <a:schemeClr val="tx1">
+                <a:lumMod val="15000"/>
+                <a:lumOff val="85000"/>
+              </a:schemeClr>
+            </a:solidFill>
+            <a:round/>
+          </a:ln>
+          <a:effectLst/>
+        </c:spPr>
+        <c:txPr>
+          <a:bodyPr rot="-60000000" spcFirstLastPara="1" vertOverflow="ellipsis" vert="horz" wrap="square" anchor="ctr" anchorCtr="1"/>
+          <a:lstStyle/>
+          <a:p>
+            <a:pPr>
+              <a:defRPr sz="900" b="0" i="0" u="none" strike="noStrike" kern="1200" baseline="0">
+                <a:solidFill>
+                  <a:schemeClr val="tx1">
+                    <a:lumMod val="65000"/>
+                    <a:lumOff val="35000"/>
+                  </a:schemeClr>
+                </a:solidFill>
+                <a:latin typeface="+mn-lt"/>
+                <a:ea typeface="+mn-ea"/>
+                <a:cs typeface="+mn-cs"/>
+              </a:defRPr>
+            </a:pPr>
+            <a:endParaRPr lang="es-UY"/>
+          </a:p>
+        </c:txPr>
+        <c:crossAx val="371231807"/>
+        <c:crosses val="autoZero"/>
+        <c:auto val="1"/>
+        <c:lblAlgn val="ctr"/>
+        <c:lblOffset val="100"/>
+        <c:noMultiLvlLbl val="0"/>
+      </c:catAx>
+      <c:valAx>
+        <c:axId val="371231807"/>
+        <c:scaling>
+          <c:orientation val="minMax"/>
+        </c:scaling>
+        <c:delete val="0"/>
+        <c:axPos val="l"/>
+        <c:numFmt formatCode="0%" sourceLinked="1"/>
+        <c:majorTickMark val="none"/>
+        <c:minorTickMark val="none"/>
+        <c:tickLblPos val="nextTo"/>
+        <c:spPr>
+          <a:noFill/>
+          <a:ln>
+            <a:noFill/>
+          </a:ln>
+          <a:effectLst/>
+        </c:spPr>
+        <c:txPr>
+          <a:bodyPr rot="-60000000" spcFirstLastPara="1" vertOverflow="ellipsis" vert="horz" wrap="square" anchor="ctr" anchorCtr="1"/>
+          <a:lstStyle/>
+          <a:p>
+            <a:pPr>
+              <a:defRPr sz="900" b="0" i="0" u="none" strike="noStrike" kern="1200" baseline="0">
+                <a:solidFill>
+                  <a:schemeClr val="tx1">
+                    <a:lumMod val="65000"/>
+                    <a:lumOff val="35000"/>
+                  </a:schemeClr>
+                </a:solidFill>
+                <a:latin typeface="+mn-lt"/>
+                <a:ea typeface="+mn-ea"/>
+                <a:cs typeface="+mn-cs"/>
+              </a:defRPr>
+            </a:pPr>
+            <a:endParaRPr lang="es-UY"/>
+          </a:p>
+        </c:txPr>
+        <c:crossAx val="370959999"/>
+        <c:crosses val="autoZero"/>
+        <c:crossBetween val="between"/>
+      </c:valAx>
+      <c:spPr>
+        <a:noFill/>
+        <a:ln>
+          <a:noFill/>
+        </a:ln>
+        <a:effectLst/>
+      </c:spPr>
+    </c:plotArea>
+    <c:legend>
+      <c:legendPos val="r"/>
+      <c:overlay val="0"/>
+      <c:spPr>
+        <a:noFill/>
+        <a:ln>
+          <a:noFill/>
+        </a:ln>
+        <a:effectLst/>
+      </c:spPr>
+      <c:txPr>
+        <a:bodyPr rot="0" spcFirstLastPara="1" vertOverflow="ellipsis" vert="horz" wrap="square" anchor="ctr" anchorCtr="1"/>
+        <a:lstStyle/>
+        <a:p>
+          <a:pPr>
+            <a:defRPr sz="900" b="0" i="0" u="none" strike="noStrike" kern="1200" baseline="0">
+              <a:solidFill>
+                <a:schemeClr val="tx1">
+                  <a:lumMod val="65000"/>
+                  <a:lumOff val="35000"/>
+                </a:schemeClr>
+              </a:solidFill>
+              <a:latin typeface="+mn-lt"/>
+              <a:ea typeface="+mn-ea"/>
+              <a:cs typeface="+mn-cs"/>
+            </a:defRPr>
+          </a:pPr>
+          <a:endParaRPr lang="es-UY"/>
+        </a:p>
+      </c:txPr>
+    </c:legend>
+    <c:plotVisOnly val="1"/>
+    <c:dispBlanksAs val="gap"/>
+    <c:showDLblsOverMax val="0"/>
+    <c:extLst>
+      <c:ext xmlns:c16r3="http://schemas.microsoft.com/office/drawing/2017/03/chart" uri="{56B9EC1D-385E-4148-901F-78D8002777C0}">
+        <c16r3:dataDisplayOptions16>
+          <c16r3:dispNaAsBlank val="1"/>
+        </c16r3:dataDisplayOptions16>
+      </c:ext>
+    </c:extLst>
+  </c:chart>
+  <c:spPr>
+    <a:noFill/>
+    <a:ln>
+      <a:noFill/>
+    </a:ln>
+    <a:effectLst/>
+  </c:spPr>
+  <c:txPr>
+    <a:bodyPr/>
+    <a:lstStyle/>
+    <a:p>
+      <a:pPr>
+        <a:defRPr/>
+      </a:pPr>
+      <a:endParaRPr lang="es-UY"/>
+    </a:p>
+  </c:txPr>
+  <c:externalData r:id="rId3">
+    <c:autoUpdate val="0"/>
+  </c:externalData>
+  <c:extLst>
+    <c:ext xmlns:c14="http://schemas.microsoft.com/office/drawing/2007/8/2/chart" uri="{781A3756-C4B2-4CAC-9D66-4F8BD8637D16}">
+      <c14:pivotOptions>
+        <c14:dropZoneFilter val="1"/>
+        <c14:dropZoneCategories val="1"/>
+        <c14:dropZoneData val="1"/>
+        <c14:dropZoneSeries val="1"/>
+        <c14:dropZonesVisible val="1"/>
+      </c14:pivotOptions>
+    </c:ext>
+    <c:ext xmlns:c16="http://schemas.microsoft.com/office/drawing/2014/chart" uri="{E28EC0CA-F0BB-4C9C-879D-F8772B89E7AC}">
+      <c16:pivotOptions16>
+        <c16:showExpandCollapseFieldButtons val="1"/>
+      </c16:pivotOptions16>
+    </c:ext>
+  </c:extLst>
+</c:chartSpace>
+</file>
+
+<file path=ppt/charts/chart5.xml><?xml version="1.0" encoding="utf-8"?>
+<c:chartSpace xmlns:c="http://schemas.openxmlformats.org/drawingml/2006/chart" xmlns:a="http://schemas.openxmlformats.org/drawingml/2006/main" xmlns:r="http://schemas.openxmlformats.org/officeDocument/2006/relationships" xmlns:c16r2="http://schemas.microsoft.com/office/drawing/2015/06/chart">
+  <c:date1904 val="0"/>
+  <c:lang val="es-ES"/>
+  <c:roundedCorners val="0"/>
+  <mc:AlternateContent xmlns:mc="http://schemas.openxmlformats.org/markup-compatibility/2006">
+    <mc:Choice xmlns:c14="http://schemas.microsoft.com/office/drawing/2007/8/2/chart" Requires="c14">
+      <c14:style val="102"/>
+    </mc:Choice>
+    <mc:Fallback>
+      <c:style val="2"/>
+    </mc:Fallback>
+  </mc:AlternateContent>
+  <c:pivotSource>
+    <c:name>[Supermarket Sales Dataset v1.0.xlsx]5!TablaDinámica5</c:name>
+    <c:fmtId val="4"/>
+  </c:pivotSource>
+  <c:chart>
+    <c:autoTitleDeleted val="1"/>
+    <c:pivotFmts>
+      <c:pivotFmt>
+        <c:idx val="0"/>
+        <c:spPr>
+          <a:solidFill>
+            <a:schemeClr val="accent1"/>
+          </a:solidFill>
+          <a:ln>
+            <a:noFill/>
+          </a:ln>
+          <a:effectLst/>
+        </c:spPr>
+        <c:marker>
+          <c:symbol val="none"/>
+        </c:marker>
+        <c:dLbl>
+          <c:idx val="0"/>
+          <c:spPr>
+            <a:noFill/>
+            <a:ln>
+              <a:noFill/>
+            </a:ln>
+            <a:effectLst/>
+          </c:spPr>
+          <c:txPr>
+            <a:bodyPr rot="0" spcFirstLastPara="1" vertOverflow="ellipsis" vert="horz" wrap="square" lIns="38100" tIns="19050" rIns="38100" bIns="19050" anchor="ctr" anchorCtr="1">
+              <a:spAutoFit/>
+            </a:bodyPr>
+            <a:lstStyle/>
+            <a:p>
+              <a:pPr>
+                <a:defRPr sz="900" b="0" i="0" u="none" strike="noStrike" kern="1200" baseline="0">
+                  <a:solidFill>
+                    <a:schemeClr val="tx1">
+                      <a:lumMod val="75000"/>
+                      <a:lumOff val="25000"/>
+                    </a:schemeClr>
+                  </a:solidFill>
+                  <a:latin typeface="+mn-lt"/>
+                  <a:ea typeface="+mn-ea"/>
+                  <a:cs typeface="+mn-cs"/>
+                </a:defRPr>
+              </a:pPr>
+              <a:endParaRPr lang="es-UY"/>
+            </a:p>
+          </c:txPr>
+          <c:showLegendKey val="0"/>
+          <c:showVal val="0"/>
+          <c:showCatName val="0"/>
+          <c:showSerName val="0"/>
+          <c:showPercent val="0"/>
+          <c:showBubbleSize val="0"/>
+          <c:extLst>
+            <c:ext xmlns:c15="http://schemas.microsoft.com/office/drawing/2012/chart" uri="{CE6537A1-D6FC-4f65-9D91-7224C49458BB}"/>
+          </c:extLst>
+        </c:dLbl>
+      </c:pivotFmt>
+      <c:pivotFmt>
+        <c:idx val="1"/>
+        <c:spPr>
+          <a:solidFill>
+            <a:schemeClr val="accent1"/>
+          </a:solidFill>
+          <a:ln>
+            <a:noFill/>
+          </a:ln>
+          <a:effectLst/>
+        </c:spPr>
+        <c:marker>
+          <c:symbol val="none"/>
+        </c:marker>
+        <c:dLbl>
+          <c:idx val="0"/>
+          <c:spPr>
+            <a:noFill/>
+            <a:ln>
+              <a:noFill/>
+            </a:ln>
+            <a:effectLst/>
+          </c:spPr>
+          <c:txPr>
+            <a:bodyPr rot="0" spcFirstLastPara="1" vertOverflow="ellipsis" vert="horz" wrap="square" lIns="38100" tIns="19050" rIns="38100" bIns="19050" anchor="ctr" anchorCtr="1">
+              <a:spAutoFit/>
+            </a:bodyPr>
+            <a:lstStyle/>
+            <a:p>
+              <a:pPr>
+                <a:defRPr sz="900" b="0" i="0" u="none" strike="noStrike" kern="1200" baseline="0">
+                  <a:solidFill>
+                    <a:schemeClr val="tx1">
+                      <a:lumMod val="75000"/>
+                      <a:lumOff val="25000"/>
+                    </a:schemeClr>
+                  </a:solidFill>
+                  <a:latin typeface="+mn-lt"/>
+                  <a:ea typeface="+mn-ea"/>
+                  <a:cs typeface="+mn-cs"/>
+                </a:defRPr>
+              </a:pPr>
+              <a:endParaRPr lang="es-UY"/>
+            </a:p>
+          </c:txPr>
+          <c:showLegendKey val="0"/>
+          <c:showVal val="0"/>
+          <c:showCatName val="0"/>
+          <c:showSerName val="0"/>
+          <c:showPercent val="0"/>
+          <c:showBubbleSize val="0"/>
+          <c:extLst>
+            <c:ext xmlns:c15="http://schemas.microsoft.com/office/drawing/2012/chart" uri="{CE6537A1-D6FC-4f65-9D91-7224C49458BB}"/>
+          </c:extLst>
+        </c:dLbl>
+      </c:pivotFmt>
+      <c:pivotFmt>
+        <c:idx val="2"/>
+        <c:spPr>
+          <a:solidFill>
+            <a:schemeClr val="accent1"/>
+          </a:solidFill>
+          <a:ln>
+            <a:noFill/>
+          </a:ln>
+          <a:effectLst/>
+        </c:spPr>
+        <c:marker>
+          <c:symbol val="none"/>
+        </c:marker>
+        <c:dLbl>
+          <c:idx val="0"/>
+          <c:spPr>
+            <a:noFill/>
+            <a:ln>
+              <a:noFill/>
+            </a:ln>
+            <a:effectLst/>
+          </c:spPr>
+          <c:txPr>
+            <a:bodyPr rot="0" spcFirstLastPara="1" vertOverflow="ellipsis" vert="horz" wrap="square" lIns="38100" tIns="19050" rIns="38100" bIns="19050" anchor="ctr" anchorCtr="1">
+              <a:spAutoFit/>
+            </a:bodyPr>
+            <a:lstStyle/>
+            <a:p>
+              <a:pPr>
+                <a:defRPr sz="900" b="0" i="0" u="none" strike="noStrike" kern="1200" baseline="0">
+                  <a:solidFill>
+                    <a:schemeClr val="tx1">
+                      <a:lumMod val="75000"/>
+                      <a:lumOff val="25000"/>
+                    </a:schemeClr>
+                  </a:solidFill>
+                  <a:latin typeface="+mn-lt"/>
+                  <a:ea typeface="+mn-ea"/>
+                  <a:cs typeface="+mn-cs"/>
+                </a:defRPr>
+              </a:pPr>
+              <a:endParaRPr lang="es-UY"/>
+            </a:p>
+          </c:txPr>
+          <c:showLegendKey val="0"/>
+          <c:showVal val="0"/>
+          <c:showCatName val="0"/>
+          <c:showSerName val="0"/>
+          <c:showPercent val="0"/>
+          <c:showBubbleSize val="0"/>
+          <c:extLst>
+            <c:ext xmlns:c15="http://schemas.microsoft.com/office/drawing/2012/chart" uri="{CE6537A1-D6FC-4f65-9D91-7224C49458BB}"/>
+          </c:extLst>
+        </c:dLbl>
+      </c:pivotFmt>
+      <c:pivotFmt>
+        <c:idx val="3"/>
+        <c:spPr>
+          <a:solidFill>
+            <a:schemeClr val="accent1"/>
+          </a:solidFill>
+          <a:ln>
+            <a:noFill/>
+          </a:ln>
+          <a:effectLst/>
+        </c:spPr>
+        <c:marker>
+          <c:symbol val="none"/>
+        </c:marker>
+        <c:dLbl>
+          <c:idx val="0"/>
+          <c:spPr>
+            <a:noFill/>
+            <a:ln>
+              <a:noFill/>
+            </a:ln>
+            <a:effectLst/>
+          </c:spPr>
+          <c:txPr>
+            <a:bodyPr rot="0" spcFirstLastPara="1" vertOverflow="ellipsis" vert="horz" wrap="square" lIns="38100" tIns="19050" rIns="38100" bIns="19050" anchor="ctr" anchorCtr="1">
+              <a:spAutoFit/>
+            </a:bodyPr>
+            <a:lstStyle/>
+            <a:p>
+              <a:pPr>
+                <a:defRPr sz="900" b="0" i="0" u="none" strike="noStrike" kern="1200" baseline="0">
+                  <a:solidFill>
+                    <a:schemeClr val="tx1">
+                      <a:lumMod val="75000"/>
+                      <a:lumOff val="25000"/>
+                    </a:schemeClr>
+                  </a:solidFill>
+                  <a:latin typeface="+mn-lt"/>
+                  <a:ea typeface="+mn-ea"/>
+                  <a:cs typeface="+mn-cs"/>
+                </a:defRPr>
+              </a:pPr>
+              <a:endParaRPr lang="es-UY"/>
+            </a:p>
+          </c:txPr>
+          <c:showLegendKey val="0"/>
+          <c:showVal val="0"/>
+          <c:showCatName val="0"/>
+          <c:showSerName val="0"/>
+          <c:showPercent val="0"/>
+          <c:showBubbleSize val="0"/>
+          <c:extLst>
+            <c:ext xmlns:c15="http://schemas.microsoft.com/office/drawing/2012/chart" uri="{CE6537A1-D6FC-4f65-9D91-7224C49458BB}"/>
+          </c:extLst>
+        </c:dLbl>
+      </c:pivotFmt>
+      <c:pivotFmt>
+        <c:idx val="4"/>
+        <c:spPr>
+          <a:solidFill>
+            <a:schemeClr val="accent1"/>
+          </a:solidFill>
+          <a:ln>
+            <a:noFill/>
+          </a:ln>
+          <a:effectLst/>
+        </c:spPr>
+        <c:marker>
+          <c:symbol val="none"/>
+        </c:marker>
+        <c:dLbl>
+          <c:idx val="0"/>
+          <c:spPr>
+            <a:noFill/>
+            <a:ln>
+              <a:noFill/>
+            </a:ln>
+            <a:effectLst/>
+          </c:spPr>
+          <c:txPr>
+            <a:bodyPr rot="0" spcFirstLastPara="1" vertOverflow="ellipsis" vert="horz" wrap="square" lIns="38100" tIns="19050" rIns="38100" bIns="19050" anchor="ctr" anchorCtr="1">
+              <a:spAutoFit/>
+            </a:bodyPr>
+            <a:lstStyle/>
+            <a:p>
+              <a:pPr>
+                <a:defRPr sz="900" b="0" i="0" u="none" strike="noStrike" kern="1200" baseline="0">
+                  <a:solidFill>
+                    <a:schemeClr val="tx1">
+                      <a:lumMod val="75000"/>
+                      <a:lumOff val="25000"/>
+                    </a:schemeClr>
+                  </a:solidFill>
+                  <a:latin typeface="+mn-lt"/>
+                  <a:ea typeface="+mn-ea"/>
+                  <a:cs typeface="+mn-cs"/>
+                </a:defRPr>
+              </a:pPr>
+              <a:endParaRPr lang="es-UY"/>
+            </a:p>
+          </c:txPr>
+          <c:showLegendKey val="0"/>
+          <c:showVal val="0"/>
+          <c:showCatName val="0"/>
+          <c:showSerName val="0"/>
+          <c:showPercent val="0"/>
+          <c:showBubbleSize val="0"/>
+          <c:extLst>
+            <c:ext xmlns:c15="http://schemas.microsoft.com/office/drawing/2012/chart" uri="{CE6537A1-D6FC-4f65-9D91-7224C49458BB}"/>
+          </c:extLst>
+        </c:dLbl>
+      </c:pivotFmt>
+      <c:pivotFmt>
+        <c:idx val="5"/>
+        <c:spPr>
+          <a:solidFill>
+            <a:schemeClr val="accent1"/>
+          </a:solidFill>
+          <a:ln>
+            <a:noFill/>
+          </a:ln>
+          <a:effectLst/>
+        </c:spPr>
+        <c:marker>
+          <c:symbol val="none"/>
+        </c:marker>
+        <c:dLbl>
+          <c:idx val="0"/>
+          <c:spPr>
+            <a:noFill/>
+            <a:ln>
+              <a:noFill/>
+            </a:ln>
+            <a:effectLst/>
+          </c:spPr>
+          <c:txPr>
+            <a:bodyPr rot="0" spcFirstLastPara="1" vertOverflow="ellipsis" vert="horz" wrap="square" lIns="38100" tIns="19050" rIns="38100" bIns="19050" anchor="ctr" anchorCtr="1">
+              <a:spAutoFit/>
+            </a:bodyPr>
+            <a:lstStyle/>
+            <a:p>
+              <a:pPr>
+                <a:defRPr sz="900" b="0" i="0" u="none" strike="noStrike" kern="1200" baseline="0">
+                  <a:solidFill>
+                    <a:schemeClr val="tx1">
+                      <a:lumMod val="75000"/>
+                      <a:lumOff val="25000"/>
+                    </a:schemeClr>
+                  </a:solidFill>
+                  <a:latin typeface="+mn-lt"/>
+                  <a:ea typeface="+mn-ea"/>
+                  <a:cs typeface="+mn-cs"/>
+                </a:defRPr>
+              </a:pPr>
+              <a:endParaRPr lang="es-UY"/>
+            </a:p>
+          </c:txPr>
+          <c:showLegendKey val="0"/>
+          <c:showVal val="0"/>
+          <c:showCatName val="0"/>
+          <c:showSerName val="0"/>
+          <c:showPercent val="0"/>
+          <c:showBubbleSize val="0"/>
+          <c:extLst>
+            <c:ext xmlns:c15="http://schemas.microsoft.com/office/drawing/2012/chart" uri="{CE6537A1-D6FC-4f65-9D91-7224C49458BB}"/>
+          </c:extLst>
+        </c:dLbl>
+      </c:pivotFmt>
+      <c:pivotFmt>
+        <c:idx val="6"/>
+        <c:spPr>
+          <a:solidFill>
+            <a:schemeClr val="accent1"/>
+          </a:solidFill>
+          <a:ln>
+            <a:noFill/>
+          </a:ln>
+          <a:effectLst/>
+        </c:spPr>
+        <c:marker>
+          <c:symbol val="none"/>
+        </c:marker>
+        <c:dLbl>
+          <c:idx val="0"/>
+          <c:spPr>
+            <a:noFill/>
+            <a:ln>
+              <a:noFill/>
+            </a:ln>
+            <a:effectLst/>
+          </c:spPr>
+          <c:txPr>
+            <a:bodyPr rot="0" spcFirstLastPara="1" vertOverflow="ellipsis" vert="horz" wrap="square" lIns="38100" tIns="19050" rIns="38100" bIns="19050" anchor="ctr" anchorCtr="1">
+              <a:spAutoFit/>
+            </a:bodyPr>
+            <a:lstStyle/>
+            <a:p>
+              <a:pPr>
+                <a:defRPr sz="900" b="0" i="0" u="none" strike="noStrike" kern="1200" baseline="0">
+                  <a:solidFill>
+                    <a:schemeClr val="tx1">
+                      <a:lumMod val="75000"/>
+                      <a:lumOff val="25000"/>
+                    </a:schemeClr>
+                  </a:solidFill>
+                  <a:latin typeface="+mn-lt"/>
+                  <a:ea typeface="+mn-ea"/>
+                  <a:cs typeface="+mn-cs"/>
+                </a:defRPr>
+              </a:pPr>
+              <a:endParaRPr lang="es-UY"/>
+            </a:p>
+          </c:txPr>
+          <c:showLegendKey val="0"/>
+          <c:showVal val="0"/>
+          <c:showCatName val="0"/>
+          <c:showSerName val="0"/>
+          <c:showPercent val="0"/>
+          <c:showBubbleSize val="0"/>
+          <c:extLst>
+            <c:ext xmlns:c15="http://schemas.microsoft.com/office/drawing/2012/chart" uri="{CE6537A1-D6FC-4f65-9D91-7224C49458BB}"/>
+          </c:extLst>
+        </c:dLbl>
+      </c:pivotFmt>
+    </c:pivotFmts>
+    <c:plotArea>
+      <c:layout/>
+      <c:barChart>
+        <c:barDir val="bar"/>
+        <c:grouping val="clustered"/>
+        <c:varyColors val="0"/>
+        <c:ser>
+          <c:idx val="0"/>
+          <c:order val="0"/>
+          <c:tx>
+            <c:strRef>
+              <c:f>'5'!$B$3</c:f>
+              <c:strCache>
+                <c:ptCount val="1"/>
+                <c:pt idx="0">
+                  <c:v>Total</c:v>
+                </c:pt>
+              </c:strCache>
+            </c:strRef>
+          </c:tx>
+          <c:spPr>
+            <a:solidFill>
+              <a:schemeClr val="accent1"/>
+            </a:solidFill>
+            <a:ln>
+              <a:noFill/>
+            </a:ln>
+            <a:effectLst/>
+          </c:spPr>
+          <c:invertIfNegative val="0"/>
+          <c:cat>
+            <c:strRef>
+              <c:f>'5'!$A$4:$A$7</c:f>
+              <c:strCache>
+                <c:ptCount val="3"/>
+                <c:pt idx="0">
+                  <c:v>Mandalay</c:v>
+                </c:pt>
+                <c:pt idx="1">
+                  <c:v>Naypyitaw</c:v>
+                </c:pt>
+                <c:pt idx="2">
+                  <c:v>Yangon</c:v>
+                </c:pt>
+              </c:strCache>
+            </c:strRef>
+          </c:cat>
+          <c:val>
+            <c:numRef>
+              <c:f>'5'!$B$4:$B$7</c:f>
+              <c:numCache>
+                <c:formatCode>General</c:formatCode>
+                <c:ptCount val="3"/>
+                <c:pt idx="0">
+                  <c:v>106197.67199999996</c:v>
+                </c:pt>
+                <c:pt idx="1">
+                  <c:v>110568.70649999994</c:v>
+                </c:pt>
+                <c:pt idx="2">
+                  <c:v>106200.37050000011</c:v>
+                </c:pt>
+              </c:numCache>
+            </c:numRef>
+          </c:val>
+          <c:extLst>
+            <c:ext xmlns:c16="http://schemas.microsoft.com/office/drawing/2014/chart" uri="{C3380CC4-5D6E-409C-BE32-E72D297353CC}">
+              <c16:uniqueId val="{00000000-C349-E140-92EE-38C7665914A4}"/>
+            </c:ext>
+          </c:extLst>
+        </c:ser>
+        <c:dLbls>
+          <c:showLegendKey val="0"/>
+          <c:showVal val="0"/>
+          <c:showCatName val="0"/>
+          <c:showSerName val="0"/>
+          <c:showPercent val="0"/>
+          <c:showBubbleSize val="0"/>
+        </c:dLbls>
+        <c:gapWidth val="219"/>
+        <c:axId val="371216319"/>
+        <c:axId val="371217215"/>
+      </c:barChart>
+      <c:catAx>
+        <c:axId val="371216319"/>
+        <c:scaling>
+          <c:orientation val="minMax"/>
+        </c:scaling>
+        <c:delete val="0"/>
+        <c:axPos val="l"/>
+        <c:numFmt formatCode="General" sourceLinked="1"/>
+        <c:majorTickMark val="none"/>
+        <c:minorTickMark val="none"/>
+        <c:tickLblPos val="nextTo"/>
+        <c:spPr>
+          <a:noFill/>
+          <a:ln w="9525" cap="flat" cmpd="sng" algn="ctr">
+            <a:solidFill>
+              <a:schemeClr val="tx1">
+                <a:lumMod val="15000"/>
+                <a:lumOff val="85000"/>
+              </a:schemeClr>
+            </a:solidFill>
+            <a:round/>
+          </a:ln>
+          <a:effectLst/>
+        </c:spPr>
+        <c:txPr>
+          <a:bodyPr rot="-60000000" spcFirstLastPara="1" vertOverflow="ellipsis" vert="horz" wrap="square" anchor="ctr" anchorCtr="1"/>
+          <a:lstStyle/>
+          <a:p>
+            <a:pPr>
+              <a:defRPr sz="900" b="0" i="0" u="none" strike="noStrike" kern="1200" baseline="0">
+                <a:solidFill>
+                  <a:schemeClr val="tx1">
+                    <a:lumMod val="65000"/>
+                    <a:lumOff val="35000"/>
+                  </a:schemeClr>
+                </a:solidFill>
+                <a:latin typeface="+mn-lt"/>
+                <a:ea typeface="+mn-ea"/>
+                <a:cs typeface="+mn-cs"/>
+              </a:defRPr>
+            </a:pPr>
+            <a:endParaRPr lang="es-UY"/>
+          </a:p>
+        </c:txPr>
+        <c:crossAx val="371217215"/>
+        <c:crosses val="autoZero"/>
+        <c:auto val="1"/>
+        <c:lblAlgn val="ctr"/>
+        <c:lblOffset val="100"/>
+        <c:noMultiLvlLbl val="0"/>
+      </c:catAx>
+      <c:valAx>
+        <c:axId val="371217215"/>
+        <c:scaling>
+          <c:orientation val="minMax"/>
+          <c:min val="0"/>
+        </c:scaling>
+        <c:delete val="0"/>
+        <c:axPos val="b"/>
+        <c:numFmt formatCode="General" sourceLinked="1"/>
+        <c:majorTickMark val="none"/>
+        <c:minorTickMark val="none"/>
+        <c:tickLblPos val="nextTo"/>
+        <c:spPr>
+          <a:noFill/>
+          <a:ln>
+            <a:noFill/>
+          </a:ln>
+          <a:effectLst/>
+        </c:spPr>
+        <c:txPr>
+          <a:bodyPr rot="-60000000" spcFirstLastPara="1" vertOverflow="ellipsis" vert="horz" wrap="square" anchor="ctr" anchorCtr="1"/>
+          <a:lstStyle/>
+          <a:p>
+            <a:pPr>
+              <a:defRPr sz="900" b="0" i="0" u="none" strike="noStrike" kern="1200" baseline="0">
+                <a:solidFill>
+                  <a:schemeClr val="tx1">
+                    <a:lumMod val="65000"/>
+                    <a:lumOff val="35000"/>
+                  </a:schemeClr>
+                </a:solidFill>
+                <a:latin typeface="+mn-lt"/>
+                <a:ea typeface="+mn-ea"/>
+                <a:cs typeface="+mn-cs"/>
+              </a:defRPr>
+            </a:pPr>
+            <a:endParaRPr lang="es-UY"/>
+          </a:p>
+        </c:txPr>
+        <c:crossAx val="371216319"/>
+        <c:crosses val="autoZero"/>
+        <c:crossBetween val="between"/>
+      </c:valAx>
+      <c:spPr>
+        <a:noFill/>
+        <a:ln>
+          <a:noFill/>
+        </a:ln>
+        <a:effectLst/>
+      </c:spPr>
+    </c:plotArea>
+    <c:plotVisOnly val="1"/>
+    <c:dispBlanksAs val="gap"/>
+    <c:showDLblsOverMax val="0"/>
+    <c:extLst>
+      <c:ext xmlns:c16r3="http://schemas.microsoft.com/office/drawing/2017/03/chart" uri="{56B9EC1D-385E-4148-901F-78D8002777C0}">
+        <c16r3:dataDisplayOptions16>
+          <c16r3:dispNaAsBlank val="1"/>
+        </c16r3:dataDisplayOptions16>
+      </c:ext>
+    </c:extLst>
+  </c:chart>
+  <c:spPr>
+    <a:noFill/>
+    <a:ln>
+      <a:noFill/>
+    </a:ln>
+    <a:effectLst/>
+  </c:spPr>
+  <c:txPr>
+    <a:bodyPr/>
+    <a:lstStyle/>
+    <a:p>
+      <a:pPr>
+        <a:defRPr/>
+      </a:pPr>
+      <a:endParaRPr lang="es-UY"/>
+    </a:p>
+  </c:txPr>
+  <c:externalData r:id="rId3">
+    <c:autoUpdate val="0"/>
+  </c:externalData>
+  <c:extLst>
+    <c:ext xmlns:c14="http://schemas.microsoft.com/office/drawing/2007/8/2/chart" uri="{781A3756-C4B2-4CAC-9D66-4F8BD8637D16}">
+      <c14:pivotOptions>
+        <c14:dropZoneFilter val="1"/>
+        <c14:dropZoneCategories val="1"/>
+        <c14:dropZoneData val="1"/>
+        <c14:dropZonesVisible val="1"/>
+      </c14:pivotOptions>
+    </c:ext>
+    <c:ext xmlns:c16="http://schemas.microsoft.com/office/drawing/2014/chart" uri="{E28EC0CA-F0BB-4C9C-879D-F8772B89E7AC}">
+      <c16:pivotOptions16>
+        <c16:showExpandCollapseFieldButtons val="1"/>
+      </c16:pivotOptions16>
+    </c:ext>
+  </c:extLst>
+</c:chartSpace>
+</file>
+
 <file path=ppt/charts/colors1.xml><?xml version="1.0" encoding="utf-8"?>
 <cs:colorStyle xmlns:cs="http://schemas.microsoft.com/office/drawing/2012/chartStyle" xmlns:a="http://schemas.openxmlformats.org/drawingml/2006/main" meth="cycle" id="10">
   <a:schemeClr val="accent1"/>
@@ -4976,6 +6938,86 @@
 </file>
 
 <file path=ppt/charts/colors3.xml><?xml version="1.0" encoding="utf-8"?>
+<cs:colorStyle xmlns:cs="http://schemas.microsoft.com/office/drawing/2012/chartStyle" xmlns:a="http://schemas.openxmlformats.org/drawingml/2006/main" meth="cycle" id="10">
+  <a:schemeClr val="accent1"/>
+  <a:schemeClr val="accent2"/>
+  <a:schemeClr val="accent3"/>
+  <a:schemeClr val="accent4"/>
+  <a:schemeClr val="accent5"/>
+  <a:schemeClr val="accent6"/>
+  <cs:variation/>
+  <cs:variation>
+    <a:lumMod val="60000"/>
+  </cs:variation>
+  <cs:variation>
+    <a:lumMod val="80000"/>
+    <a:lumOff val="20000"/>
+  </cs:variation>
+  <cs:variation>
+    <a:lumMod val="80000"/>
+  </cs:variation>
+  <cs:variation>
+    <a:lumMod val="60000"/>
+    <a:lumOff val="40000"/>
+  </cs:variation>
+  <cs:variation>
+    <a:lumMod val="50000"/>
+  </cs:variation>
+  <cs:variation>
+    <a:lumMod val="70000"/>
+    <a:lumOff val="30000"/>
+  </cs:variation>
+  <cs:variation>
+    <a:lumMod val="70000"/>
+  </cs:variation>
+  <cs:variation>
+    <a:lumMod val="50000"/>
+    <a:lumOff val="50000"/>
+  </cs:variation>
+</cs:colorStyle>
+</file>
+
+<file path=ppt/charts/colors4.xml><?xml version="1.0" encoding="utf-8"?>
+<cs:colorStyle xmlns:cs="http://schemas.microsoft.com/office/drawing/2012/chartStyle" xmlns:a="http://schemas.openxmlformats.org/drawingml/2006/main" meth="cycle" id="10">
+  <a:schemeClr val="accent1"/>
+  <a:schemeClr val="accent2"/>
+  <a:schemeClr val="accent3"/>
+  <a:schemeClr val="accent4"/>
+  <a:schemeClr val="accent5"/>
+  <a:schemeClr val="accent6"/>
+  <cs:variation/>
+  <cs:variation>
+    <a:lumMod val="60000"/>
+  </cs:variation>
+  <cs:variation>
+    <a:lumMod val="80000"/>
+    <a:lumOff val="20000"/>
+  </cs:variation>
+  <cs:variation>
+    <a:lumMod val="80000"/>
+  </cs:variation>
+  <cs:variation>
+    <a:lumMod val="60000"/>
+    <a:lumOff val="40000"/>
+  </cs:variation>
+  <cs:variation>
+    <a:lumMod val="50000"/>
+  </cs:variation>
+  <cs:variation>
+    <a:lumMod val="70000"/>
+    <a:lumOff val="30000"/>
+  </cs:variation>
+  <cs:variation>
+    <a:lumMod val="70000"/>
+  </cs:variation>
+  <cs:variation>
+    <a:lumMod val="50000"/>
+    <a:lumOff val="50000"/>
+  </cs:variation>
+</cs:colorStyle>
+</file>
+
+<file path=ppt/charts/colors5.xml><?xml version="1.0" encoding="utf-8"?>
 <cs:colorStyle xmlns:cs="http://schemas.microsoft.com/office/drawing/2012/chartStyle" xmlns:a="http://schemas.openxmlformats.org/drawingml/2006/main" meth="cycle" id="10">
   <a:schemeClr val="accent1"/>
   <a:schemeClr val="accent2"/>
@@ -6539,6 +8581,1012 @@
 </cs:chartStyle>
 </file>
 
+<file path=ppt/charts/style4.xml><?xml version="1.0" encoding="utf-8"?>
+<cs:chartStyle xmlns:cs="http://schemas.microsoft.com/office/drawing/2012/chartStyle" xmlns:a="http://schemas.openxmlformats.org/drawingml/2006/main" id="201">
+  <cs:axisTitle>
+    <cs:lnRef idx="0"/>
+    <cs:fillRef idx="0"/>
+    <cs:effectRef idx="0"/>
+    <cs:fontRef idx="minor">
+      <a:schemeClr val="tx1">
+        <a:lumMod val="65000"/>
+        <a:lumOff val="35000"/>
+      </a:schemeClr>
+    </cs:fontRef>
+    <cs:defRPr sz="1000" kern="1200"/>
+  </cs:axisTitle>
+  <cs:categoryAxis>
+    <cs:lnRef idx="0"/>
+    <cs:fillRef idx="0"/>
+    <cs:effectRef idx="0"/>
+    <cs:fontRef idx="minor">
+      <a:schemeClr val="tx1">
+        <a:lumMod val="65000"/>
+        <a:lumOff val="35000"/>
+      </a:schemeClr>
+    </cs:fontRef>
+    <cs:spPr>
+      <a:ln w="9525" cap="flat" cmpd="sng" algn="ctr">
+        <a:solidFill>
+          <a:schemeClr val="tx1">
+            <a:lumMod val="15000"/>
+            <a:lumOff val="85000"/>
+          </a:schemeClr>
+        </a:solidFill>
+        <a:round/>
+      </a:ln>
+    </cs:spPr>
+    <cs:defRPr sz="900" kern="1200"/>
+  </cs:categoryAxis>
+  <cs:chartArea mods="allowNoFillOverride allowNoLineOverride">
+    <cs:lnRef idx="0"/>
+    <cs:fillRef idx="0"/>
+    <cs:effectRef idx="0"/>
+    <cs:fontRef idx="minor">
+      <a:schemeClr val="tx1"/>
+    </cs:fontRef>
+    <cs:spPr>
+      <a:solidFill>
+        <a:schemeClr val="bg1"/>
+      </a:solidFill>
+      <a:ln w="9525" cap="flat" cmpd="sng" algn="ctr">
+        <a:solidFill>
+          <a:schemeClr val="tx1">
+            <a:lumMod val="15000"/>
+            <a:lumOff val="85000"/>
+          </a:schemeClr>
+        </a:solidFill>
+        <a:round/>
+      </a:ln>
+    </cs:spPr>
+    <cs:defRPr sz="1000" kern="1200"/>
+  </cs:chartArea>
+  <cs:dataLabel>
+    <cs:lnRef idx="0"/>
+    <cs:fillRef idx="0"/>
+    <cs:effectRef idx="0"/>
+    <cs:fontRef idx="minor">
+      <a:schemeClr val="tx1">
+        <a:lumMod val="75000"/>
+        <a:lumOff val="25000"/>
+      </a:schemeClr>
+    </cs:fontRef>
+    <cs:defRPr sz="900" kern="1200"/>
+  </cs:dataLabel>
+  <cs:dataLabelCallout>
+    <cs:lnRef idx="0"/>
+    <cs:fillRef idx="0"/>
+    <cs:effectRef idx="0"/>
+    <cs:fontRef idx="minor">
+      <a:schemeClr val="dk1">
+        <a:lumMod val="65000"/>
+        <a:lumOff val="35000"/>
+      </a:schemeClr>
+    </cs:fontRef>
+    <cs:spPr>
+      <a:solidFill>
+        <a:schemeClr val="lt1"/>
+      </a:solidFill>
+      <a:ln>
+        <a:solidFill>
+          <a:schemeClr val="dk1">
+            <a:lumMod val="25000"/>
+            <a:lumOff val="75000"/>
+          </a:schemeClr>
+        </a:solidFill>
+      </a:ln>
+    </cs:spPr>
+    <cs:defRPr sz="900" kern="1200"/>
+    <cs:bodyPr rot="0" spcFirstLastPara="1" vertOverflow="clip" horzOverflow="clip" vert="horz" wrap="square" lIns="36576" tIns="18288" rIns="36576" bIns="18288" anchor="ctr" anchorCtr="1">
+      <a:spAutoFit/>
+    </cs:bodyPr>
+  </cs:dataLabelCallout>
+  <cs:dataPoint>
+    <cs:lnRef idx="0"/>
+    <cs:fillRef idx="1">
+      <cs:styleClr val="auto"/>
+    </cs:fillRef>
+    <cs:effectRef idx="0"/>
+    <cs:fontRef idx="minor">
+      <a:schemeClr val="tx1"/>
+    </cs:fontRef>
+  </cs:dataPoint>
+  <cs:dataPoint3D>
+    <cs:lnRef idx="0"/>
+    <cs:fillRef idx="1">
+      <cs:styleClr val="auto"/>
+    </cs:fillRef>
+    <cs:effectRef idx="0"/>
+    <cs:fontRef idx="minor">
+      <a:schemeClr val="tx1"/>
+    </cs:fontRef>
+  </cs:dataPoint3D>
+  <cs:dataPointLine>
+    <cs:lnRef idx="0">
+      <cs:styleClr val="auto"/>
+    </cs:lnRef>
+    <cs:fillRef idx="1"/>
+    <cs:effectRef idx="0"/>
+    <cs:fontRef idx="minor">
+      <a:schemeClr val="tx1"/>
+    </cs:fontRef>
+    <cs:spPr>
+      <a:ln w="28575" cap="rnd">
+        <a:solidFill>
+          <a:schemeClr val="phClr"/>
+        </a:solidFill>
+        <a:round/>
+      </a:ln>
+    </cs:spPr>
+  </cs:dataPointLine>
+  <cs:dataPointMarker>
+    <cs:lnRef idx="0">
+      <cs:styleClr val="auto"/>
+    </cs:lnRef>
+    <cs:fillRef idx="1">
+      <cs:styleClr val="auto"/>
+    </cs:fillRef>
+    <cs:effectRef idx="0"/>
+    <cs:fontRef idx="minor">
+      <a:schemeClr val="tx1"/>
+    </cs:fontRef>
+    <cs:spPr>
+      <a:ln w="9525">
+        <a:solidFill>
+          <a:schemeClr val="phClr"/>
+        </a:solidFill>
+      </a:ln>
+    </cs:spPr>
+  </cs:dataPointMarker>
+  <cs:dataPointMarkerLayout symbol="circle" size="5"/>
+  <cs:dataPointWireframe>
+    <cs:lnRef idx="0">
+      <cs:styleClr val="auto"/>
+    </cs:lnRef>
+    <cs:fillRef idx="1"/>
+    <cs:effectRef idx="0"/>
+    <cs:fontRef idx="minor">
+      <a:schemeClr val="tx1"/>
+    </cs:fontRef>
+    <cs:spPr>
+      <a:ln w="9525" cap="rnd">
+        <a:solidFill>
+          <a:schemeClr val="phClr"/>
+        </a:solidFill>
+        <a:round/>
+      </a:ln>
+    </cs:spPr>
+  </cs:dataPointWireframe>
+  <cs:dataTable>
+    <cs:lnRef idx="0"/>
+    <cs:fillRef idx="0"/>
+    <cs:effectRef idx="0"/>
+    <cs:fontRef idx="minor">
+      <a:schemeClr val="tx1">
+        <a:lumMod val="65000"/>
+        <a:lumOff val="35000"/>
+      </a:schemeClr>
+    </cs:fontRef>
+    <cs:spPr>
+      <a:noFill/>
+      <a:ln w="9525" cap="flat" cmpd="sng" algn="ctr">
+        <a:solidFill>
+          <a:schemeClr val="tx1">
+            <a:lumMod val="15000"/>
+            <a:lumOff val="85000"/>
+          </a:schemeClr>
+        </a:solidFill>
+        <a:round/>
+      </a:ln>
+    </cs:spPr>
+    <cs:defRPr sz="900" kern="1200"/>
+  </cs:dataTable>
+  <cs:downBar>
+    <cs:lnRef idx="0"/>
+    <cs:fillRef idx="0"/>
+    <cs:effectRef idx="0"/>
+    <cs:fontRef idx="minor">
+      <a:schemeClr val="dk1"/>
+    </cs:fontRef>
+    <cs:spPr>
+      <a:solidFill>
+        <a:schemeClr val="dk1">
+          <a:lumMod val="65000"/>
+          <a:lumOff val="35000"/>
+        </a:schemeClr>
+      </a:solidFill>
+      <a:ln w="9525">
+        <a:solidFill>
+          <a:schemeClr val="tx1">
+            <a:lumMod val="65000"/>
+            <a:lumOff val="35000"/>
+          </a:schemeClr>
+        </a:solidFill>
+      </a:ln>
+    </cs:spPr>
+  </cs:downBar>
+  <cs:dropLine>
+    <cs:lnRef idx="0"/>
+    <cs:fillRef idx="0"/>
+    <cs:effectRef idx="0"/>
+    <cs:fontRef idx="minor">
+      <a:schemeClr val="tx1"/>
+    </cs:fontRef>
+    <cs:spPr>
+      <a:ln w="9525" cap="flat" cmpd="sng" algn="ctr">
+        <a:solidFill>
+          <a:schemeClr val="tx1">
+            <a:lumMod val="35000"/>
+            <a:lumOff val="65000"/>
+          </a:schemeClr>
+        </a:solidFill>
+        <a:round/>
+      </a:ln>
+    </cs:spPr>
+  </cs:dropLine>
+  <cs:errorBar>
+    <cs:lnRef idx="0"/>
+    <cs:fillRef idx="0"/>
+    <cs:effectRef idx="0"/>
+    <cs:fontRef idx="minor">
+      <a:schemeClr val="tx1"/>
+    </cs:fontRef>
+    <cs:spPr>
+      <a:ln w="9525" cap="flat" cmpd="sng" algn="ctr">
+        <a:solidFill>
+          <a:schemeClr val="tx1">
+            <a:lumMod val="65000"/>
+            <a:lumOff val="35000"/>
+          </a:schemeClr>
+        </a:solidFill>
+        <a:round/>
+      </a:ln>
+    </cs:spPr>
+  </cs:errorBar>
+  <cs:floor>
+    <cs:lnRef idx="0"/>
+    <cs:fillRef idx="0"/>
+    <cs:effectRef idx="0"/>
+    <cs:fontRef idx="minor">
+      <a:schemeClr val="tx1"/>
+    </cs:fontRef>
+    <cs:spPr>
+      <a:noFill/>
+      <a:ln>
+        <a:noFill/>
+      </a:ln>
+    </cs:spPr>
+  </cs:floor>
+  <cs:gridlineMajor>
+    <cs:lnRef idx="0"/>
+    <cs:fillRef idx="0"/>
+    <cs:effectRef idx="0"/>
+    <cs:fontRef idx="minor">
+      <a:schemeClr val="tx1"/>
+    </cs:fontRef>
+    <cs:spPr>
+      <a:ln w="9525" cap="flat" cmpd="sng" algn="ctr">
+        <a:solidFill>
+          <a:schemeClr val="tx1">
+            <a:lumMod val="15000"/>
+            <a:lumOff val="85000"/>
+          </a:schemeClr>
+        </a:solidFill>
+        <a:round/>
+      </a:ln>
+    </cs:spPr>
+  </cs:gridlineMajor>
+  <cs:gridlineMinor>
+    <cs:lnRef idx="0"/>
+    <cs:fillRef idx="0"/>
+    <cs:effectRef idx="0"/>
+    <cs:fontRef idx="minor">
+      <a:schemeClr val="tx1"/>
+    </cs:fontRef>
+    <cs:spPr>
+      <a:ln w="9525" cap="flat" cmpd="sng" algn="ctr">
+        <a:solidFill>
+          <a:schemeClr val="tx1">
+            <a:lumMod val="5000"/>
+            <a:lumOff val="95000"/>
+          </a:schemeClr>
+        </a:solidFill>
+        <a:round/>
+      </a:ln>
+    </cs:spPr>
+  </cs:gridlineMinor>
+  <cs:hiLoLine>
+    <cs:lnRef idx="0"/>
+    <cs:fillRef idx="0"/>
+    <cs:effectRef idx="0"/>
+    <cs:fontRef idx="minor">
+      <a:schemeClr val="tx1"/>
+    </cs:fontRef>
+    <cs:spPr>
+      <a:ln w="9525" cap="flat" cmpd="sng" algn="ctr">
+        <a:solidFill>
+          <a:schemeClr val="tx1">
+            <a:lumMod val="75000"/>
+            <a:lumOff val="25000"/>
+          </a:schemeClr>
+        </a:solidFill>
+        <a:round/>
+      </a:ln>
+    </cs:spPr>
+  </cs:hiLoLine>
+  <cs:leaderLine>
+    <cs:lnRef idx="0"/>
+    <cs:fillRef idx="0"/>
+    <cs:effectRef idx="0"/>
+    <cs:fontRef idx="minor">
+      <a:schemeClr val="tx1"/>
+    </cs:fontRef>
+    <cs:spPr>
+      <a:ln w="9525" cap="flat" cmpd="sng" algn="ctr">
+        <a:solidFill>
+          <a:schemeClr val="tx1">
+            <a:lumMod val="35000"/>
+            <a:lumOff val="65000"/>
+          </a:schemeClr>
+        </a:solidFill>
+        <a:round/>
+      </a:ln>
+    </cs:spPr>
+  </cs:leaderLine>
+  <cs:legend>
+    <cs:lnRef idx="0"/>
+    <cs:fillRef idx="0"/>
+    <cs:effectRef idx="0"/>
+    <cs:fontRef idx="minor">
+      <a:schemeClr val="tx1">
+        <a:lumMod val="65000"/>
+        <a:lumOff val="35000"/>
+      </a:schemeClr>
+    </cs:fontRef>
+    <cs:defRPr sz="900" kern="1200"/>
+  </cs:legend>
+  <cs:plotArea mods="allowNoFillOverride allowNoLineOverride">
+    <cs:lnRef idx="0"/>
+    <cs:fillRef idx="0"/>
+    <cs:effectRef idx="0"/>
+    <cs:fontRef idx="minor">
+      <a:schemeClr val="tx1"/>
+    </cs:fontRef>
+  </cs:plotArea>
+  <cs:plotArea3D mods="allowNoFillOverride allowNoLineOverride">
+    <cs:lnRef idx="0"/>
+    <cs:fillRef idx="0"/>
+    <cs:effectRef idx="0"/>
+    <cs:fontRef idx="minor">
+      <a:schemeClr val="tx1"/>
+    </cs:fontRef>
+  </cs:plotArea3D>
+  <cs:seriesAxis>
+    <cs:lnRef idx="0"/>
+    <cs:fillRef idx="0"/>
+    <cs:effectRef idx="0"/>
+    <cs:fontRef idx="minor">
+      <a:schemeClr val="tx1">
+        <a:lumMod val="65000"/>
+        <a:lumOff val="35000"/>
+      </a:schemeClr>
+    </cs:fontRef>
+    <cs:defRPr sz="900" kern="1200"/>
+  </cs:seriesAxis>
+  <cs:seriesLine>
+    <cs:lnRef idx="0"/>
+    <cs:fillRef idx="0"/>
+    <cs:effectRef idx="0"/>
+    <cs:fontRef idx="minor">
+      <a:schemeClr val="tx1"/>
+    </cs:fontRef>
+    <cs:spPr>
+      <a:ln w="9525" cap="flat" cmpd="sng" algn="ctr">
+        <a:solidFill>
+          <a:schemeClr val="tx1">
+            <a:lumMod val="35000"/>
+            <a:lumOff val="65000"/>
+          </a:schemeClr>
+        </a:solidFill>
+        <a:round/>
+      </a:ln>
+    </cs:spPr>
+  </cs:seriesLine>
+  <cs:title>
+    <cs:lnRef idx="0"/>
+    <cs:fillRef idx="0"/>
+    <cs:effectRef idx="0"/>
+    <cs:fontRef idx="minor">
+      <a:schemeClr val="tx1">
+        <a:lumMod val="65000"/>
+        <a:lumOff val="35000"/>
+      </a:schemeClr>
+    </cs:fontRef>
+    <cs:defRPr sz="1400" b="0" kern="1200" spc="0" baseline="0"/>
+  </cs:title>
+  <cs:trendline>
+    <cs:lnRef idx="0">
+      <cs:styleClr val="auto"/>
+    </cs:lnRef>
+    <cs:fillRef idx="0"/>
+    <cs:effectRef idx="0"/>
+    <cs:fontRef idx="minor">
+      <a:schemeClr val="tx1"/>
+    </cs:fontRef>
+    <cs:spPr>
+      <a:ln w="19050" cap="rnd">
+        <a:solidFill>
+          <a:schemeClr val="phClr"/>
+        </a:solidFill>
+        <a:prstDash val="sysDot"/>
+      </a:ln>
+    </cs:spPr>
+  </cs:trendline>
+  <cs:trendlineLabel>
+    <cs:lnRef idx="0"/>
+    <cs:fillRef idx="0"/>
+    <cs:effectRef idx="0"/>
+    <cs:fontRef idx="minor">
+      <a:schemeClr val="tx1">
+        <a:lumMod val="65000"/>
+        <a:lumOff val="35000"/>
+      </a:schemeClr>
+    </cs:fontRef>
+    <cs:defRPr sz="900" kern="1200"/>
+  </cs:trendlineLabel>
+  <cs:upBar>
+    <cs:lnRef idx="0"/>
+    <cs:fillRef idx="0"/>
+    <cs:effectRef idx="0"/>
+    <cs:fontRef idx="minor">
+      <a:schemeClr val="dk1"/>
+    </cs:fontRef>
+    <cs:spPr>
+      <a:solidFill>
+        <a:schemeClr val="lt1"/>
+      </a:solidFill>
+      <a:ln w="9525">
+        <a:solidFill>
+          <a:schemeClr val="tx1">
+            <a:lumMod val="15000"/>
+            <a:lumOff val="85000"/>
+          </a:schemeClr>
+        </a:solidFill>
+      </a:ln>
+    </cs:spPr>
+  </cs:upBar>
+  <cs:valueAxis>
+    <cs:lnRef idx="0"/>
+    <cs:fillRef idx="0"/>
+    <cs:effectRef idx="0"/>
+    <cs:fontRef idx="minor">
+      <a:schemeClr val="tx1">
+        <a:lumMod val="65000"/>
+        <a:lumOff val="35000"/>
+      </a:schemeClr>
+    </cs:fontRef>
+    <cs:defRPr sz="900" kern="1200"/>
+  </cs:valueAxis>
+  <cs:wall>
+    <cs:lnRef idx="0"/>
+    <cs:fillRef idx="0"/>
+    <cs:effectRef idx="0"/>
+    <cs:fontRef idx="minor">
+      <a:schemeClr val="tx1"/>
+    </cs:fontRef>
+    <cs:spPr>
+      <a:noFill/>
+      <a:ln>
+        <a:noFill/>
+      </a:ln>
+    </cs:spPr>
+  </cs:wall>
+</cs:chartStyle>
+</file>
+
+<file path=ppt/charts/style5.xml><?xml version="1.0" encoding="utf-8"?>
+<cs:chartStyle xmlns:cs="http://schemas.microsoft.com/office/drawing/2012/chartStyle" xmlns:a="http://schemas.openxmlformats.org/drawingml/2006/main" id="201">
+  <cs:axisTitle>
+    <cs:lnRef idx="0"/>
+    <cs:fillRef idx="0"/>
+    <cs:effectRef idx="0"/>
+    <cs:fontRef idx="minor">
+      <a:schemeClr val="tx1">
+        <a:lumMod val="65000"/>
+        <a:lumOff val="35000"/>
+      </a:schemeClr>
+    </cs:fontRef>
+    <cs:defRPr sz="1000" kern="1200"/>
+  </cs:axisTitle>
+  <cs:categoryAxis>
+    <cs:lnRef idx="0"/>
+    <cs:fillRef idx="0"/>
+    <cs:effectRef idx="0"/>
+    <cs:fontRef idx="minor">
+      <a:schemeClr val="tx1">
+        <a:lumMod val="65000"/>
+        <a:lumOff val="35000"/>
+      </a:schemeClr>
+    </cs:fontRef>
+    <cs:spPr>
+      <a:ln w="9525" cap="flat" cmpd="sng" algn="ctr">
+        <a:solidFill>
+          <a:schemeClr val="tx1">
+            <a:lumMod val="15000"/>
+            <a:lumOff val="85000"/>
+          </a:schemeClr>
+        </a:solidFill>
+        <a:round/>
+      </a:ln>
+    </cs:spPr>
+    <cs:defRPr sz="900" kern="1200"/>
+  </cs:categoryAxis>
+  <cs:chartArea mods="allowNoFillOverride allowNoLineOverride">
+    <cs:lnRef idx="0"/>
+    <cs:fillRef idx="0"/>
+    <cs:effectRef idx="0"/>
+    <cs:fontRef idx="minor">
+      <a:schemeClr val="tx1"/>
+    </cs:fontRef>
+    <cs:spPr>
+      <a:solidFill>
+        <a:schemeClr val="bg1"/>
+      </a:solidFill>
+      <a:ln w="9525" cap="flat" cmpd="sng" algn="ctr">
+        <a:solidFill>
+          <a:schemeClr val="tx1">
+            <a:lumMod val="15000"/>
+            <a:lumOff val="85000"/>
+          </a:schemeClr>
+        </a:solidFill>
+        <a:round/>
+      </a:ln>
+    </cs:spPr>
+    <cs:defRPr sz="1000" kern="1200"/>
+  </cs:chartArea>
+  <cs:dataLabel>
+    <cs:lnRef idx="0"/>
+    <cs:fillRef idx="0"/>
+    <cs:effectRef idx="0"/>
+    <cs:fontRef idx="minor">
+      <a:schemeClr val="tx1">
+        <a:lumMod val="75000"/>
+        <a:lumOff val="25000"/>
+      </a:schemeClr>
+    </cs:fontRef>
+    <cs:defRPr sz="900" kern="1200"/>
+  </cs:dataLabel>
+  <cs:dataLabelCallout>
+    <cs:lnRef idx="0"/>
+    <cs:fillRef idx="0"/>
+    <cs:effectRef idx="0"/>
+    <cs:fontRef idx="minor">
+      <a:schemeClr val="dk1">
+        <a:lumMod val="65000"/>
+        <a:lumOff val="35000"/>
+      </a:schemeClr>
+    </cs:fontRef>
+    <cs:spPr>
+      <a:solidFill>
+        <a:schemeClr val="lt1"/>
+      </a:solidFill>
+      <a:ln>
+        <a:solidFill>
+          <a:schemeClr val="dk1">
+            <a:lumMod val="25000"/>
+            <a:lumOff val="75000"/>
+          </a:schemeClr>
+        </a:solidFill>
+      </a:ln>
+    </cs:spPr>
+    <cs:defRPr sz="900" kern="1200"/>
+    <cs:bodyPr rot="0" spcFirstLastPara="1" vertOverflow="clip" horzOverflow="clip" vert="horz" wrap="square" lIns="36576" tIns="18288" rIns="36576" bIns="18288" anchor="ctr" anchorCtr="1">
+      <a:spAutoFit/>
+    </cs:bodyPr>
+  </cs:dataLabelCallout>
+  <cs:dataPoint>
+    <cs:lnRef idx="0"/>
+    <cs:fillRef idx="1">
+      <cs:styleClr val="auto"/>
+    </cs:fillRef>
+    <cs:effectRef idx="0"/>
+    <cs:fontRef idx="minor">
+      <a:schemeClr val="tx1"/>
+    </cs:fontRef>
+  </cs:dataPoint>
+  <cs:dataPoint3D>
+    <cs:lnRef idx="0"/>
+    <cs:fillRef idx="1">
+      <cs:styleClr val="auto"/>
+    </cs:fillRef>
+    <cs:effectRef idx="0"/>
+    <cs:fontRef idx="minor">
+      <a:schemeClr val="tx1"/>
+    </cs:fontRef>
+  </cs:dataPoint3D>
+  <cs:dataPointLine>
+    <cs:lnRef idx="0">
+      <cs:styleClr val="auto"/>
+    </cs:lnRef>
+    <cs:fillRef idx="1"/>
+    <cs:effectRef idx="0"/>
+    <cs:fontRef idx="minor">
+      <a:schemeClr val="tx1"/>
+    </cs:fontRef>
+    <cs:spPr>
+      <a:ln w="28575" cap="rnd">
+        <a:solidFill>
+          <a:schemeClr val="phClr"/>
+        </a:solidFill>
+        <a:round/>
+      </a:ln>
+    </cs:spPr>
+  </cs:dataPointLine>
+  <cs:dataPointMarker>
+    <cs:lnRef idx="0">
+      <cs:styleClr val="auto"/>
+    </cs:lnRef>
+    <cs:fillRef idx="1">
+      <cs:styleClr val="auto"/>
+    </cs:fillRef>
+    <cs:effectRef idx="0"/>
+    <cs:fontRef idx="minor">
+      <a:schemeClr val="tx1"/>
+    </cs:fontRef>
+    <cs:spPr>
+      <a:ln w="9525">
+        <a:solidFill>
+          <a:schemeClr val="phClr"/>
+        </a:solidFill>
+      </a:ln>
+    </cs:spPr>
+  </cs:dataPointMarker>
+  <cs:dataPointMarkerLayout symbol="circle" size="5"/>
+  <cs:dataPointWireframe>
+    <cs:lnRef idx="0">
+      <cs:styleClr val="auto"/>
+    </cs:lnRef>
+    <cs:fillRef idx="1"/>
+    <cs:effectRef idx="0"/>
+    <cs:fontRef idx="minor">
+      <a:schemeClr val="tx1"/>
+    </cs:fontRef>
+    <cs:spPr>
+      <a:ln w="9525" cap="rnd">
+        <a:solidFill>
+          <a:schemeClr val="phClr"/>
+        </a:solidFill>
+        <a:round/>
+      </a:ln>
+    </cs:spPr>
+  </cs:dataPointWireframe>
+  <cs:dataTable>
+    <cs:lnRef idx="0"/>
+    <cs:fillRef idx="0"/>
+    <cs:effectRef idx="0"/>
+    <cs:fontRef idx="minor">
+      <a:schemeClr val="tx1">
+        <a:lumMod val="65000"/>
+        <a:lumOff val="35000"/>
+      </a:schemeClr>
+    </cs:fontRef>
+    <cs:spPr>
+      <a:noFill/>
+      <a:ln w="9525" cap="flat" cmpd="sng" algn="ctr">
+        <a:solidFill>
+          <a:schemeClr val="tx1">
+            <a:lumMod val="15000"/>
+            <a:lumOff val="85000"/>
+          </a:schemeClr>
+        </a:solidFill>
+        <a:round/>
+      </a:ln>
+    </cs:spPr>
+    <cs:defRPr sz="900" kern="1200"/>
+  </cs:dataTable>
+  <cs:downBar>
+    <cs:lnRef idx="0"/>
+    <cs:fillRef idx="0"/>
+    <cs:effectRef idx="0"/>
+    <cs:fontRef idx="minor">
+      <a:schemeClr val="dk1"/>
+    </cs:fontRef>
+    <cs:spPr>
+      <a:solidFill>
+        <a:schemeClr val="dk1">
+          <a:lumMod val="65000"/>
+          <a:lumOff val="35000"/>
+        </a:schemeClr>
+      </a:solidFill>
+      <a:ln w="9525">
+        <a:solidFill>
+          <a:schemeClr val="tx1">
+            <a:lumMod val="65000"/>
+            <a:lumOff val="35000"/>
+          </a:schemeClr>
+        </a:solidFill>
+      </a:ln>
+    </cs:spPr>
+  </cs:downBar>
+  <cs:dropLine>
+    <cs:lnRef idx="0"/>
+    <cs:fillRef idx="0"/>
+    <cs:effectRef idx="0"/>
+    <cs:fontRef idx="minor">
+      <a:schemeClr val="tx1"/>
+    </cs:fontRef>
+    <cs:spPr>
+      <a:ln w="9525" cap="flat" cmpd="sng" algn="ctr">
+        <a:solidFill>
+          <a:schemeClr val="tx1">
+            <a:lumMod val="35000"/>
+            <a:lumOff val="65000"/>
+          </a:schemeClr>
+        </a:solidFill>
+        <a:round/>
+      </a:ln>
+    </cs:spPr>
+  </cs:dropLine>
+  <cs:errorBar>
+    <cs:lnRef idx="0"/>
+    <cs:fillRef idx="0"/>
+    <cs:effectRef idx="0"/>
+    <cs:fontRef idx="minor">
+      <a:schemeClr val="tx1"/>
+    </cs:fontRef>
+    <cs:spPr>
+      <a:ln w="9525" cap="flat" cmpd="sng" algn="ctr">
+        <a:solidFill>
+          <a:schemeClr val="tx1">
+            <a:lumMod val="65000"/>
+            <a:lumOff val="35000"/>
+          </a:schemeClr>
+        </a:solidFill>
+        <a:round/>
+      </a:ln>
+    </cs:spPr>
+  </cs:errorBar>
+  <cs:floor>
+    <cs:lnRef idx="0"/>
+    <cs:fillRef idx="0"/>
+    <cs:effectRef idx="0"/>
+    <cs:fontRef idx="minor">
+      <a:schemeClr val="tx1"/>
+    </cs:fontRef>
+    <cs:spPr>
+      <a:noFill/>
+      <a:ln>
+        <a:noFill/>
+      </a:ln>
+    </cs:spPr>
+  </cs:floor>
+  <cs:gridlineMajor>
+    <cs:lnRef idx="0"/>
+    <cs:fillRef idx="0"/>
+    <cs:effectRef idx="0"/>
+    <cs:fontRef idx="minor">
+      <a:schemeClr val="tx1"/>
+    </cs:fontRef>
+    <cs:spPr>
+      <a:ln w="9525" cap="flat" cmpd="sng" algn="ctr">
+        <a:solidFill>
+          <a:schemeClr val="tx1">
+            <a:lumMod val="15000"/>
+            <a:lumOff val="85000"/>
+          </a:schemeClr>
+        </a:solidFill>
+        <a:round/>
+      </a:ln>
+    </cs:spPr>
+  </cs:gridlineMajor>
+  <cs:gridlineMinor>
+    <cs:lnRef idx="0"/>
+    <cs:fillRef idx="0"/>
+    <cs:effectRef idx="0"/>
+    <cs:fontRef idx="minor">
+      <a:schemeClr val="tx1"/>
+    </cs:fontRef>
+    <cs:spPr>
+      <a:ln w="9525" cap="flat" cmpd="sng" algn="ctr">
+        <a:solidFill>
+          <a:schemeClr val="tx1">
+            <a:lumMod val="5000"/>
+            <a:lumOff val="95000"/>
+          </a:schemeClr>
+        </a:solidFill>
+        <a:round/>
+      </a:ln>
+    </cs:spPr>
+  </cs:gridlineMinor>
+  <cs:hiLoLine>
+    <cs:lnRef idx="0"/>
+    <cs:fillRef idx="0"/>
+    <cs:effectRef idx="0"/>
+    <cs:fontRef idx="minor">
+      <a:schemeClr val="tx1"/>
+    </cs:fontRef>
+    <cs:spPr>
+      <a:ln w="9525" cap="flat" cmpd="sng" algn="ctr">
+        <a:solidFill>
+          <a:schemeClr val="tx1">
+            <a:lumMod val="75000"/>
+            <a:lumOff val="25000"/>
+          </a:schemeClr>
+        </a:solidFill>
+        <a:round/>
+      </a:ln>
+    </cs:spPr>
+  </cs:hiLoLine>
+  <cs:leaderLine>
+    <cs:lnRef idx="0"/>
+    <cs:fillRef idx="0"/>
+    <cs:effectRef idx="0"/>
+    <cs:fontRef idx="minor">
+      <a:schemeClr val="tx1"/>
+    </cs:fontRef>
+    <cs:spPr>
+      <a:ln w="9525" cap="flat" cmpd="sng" algn="ctr">
+        <a:solidFill>
+          <a:schemeClr val="tx1">
+            <a:lumMod val="35000"/>
+            <a:lumOff val="65000"/>
+          </a:schemeClr>
+        </a:solidFill>
+        <a:round/>
+      </a:ln>
+    </cs:spPr>
+  </cs:leaderLine>
+  <cs:legend>
+    <cs:lnRef idx="0"/>
+    <cs:fillRef idx="0"/>
+    <cs:effectRef idx="0"/>
+    <cs:fontRef idx="minor">
+      <a:schemeClr val="tx1">
+        <a:lumMod val="65000"/>
+        <a:lumOff val="35000"/>
+      </a:schemeClr>
+    </cs:fontRef>
+    <cs:defRPr sz="900" kern="1200"/>
+  </cs:legend>
+  <cs:plotArea mods="allowNoFillOverride allowNoLineOverride">
+    <cs:lnRef idx="0"/>
+    <cs:fillRef idx="0"/>
+    <cs:effectRef idx="0"/>
+    <cs:fontRef idx="minor">
+      <a:schemeClr val="tx1"/>
+    </cs:fontRef>
+  </cs:plotArea>
+  <cs:plotArea3D mods="allowNoFillOverride allowNoLineOverride">
+    <cs:lnRef idx="0"/>
+    <cs:fillRef idx="0"/>
+    <cs:effectRef idx="0"/>
+    <cs:fontRef idx="minor">
+      <a:schemeClr val="tx1"/>
+    </cs:fontRef>
+  </cs:plotArea3D>
+  <cs:seriesAxis>
+    <cs:lnRef idx="0"/>
+    <cs:fillRef idx="0"/>
+    <cs:effectRef idx="0"/>
+    <cs:fontRef idx="minor">
+      <a:schemeClr val="tx1">
+        <a:lumMod val="65000"/>
+        <a:lumOff val="35000"/>
+      </a:schemeClr>
+    </cs:fontRef>
+    <cs:defRPr sz="900" kern="1200"/>
+  </cs:seriesAxis>
+  <cs:seriesLine>
+    <cs:lnRef idx="0"/>
+    <cs:fillRef idx="0"/>
+    <cs:effectRef idx="0"/>
+    <cs:fontRef idx="minor">
+      <a:schemeClr val="tx1"/>
+    </cs:fontRef>
+    <cs:spPr>
+      <a:ln w="9525" cap="flat" cmpd="sng" algn="ctr">
+        <a:solidFill>
+          <a:schemeClr val="tx1">
+            <a:lumMod val="35000"/>
+            <a:lumOff val="65000"/>
+          </a:schemeClr>
+        </a:solidFill>
+        <a:round/>
+      </a:ln>
+    </cs:spPr>
+  </cs:seriesLine>
+  <cs:title>
+    <cs:lnRef idx="0"/>
+    <cs:fillRef idx="0"/>
+    <cs:effectRef idx="0"/>
+    <cs:fontRef idx="minor">
+      <a:schemeClr val="tx1">
+        <a:lumMod val="65000"/>
+        <a:lumOff val="35000"/>
+      </a:schemeClr>
+    </cs:fontRef>
+    <cs:defRPr sz="1400" b="0" kern="1200" spc="0" baseline="0"/>
+  </cs:title>
+  <cs:trendline>
+    <cs:lnRef idx="0">
+      <cs:styleClr val="auto"/>
+    </cs:lnRef>
+    <cs:fillRef idx="0"/>
+    <cs:effectRef idx="0"/>
+    <cs:fontRef idx="minor">
+      <a:schemeClr val="tx1"/>
+    </cs:fontRef>
+    <cs:spPr>
+      <a:ln w="19050" cap="rnd">
+        <a:solidFill>
+          <a:schemeClr val="phClr"/>
+        </a:solidFill>
+        <a:prstDash val="sysDot"/>
+      </a:ln>
+    </cs:spPr>
+  </cs:trendline>
+  <cs:trendlineLabel>
+    <cs:lnRef idx="0"/>
+    <cs:fillRef idx="0"/>
+    <cs:effectRef idx="0"/>
+    <cs:fontRef idx="minor">
+      <a:schemeClr val="tx1">
+        <a:lumMod val="65000"/>
+        <a:lumOff val="35000"/>
+      </a:schemeClr>
+    </cs:fontRef>
+    <cs:defRPr sz="900" kern="1200"/>
+  </cs:trendlineLabel>
+  <cs:upBar>
+    <cs:lnRef idx="0"/>
+    <cs:fillRef idx="0"/>
+    <cs:effectRef idx="0"/>
+    <cs:fontRef idx="minor">
+      <a:schemeClr val="dk1"/>
+    </cs:fontRef>
+    <cs:spPr>
+      <a:solidFill>
+        <a:schemeClr val="lt1"/>
+      </a:solidFill>
+      <a:ln w="9525">
+        <a:solidFill>
+          <a:schemeClr val="tx1">
+            <a:lumMod val="15000"/>
+            <a:lumOff val="85000"/>
+          </a:schemeClr>
+        </a:solidFill>
+      </a:ln>
+    </cs:spPr>
+  </cs:upBar>
+  <cs:valueAxis>
+    <cs:lnRef idx="0"/>
+    <cs:fillRef idx="0"/>
+    <cs:effectRef idx="0"/>
+    <cs:fontRef idx="minor">
+      <a:schemeClr val="tx1">
+        <a:lumMod val="65000"/>
+        <a:lumOff val="35000"/>
+      </a:schemeClr>
+    </cs:fontRef>
+    <cs:defRPr sz="900" kern="1200"/>
+  </cs:valueAxis>
+  <cs:wall>
+    <cs:lnRef idx="0"/>
+    <cs:fillRef idx="0"/>
+    <cs:effectRef idx="0"/>
+    <cs:fontRef idx="minor">
+      <a:schemeClr val="tx1"/>
+    </cs:fontRef>
+    <cs:spPr>
+      <a:noFill/>
+      <a:ln>
+        <a:noFill/>
+      </a:ln>
+    </cs:spPr>
+  </cs:wall>
+</cs:chartStyle>
+</file>
+
 <file path=ppt/drawings/drawing1.xml><?xml version="1.0" encoding="utf-8"?>
 <c:userShapes xmlns:c="http://schemas.openxmlformats.org/drawingml/2006/chart">
   <cdr:relSizeAnchor xmlns:cdr="http://schemas.openxmlformats.org/drawingml/2006/chartDrawing">
@@ -14364,70 +17412,7 @@
                 <a:latin typeface="Calibri"/>
               </a:defRPr>
             </a:pPr>
-            <a:r>
-              <a:rPr lang="es-419" dirty="0"/>
-              <a:t>Grafico </a:t>
-            </a:r>
-            <a:r>
-              <a:rPr dirty="0"/>
-              <a:t>% </a:t>
-            </a:r>
-            <a:r>
-              <a:rPr dirty="0" err="1"/>
-              <a:t>por</a:t>
-            </a:r>
-            <a:r>
-              <a:rPr dirty="0"/>
-              <a:t> </a:t>
-            </a:r>
-            <a:r>
-              <a:rPr dirty="0" err="1"/>
-              <a:t>género</a:t>
-            </a:r>
-            <a:r>
-              <a:rPr dirty="0"/>
-              <a:t> </a:t>
-            </a:r>
-            <a:r>
-              <a:rPr dirty="0" err="1"/>
-              <a:t>en</a:t>
-            </a:r>
-            <a:r>
-              <a:rPr dirty="0"/>
-              <a:t> </a:t>
-            </a:r>
-            <a:r>
-              <a:rPr dirty="0" err="1"/>
-              <a:t>cada</a:t>
-            </a:r>
-            <a:r>
-              <a:rPr dirty="0"/>
-              <a:t> </a:t>
-            </a:r>
-            <a:r>
-              <a:rPr dirty="0" err="1"/>
-              <a:t>línea</a:t>
-            </a:r>
-            <a:r>
-              <a:rPr dirty="0"/>
-              <a:t> de </a:t>
-            </a:r>
-            <a:r>
-              <a:rPr dirty="0" err="1"/>
-              <a:t>producto</a:t>
-            </a:r>
-            <a:r>
-              <a:rPr dirty="0"/>
-              <a:t> (barras 100% </a:t>
-            </a:r>
-            <a:r>
-              <a:rPr dirty="0" err="1"/>
-              <a:t>apiladas</a:t>
-            </a:r>
-            <a:r>
-              <a:rPr dirty="0"/>
-              <a:t>)</a:t>
-            </a:r>
+            <a:endParaRPr dirty="0"/>
           </a:p>
         </p:txBody>
       </p:sp>
@@ -15303,6 +18288,36 @@
           </a:p>
         </p:txBody>
       </p:sp>
+      <p:graphicFrame>
+        <p:nvGraphicFramePr>
+          <p:cNvPr id="29" name="Gráfico 28">
+            <a:extLst>
+              <a:ext uri="{FF2B5EF4-FFF2-40B4-BE49-F238E27FC236}">
+                <a16:creationId xmlns:a16="http://schemas.microsoft.com/office/drawing/2014/main" id="{F45C9569-2238-09E3-BDD6-2072435EFA4F}"/>
+              </a:ext>
+            </a:extLst>
+          </p:cNvPr>
+          <p:cNvGraphicFramePr>
+            <a:graphicFrameLocks/>
+          </p:cNvGraphicFramePr>
+          <p:nvPr>
+            <p:extLst>
+              <p:ext uri="{D42A27DB-BD31-4B8C-83A1-F6EECF244321}">
+                <p14:modId xmlns:p14="http://schemas.microsoft.com/office/powerpoint/2010/main" val="700563449"/>
+              </p:ext>
+            </p:extLst>
+          </p:nvPr>
+        </p:nvGraphicFramePr>
+        <p:xfrm>
+          <a:off x="201706" y="1536192"/>
+          <a:ext cx="11220041" cy="2834640"/>
+        </p:xfrm>
+        <a:graphic>
+          <a:graphicData uri="http://schemas.openxmlformats.org/drawingml/2006/chart">
+            <c:chart xmlns:c="http://schemas.openxmlformats.org/drawingml/2006/chart" xmlns:r="http://schemas.openxmlformats.org/officeDocument/2006/relationships" r:id="rId2"/>
+          </a:graphicData>
+        </a:graphic>
+      </p:graphicFrame>
     </p:spTree>
   </p:cSld>
   <p:clrMapOvr>
@@ -16203,38 +19218,6 @@
                 <a:latin typeface="Calibri"/>
               </a:defRPr>
             </a:pPr>
-            <a:r>
-              <a:rPr lang="es-419" dirty="0"/>
-              <a:t>Grafico </a:t>
-            </a:r>
-            <a:r>
-              <a:rPr dirty="0" err="1"/>
-              <a:t>ventas</a:t>
-            </a:r>
-            <a:r>
-              <a:rPr dirty="0"/>
-              <a:t> y </a:t>
-            </a:r>
-            <a:r>
-              <a:rPr dirty="0" err="1"/>
-              <a:t>transacciones</a:t>
-            </a:r>
-            <a:r>
-              <a:rPr dirty="0"/>
-              <a:t> </a:t>
-            </a:r>
-            <a:r>
-              <a:rPr dirty="0" err="1"/>
-              <a:t>por</a:t>
-            </a:r>
-            <a:r>
-              <a:rPr dirty="0"/>
-              <a:t> </a:t>
-            </a:r>
-            <a:r>
-              <a:rPr dirty="0" err="1"/>
-              <a:t>sucursal</a:t>
-            </a:r>
             <a:endParaRPr dirty="0"/>
           </a:p>
         </p:txBody>
@@ -16275,6 +19258,36 @@
           </a:p>
         </p:txBody>
       </p:sp>
+      <p:graphicFrame>
+        <p:nvGraphicFramePr>
+          <p:cNvPr id="25" name="Gráfico 24">
+            <a:extLst>
+              <a:ext uri="{FF2B5EF4-FFF2-40B4-BE49-F238E27FC236}">
+                <a16:creationId xmlns:a16="http://schemas.microsoft.com/office/drawing/2014/main" id="{F21D9F83-00AA-76CD-4D76-10838FDE0FCF}"/>
+              </a:ext>
+            </a:extLst>
+          </p:cNvPr>
+          <p:cNvGraphicFramePr>
+            <a:graphicFrameLocks/>
+          </p:cNvGraphicFramePr>
+          <p:nvPr>
+            <p:extLst>
+              <p:ext uri="{D42A27DB-BD31-4B8C-83A1-F6EECF244321}">
+                <p14:modId xmlns:p14="http://schemas.microsoft.com/office/powerpoint/2010/main" val="2109632787"/>
+              </p:ext>
+            </p:extLst>
+          </p:nvPr>
+        </p:nvGraphicFramePr>
+        <p:xfrm>
+          <a:off x="1178112" y="4288536"/>
+          <a:ext cx="9530976" cy="1947672"/>
+        </p:xfrm>
+        <a:graphic>
+          <a:graphicData uri="http://schemas.openxmlformats.org/drawingml/2006/chart">
+            <c:chart xmlns:c="http://schemas.openxmlformats.org/drawingml/2006/chart" xmlns:r="http://schemas.openxmlformats.org/officeDocument/2006/relationships" r:id="rId2"/>
+          </a:graphicData>
+        </a:graphic>
+      </p:graphicFrame>
     </p:spTree>
   </p:cSld>
   <p:clrMapOvr>

--- a/Taller/Archivos notables/Desafio3_Presentacion_v3.pptx
+++ b/Taller/Archivos notables/Desafio3_Presentacion_v3.pptx
@@ -2912,7 +2912,9 @@
           </c:tx>
           <c:spPr>
             <a:solidFill>
-              <a:schemeClr val="accent1"/>
+              <a:schemeClr val="bg1">
+                <a:lumMod val="50000"/>
+              </a:schemeClr>
             </a:solidFill>
             <a:ln>
               <a:noFill/>
@@ -2971,7 +2973,9 @@
           </c:tx>
           <c:spPr>
             <a:solidFill>
-              <a:schemeClr val="accent2"/>
+              <a:schemeClr val="bg1">
+                <a:lumMod val="65000"/>
+              </a:schemeClr>
             </a:solidFill>
             <a:ln>
               <a:noFill/>
@@ -3030,7 +3034,9 @@
           </c:tx>
           <c:spPr>
             <a:solidFill>
-              <a:schemeClr val="accent3"/>
+              <a:schemeClr val="bg1">
+                <a:lumMod val="75000"/>
+              </a:schemeClr>
             </a:solidFill>
             <a:ln>
               <a:noFill/>
@@ -3148,7 +3154,9 @@
           </c:tx>
           <c:spPr>
             <a:solidFill>
-              <a:schemeClr val="accent5"/>
+              <a:schemeClr val="bg1">
+                <a:lumMod val="85000"/>
+              </a:schemeClr>
             </a:solidFill>
             <a:ln>
               <a:noFill/>
@@ -3207,7 +3215,10 @@
           </c:tx>
           <c:spPr>
             <a:solidFill>
-              <a:schemeClr val="accent6"/>
+              <a:schemeClr val="bg1">
+                <a:lumMod val="85000"/>
+                <a:alpha val="39572"/>
+              </a:schemeClr>
             </a:solidFill>
             <a:ln>
               <a:noFill/>
@@ -3322,20 +3333,6 @@
         </c:scaling>
         <c:delete val="0"/>
         <c:axPos val="b"/>
-        <c:majorGridlines>
-          <c:spPr>
-            <a:ln w="9525" cap="flat" cmpd="sng" algn="ctr">
-              <a:solidFill>
-                <a:schemeClr val="tx1">
-                  <a:lumMod val="15000"/>
-                  <a:lumOff val="85000"/>
-                </a:schemeClr>
-              </a:solidFill>
-              <a:round/>
-            </a:ln>
-            <a:effectLst/>
-          </c:spPr>
-        </c:majorGridlines>
         <c:numFmt formatCode="General" sourceLinked="1"/>
         <c:majorTickMark val="none"/>
         <c:minorTickMark val="none"/>
@@ -4457,7 +4454,7 @@
           </c:tx>
           <c:spPr>
             <a:solidFill>
-              <a:schemeClr val="accent1"/>
+              <a:srgbClr val="B25A37"/>
             </a:solidFill>
             <a:ln>
               <a:noFill/>
@@ -4540,7 +4537,7 @@
           </c:tx>
           <c:spPr>
             <a:solidFill>
-              <a:schemeClr val="accent2"/>
+              <a:srgbClr val="648C6E"/>
             </a:solidFill>
             <a:ln>
               <a:noFill/>
@@ -4623,7 +4620,7 @@
           </c:tx>
           <c:spPr>
             <a:solidFill>
-              <a:schemeClr val="accent3"/>
+              <a:srgbClr val="1E3C30"/>
             </a:solidFill>
             <a:ln>
               <a:noFill/>
@@ -4910,7 +4907,7 @@
   </mc:AlternateContent>
   <c:pivotSource>
     <c:name>[Supermarket Sales Dataset v1.0.xlsx]4!TablaDinámica2</c:name>
-    <c:fmtId val="6"/>
+    <c:fmtId val="9"/>
   </c:pivotSource>
   <c:chart>
     <c:autoTitleDeleted val="0"/>
@@ -5846,7 +5843,7 @@
         </c:manualLayout>
       </c:layout>
       <c:barChart>
-        <c:barDir val="col"/>
+        <c:barDir val="bar"/>
         <c:grouping val="percentStacked"/>
         <c:varyColors val="0"/>
         <c:ser>
@@ -5903,7 +5900,7 @@
             <c:numRef>
               <c:f>'4'!$B$3:$B$9</c:f>
               <c:numCache>
-                <c:formatCode>General</c:formatCode>
+                <c:formatCode>0</c:formatCode>
                 <c:ptCount val="6"/>
                 <c:pt idx="0">
                   <c:v>61040.741848872705</c:v>
@@ -5928,7 +5925,7 @@
           </c:val>
           <c:extLst>
             <c:ext xmlns:c16="http://schemas.microsoft.com/office/drawing/2014/chart" uri="{C3380CC4-5D6E-409C-BE32-E72D297353CC}">
-              <c16:uniqueId val="{00000000-39E6-3247-98A6-F1FC545AE0AD}"/>
+              <c16:uniqueId val="{00000000-6AD0-E74F-8CFB-69B0756EA0F2}"/>
             </c:ext>
           </c:extLst>
         </c:ser>
@@ -5986,7 +5983,7 @@
             <c:numRef>
               <c:f>'4'!$C$3:$C$9</c:f>
               <c:numCache>
-                <c:formatCode>General</c:formatCode>
+                <c:formatCode>0</c:formatCode>
                 <c:ptCount val="6"/>
                 <c:pt idx="0">
                   <c:v>60644.669259598784</c:v>
@@ -6011,7 +6008,7 @@
           </c:val>
           <c:extLst>
             <c:ext xmlns:c16="http://schemas.microsoft.com/office/drawing/2014/chart" uri="{C3380CC4-5D6E-409C-BE32-E72D297353CC}">
-              <c16:uniqueId val="{00000001-39E6-3247-98A6-F1FC545AE0AD}"/>
+              <c16:uniqueId val="{00000001-6AD0-E74F-8CFB-69B0756EA0F2}"/>
             </c:ext>
           </c:extLst>
         </c:ser>
@@ -6034,7 +6031,7 @@
           <c:orientation val="minMax"/>
         </c:scaling>
         <c:delete val="0"/>
-        <c:axPos val="b"/>
+        <c:axPos val="l"/>
         <c:numFmt formatCode="General" sourceLinked="1"/>
         <c:majorTickMark val="none"/>
         <c:minorTickMark val="none"/>
@@ -6085,7 +6082,7 @@
           <c:orientation val="minMax"/>
         </c:scaling>
         <c:delete val="0"/>
-        <c:axPos val="l"/>
+        <c:axPos val="b"/>
         <c:numFmt formatCode="0%" sourceLinked="1"/>
         <c:majorTickMark val="none"/>
         <c:minorTickMark val="none"/>
@@ -6129,37 +6126,6 @@
         <a:effectLst/>
       </c:spPr>
     </c:plotArea>
-    <c:legend>
-      <c:legendPos val="r"/>
-      <c:overlay val="0"/>
-      <c:spPr>
-        <a:noFill/>
-        <a:ln>
-          <a:noFill/>
-        </a:ln>
-        <a:effectLst/>
-      </c:spPr>
-      <c:txPr>
-        <a:bodyPr rot="0" spcFirstLastPara="1" vertOverflow="ellipsis" vert="horz" wrap="square" anchor="ctr" anchorCtr="1"/>
-        <a:lstStyle/>
-        <a:p>
-          <a:pPr>
-            <a:defRPr sz="900" b="0" i="0" u="none" strike="noStrike" kern="1200" baseline="0">
-              <a:solidFill>
-                <a:schemeClr val="tx1">
-                  <a:lumMod val="65000"/>
-                  <a:lumOff val="35000"/>
-                </a:schemeClr>
-              </a:solidFill>
-              <a:latin typeface="+mn-lt"/>
-              <a:ea typeface="+mn-ea"/>
-              <a:cs typeface="+mn-cs"/>
-            </a:defRPr>
-          </a:pPr>
-          <a:endParaRPr lang="es-UY"/>
-        </a:p>
-      </c:txPr>
-    </c:legend>
     <c:plotVisOnly val="1"/>
     <c:dispBlanksAs val="gap"/>
     <c:showDLblsOverMax val="0"/>
@@ -6197,7 +6163,6 @@
         <c14:dropZoneFilter val="1"/>
         <c14:dropZoneCategories val="1"/>
         <c14:dropZoneData val="1"/>
-        <c14:dropZoneSeries val="1"/>
         <c14:dropZonesVisible val="1"/>
       </c14:pivotOptions>
     </c:ext>
@@ -6628,7 +6593,7 @@
       <c:barChart>
         <c:barDir val="bar"/>
         <c:grouping val="clustered"/>
-        <c:varyColors val="0"/>
+        <c:varyColors val="1"/>
         <c:ser>
           <c:idx val="0"/>
           <c:order val="0"/>
@@ -6643,16 +6608,64 @@
               </c:strCache>
             </c:strRef>
           </c:tx>
-          <c:spPr>
-            <a:solidFill>
-              <a:schemeClr val="accent1"/>
-            </a:solidFill>
-            <a:ln>
-              <a:noFill/>
-            </a:ln>
-            <a:effectLst/>
-          </c:spPr>
           <c:invertIfNegative val="0"/>
+          <c:dPt>
+            <c:idx val="0"/>
+            <c:invertIfNegative val="0"/>
+            <c:bubble3D val="0"/>
+            <c:spPr>
+              <a:solidFill>
+                <a:srgbClr val="648C6E"/>
+              </a:solidFill>
+              <a:ln>
+                <a:noFill/>
+              </a:ln>
+              <a:effectLst/>
+            </c:spPr>
+            <c:extLst>
+              <c:ext xmlns:c16="http://schemas.microsoft.com/office/drawing/2014/chart" uri="{C3380CC4-5D6E-409C-BE32-E72D297353CC}">
+                <c16:uniqueId val="{00000003-C349-E140-92EE-38C7665914A4}"/>
+              </c:ext>
+            </c:extLst>
+          </c:dPt>
+          <c:dPt>
+            <c:idx val="1"/>
+            <c:invertIfNegative val="0"/>
+            <c:bubble3D val="0"/>
+            <c:spPr>
+              <a:solidFill>
+                <a:srgbClr val="B25A37"/>
+              </a:solidFill>
+              <a:ln>
+                <a:noFill/>
+              </a:ln>
+              <a:effectLst/>
+            </c:spPr>
+            <c:extLst>
+              <c:ext xmlns:c16="http://schemas.microsoft.com/office/drawing/2014/chart" uri="{C3380CC4-5D6E-409C-BE32-E72D297353CC}">
+                <c16:uniqueId val="{00000002-C349-E140-92EE-38C7665914A4}"/>
+              </c:ext>
+            </c:extLst>
+          </c:dPt>
+          <c:dPt>
+            <c:idx val="2"/>
+            <c:invertIfNegative val="0"/>
+            <c:bubble3D val="0"/>
+            <c:spPr>
+              <a:solidFill>
+                <a:srgbClr val="1E3C30"/>
+              </a:solidFill>
+              <a:ln>
+                <a:noFill/>
+              </a:ln>
+              <a:effectLst/>
+            </c:spPr>
+            <c:extLst>
+              <c:ext xmlns:c16="http://schemas.microsoft.com/office/drawing/2014/chart" uri="{C3380CC4-5D6E-409C-BE32-E72D297353CC}">
+                <c16:uniqueId val="{00000001-C349-E140-92EE-38C7665914A4}"/>
+              </c:ext>
+            </c:extLst>
+          </c:dPt>
           <c:cat>
             <c:strRef>
               <c:f>'5'!$A$4:$A$7</c:f>
@@ -12803,8 +12816,34 @@
               </a:defRPr>
             </a:pPr>
             <a:r>
-              <a:t>Análisis de datos para 3 campañas de marketing mensuales</a:t>
-            </a:r>
+              <a:rPr dirty="0" err="1"/>
+              <a:t>Análisis</a:t>
+            </a:r>
+            <a:r>
+              <a:rPr dirty="0"/>
+              <a:t> de </a:t>
+            </a:r>
+            <a:r>
+              <a:rPr dirty="0" err="1"/>
+              <a:t>datos</a:t>
+            </a:r>
+            <a:r>
+              <a:rPr dirty="0"/>
+              <a:t> para 3 </a:t>
+            </a:r>
+            <a:r>
+              <a:rPr dirty="0" err="1"/>
+              <a:t>campañas</a:t>
+            </a:r>
+            <a:r>
+              <a:rPr dirty="0"/>
+              <a:t> de marketing </a:t>
+            </a:r>
+            <a:r>
+              <a:rPr dirty="0" err="1"/>
+              <a:t>mensuales</a:t>
+            </a:r>
+            <a:endParaRPr dirty="0"/>
           </a:p>
         </p:txBody>
       </p:sp>
@@ -12861,7 +12900,7 @@
         <p:spPr>
           <a:xfrm>
             <a:off x="640080" y="4526280"/>
-            <a:ext cx="8229600" cy="365760"/>
+            <a:ext cx="8229600" cy="846386"/>
           </a:xfrm>
           <a:prstGeom prst="rect">
             <a:avLst/>
@@ -12883,8 +12922,49 @@
               </a:defRPr>
             </a:pPr>
             <a:r>
-              <a:t>Cliente: Cadena de Supermercados  |  3 sucursales  |  Enero – Marzo</a:t>
-            </a:r>
+              <a:rPr lang="es-419" sz="1600" b="1" dirty="0"/>
+              <a:t>Participantes</a:t>
+            </a:r>
+          </a:p>
+          <a:p>
+            <a:pPr algn="l">
+              <a:defRPr sz="1100" b="0" i="1">
+                <a:solidFill>
+                  <a:srgbClr val="8CAA91"/>
+                </a:solidFill>
+                <a:latin typeface="Calibri"/>
+              </a:defRPr>
+            </a:pPr>
+            <a:endParaRPr lang="es-419" dirty="0"/>
+          </a:p>
+          <a:p>
+            <a:pPr algn="l">
+              <a:defRPr sz="1100" b="0" i="1">
+                <a:solidFill>
+                  <a:srgbClr val="8CAA91"/>
+                </a:solidFill>
+                <a:latin typeface="Calibri"/>
+              </a:defRPr>
+            </a:pPr>
+            <a:r>
+              <a:rPr lang="es-419" dirty="0"/>
+              <a:t>Javier Fernández - 172271</a:t>
+            </a:r>
+          </a:p>
+          <a:p>
+            <a:pPr algn="l">
+              <a:defRPr sz="1100" b="0" i="1">
+                <a:solidFill>
+                  <a:srgbClr val="8CAA91"/>
+                </a:solidFill>
+                <a:latin typeface="Calibri"/>
+              </a:defRPr>
+            </a:pPr>
+            <a:r>
+              <a:rPr lang="es-419" dirty="0"/>
+              <a:t>Facundo Duarte - 256083</a:t>
+            </a:r>
+            <a:endParaRPr dirty="0"/>
           </a:p>
         </p:txBody>
       </p:sp>
@@ -13542,6 +13622,7 @@
               </a:defRPr>
             </a:pPr>
             <a:r>
+              <a:rPr dirty="0"/>
               <a:t>Yangon</a:t>
             </a:r>
           </a:p>
@@ -13556,7 +13637,7 @@
         <p:spPr>
           <a:xfrm>
             <a:off x="804672" y="2587752"/>
-            <a:ext cx="3154680" cy="347472"/>
+            <a:ext cx="3154680" cy="307777"/>
           </a:xfrm>
           <a:prstGeom prst="rect">
             <a:avLst/>
@@ -13578,8 +13659,22 @@
               </a:defRPr>
             </a:pPr>
             <a:r>
-              <a:t>Capital comercial y económica</a:t>
-            </a:r>
+              <a:rPr sz="1400" dirty="0"/>
+              <a:t>Capital </a:t>
+            </a:r>
+            <a:r>
+              <a:rPr sz="1400" dirty="0" err="1"/>
+              <a:t>comercial</a:t>
+            </a:r>
+            <a:r>
+              <a:rPr sz="1400" dirty="0"/>
+              <a:t> y </a:t>
+            </a:r>
+            <a:r>
+              <a:rPr sz="1400" dirty="0" err="1"/>
+              <a:t>económica</a:t>
+            </a:r>
+            <a:endParaRPr sz="1400" dirty="0"/>
           </a:p>
         </p:txBody>
       </p:sp>
@@ -13592,7 +13687,7 @@
         <p:spPr>
           <a:xfrm>
             <a:off x="804672" y="2944368"/>
-            <a:ext cx="3154680" cy="292608"/>
+            <a:ext cx="3154680" cy="307777"/>
           </a:xfrm>
           <a:prstGeom prst="rect">
             <a:avLst/>
@@ -13614,6 +13709,7 @@
               </a:defRPr>
             </a:pPr>
             <a:r>
+              <a:rPr sz="1400" dirty="0"/>
               <a:t>5.9M hab.</a:t>
             </a:r>
           </a:p>
@@ -13671,8 +13767,8 @@
         </p:nvSpPr>
         <p:spPr>
           <a:xfrm>
-            <a:off x="804672" y="3383280"/>
-            <a:ext cx="3154680" cy="411480"/>
+            <a:off x="804672" y="3584895"/>
+            <a:ext cx="3154680" cy="523220"/>
           </a:xfrm>
           <a:prstGeom prst="rect">
             <a:avLst/>
@@ -13694,7 +13790,16 @@
               </a:defRPr>
             </a:pPr>
             <a:r>
-              <a:t>340 transacciones · Ticket prom: $312 · Rating 7.0</a:t>
+              <a:rPr sz="1400" dirty="0"/>
+              <a:t>340 </a:t>
+            </a:r>
+            <a:r>
+              <a:rPr sz="1400" dirty="0" err="1"/>
+              <a:t>transacciones</a:t>
+            </a:r>
+            <a:r>
+              <a:rPr sz="1400" dirty="0"/>
+              <a:t> · Ticket prom: $312 · Rating 7.0</a:t>
             </a:r>
           </a:p>
         </p:txBody>
@@ -13707,8 +13812,8 @@
         </p:nvSpPr>
         <p:spPr>
           <a:xfrm>
-            <a:off x="804672" y="3840480"/>
-            <a:ext cx="3154680" cy="2103120"/>
+            <a:off x="804672" y="4486811"/>
+            <a:ext cx="3154680" cy="1077218"/>
           </a:xfrm>
           <a:prstGeom prst="rect">
             <a:avLst/>
@@ -13730,7 +13835,88 @@
               </a:defRPr>
             </a:pPr>
             <a:r>
-              <a:t>La ciudad más cosmopolita. Mayor volumen pero ticket más bajo. El consumidor es el más diverso y competido.</a:t>
+              <a:rPr sz="1600" dirty="0"/>
+              <a:t>La ciudad </a:t>
+            </a:r>
+            <a:r>
+              <a:rPr sz="1600" dirty="0" err="1"/>
+              <a:t>más</a:t>
+            </a:r>
+            <a:r>
+              <a:rPr sz="1600" dirty="0"/>
+              <a:t> </a:t>
+            </a:r>
+            <a:r>
+              <a:rPr sz="1600" dirty="0" err="1"/>
+              <a:t>cosmopolita</a:t>
+            </a:r>
+            <a:r>
+              <a:rPr sz="1600" dirty="0"/>
+              <a:t>. Mayor </a:t>
+            </a:r>
+            <a:r>
+              <a:rPr sz="1600" dirty="0" err="1"/>
+              <a:t>volumen</a:t>
+            </a:r>
+            <a:r>
+              <a:rPr sz="1600" dirty="0"/>
+              <a:t> </a:t>
+            </a:r>
+            <a:r>
+              <a:rPr sz="1600" dirty="0" err="1"/>
+              <a:t>pero</a:t>
+            </a:r>
+            <a:r>
+              <a:rPr sz="1600" dirty="0"/>
+              <a:t> ticket </a:t>
+            </a:r>
+            <a:r>
+              <a:rPr sz="1600" dirty="0" err="1"/>
+              <a:t>más</a:t>
+            </a:r>
+            <a:r>
+              <a:rPr sz="1600" dirty="0"/>
+              <a:t> bajo. El </a:t>
+            </a:r>
+            <a:r>
+              <a:rPr sz="1600" dirty="0" err="1"/>
+              <a:t>consumidor</a:t>
+            </a:r>
+            <a:r>
+              <a:rPr sz="1600" dirty="0"/>
+              <a:t> es </a:t>
+            </a:r>
+            <a:r>
+              <a:rPr sz="1600" dirty="0" err="1"/>
+              <a:t>el</a:t>
+            </a:r>
+            <a:r>
+              <a:rPr sz="1600" dirty="0"/>
+              <a:t> </a:t>
+            </a:r>
+            <a:r>
+              <a:rPr sz="1600" dirty="0" err="1"/>
+              <a:t>más</a:t>
+            </a:r>
+            <a:r>
+              <a:rPr sz="1600" dirty="0"/>
+              <a:t> </a:t>
+            </a:r>
+            <a:r>
+              <a:rPr sz="1600" dirty="0" err="1"/>
+              <a:t>diverso</a:t>
+            </a:r>
+            <a:r>
+              <a:rPr sz="1600" dirty="0"/>
+              <a:t> y </a:t>
+            </a:r>
+            <a:r>
+              <a:rPr sz="1600" dirty="0" err="1"/>
+              <a:t>competido</a:t>
+            </a:r>
+            <a:r>
+              <a:rPr sz="1600" dirty="0"/>
+              <a:t>.</a:t>
             </a:r>
           </a:p>
         </p:txBody>
@@ -13906,7 +14092,7 @@
         <p:spPr>
           <a:xfrm>
             <a:off x="4690872" y="2587752"/>
-            <a:ext cx="3154680" cy="347472"/>
+            <a:ext cx="3154680" cy="307777"/>
           </a:xfrm>
           <a:prstGeom prst="rect">
             <a:avLst/>
@@ -13928,8 +14114,14 @@
               </a:defRPr>
             </a:pPr>
             <a:r>
-              <a:t>Centro cultural del norte</a:t>
-            </a:r>
+              <a:rPr sz="1400" dirty="0"/>
+              <a:t>Centro cultural del </a:t>
+            </a:r>
+            <a:r>
+              <a:rPr sz="1400" dirty="0" err="1"/>
+              <a:t>norte</a:t>
+            </a:r>
+            <a:endParaRPr sz="1400" dirty="0"/>
           </a:p>
         </p:txBody>
       </p:sp>
@@ -13942,7 +14134,7 @@
         <p:spPr>
           <a:xfrm>
             <a:off x="4690872" y="2944368"/>
-            <a:ext cx="3154680" cy="292608"/>
+            <a:ext cx="3154680" cy="307777"/>
           </a:xfrm>
           <a:prstGeom prst="rect">
             <a:avLst/>
@@ -13964,6 +14156,7 @@
               </a:defRPr>
             </a:pPr>
             <a:r>
+              <a:rPr sz="1400" dirty="0"/>
               <a:t>1.6M hab.</a:t>
             </a:r>
           </a:p>
@@ -14022,7 +14215,7 @@
         <p:spPr>
           <a:xfrm>
             <a:off x="4690872" y="3383280"/>
-            <a:ext cx="3154680" cy="411480"/>
+            <a:ext cx="3154680" cy="523220"/>
           </a:xfrm>
           <a:prstGeom prst="rect">
             <a:avLst/>
@@ -14044,7 +14237,16 @@
               </a:defRPr>
             </a:pPr>
             <a:r>
-              <a:t>332 transacciones · Ticket prom: $320 · Rating 6.8</a:t>
+              <a:rPr sz="1400" dirty="0"/>
+              <a:t>332 </a:t>
+            </a:r>
+            <a:r>
+              <a:rPr sz="1400" dirty="0" err="1"/>
+              <a:t>transacciones</a:t>
+            </a:r>
+            <a:r>
+              <a:rPr sz="1400" dirty="0"/>
+              <a:t> · Ticket prom: $320 · Rating 6.8</a:t>
             </a:r>
           </a:p>
         </p:txBody>
@@ -14057,8 +14259,8 @@
         </p:nvSpPr>
         <p:spPr>
           <a:xfrm>
-            <a:off x="4690872" y="3840480"/>
-            <a:ext cx="3154680" cy="2103120"/>
+            <a:off x="4690872" y="4573107"/>
+            <a:ext cx="3154680" cy="830997"/>
           </a:xfrm>
           <a:prstGeom prst="rect">
             <a:avLst/>
@@ -14080,7 +14282,44 @@
               </a:defRPr>
             </a:pPr>
             <a:r>
-              <a:t>Hub religioso y cultural. Lidera en Health &amp; Beauty y Sports &amp; Travel. Menor satisfacción del cliente.</a:t>
+              <a:rPr lang="es-419" sz="1600" dirty="0"/>
+              <a:t>Centro</a:t>
+            </a:r>
+            <a:r>
+              <a:rPr sz="1600" dirty="0"/>
+              <a:t> religioso y cultural. </a:t>
+            </a:r>
+            <a:r>
+              <a:rPr sz="1600" dirty="0" err="1"/>
+              <a:t>Lidera</a:t>
+            </a:r>
+            <a:r>
+              <a:rPr sz="1600" dirty="0"/>
+              <a:t> </a:t>
+            </a:r>
+            <a:r>
+              <a:rPr sz="1600" dirty="0" err="1"/>
+              <a:t>en</a:t>
+            </a:r>
+            <a:r>
+              <a:rPr sz="1600" dirty="0"/>
+              <a:t> Health &amp; Beauty y Sports &amp; Travel. Menor </a:t>
+            </a:r>
+            <a:r>
+              <a:rPr sz="1600" dirty="0" err="1"/>
+              <a:t>satisfacción</a:t>
+            </a:r>
+            <a:r>
+              <a:rPr sz="1600" dirty="0"/>
+              <a:t> del </a:t>
+            </a:r>
+            <a:r>
+              <a:rPr sz="1600" dirty="0" err="1"/>
+              <a:t>cliente</a:t>
+            </a:r>
+            <a:r>
+              <a:rPr sz="1600" dirty="0"/>
+              <a:t>.</a:t>
             </a:r>
           </a:p>
         </p:txBody>
@@ -14256,7 +14495,7 @@
         <p:spPr>
           <a:xfrm>
             <a:off x="8577072" y="2587752"/>
-            <a:ext cx="3154680" cy="347472"/>
+            <a:ext cx="3154680" cy="307777"/>
           </a:xfrm>
           <a:prstGeom prst="rect">
             <a:avLst/>
@@ -14278,8 +14517,22 @@
               </a:defRPr>
             </a:pPr>
             <a:r>
-              <a:t>Capital política y gubernamental</a:t>
-            </a:r>
+              <a:rPr sz="1400" dirty="0"/>
+              <a:t>Capital </a:t>
+            </a:r>
+            <a:r>
+              <a:rPr sz="1400" dirty="0" err="1"/>
+              <a:t>política</a:t>
+            </a:r>
+            <a:r>
+              <a:rPr sz="1400" dirty="0"/>
+              <a:t> y </a:t>
+            </a:r>
+            <a:r>
+              <a:rPr sz="1400" dirty="0" err="1"/>
+              <a:t>gubernamental</a:t>
+            </a:r>
+            <a:endParaRPr sz="1400" dirty="0"/>
           </a:p>
         </p:txBody>
       </p:sp>
@@ -14292,7 +14545,7 @@
         <p:spPr>
           <a:xfrm>
             <a:off x="8577072" y="2944368"/>
-            <a:ext cx="3154680" cy="292608"/>
+            <a:ext cx="3154680" cy="307777"/>
           </a:xfrm>
           <a:prstGeom prst="rect">
             <a:avLst/>
@@ -14314,6 +14567,7 @@
               </a:defRPr>
             </a:pPr>
             <a:r>
+              <a:rPr sz="1400" dirty="0"/>
               <a:t>815K hab.</a:t>
             </a:r>
           </a:p>
@@ -14372,7 +14626,7 @@
         <p:spPr>
           <a:xfrm>
             <a:off x="8577072" y="3383280"/>
-            <a:ext cx="3154680" cy="411480"/>
+            <a:ext cx="3154680" cy="523220"/>
           </a:xfrm>
           <a:prstGeom prst="rect">
             <a:avLst/>
@@ -14394,7 +14648,16 @@
               </a:defRPr>
             </a:pPr>
             <a:r>
-              <a:t>328 transacciones · Ticket prom: $337 · Rating 7.1</a:t>
+              <a:rPr sz="1400" dirty="0"/>
+              <a:t>328 </a:t>
+            </a:r>
+            <a:r>
+              <a:rPr sz="1400" dirty="0" err="1"/>
+              <a:t>transacciones</a:t>
+            </a:r>
+            <a:r>
+              <a:rPr sz="1400" dirty="0"/>
+              <a:t> · Ticket prom: $337 · Rating 7.1</a:t>
             </a:r>
           </a:p>
         </p:txBody>
@@ -14407,8 +14670,8 @@
         </p:nvSpPr>
         <p:spPr>
           <a:xfrm>
-            <a:off x="8577072" y="3840480"/>
-            <a:ext cx="3154680" cy="2103120"/>
+            <a:off x="8577072" y="4546461"/>
+            <a:ext cx="3154680" cy="1077218"/>
           </a:xfrm>
           <a:prstGeom prst="rect">
             <a:avLst/>
@@ -14430,7 +14693,112 @@
               </a:defRPr>
             </a:pPr>
             <a:r>
-              <a:t>La ciudad más chica, el ticket más alto. Los funcionarios de gobierno tienen ingresos estables y compran más por visita.</a:t>
+              <a:rPr sz="1600" dirty="0"/>
+              <a:t>La ciudad </a:t>
+            </a:r>
+            <a:r>
+              <a:rPr sz="1600" dirty="0" err="1"/>
+              <a:t>más</a:t>
+            </a:r>
+            <a:r>
+              <a:rPr sz="1600" dirty="0"/>
+              <a:t> </a:t>
+            </a:r>
+            <a:r>
+              <a:rPr sz="1600" dirty="0" err="1"/>
+              <a:t>chica</a:t>
+            </a:r>
+            <a:r>
+              <a:rPr sz="1600" dirty="0"/>
+              <a:t>, </a:t>
+            </a:r>
+            <a:r>
+              <a:rPr sz="1600" dirty="0" err="1"/>
+              <a:t>el</a:t>
+            </a:r>
+            <a:r>
+              <a:rPr sz="1600" dirty="0"/>
+              <a:t> ticket </a:t>
+            </a:r>
+            <a:r>
+              <a:rPr sz="1600" dirty="0" err="1"/>
+              <a:t>más</a:t>
+            </a:r>
+            <a:r>
+              <a:rPr sz="1600" dirty="0"/>
+              <a:t> alto. Los </a:t>
+            </a:r>
+            <a:r>
+              <a:rPr sz="1600" dirty="0" err="1"/>
+              <a:t>funcionarios</a:t>
+            </a:r>
+            <a:r>
+              <a:rPr sz="1600" dirty="0"/>
+              <a:t> de </a:t>
+            </a:r>
+            <a:r>
+              <a:rPr sz="1600" dirty="0" err="1"/>
+              <a:t>gobierno</a:t>
+            </a:r>
+            <a:r>
+              <a:rPr sz="1600" dirty="0"/>
+              <a:t> </a:t>
+            </a:r>
+            <a:r>
+              <a:rPr sz="1600" dirty="0" err="1"/>
+              <a:t>tienen</a:t>
+            </a:r>
+            <a:r>
+              <a:rPr sz="1600" dirty="0"/>
+              <a:t> </a:t>
+            </a:r>
+            <a:r>
+              <a:rPr sz="1600" dirty="0" err="1"/>
+              <a:t>ingresos</a:t>
+            </a:r>
+            <a:r>
+              <a:rPr sz="1600" dirty="0"/>
+              <a:t> </a:t>
+            </a:r>
+            <a:r>
+              <a:rPr sz="1600" dirty="0" err="1"/>
+              <a:t>estables</a:t>
+            </a:r>
+            <a:r>
+              <a:rPr sz="1600" dirty="0"/>
+              <a:t> y </a:t>
+            </a:r>
+            <a:r>
+              <a:rPr sz="1600" dirty="0" err="1"/>
+              <a:t>compran</a:t>
+            </a:r>
+            <a:r>
+              <a:rPr sz="1600" dirty="0"/>
+              <a:t> </a:t>
+            </a:r>
+            <a:r>
+              <a:rPr sz="1600" dirty="0" err="1"/>
+              <a:t>más</a:t>
+            </a:r>
+            <a:r>
+              <a:rPr sz="1600" dirty="0"/>
+              <a:t> </a:t>
+            </a:r>
+            <a:r>
+              <a:rPr sz="1600" dirty="0" err="1"/>
+              <a:t>por</a:t>
+            </a:r>
+            <a:r>
+              <a:rPr sz="1600" dirty="0"/>
+              <a:t> </a:t>
+            </a:r>
+            <a:r>
+              <a:rPr sz="1600" dirty="0" err="1"/>
+              <a:t>visita</a:t>
+            </a:r>
+            <a:r>
+              <a:rPr sz="1600" dirty="0"/>
+              <a:t>.</a:t>
             </a:r>
           </a:p>
         </p:txBody>
@@ -14706,7 +15074,7 @@
           <a:lstStyle/>
           <a:p>
             <a:pPr algn="ctr"/>
-            <a:endParaRPr/>
+            <a:endParaRPr dirty="0"/>
           </a:p>
         </p:txBody>
       </p:sp>
@@ -14741,6 +15109,7 @@
               </a:defRPr>
             </a:pPr>
             <a:r>
+              <a:rPr dirty="0"/>
               <a:t>$335</a:t>
             </a:r>
           </a:p>
@@ -14777,6 +15146,7 @@
               </a:defRPr>
             </a:pPr>
             <a:r>
+              <a:rPr dirty="0"/>
               <a:t>ticket prom. · Mujeres</a:t>
             </a:r>
           </a:p>
@@ -14791,7 +15161,7 @@
         <p:spPr>
           <a:xfrm>
             <a:off x="777240" y="2880360"/>
-            <a:ext cx="5029200" cy="347472"/>
+            <a:ext cx="5029200" cy="276999"/>
           </a:xfrm>
           <a:prstGeom prst="rect">
             <a:avLst/>
@@ -14813,8 +15183,30 @@
               </a:defRPr>
             </a:pPr>
             <a:r>
-              <a:t>501 transacciones · $167.8K totales · 52% de las ventas</a:t>
-            </a:r>
+              <a:rPr sz="1200" dirty="0"/>
+              <a:t>501 </a:t>
+            </a:r>
+            <a:r>
+              <a:rPr sz="1200" dirty="0" err="1"/>
+              <a:t>transacciones</a:t>
+            </a:r>
+            <a:r>
+              <a:rPr sz="1200" dirty="0"/>
+              <a:t> · $167.8K </a:t>
+            </a:r>
+            <a:r>
+              <a:rPr sz="1200" dirty="0" err="1"/>
+              <a:t>totales</a:t>
+            </a:r>
+            <a:r>
+              <a:rPr sz="1200" dirty="0"/>
+              <a:t> · 52% de las </a:t>
+            </a:r>
+            <a:r>
+              <a:rPr sz="1200" dirty="0" err="1"/>
+              <a:t>ventas</a:t>
+            </a:r>
+            <a:endParaRPr sz="1200" dirty="0"/>
           </a:p>
         </p:txBody>
       </p:sp>
@@ -14879,7 +15271,7 @@
             <a:avLst/>
           </a:prstGeom>
           <a:solidFill>
-            <a:srgbClr val="648C6E"/>
+            <a:srgbClr val="0070C0"/>
           </a:solidFill>
           <a:ln>
             <a:noFill/>
@@ -14917,7 +15309,7 @@
         <p:spPr>
           <a:xfrm>
             <a:off x="6629400" y="1572768"/>
-            <a:ext cx="5029200" cy="1051560"/>
+            <a:ext cx="5029200" cy="1107996"/>
           </a:xfrm>
           <a:prstGeom prst="rect">
             <a:avLst/>
@@ -14939,6 +15331,11 @@
               </a:defRPr>
             </a:pPr>
             <a:r>
+              <a:rPr dirty="0">
+                <a:solidFill>
+                  <a:srgbClr val="0070C0"/>
+                </a:solidFill>
+              </a:rPr>
               <a:t>$311</a:t>
             </a:r>
           </a:p>
@@ -14989,7 +15386,7 @@
         <p:spPr>
           <a:xfrm>
             <a:off x="6629400" y="2880360"/>
-            <a:ext cx="5029200" cy="347472"/>
+            <a:ext cx="5029200" cy="276999"/>
           </a:xfrm>
           <a:prstGeom prst="rect">
             <a:avLst/>
@@ -15011,8 +15408,30 @@
               </a:defRPr>
             </a:pPr>
             <a:r>
-              <a:t>499 transacciones · $155.1K totales · 48% de las ventas</a:t>
-            </a:r>
+              <a:rPr sz="1200" dirty="0"/>
+              <a:t>499 </a:t>
+            </a:r>
+            <a:r>
+              <a:rPr sz="1200" dirty="0" err="1"/>
+              <a:t>transacciones</a:t>
+            </a:r>
+            <a:r>
+              <a:rPr sz="1200" dirty="0"/>
+              <a:t> · $155.1K </a:t>
+            </a:r>
+            <a:r>
+              <a:rPr sz="1200" dirty="0" err="1"/>
+              <a:t>totales</a:t>
+            </a:r>
+            <a:r>
+              <a:rPr sz="1200" dirty="0"/>
+              <a:t> · 48% de las </a:t>
+            </a:r>
+            <a:r>
+              <a:rPr sz="1200" dirty="0" err="1"/>
+              <a:t>ventas</a:t>
+            </a:r>
+            <a:endParaRPr sz="1200" dirty="0"/>
           </a:p>
         </p:txBody>
       </p:sp>
@@ -15265,7 +15684,7 @@
           <p:nvPr>
             <p:extLst>
               <p:ext uri="{D42A27DB-BD31-4B8C-83A1-F6EECF244321}">
-                <p14:modId xmlns:p14="http://schemas.microsoft.com/office/powerpoint/2010/main" val="2522206501"/>
+                <p14:modId xmlns:p14="http://schemas.microsoft.com/office/powerpoint/2010/main" val="3653196516"/>
               </p:ext>
             </p:extLst>
           </p:nvPr>
@@ -15847,7 +16266,7 @@
         <p:spPr>
           <a:xfrm>
             <a:off x="8092440" y="4224528"/>
-            <a:ext cx="3246120" cy="1645920"/>
+            <a:ext cx="3246120" cy="646331"/>
           </a:xfrm>
           <a:prstGeom prst="rect">
             <a:avLst/>
@@ -15869,7 +16288,76 @@
               </a:defRPr>
             </a:pPr>
             <a:r>
-              <a:t>Valle: 16h, 17h y 20h están por debajo del promedio. Oportunidad para generar tráfico con ofertas.</a:t>
+              <a:rPr lang="es-UY" dirty="0"/>
+              <a:t>Ventas mínimas</a:t>
+            </a:r>
+            <a:r>
+              <a:rPr dirty="0"/>
+              <a:t>: 16h, 17h y 20h </a:t>
+            </a:r>
+            <a:r>
+              <a:rPr dirty="0" err="1"/>
+              <a:t>están</a:t>
+            </a:r>
+            <a:r>
+              <a:rPr dirty="0"/>
+              <a:t> </a:t>
+            </a:r>
+            <a:r>
+              <a:rPr dirty="0" err="1"/>
+              <a:t>por</a:t>
+            </a:r>
+            <a:r>
+              <a:rPr dirty="0"/>
+              <a:t> </a:t>
+            </a:r>
+            <a:r>
+              <a:rPr dirty="0" err="1"/>
+              <a:t>debajo</a:t>
+            </a:r>
+            <a:r>
+              <a:rPr dirty="0"/>
+              <a:t> del </a:t>
+            </a:r>
+            <a:r>
+              <a:rPr dirty="0" err="1"/>
+              <a:t>promedio</a:t>
+            </a:r>
+            <a:r>
+              <a:rPr dirty="0"/>
+              <a:t>. </a:t>
+            </a:r>
+            <a:r>
+              <a:rPr dirty="0" err="1"/>
+              <a:t>Oportunidad</a:t>
+            </a:r>
+            <a:r>
+              <a:rPr dirty="0"/>
+              <a:t> para </a:t>
+            </a:r>
+            <a:r>
+              <a:rPr dirty="0" err="1"/>
+              <a:t>generar</a:t>
+            </a:r>
+            <a:r>
+              <a:rPr dirty="0"/>
+              <a:t> </a:t>
+            </a:r>
+            <a:r>
+              <a:rPr dirty="0" err="1"/>
+              <a:t>tráfico</a:t>
+            </a:r>
+            <a:r>
+              <a:rPr dirty="0"/>
+              <a:t> con </a:t>
+            </a:r>
+            <a:r>
+              <a:rPr dirty="0" err="1"/>
+              <a:t>ofertas</a:t>
+            </a:r>
+            <a:r>
+              <a:rPr dirty="0"/>
+              <a:t>.</a:t>
             </a:r>
           </a:p>
         </p:txBody>
@@ -17199,7 +17687,7 @@
           <p:nvPr>
             <p:extLst>
               <p:ext uri="{D42A27DB-BD31-4B8C-83A1-F6EECF244321}">
-                <p14:modId xmlns:p14="http://schemas.microsoft.com/office/powerpoint/2010/main" val="3264857689"/>
+                <p14:modId xmlns:p14="http://schemas.microsoft.com/office/powerpoint/2010/main" val="1844203251"/>
               </p:ext>
             </p:extLst>
           </p:nvPr>
@@ -17515,7 +18003,7 @@
         <p:spPr>
           <a:xfrm>
             <a:off x="685800" y="4553712"/>
-            <a:ext cx="2377440" cy="347472"/>
+            <a:ext cx="2377440" cy="307777"/>
           </a:xfrm>
           <a:prstGeom prst="rect">
             <a:avLst/>
@@ -17537,6 +18025,7 @@
               </a:defRPr>
             </a:pPr>
             <a:r>
+              <a:rPr sz="1400" dirty="0"/>
               <a:t>Health &amp; Beauty</a:t>
             </a:r>
           </a:p>
@@ -17551,7 +18040,7 @@
         <p:spPr>
           <a:xfrm>
             <a:off x="685800" y="4919472"/>
-            <a:ext cx="2377440" cy="347472"/>
+            <a:ext cx="2377440" cy="307777"/>
           </a:xfrm>
           <a:prstGeom prst="rect">
             <a:avLst/>
@@ -17573,6 +18062,11 @@
               </a:defRPr>
             </a:pPr>
             <a:r>
+              <a:rPr sz="1400" dirty="0">
+                <a:solidFill>
+                  <a:srgbClr val="0070C0"/>
+                </a:solidFill>
+              </a:rPr>
               <a:t>Hombres 62.3%</a:t>
             </a:r>
           </a:p>
@@ -17587,7 +18081,7 @@
         <p:spPr>
           <a:xfrm>
             <a:off x="685800" y="5257800"/>
-            <a:ext cx="2377440" cy="347472"/>
+            <a:ext cx="2377440" cy="307777"/>
           </a:xfrm>
           <a:prstGeom prst="rect">
             <a:avLst/>
@@ -17609,6 +18103,11 @@
               </a:defRPr>
             </a:pPr>
             <a:r>
+              <a:rPr sz="1400" dirty="0">
+                <a:solidFill>
+                  <a:srgbClr val="B25A37"/>
+                </a:solidFill>
+              </a:rPr>
               <a:t>Mujeres 37.7%</a:t>
             </a:r>
           </a:p>
@@ -17713,7 +18212,7 @@
         <p:spPr>
           <a:xfrm>
             <a:off x="3520440" y="4553712"/>
-            <a:ext cx="2377440" cy="347472"/>
+            <a:ext cx="2377440" cy="307777"/>
           </a:xfrm>
           <a:prstGeom prst="rect">
             <a:avLst/>
@@ -17735,6 +18234,7 @@
               </a:defRPr>
             </a:pPr>
             <a:r>
+              <a:rPr sz="1400" dirty="0"/>
               <a:t>Food &amp; Beverages</a:t>
             </a:r>
           </a:p>
@@ -17749,7 +18249,7 @@
         <p:spPr>
           <a:xfrm>
             <a:off x="3520440" y="4919472"/>
-            <a:ext cx="2377440" cy="347472"/>
+            <a:ext cx="2377440" cy="307777"/>
           </a:xfrm>
           <a:prstGeom prst="rect">
             <a:avLst/>
@@ -17771,6 +18271,11 @@
               </a:defRPr>
             </a:pPr>
             <a:r>
+              <a:rPr sz="1400" dirty="0">
+                <a:solidFill>
+                  <a:srgbClr val="B25A37"/>
+                </a:solidFill>
+              </a:rPr>
               <a:t>Mujeres 59.1%</a:t>
             </a:r>
           </a:p>
@@ -17785,7 +18290,7 @@
         <p:spPr>
           <a:xfrm>
             <a:off x="3520440" y="5257800"/>
-            <a:ext cx="2377440" cy="347472"/>
+            <a:ext cx="2377440" cy="307777"/>
           </a:xfrm>
           <a:prstGeom prst="rect">
             <a:avLst/>
@@ -17807,6 +18312,11 @@
               </a:defRPr>
             </a:pPr>
             <a:r>
+              <a:rPr sz="1400" dirty="0">
+                <a:solidFill>
+                  <a:srgbClr val="0070C0"/>
+                </a:solidFill>
+              </a:rPr>
               <a:t>Hombres 40.9%</a:t>
             </a:r>
           </a:p>
@@ -17911,7 +18421,7 @@
         <p:spPr>
           <a:xfrm>
             <a:off x="6355080" y="4553712"/>
-            <a:ext cx="2377440" cy="347472"/>
+            <a:ext cx="2377440" cy="307777"/>
           </a:xfrm>
           <a:prstGeom prst="rect">
             <a:avLst/>
@@ -17933,6 +18443,7 @@
               </a:defRPr>
             </a:pPr>
             <a:r>
+              <a:rPr sz="1400" dirty="0"/>
               <a:t>Fashion Acc.</a:t>
             </a:r>
           </a:p>
@@ -17947,7 +18458,7 @@
         <p:spPr>
           <a:xfrm>
             <a:off x="6355080" y="4919472"/>
-            <a:ext cx="2377440" cy="347472"/>
+            <a:ext cx="2377440" cy="307777"/>
           </a:xfrm>
           <a:prstGeom prst="rect">
             <a:avLst/>
@@ -17969,6 +18480,11 @@
               </a:defRPr>
             </a:pPr>
             <a:r>
+              <a:rPr sz="1400" dirty="0">
+                <a:solidFill>
+                  <a:srgbClr val="B25A37"/>
+                </a:solidFill>
+              </a:rPr>
               <a:t>Mujeres 56.0%</a:t>
             </a:r>
           </a:p>
@@ -17983,7 +18499,7 @@
         <p:spPr>
           <a:xfrm>
             <a:off x="6355080" y="5257800"/>
-            <a:ext cx="2377440" cy="347472"/>
+            <a:ext cx="2377440" cy="307777"/>
           </a:xfrm>
           <a:prstGeom prst="rect">
             <a:avLst/>
@@ -18005,6 +18521,11 @@
               </a:defRPr>
             </a:pPr>
             <a:r>
+              <a:rPr sz="1400" dirty="0">
+                <a:solidFill>
+                  <a:srgbClr val="0070C0"/>
+                </a:solidFill>
+              </a:rPr>
               <a:t>Hombres 44.0%</a:t>
             </a:r>
           </a:p>
@@ -18109,7 +18630,7 @@
         <p:spPr>
           <a:xfrm>
             <a:off x="9189720" y="4553712"/>
-            <a:ext cx="2377440" cy="347472"/>
+            <a:ext cx="2377440" cy="307777"/>
           </a:xfrm>
           <a:prstGeom prst="rect">
             <a:avLst/>
@@ -18131,6 +18652,7 @@
               </a:defRPr>
             </a:pPr>
             <a:r>
+              <a:rPr sz="1400" dirty="0"/>
               <a:t>Electronic Acc.</a:t>
             </a:r>
           </a:p>
@@ -18145,7 +18667,7 @@
         <p:spPr>
           <a:xfrm>
             <a:off x="9189720" y="4919472"/>
-            <a:ext cx="2377440" cy="347472"/>
+            <a:ext cx="2377440" cy="307777"/>
           </a:xfrm>
           <a:prstGeom prst="rect">
             <a:avLst/>
@@ -18167,8 +18689,14 @@
               </a:defRPr>
             </a:pPr>
             <a:r>
-              <a:t>Casi igualado</a:t>
-            </a:r>
+              <a:rPr sz="1400" dirty="0"/>
+              <a:t>Casi </a:t>
+            </a:r>
+            <a:r>
+              <a:rPr sz="1400" dirty="0" err="1"/>
+              <a:t>igualado</a:t>
+            </a:r>
+            <a:endParaRPr sz="1400" dirty="0"/>
           </a:p>
         </p:txBody>
       </p:sp>
@@ -18181,7 +18709,7 @@
         <p:spPr>
           <a:xfrm>
             <a:off x="9189720" y="5257800"/>
-            <a:ext cx="2377440" cy="347472"/>
+            <a:ext cx="2377440" cy="307777"/>
           </a:xfrm>
           <a:prstGeom prst="rect">
             <a:avLst/>
@@ -18203,52 +18731,9 @@
               </a:defRPr>
             </a:pPr>
             <a:r>
+              <a:rPr sz="1400" dirty="0"/>
               <a:t>50% / 50%</a:t>
             </a:r>
-          </a:p>
-        </p:txBody>
-      </p:sp>
-      <p:sp>
-        <p:nvSpPr>
-          <p:cNvPr id="26" name="Rectangle 25"/>
-          <p:cNvSpPr/>
-          <p:nvPr/>
-        </p:nvSpPr>
-        <p:spPr>
-          <a:xfrm>
-            <a:off x="11612880" y="4462272"/>
-            <a:ext cx="548640" cy="1783080"/>
-          </a:xfrm>
-          <a:prstGeom prst="rect">
-            <a:avLst/>
-          </a:prstGeom>
-          <a:solidFill>
-            <a:srgbClr val="1E3C30"/>
-          </a:solidFill>
-          <a:ln>
-            <a:noFill/>
-          </a:ln>
-        </p:spPr>
-        <p:style>
-          <a:lnRef idx="1">
-            <a:schemeClr val="accent1"/>
-          </a:lnRef>
-          <a:fillRef idx="3">
-            <a:schemeClr val="accent1"/>
-          </a:fillRef>
-          <a:effectRef idx="2">
-            <a:schemeClr val="accent1"/>
-          </a:effectRef>
-          <a:fontRef idx="minor">
-            <a:schemeClr val="lt1"/>
-          </a:fontRef>
-        </p:style>
-        <p:txBody>
-          <a:bodyPr rtlCol="0" anchor="ctr"/>
-          <a:lstStyle/>
-          <a:p>
-            <a:pPr algn="ctr"/>
-            <a:endParaRPr/>
           </a:p>
         </p:txBody>
       </p:sp>
@@ -18290,7 +18775,7 @@
       </p:sp>
       <p:graphicFrame>
         <p:nvGraphicFramePr>
-          <p:cNvPr id="29" name="Gráfico 28">
+          <p:cNvPr id="30" name="Gráfico 29">
             <a:extLst>
               <a:ext uri="{FF2B5EF4-FFF2-40B4-BE49-F238E27FC236}">
                 <a16:creationId xmlns:a16="http://schemas.microsoft.com/office/drawing/2014/main" id="{F45C9569-2238-09E3-BDD6-2072435EFA4F}"/>
@@ -18303,14 +18788,14 @@
           <p:nvPr>
             <p:extLst>
               <p:ext uri="{D42A27DB-BD31-4B8C-83A1-F6EECF244321}">
-                <p14:modId xmlns:p14="http://schemas.microsoft.com/office/powerpoint/2010/main" val="700563449"/>
+                <p14:modId xmlns:p14="http://schemas.microsoft.com/office/powerpoint/2010/main" val="774287958"/>
               </p:ext>
             </p:extLst>
           </p:nvPr>
         </p:nvGraphicFramePr>
         <p:xfrm>
-          <a:off x="201706" y="1536192"/>
-          <a:ext cx="11220041" cy="2834640"/>
+          <a:off x="533400" y="1380524"/>
+          <a:ext cx="11125199" cy="3127248"/>
         </p:xfrm>
         <a:graphic>
           <a:graphicData uri="http://schemas.openxmlformats.org/drawingml/2006/chart">
@@ -18566,7 +19051,7 @@
         <p:spPr>
           <a:xfrm>
             <a:off x="731520" y="1536192"/>
-            <a:ext cx="3337560" cy="384048"/>
+            <a:ext cx="3337560" cy="338554"/>
           </a:xfrm>
           <a:prstGeom prst="rect">
             <a:avLst/>
@@ -18588,6 +19073,7 @@
               </a:defRPr>
             </a:pPr>
             <a:r>
+              <a:rPr sz="1600" dirty="0"/>
               <a:t>A · Yangon</a:t>
             </a:r>
           </a:p>
@@ -18638,7 +19124,7 @@
         <p:spPr>
           <a:xfrm>
             <a:off x="731520" y="2651760"/>
-            <a:ext cx="3337560" cy="347472"/>
+            <a:ext cx="3337560" cy="307777"/>
           </a:xfrm>
           <a:prstGeom prst="rect">
             <a:avLst/>
@@ -18660,7 +19146,16 @@
               </a:defRPr>
             </a:pPr>
             <a:r>
-              <a:t>340 transacciones · ticket $312 · rating 7.0</a:t>
+              <a:rPr sz="1400" dirty="0"/>
+              <a:t>340 </a:t>
+            </a:r>
+            <a:r>
+              <a:rPr sz="1400" dirty="0" err="1"/>
+              <a:t>transacciones</a:t>
+            </a:r>
+            <a:r>
+              <a:rPr sz="1400" dirty="0"/>
+              <a:t> · ticket $312 · rating 7.0</a:t>
             </a:r>
           </a:p>
         </p:txBody>
@@ -18674,7 +19169,7 @@
         <p:spPr>
           <a:xfrm>
             <a:off x="731520" y="3017520"/>
-            <a:ext cx="3337560" cy="822960"/>
+            <a:ext cx="3337560" cy="523220"/>
           </a:xfrm>
           <a:prstGeom prst="rect">
             <a:avLst/>
@@ -18696,7 +19191,40 @@
               </a:defRPr>
             </a:pPr>
             <a:r>
-              <a:t>Mayor volumen, menor ticket. Lidera en Home &amp; Lifestyle.</a:t>
+              <a:rPr sz="1400" b="1" dirty="0"/>
+              <a:t>Mayor </a:t>
+            </a:r>
+            <a:r>
+              <a:rPr sz="1400" b="1" dirty="0" err="1"/>
+              <a:t>volumen</a:t>
+            </a:r>
+            <a:r>
+              <a:rPr sz="1400" b="1" dirty="0"/>
+              <a:t>, </a:t>
+            </a:r>
+            <a:r>
+              <a:rPr sz="1400" b="1" dirty="0" err="1"/>
+              <a:t>menor</a:t>
+            </a:r>
+            <a:r>
+              <a:rPr sz="1400" b="1" dirty="0"/>
+              <a:t> ticket. </a:t>
+            </a:r>
+            <a:r>
+              <a:rPr sz="1400" dirty="0" err="1"/>
+              <a:t>Lidera</a:t>
+            </a:r>
+            <a:r>
+              <a:rPr sz="1400" dirty="0"/>
+              <a:t> </a:t>
+            </a:r>
+            <a:r>
+              <a:rPr sz="1400" dirty="0" err="1"/>
+              <a:t>en</a:t>
+            </a:r>
+            <a:r>
+              <a:rPr sz="1400" dirty="0"/>
+              <a:t> Home &amp; Lifestyle.</a:t>
             </a:r>
           </a:p>
         </p:txBody>
@@ -18800,7 +19328,7 @@
         <p:spPr>
           <a:xfrm>
             <a:off x="4617720" y="1536192"/>
-            <a:ext cx="3337560" cy="384048"/>
+            <a:ext cx="3337560" cy="338554"/>
           </a:xfrm>
           <a:prstGeom prst="rect">
             <a:avLst/>
@@ -18822,6 +19350,7 @@
               </a:defRPr>
             </a:pPr>
             <a:r>
+              <a:rPr sz="1600" dirty="0"/>
               <a:t>C · Naypyitaw</a:t>
             </a:r>
           </a:p>
@@ -18872,7 +19401,7 @@
         <p:spPr>
           <a:xfrm>
             <a:off x="4617720" y="2651760"/>
-            <a:ext cx="3337560" cy="347472"/>
+            <a:ext cx="3337560" cy="307777"/>
           </a:xfrm>
           <a:prstGeom prst="rect">
             <a:avLst/>
@@ -18894,7 +19423,16 @@
               </a:defRPr>
             </a:pPr>
             <a:r>
-              <a:t>328 transacciones · ticket $337 · rating 7.1</a:t>
+              <a:rPr sz="1400" dirty="0"/>
+              <a:t>328 </a:t>
+            </a:r>
+            <a:r>
+              <a:rPr sz="1400" dirty="0" err="1"/>
+              <a:t>transacciones</a:t>
+            </a:r>
+            <a:r>
+              <a:rPr sz="1400" dirty="0"/>
+              <a:t> · ticket $337 · rating 7.1</a:t>
             </a:r>
           </a:p>
         </p:txBody>
@@ -18908,7 +19446,7 @@
         <p:spPr>
           <a:xfrm>
             <a:off x="4617720" y="3017520"/>
-            <a:ext cx="3337560" cy="822960"/>
+            <a:ext cx="3337560" cy="523220"/>
           </a:xfrm>
           <a:prstGeom prst="rect">
             <a:avLst/>
@@ -18930,7 +19468,44 @@
               </a:defRPr>
             </a:pPr>
             <a:r>
-              <a:t>Menor volumen pero mayor ticket y mejor satisfacción.</a:t>
+              <a:rPr sz="1400" b="1" dirty="0"/>
+              <a:t>Menor </a:t>
+            </a:r>
+            <a:r>
+              <a:rPr sz="1400" b="1" dirty="0" err="1"/>
+              <a:t>volumen</a:t>
+            </a:r>
+            <a:r>
+              <a:rPr sz="1400" b="1" dirty="0"/>
+              <a:t> </a:t>
+            </a:r>
+            <a:r>
+              <a:rPr sz="1400" b="1" dirty="0" err="1"/>
+              <a:t>pero</a:t>
+            </a:r>
+            <a:r>
+              <a:rPr sz="1400" b="1" dirty="0"/>
+              <a:t> mayor ticket </a:t>
+            </a:r>
+            <a:r>
+              <a:rPr sz="1400" dirty="0"/>
+              <a:t>y </a:t>
+            </a:r>
+            <a:r>
+              <a:rPr sz="1400" dirty="0" err="1"/>
+              <a:t>mejor</a:t>
+            </a:r>
+            <a:r>
+              <a:rPr sz="1400" dirty="0"/>
+              <a:t> </a:t>
+            </a:r>
+            <a:r>
+              <a:rPr sz="1400" dirty="0" err="1"/>
+              <a:t>satisfacción</a:t>
+            </a:r>
+            <a:r>
+              <a:rPr sz="1400" dirty="0"/>
+              <a:t>.</a:t>
             </a:r>
           </a:p>
         </p:txBody>
@@ -19034,7 +19609,7 @@
         <p:spPr>
           <a:xfrm>
             <a:off x="8503919" y="1536192"/>
-            <a:ext cx="3337560" cy="384048"/>
+            <a:ext cx="3337560" cy="338554"/>
           </a:xfrm>
           <a:prstGeom prst="rect">
             <a:avLst/>
@@ -19056,6 +19631,7 @@
               </a:defRPr>
             </a:pPr>
             <a:r>
+              <a:rPr sz="1600" dirty="0"/>
               <a:t>B · Mandalay</a:t>
             </a:r>
           </a:p>
@@ -19092,6 +19668,7 @@
               </a:defRPr>
             </a:pPr>
             <a:r>
+              <a:rPr dirty="0"/>
               <a:t>$106.2K</a:t>
             </a:r>
           </a:p>
@@ -19106,7 +19683,7 @@
         <p:spPr>
           <a:xfrm>
             <a:off x="8503919" y="2651760"/>
-            <a:ext cx="3337560" cy="347472"/>
+            <a:ext cx="3337560" cy="307777"/>
           </a:xfrm>
           <a:prstGeom prst="rect">
             <a:avLst/>
@@ -19128,7 +19705,16 @@
               </a:defRPr>
             </a:pPr>
             <a:r>
-              <a:t>332 transacciones · ticket $320 · rating 6.8</a:t>
+              <a:rPr sz="1400" dirty="0"/>
+              <a:t>332 </a:t>
+            </a:r>
+            <a:r>
+              <a:rPr sz="1400" dirty="0" err="1"/>
+              <a:t>transacciones</a:t>
+            </a:r>
+            <a:r>
+              <a:rPr sz="1400" dirty="0"/>
+              <a:t> · ticket $320 · rating 6.8</a:t>
             </a:r>
           </a:p>
         </p:txBody>
@@ -19142,7 +19728,7 @@
         <p:spPr>
           <a:xfrm>
             <a:off x="8503919" y="3017520"/>
-            <a:ext cx="3337560" cy="822960"/>
+            <a:ext cx="3337560" cy="523220"/>
           </a:xfrm>
           <a:prstGeom prst="rect">
             <a:avLst/>
@@ -19164,7 +19750,44 @@
               </a:defRPr>
             </a:pPr>
             <a:r>
-              <a:t>Lidera en Health &amp; Beauty. Rating más bajo: oportunidad de mejora.</a:t>
+              <a:rPr sz="1400" dirty="0" err="1"/>
+              <a:t>Lidera</a:t>
+            </a:r>
+            <a:r>
+              <a:rPr sz="1400" dirty="0"/>
+              <a:t> </a:t>
+            </a:r>
+            <a:r>
+              <a:rPr sz="1400" dirty="0" err="1"/>
+              <a:t>en</a:t>
+            </a:r>
+            <a:r>
+              <a:rPr sz="1400" dirty="0"/>
+              <a:t> Health &amp; Beauty. Rating </a:t>
+            </a:r>
+            <a:r>
+              <a:rPr sz="1400" dirty="0" err="1"/>
+              <a:t>más</a:t>
+            </a:r>
+            <a:r>
+              <a:rPr sz="1400" dirty="0"/>
+              <a:t> bajo: </a:t>
+            </a:r>
+            <a:r>
+              <a:rPr sz="1400" dirty="0" err="1"/>
+              <a:t>oportunidad</a:t>
+            </a:r>
+            <a:r>
+              <a:rPr sz="1400" dirty="0"/>
+              <a:t> de </a:t>
+            </a:r>
+            <a:r>
+              <a:rPr sz="1400" dirty="0" err="1"/>
+              <a:t>mejora</a:t>
+            </a:r>
+            <a:r>
+              <a:rPr sz="1400" dirty="0"/>
+              <a:t>.</a:t>
             </a:r>
           </a:p>
         </p:txBody>
@@ -19273,7 +19896,7 @@
           <p:nvPr>
             <p:extLst>
               <p:ext uri="{D42A27DB-BD31-4B8C-83A1-F6EECF244321}">
-                <p14:modId xmlns:p14="http://schemas.microsoft.com/office/powerpoint/2010/main" val="2109632787"/>
+                <p14:modId xmlns:p14="http://schemas.microsoft.com/office/powerpoint/2010/main" val="1135503543"/>
               </p:ext>
             </p:extLst>
           </p:nvPr>
@@ -19573,7 +20196,7 @@
         <p:spPr>
           <a:xfrm>
             <a:off x="640080" y="2560320"/>
-            <a:ext cx="3383280" cy="292608"/>
+            <a:ext cx="3383280" cy="338554"/>
           </a:xfrm>
           <a:prstGeom prst="rect">
             <a:avLst/>
@@ -19595,6 +20218,7 @@
               </a:defRPr>
             </a:pPr>
             <a:r>
+              <a:rPr sz="1600" dirty="0"/>
               <a:t>FOCO</a:t>
             </a:r>
           </a:p>
@@ -19609,7 +20233,7 @@
         <p:spPr>
           <a:xfrm>
             <a:off x="640080" y="2852927"/>
-            <a:ext cx="3383280" cy="658368"/>
+            <a:ext cx="3383280" cy="307777"/>
           </a:xfrm>
           <a:prstGeom prst="rect">
             <a:avLst/>
@@ -19631,6 +20255,7 @@
               </a:defRPr>
             </a:pPr>
             <a:r>
+              <a:rPr sz="1400" dirty="0"/>
               <a:t>Food &amp; Beverages</a:t>
             </a:r>
           </a:p>
@@ -19645,7 +20270,7 @@
         <p:spPr>
           <a:xfrm>
             <a:off x="640080" y="3566160"/>
-            <a:ext cx="3383280" cy="292608"/>
+            <a:ext cx="3383280" cy="338554"/>
           </a:xfrm>
           <a:prstGeom prst="rect">
             <a:avLst/>
@@ -19667,8 +20292,10 @@
               </a:defRPr>
             </a:pPr>
             <a:r>
-              <a:t>TARGET</a:t>
-            </a:r>
+              <a:rPr lang="es-419" sz="1600" dirty="0"/>
+              <a:t>PUBLICO OBJETIVO</a:t>
+            </a:r>
+            <a:endParaRPr sz="1600" dirty="0"/>
           </a:p>
         </p:txBody>
       </p:sp>
@@ -19681,7 +20308,7 @@
         <p:spPr>
           <a:xfrm>
             <a:off x="640080" y="3858768"/>
-            <a:ext cx="3383280" cy="658368"/>
+            <a:ext cx="3383280" cy="307777"/>
           </a:xfrm>
           <a:prstGeom prst="rect">
             <a:avLst/>
@@ -19703,6 +20330,7 @@
               </a:defRPr>
             </a:pPr>
             <a:r>
+              <a:rPr sz="1400" dirty="0"/>
               <a:t>Mujeres — Naypyitaw y Yangon</a:t>
             </a:r>
           </a:p>
@@ -19717,7 +20345,7 @@
         <p:spPr>
           <a:xfrm>
             <a:off x="640080" y="4572000"/>
-            <a:ext cx="3383280" cy="292608"/>
+            <a:ext cx="3383280" cy="338554"/>
           </a:xfrm>
           <a:prstGeom prst="rect">
             <a:avLst/>
@@ -19739,6 +20367,7 @@
               </a:defRPr>
             </a:pPr>
             <a:r>
+              <a:rPr sz="1600" dirty="0"/>
               <a:t>TÁCTICA</a:t>
             </a:r>
           </a:p>
@@ -19753,7 +20382,7 @@
         <p:spPr>
           <a:xfrm>
             <a:off x="640080" y="4864608"/>
-            <a:ext cx="3383280" cy="658368"/>
+            <a:ext cx="3383280" cy="523220"/>
           </a:xfrm>
           <a:prstGeom prst="rect">
             <a:avLst/>
@@ -19775,7 +20404,52 @@
               </a:defRPr>
             </a:pPr>
             <a:r>
-              <a:t>Degustaciones y combos familiares en los picos de 13h y 19h.</a:t>
+              <a:rPr lang="es-419" sz="1400" dirty="0"/>
+              <a:t>Promover d</a:t>
+            </a:r>
+            <a:r>
+              <a:rPr sz="1400" dirty="0" err="1"/>
+              <a:t>egustaciones</a:t>
+            </a:r>
+            <a:r>
+              <a:rPr sz="1400" dirty="0"/>
+              <a:t> y combos </a:t>
+            </a:r>
+            <a:r>
+              <a:rPr sz="1400" dirty="0" err="1"/>
+              <a:t>familiares</a:t>
+            </a:r>
+            <a:r>
+              <a:rPr sz="1400" dirty="0"/>
+              <a:t> </a:t>
+            </a:r>
+            <a:r>
+              <a:rPr sz="1400" dirty="0" err="1"/>
+              <a:t>en</a:t>
+            </a:r>
+            <a:r>
+              <a:rPr sz="1400" dirty="0"/>
+              <a:t> </a:t>
+            </a:r>
+            <a:r>
+              <a:rPr sz="1400" dirty="0" err="1"/>
+              <a:t>los</a:t>
+            </a:r>
+            <a:r>
+              <a:rPr sz="1400" dirty="0"/>
+              <a:t> </a:t>
+            </a:r>
+            <a:r>
+              <a:rPr sz="1400" b="1" dirty="0" err="1"/>
+              <a:t>picos</a:t>
+            </a:r>
+            <a:r>
+              <a:rPr sz="1400" b="1" dirty="0"/>
+              <a:t> de 13h y 19h</a:t>
+            </a:r>
+            <a:r>
+              <a:rPr sz="1400" dirty="0"/>
+              <a:t>.</a:t>
             </a:r>
           </a:p>
         </p:txBody>
@@ -19789,7 +20463,7 @@
         <p:spPr>
           <a:xfrm>
             <a:off x="640080" y="5577840"/>
-            <a:ext cx="3383280" cy="292608"/>
+            <a:ext cx="3383280" cy="338554"/>
           </a:xfrm>
           <a:prstGeom prst="rect">
             <a:avLst/>
@@ -19811,6 +20485,7 @@
               </a:defRPr>
             </a:pPr>
             <a:r>
+              <a:rPr sz="1600" dirty="0"/>
               <a:t>POR QUÉ</a:t>
             </a:r>
           </a:p>
@@ -19825,7 +20500,7 @@
         <p:spPr>
           <a:xfrm>
             <a:off x="640080" y="5870448"/>
-            <a:ext cx="3383280" cy="658368"/>
+            <a:ext cx="3383280" cy="738664"/>
           </a:xfrm>
           <a:prstGeom prst="rect">
             <a:avLst/>
@@ -19847,7 +20522,84 @@
               </a:defRPr>
             </a:pPr>
             <a:r>
-              <a:t>Enero es el mejor mes ($116K). Mujeres dominan esta categoría (+44%). Naypyitaw lidera el mes.</a:t>
+              <a:rPr sz="1400" dirty="0" err="1"/>
+              <a:t>Enero</a:t>
+            </a:r>
+            <a:r>
+              <a:rPr sz="1400" dirty="0"/>
+              <a:t> es </a:t>
+            </a:r>
+            <a:r>
+              <a:rPr sz="1400" dirty="0" err="1"/>
+              <a:t>el</a:t>
+            </a:r>
+            <a:r>
+              <a:rPr sz="1400" dirty="0"/>
+              <a:t> </a:t>
+            </a:r>
+            <a:r>
+              <a:rPr sz="1400" dirty="0" err="1"/>
+              <a:t>mejor</a:t>
+            </a:r>
+            <a:r>
+              <a:rPr sz="1400" dirty="0"/>
+              <a:t> </a:t>
+            </a:r>
+            <a:r>
+              <a:rPr sz="1400" dirty="0" err="1"/>
+              <a:t>mes</a:t>
+            </a:r>
+            <a:r>
+              <a:rPr sz="1400" dirty="0"/>
+              <a:t> ($116K). Mujeres </a:t>
+            </a:r>
+            <a:r>
+              <a:rPr sz="1400" dirty="0" err="1"/>
+              <a:t>dominan</a:t>
+            </a:r>
+            <a:r>
+              <a:rPr sz="1400" dirty="0"/>
+              <a:t> </a:t>
+            </a:r>
+            <a:r>
+              <a:rPr sz="1400" dirty="0" err="1"/>
+              <a:t>esta</a:t>
+            </a:r>
+            <a:r>
+              <a:rPr sz="1400" dirty="0"/>
+              <a:t> </a:t>
+            </a:r>
+            <a:r>
+              <a:rPr sz="1400" dirty="0" err="1"/>
+              <a:t>categoría</a:t>
+            </a:r>
+            <a:r>
+              <a:rPr sz="1400" dirty="0"/>
+              <a:t> (+44%). Naypyitaw </a:t>
+            </a:r>
+            <a:r>
+              <a:rPr sz="1400" dirty="0" err="1"/>
+              <a:t>lidera</a:t>
+            </a:r>
+            <a:r>
+              <a:rPr sz="1400" dirty="0"/>
+              <a:t> </a:t>
+            </a:r>
+            <a:r>
+              <a:rPr sz="1400" dirty="0" err="1"/>
+              <a:t>el</a:t>
+            </a:r>
+            <a:r>
+              <a:rPr sz="1400" dirty="0"/>
+              <a:t> </a:t>
+            </a:r>
+            <a:r>
+              <a:rPr sz="1400" dirty="0" err="1"/>
+              <a:t>mes</a:t>
+            </a:r>
+            <a:r>
+              <a:rPr sz="1400" dirty="0"/>
+              <a:t>.</a:t>
             </a:r>
           </a:p>
         </p:txBody>
@@ -19988,7 +20740,7 @@
         <p:spPr>
           <a:xfrm>
             <a:off x="4526280" y="2560320"/>
-            <a:ext cx="3383280" cy="292608"/>
+            <a:ext cx="3383280" cy="338554"/>
           </a:xfrm>
           <a:prstGeom prst="rect">
             <a:avLst/>
@@ -20010,8 +20762,10 @@
               </a:defRPr>
             </a:pPr>
             <a:r>
+              <a:rPr sz="1600" dirty="0"/>
               <a:t>FOCO</a:t>
             </a:r>
+            <a:endParaRPr dirty="0"/>
           </a:p>
         </p:txBody>
       </p:sp>
@@ -20024,7 +20778,7 @@
         <p:spPr>
           <a:xfrm>
             <a:off x="4526280" y="2852927"/>
-            <a:ext cx="3383280" cy="658368"/>
+            <a:ext cx="3383280" cy="307777"/>
           </a:xfrm>
           <a:prstGeom prst="rect">
             <a:avLst/>
@@ -20046,6 +20800,7 @@
               </a:defRPr>
             </a:pPr>
             <a:r>
+              <a:rPr sz="1400" dirty="0"/>
               <a:t>Health &amp; Beauty</a:t>
             </a:r>
           </a:p>
@@ -20060,7 +20815,7 @@
         <p:spPr>
           <a:xfrm>
             <a:off x="4526280" y="3566160"/>
-            <a:ext cx="3383280" cy="292608"/>
+            <a:ext cx="3383280" cy="338554"/>
           </a:xfrm>
           <a:prstGeom prst="rect">
             <a:avLst/>
@@ -20082,8 +20837,10 @@
               </a:defRPr>
             </a:pPr>
             <a:r>
-              <a:t>TARGET</a:t>
-            </a:r>
+              <a:rPr lang="es-419" sz="1600" dirty="0"/>
+              <a:t>PUBLICO OBJETIVO</a:t>
+            </a:r>
+            <a:endParaRPr sz="1600" dirty="0"/>
           </a:p>
         </p:txBody>
       </p:sp>
@@ -20096,7 +20853,7 @@
         <p:spPr>
           <a:xfrm>
             <a:off x="4526280" y="3858768"/>
-            <a:ext cx="3383280" cy="658368"/>
+            <a:ext cx="3383280" cy="307777"/>
           </a:xfrm>
           <a:prstGeom prst="rect">
             <a:avLst/>
@@ -20118,6 +20875,7 @@
               </a:defRPr>
             </a:pPr>
             <a:r>
+              <a:rPr sz="1400" dirty="0"/>
               <a:t>Hombres — Mandalay</a:t>
             </a:r>
           </a:p>
@@ -20132,7 +20890,7 @@
         <p:spPr>
           <a:xfrm>
             <a:off x="4526280" y="4572000"/>
-            <a:ext cx="3383280" cy="292608"/>
+            <a:ext cx="3383280" cy="338554"/>
           </a:xfrm>
           <a:prstGeom prst="rect">
             <a:avLst/>
@@ -20154,6 +20912,7 @@
               </a:defRPr>
             </a:pPr>
             <a:r>
+              <a:rPr sz="1600" dirty="0"/>
               <a:t>TÁCTICA</a:t>
             </a:r>
           </a:p>
@@ -20168,7 +20927,7 @@
         <p:spPr>
           <a:xfrm>
             <a:off x="4526280" y="4864608"/>
-            <a:ext cx="3383280" cy="658368"/>
+            <a:ext cx="3383280" cy="523220"/>
           </a:xfrm>
           <a:prstGeom prst="rect">
             <a:avLst/>
@@ -20190,7 +20949,36 @@
               </a:defRPr>
             </a:pPr>
             <a:r>
-              <a:t>Comunicación y promociones pensadas exclusivamente para hombres.</a:t>
+              <a:rPr sz="1400" dirty="0" err="1"/>
+              <a:t>Comunicación</a:t>
+            </a:r>
+            <a:r>
+              <a:rPr sz="1400" dirty="0"/>
+              <a:t> y </a:t>
+            </a:r>
+            <a:r>
+              <a:rPr sz="1400" dirty="0" err="1"/>
+              <a:t>promociones</a:t>
+            </a:r>
+            <a:r>
+              <a:rPr sz="1400" dirty="0"/>
+              <a:t> </a:t>
+            </a:r>
+            <a:r>
+              <a:rPr sz="1400" dirty="0" err="1"/>
+              <a:t>pensadas</a:t>
+            </a:r>
+            <a:r>
+              <a:rPr sz="1400" dirty="0"/>
+              <a:t> </a:t>
+            </a:r>
+            <a:r>
+              <a:rPr sz="1400" dirty="0" err="1"/>
+              <a:t>exclusivamente</a:t>
+            </a:r>
+            <a:r>
+              <a:rPr sz="1400" dirty="0"/>
+              <a:t> para hombres.</a:t>
             </a:r>
           </a:p>
         </p:txBody>
@@ -20204,7 +20992,7 @@
         <p:spPr>
           <a:xfrm>
             <a:off x="4526280" y="5577840"/>
-            <a:ext cx="3383280" cy="292608"/>
+            <a:ext cx="3383280" cy="338554"/>
           </a:xfrm>
           <a:prstGeom prst="rect">
             <a:avLst/>
@@ -20226,6 +21014,7 @@
               </a:defRPr>
             </a:pPr>
             <a:r>
+              <a:rPr sz="1600" dirty="0"/>
               <a:t>POR QUÉ</a:t>
             </a:r>
           </a:p>
@@ -20240,7 +21029,7 @@
         <p:spPr>
           <a:xfrm>
             <a:off x="4526280" y="5870448"/>
-            <a:ext cx="3383280" cy="658368"/>
+            <a:ext cx="3383280" cy="738664"/>
           </a:xfrm>
           <a:prstGeom prst="rect">
             <a:avLst/>
@@ -20262,7 +21051,64 @@
               </a:defRPr>
             </a:pPr>
             <a:r>
-              <a:t>Febrero es el mes más bajo ($97K). La brecha masculina en H&amp;B es la mayor del dataset: 65%.</a:t>
+              <a:rPr sz="1400" b="1" dirty="0" err="1"/>
+              <a:t>Febrero</a:t>
+            </a:r>
+            <a:r>
+              <a:rPr sz="1400" b="1" dirty="0"/>
+              <a:t> es </a:t>
+            </a:r>
+            <a:r>
+              <a:rPr sz="1400" b="1" dirty="0" err="1"/>
+              <a:t>el</a:t>
+            </a:r>
+            <a:r>
+              <a:rPr sz="1400" b="1" dirty="0"/>
+              <a:t> </a:t>
+            </a:r>
+            <a:r>
+              <a:rPr sz="1400" b="1" dirty="0" err="1"/>
+              <a:t>mes</a:t>
+            </a:r>
+            <a:r>
+              <a:rPr sz="1400" b="1" dirty="0"/>
+              <a:t> </a:t>
+            </a:r>
+            <a:r>
+              <a:rPr sz="1400" b="1" dirty="0" err="1"/>
+              <a:t>más</a:t>
+            </a:r>
+            <a:r>
+              <a:rPr sz="1400" b="1" dirty="0"/>
+              <a:t> bajo </a:t>
+            </a:r>
+            <a:r>
+              <a:rPr sz="1400" dirty="0"/>
+              <a:t>($97K). La </a:t>
+            </a:r>
+            <a:r>
+              <a:rPr sz="1400" dirty="0" err="1"/>
+              <a:t>brecha</a:t>
+            </a:r>
+            <a:r>
+              <a:rPr sz="1400" dirty="0"/>
+              <a:t> </a:t>
+            </a:r>
+            <a:r>
+              <a:rPr sz="1400" dirty="0" err="1"/>
+              <a:t>masculina</a:t>
+            </a:r>
+            <a:r>
+              <a:rPr sz="1400" dirty="0"/>
+              <a:t> </a:t>
+            </a:r>
+            <a:r>
+              <a:rPr sz="1400" dirty="0" err="1"/>
+              <a:t>en</a:t>
+            </a:r>
+            <a:r>
+              <a:rPr sz="1400" dirty="0"/>
+              <a:t> H&amp;B es la mayor del dataset: 65%.</a:t>
             </a:r>
           </a:p>
         </p:txBody>
@@ -20403,7 +21249,7 @@
         <p:spPr>
           <a:xfrm>
             <a:off x="8412480" y="2560320"/>
-            <a:ext cx="3383280" cy="292608"/>
+            <a:ext cx="3383280" cy="338554"/>
           </a:xfrm>
           <a:prstGeom prst="rect">
             <a:avLst/>
@@ -20425,6 +21271,7 @@
               </a:defRPr>
             </a:pPr>
             <a:r>
+              <a:rPr sz="1600" dirty="0"/>
               <a:t>FOCO</a:t>
             </a:r>
           </a:p>
@@ -20439,7 +21286,7 @@
         <p:spPr>
           <a:xfrm>
             <a:off x="8412480" y="2852927"/>
-            <a:ext cx="3383280" cy="658368"/>
+            <a:ext cx="3383280" cy="307777"/>
           </a:xfrm>
           <a:prstGeom prst="rect">
             <a:avLst/>
@@ -20461,6 +21308,7 @@
               </a:defRPr>
             </a:pPr>
             <a:r>
+              <a:rPr sz="1400" dirty="0"/>
               <a:t>Home &amp; Lifestyle + Sports &amp; Travel</a:t>
             </a:r>
           </a:p>
@@ -20475,7 +21323,7 @@
         <p:spPr>
           <a:xfrm>
             <a:off x="8412480" y="3566160"/>
-            <a:ext cx="3383280" cy="292608"/>
+            <a:ext cx="3383280" cy="338554"/>
           </a:xfrm>
           <a:prstGeom prst="rect">
             <a:avLst/>
@@ -20497,8 +21345,10 @@
               </a:defRPr>
             </a:pPr>
             <a:r>
-              <a:t>TARGET</a:t>
-            </a:r>
+              <a:rPr lang="es-419" sz="1600" dirty="0"/>
+              <a:t>PUBLICO OBJETIVO</a:t>
+            </a:r>
+            <a:endParaRPr sz="1600" dirty="0"/>
           </a:p>
         </p:txBody>
       </p:sp>
@@ -20511,7 +21361,7 @@
         <p:spPr>
           <a:xfrm>
             <a:off x="8412480" y="3858768"/>
-            <a:ext cx="3383280" cy="658368"/>
+            <a:ext cx="3383280" cy="307777"/>
           </a:xfrm>
           <a:prstGeom prst="rect">
             <a:avLst/>
@@ -20533,6 +21383,7 @@
               </a:defRPr>
             </a:pPr>
             <a:r>
+              <a:rPr sz="1400" dirty="0"/>
               <a:t>Público general — Yangon</a:t>
             </a:r>
           </a:p>
@@ -20547,7 +21398,7 @@
         <p:spPr>
           <a:xfrm>
             <a:off x="8412480" y="4572000"/>
-            <a:ext cx="3383280" cy="292608"/>
+            <a:ext cx="3383280" cy="338554"/>
           </a:xfrm>
           <a:prstGeom prst="rect">
             <a:avLst/>
@@ -20569,6 +21420,7 @@
               </a:defRPr>
             </a:pPr>
             <a:r>
+              <a:rPr sz="1600" dirty="0"/>
               <a:t>TÁCTICA</a:t>
             </a:r>
           </a:p>
@@ -20583,7 +21435,7 @@
         <p:spPr>
           <a:xfrm>
             <a:off x="8412480" y="4864608"/>
-            <a:ext cx="3383280" cy="658368"/>
+            <a:ext cx="3383280" cy="738664"/>
           </a:xfrm>
           <a:prstGeom prst="rect">
             <a:avLst/>
@@ -20605,7 +21457,64 @@
               </a:defRPr>
             </a:pPr>
             <a:r>
-              <a:t>Combos cruzados hogar + deporte. Aprovechar el ticket alto de Yangon en estas líneas.</a:t>
+              <a:rPr sz="1400" dirty="0"/>
+              <a:t>Combos cruzados </a:t>
+            </a:r>
+            <a:r>
+              <a:rPr sz="1400" dirty="0" err="1"/>
+              <a:t>hogar</a:t>
+            </a:r>
+            <a:r>
+              <a:rPr sz="1400" dirty="0"/>
+              <a:t> + </a:t>
+            </a:r>
+            <a:r>
+              <a:rPr sz="1400" dirty="0" err="1"/>
+              <a:t>deporte</a:t>
+            </a:r>
+            <a:r>
+              <a:rPr sz="1400" dirty="0"/>
+              <a:t>. </a:t>
+            </a:r>
+            <a:r>
+              <a:rPr sz="1400" dirty="0" err="1"/>
+              <a:t>Aprovechar</a:t>
+            </a:r>
+            <a:r>
+              <a:rPr sz="1400" dirty="0"/>
+              <a:t> </a:t>
+            </a:r>
+            <a:r>
+              <a:rPr sz="1400" dirty="0" err="1"/>
+              <a:t>el</a:t>
+            </a:r>
+            <a:r>
+              <a:rPr sz="1400" dirty="0"/>
+              <a:t> ticket alto de Yangon </a:t>
+            </a:r>
+            <a:r>
+              <a:rPr sz="1400" dirty="0" err="1"/>
+              <a:t>en</a:t>
+            </a:r>
+            <a:r>
+              <a:rPr sz="1400" dirty="0"/>
+              <a:t> </a:t>
+            </a:r>
+            <a:r>
+              <a:rPr sz="1400" dirty="0" err="1"/>
+              <a:t>estas</a:t>
+            </a:r>
+            <a:r>
+              <a:rPr sz="1400" dirty="0"/>
+              <a:t> </a:t>
+            </a:r>
+            <a:r>
+              <a:rPr sz="1400" dirty="0" err="1"/>
+              <a:t>líneas</a:t>
+            </a:r>
+            <a:r>
+              <a:rPr sz="1400" dirty="0"/>
+              <a:t>.</a:t>
             </a:r>
           </a:p>
         </p:txBody>
@@ -20619,7 +21528,7 @@
         <p:spPr>
           <a:xfrm>
             <a:off x="8412480" y="5577840"/>
-            <a:ext cx="3383280" cy="292608"/>
+            <a:ext cx="3383280" cy="338554"/>
           </a:xfrm>
           <a:prstGeom prst="rect">
             <a:avLst/>
@@ -20641,6 +21550,7 @@
               </a:defRPr>
             </a:pPr>
             <a:r>
+              <a:rPr sz="1600" dirty="0"/>
               <a:t>POR QUÉ</a:t>
             </a:r>
           </a:p>
@@ -20655,7 +21565,7 @@
         <p:spPr>
           <a:xfrm>
             <a:off x="8412480" y="5870448"/>
-            <a:ext cx="3383280" cy="658368"/>
+            <a:ext cx="3383280" cy="523220"/>
           </a:xfrm>
           <a:prstGeom prst="rect">
             <a:avLst/>
@@ -20677,7 +21587,64 @@
               </a:defRPr>
             </a:pPr>
             <a:r>
-              <a:t>Marzo antecede al Año Nuevo birmano (abril): las familias renuevan el hogar.</a:t>
+              <a:rPr sz="1400" dirty="0"/>
+              <a:t>Marzo antecede al </a:t>
+            </a:r>
+            <a:r>
+              <a:rPr sz="1400" b="1" dirty="0"/>
+              <a:t>Año Nuevo </a:t>
+            </a:r>
+            <a:r>
+              <a:rPr sz="1400" b="1" dirty="0" err="1"/>
+              <a:t>birmano</a:t>
+            </a:r>
+            <a:r>
+              <a:rPr sz="1400" b="1" dirty="0"/>
+              <a:t> </a:t>
+            </a:r>
+            <a:r>
+              <a:rPr sz="1400" dirty="0"/>
+              <a:t>(</a:t>
+            </a:r>
+            <a:r>
+              <a:rPr sz="1400" dirty="0" err="1"/>
+              <a:t>abril</a:t>
+            </a:r>
+            <a:r>
+              <a:rPr sz="1400" dirty="0"/>
+              <a:t>): las </a:t>
+            </a:r>
+            <a:r>
+              <a:rPr sz="1400" dirty="0" err="1"/>
+              <a:t>familias</a:t>
+            </a:r>
+            <a:r>
+              <a:rPr sz="1400" dirty="0"/>
+              <a:t> </a:t>
+            </a:r>
+            <a:r>
+              <a:rPr sz="1400" dirty="0" err="1"/>
+              <a:t>renuevan</a:t>
+            </a:r>
+            <a:r>
+              <a:rPr sz="1400" dirty="0"/>
+              <a:t> </a:t>
+            </a:r>
+            <a:r>
+              <a:rPr sz="1400" dirty="0" err="1"/>
+              <a:t>el</a:t>
+            </a:r>
+            <a:r>
+              <a:rPr sz="1400" dirty="0"/>
+              <a:t> </a:t>
+            </a:r>
+            <a:r>
+              <a:rPr sz="1400" dirty="0" err="1"/>
+              <a:t>hogar</a:t>
+            </a:r>
+            <a:r>
+              <a:rPr sz="1400" dirty="0"/>
+              <a:t>.</a:t>
             </a:r>
           </a:p>
         </p:txBody>
@@ -20713,7 +21680,11 @@
               </a:defRPr>
             </a:pPr>
             <a:r>
-              <a:t>Desafío 3  ·  Supermarket Sales  ·  Myanmar 2019</a:t>
+              <a:rPr dirty="0" err="1"/>
+              <a:t>Desafío</a:t>
+            </a:r>
+            <a:r>
+              <a:t> 3  ·  Supermarket Sales  ·  Myanmar 2019</a:t>
             </a:r>
           </a:p>
         </p:txBody>
@@ -21030,7 +22001,80 @@
               </a:defRPr>
             </a:pPr>
             <a:r>
-              <a:t>La distribución entre géneros, sucursales y horarios es equilibrada — pero con brechas muy accionables.</a:t>
+              <a:rPr dirty="0"/>
+              <a:t>La </a:t>
+            </a:r>
+            <a:r>
+              <a:rPr dirty="0" err="1"/>
+              <a:t>distribución</a:t>
+            </a:r>
+            <a:r>
+              <a:rPr dirty="0"/>
+              <a:t> entre </a:t>
+            </a:r>
+            <a:r>
+              <a:rPr dirty="0" err="1"/>
+              <a:t>géneros</a:t>
+            </a:r>
+            <a:r>
+              <a:rPr dirty="0"/>
+              <a:t>, </a:t>
+            </a:r>
+            <a:r>
+              <a:rPr dirty="0" err="1"/>
+              <a:t>sucursales</a:t>
+            </a:r>
+            <a:r>
+              <a:rPr dirty="0"/>
+              <a:t> y </a:t>
+            </a:r>
+            <a:r>
+              <a:rPr dirty="0" err="1"/>
+              <a:t>horarios</a:t>
+            </a:r>
+            <a:r>
+              <a:rPr dirty="0"/>
+              <a:t> es </a:t>
+            </a:r>
+            <a:r>
+              <a:rPr dirty="0" err="1"/>
+              <a:t>equilibrada</a:t>
+            </a:r>
+            <a:r>
+              <a:rPr dirty="0"/>
+              <a:t> — </a:t>
+            </a:r>
+            <a:r>
+              <a:rPr dirty="0" err="1"/>
+              <a:t>pero</a:t>
+            </a:r>
+            <a:r>
+              <a:rPr dirty="0"/>
+              <a:t> con </a:t>
+            </a:r>
+            <a:r>
+              <a:rPr dirty="0" err="1"/>
+              <a:t>brechas</a:t>
+            </a:r>
+            <a:r>
+              <a:rPr dirty="0"/>
+              <a:t> </a:t>
+            </a:r>
+            <a:r>
+              <a:rPr dirty="0" err="1"/>
+              <a:t>muy</a:t>
+            </a:r>
+            <a:r>
+              <a:rPr dirty="0"/>
+              <a:t> </a:t>
+            </a:r>
+            <a:r>
+              <a:rPr dirty="0" err="1"/>
+              <a:t>accionables</a:t>
+            </a:r>
+            <a:r>
+              <a:rPr dirty="0"/>
+              <a:t>.</a:t>
             </a:r>
           </a:p>
         </p:txBody>
@@ -21110,7 +22154,48 @@
               </a:defRPr>
             </a:pPr>
             <a:r>
-              <a:t>Health &amp; Beauty: los hombres gastan 65% más que las mujeres. El mayor insight del dataset.</a:t>
+              <a:rPr dirty="0"/>
+              <a:t>Health &amp; Beauty: </a:t>
+            </a:r>
+            <a:r>
+              <a:rPr dirty="0" err="1"/>
+              <a:t>los</a:t>
+            </a:r>
+            <a:r>
+              <a:rPr dirty="0"/>
+              <a:t> hombres </a:t>
+            </a:r>
+            <a:r>
+              <a:rPr dirty="0" err="1"/>
+              <a:t>gastan</a:t>
+            </a:r>
+            <a:r>
+              <a:rPr dirty="0"/>
+              <a:t> 65% </a:t>
+            </a:r>
+            <a:r>
+              <a:rPr dirty="0" err="1"/>
+              <a:t>más</a:t>
+            </a:r>
+            <a:r>
+              <a:rPr dirty="0"/>
+              <a:t> </a:t>
+            </a:r>
+            <a:r>
+              <a:rPr dirty="0" err="1"/>
+              <a:t>que</a:t>
+            </a:r>
+            <a:r>
+              <a:rPr dirty="0"/>
+              <a:t> las </a:t>
+            </a:r>
+            <a:r>
+              <a:rPr dirty="0" err="1"/>
+              <a:t>mujeres</a:t>
+            </a:r>
+            <a:r>
+              <a:rPr dirty="0"/>
+              <a:t>. El mayor insight del dataset.</a:t>
             </a:r>
           </a:p>
         </p:txBody>
@@ -21190,7 +22275,72 @@
               </a:defRPr>
             </a:pPr>
             <a:r>
-              <a:t>Los picos de 13h y 19h deben ser el eje de cualquier activación en sucursal.</a:t>
+              <a:rPr dirty="0"/>
+              <a:t>Los </a:t>
+            </a:r>
+            <a:r>
+              <a:rPr dirty="0" err="1"/>
+              <a:t>picos</a:t>
+            </a:r>
+            <a:r>
+              <a:rPr dirty="0"/>
+              <a:t> de 13h y 19h </a:t>
+            </a:r>
+            <a:r>
+              <a:rPr dirty="0" err="1"/>
+              <a:t>deben</a:t>
+            </a:r>
+            <a:r>
+              <a:rPr dirty="0"/>
+              <a:t> ser </a:t>
+            </a:r>
+            <a:r>
+              <a:rPr dirty="0" err="1"/>
+              <a:t>el</a:t>
+            </a:r>
+            <a:r>
+              <a:rPr dirty="0"/>
+              <a:t> </a:t>
+            </a:r>
+            <a:r>
+              <a:rPr dirty="0" err="1"/>
+              <a:t>eje</a:t>
+            </a:r>
+            <a:r>
+              <a:rPr dirty="0"/>
+              <a:t> de </a:t>
+            </a:r>
+            <a:r>
+              <a:rPr dirty="0" err="1"/>
+              <a:t>cualquier</a:t>
+            </a:r>
+            <a:r>
+              <a:rPr dirty="0"/>
+              <a:t> </a:t>
+            </a:r>
+            <a:r>
+              <a:rPr dirty="0" err="1"/>
+              <a:t>activación</a:t>
+            </a:r>
+            <a:r>
+              <a:rPr dirty="0"/>
+              <a:t> </a:t>
+            </a:r>
+            <a:r>
+              <a:rPr dirty="0" err="1"/>
+              <a:t>en</a:t>
+            </a:r>
+            <a:r>
+              <a:rPr dirty="0"/>
+              <a:t> </a:t>
+            </a:r>
+            <a:r>
+              <a:rPr dirty="0" err="1"/>
+              <a:t>sucursal</a:t>
+            </a:r>
+            <a:r>
+              <a:rPr dirty="0"/>
+              <a:t>.</a:t>
             </a:r>
           </a:p>
         </p:txBody>
@@ -21270,87 +22420,48 @@
               </a:defRPr>
             </a:pPr>
             <a:r>
-              <a:t>Naypyitaw factura más con menos transacciones: prioridad para campañas de ticket alto.</a:t>
-            </a:r>
-          </a:p>
-        </p:txBody>
-      </p:sp>
-      <p:sp>
-        <p:nvSpPr>
-          <p:cNvPr id="15" name="Rectangle 14"/>
-          <p:cNvSpPr/>
-          <p:nvPr/>
-        </p:nvSpPr>
-        <p:spPr>
-          <a:xfrm>
-            <a:off x="640080" y="5513831"/>
-            <a:ext cx="201168" cy="201168"/>
-          </a:xfrm>
-          <a:prstGeom prst="rect">
-            <a:avLst/>
-          </a:prstGeom>
-          <a:solidFill>
-            <a:srgbClr val="B25A37"/>
-          </a:solidFill>
-          <a:ln>
-            <a:noFill/>
-          </a:ln>
-        </p:spPr>
-        <p:style>
-          <a:lnRef idx="1">
-            <a:schemeClr val="accent1"/>
-          </a:lnRef>
-          <a:fillRef idx="3">
-            <a:schemeClr val="accent1"/>
-          </a:fillRef>
-          <a:effectRef idx="2">
-            <a:schemeClr val="accent1"/>
-          </a:effectRef>
-          <a:fontRef idx="minor">
-            <a:schemeClr val="lt1"/>
-          </a:fontRef>
-        </p:style>
-        <p:txBody>
-          <a:bodyPr rtlCol="0" anchor="ctr"/>
-          <a:lstStyle/>
-          <a:p>
-            <a:pPr algn="ctr"/>
-            <a:endParaRPr/>
-          </a:p>
-        </p:txBody>
-      </p:sp>
-      <p:sp>
-        <p:nvSpPr>
-          <p:cNvPr id="16" name="TextBox 15"/>
-          <p:cNvSpPr txBox="1"/>
-          <p:nvPr/>
-        </p:nvSpPr>
-        <p:spPr>
-          <a:xfrm>
-            <a:off x="1005840" y="5422392"/>
-            <a:ext cx="7406640" cy="685800"/>
-          </a:xfrm>
-          <a:prstGeom prst="rect">
-            <a:avLst/>
-          </a:prstGeom>
-          <a:noFill/>
-        </p:spPr>
-        <p:txBody>
-          <a:bodyPr wrap="square">
-            <a:spAutoFit/>
-          </a:bodyPr>
-          <a:lstStyle/>
-          <a:p>
-            <a:pPr algn="l">
-              <a:defRPr sz="1500" b="0" i="0">
-                <a:solidFill>
-                  <a:srgbClr val="FFFFFF"/>
-                </a:solidFill>
-                <a:latin typeface="Calibri"/>
-              </a:defRPr>
-            </a:pPr>
-            <a:r>
-              <a:t>Febrero es el mes más débil. Una campaña focalizada (Health &amp; Beauty / hombres) puede revertirlo.</a:t>
+              <a:rPr dirty="0"/>
+              <a:t>Naypyitaw factura </a:t>
+            </a:r>
+            <a:r>
+              <a:rPr dirty="0" err="1"/>
+              <a:t>más</a:t>
+            </a:r>
+            <a:r>
+              <a:rPr dirty="0"/>
+              <a:t> con </a:t>
+            </a:r>
+            <a:r>
+              <a:rPr dirty="0" err="1"/>
+              <a:t>menos</a:t>
+            </a:r>
+            <a:r>
+              <a:rPr dirty="0"/>
+              <a:t> </a:t>
+            </a:r>
+            <a:r>
+              <a:rPr dirty="0" err="1"/>
+              <a:t>transacciones</a:t>
+            </a:r>
+            <a:r>
+              <a:rPr dirty="0"/>
+              <a:t>: </a:t>
+            </a:r>
+            <a:r>
+              <a:rPr dirty="0" err="1"/>
+              <a:t>prioridad</a:t>
+            </a:r>
+            <a:r>
+              <a:rPr dirty="0"/>
+              <a:t> para </a:t>
+            </a:r>
+            <a:r>
+              <a:rPr dirty="0" err="1"/>
+              <a:t>campañas</a:t>
+            </a:r>
+            <a:r>
+              <a:rPr dirty="0"/>
+              <a:t> de ticket alto.</a:t>
             </a:r>
           </a:p>
         </p:txBody>

--- a/Taller/Archivos notables/Desafio3_Presentacion_v3.pptx
+++ b/Taller/Archivos notables/Desafio3_Presentacion_v3.pptx
@@ -21684,6 +21684,7 @@
               <a:t>Desafío</a:t>
             </a:r>
             <a:r>
+              <a:rPr dirty="0"/>
               <a:t> 3  ·  Supermarket Sales  ·  Myanmar 2019</a:t>
             </a:r>
           </a:p>

--- a/Taller/Archivos notables/Desafio3_Presentacion_v3.pptx
+++ b/Taller/Archivos notables/Desafio3_Presentacion_v3.pptx
@@ -5862,7 +5862,7 @@
           </c:tx>
           <c:spPr>
             <a:solidFill>
-              <a:schemeClr val="accent1"/>
+              <a:schemeClr val="accent2"/>
             </a:solidFill>
             <a:ln>
               <a:noFill/>
@@ -5945,7 +5945,7 @@
           </c:tx>
           <c:spPr>
             <a:solidFill>
-              <a:schemeClr val="accent2"/>
+              <a:schemeClr val="accent1"/>
             </a:solidFill>
             <a:ln>
               <a:noFill/>
@@ -9825,7 +9825,7 @@
           <a:p>
             <a:fld id="{5BCAD085-E8A6-8845-BD4E-CB4CCA059FC4}" type="datetimeFigureOut">
               <a:rPr lang="en-US" smtClean="0"/>
-              <a:t>2/23/26</a:t>
+              <a:t>2/25/26</a:t>
             </a:fld>
             <a:endParaRPr lang="en-US"/>
           </a:p>
@@ -9993,7 +9993,7 @@
           <a:p>
             <a:fld id="{5BCAD085-E8A6-8845-BD4E-CB4CCA059FC4}" type="datetimeFigureOut">
               <a:rPr lang="en-US" smtClean="0"/>
-              <a:t>2/23/26</a:t>
+              <a:t>2/25/26</a:t>
             </a:fld>
             <a:endParaRPr lang="en-US"/>
           </a:p>
@@ -10171,7 +10171,7 @@
           <a:p>
             <a:fld id="{5BCAD085-E8A6-8845-BD4E-CB4CCA059FC4}" type="datetimeFigureOut">
               <a:rPr lang="en-US" smtClean="0"/>
-              <a:t>2/23/26</a:t>
+              <a:t>2/25/26</a:t>
             </a:fld>
             <a:endParaRPr lang="en-US"/>
           </a:p>
@@ -10339,7 +10339,7 @@
           <a:p>
             <a:fld id="{5BCAD085-E8A6-8845-BD4E-CB4CCA059FC4}" type="datetimeFigureOut">
               <a:rPr lang="en-US" smtClean="0"/>
-              <a:t>2/23/26</a:t>
+              <a:t>2/25/26</a:t>
             </a:fld>
             <a:endParaRPr lang="en-US"/>
           </a:p>
@@ -10584,7 +10584,7 @@
           <a:p>
             <a:fld id="{5BCAD085-E8A6-8845-BD4E-CB4CCA059FC4}" type="datetimeFigureOut">
               <a:rPr lang="en-US" smtClean="0"/>
-              <a:t>2/23/26</a:t>
+              <a:t>2/25/26</a:t>
             </a:fld>
             <a:endParaRPr lang="en-US"/>
           </a:p>
@@ -10869,7 +10869,7 @@
           <a:p>
             <a:fld id="{5BCAD085-E8A6-8845-BD4E-CB4CCA059FC4}" type="datetimeFigureOut">
               <a:rPr lang="en-US" smtClean="0"/>
-              <a:t>2/23/26</a:t>
+              <a:t>2/25/26</a:t>
             </a:fld>
             <a:endParaRPr lang="en-US"/>
           </a:p>
@@ -11288,7 +11288,7 @@
           <a:p>
             <a:fld id="{5BCAD085-E8A6-8845-BD4E-CB4CCA059FC4}" type="datetimeFigureOut">
               <a:rPr lang="en-US" smtClean="0"/>
-              <a:t>2/23/26</a:t>
+              <a:t>2/25/26</a:t>
             </a:fld>
             <a:endParaRPr lang="en-US"/>
           </a:p>
@@ -11405,7 +11405,7 @@
           <a:p>
             <a:fld id="{5BCAD085-E8A6-8845-BD4E-CB4CCA059FC4}" type="datetimeFigureOut">
               <a:rPr lang="en-US" smtClean="0"/>
-              <a:t>2/23/26</a:t>
+              <a:t>2/25/26</a:t>
             </a:fld>
             <a:endParaRPr lang="en-US"/>
           </a:p>
@@ -11500,7 +11500,7 @@
           <a:p>
             <a:fld id="{5BCAD085-E8A6-8845-BD4E-CB4CCA059FC4}" type="datetimeFigureOut">
               <a:rPr lang="en-US" smtClean="0"/>
-              <a:t>2/23/26</a:t>
+              <a:t>2/25/26</a:t>
             </a:fld>
             <a:endParaRPr lang="en-US"/>
           </a:p>
@@ -11775,7 +11775,7 @@
           <a:p>
             <a:fld id="{5BCAD085-E8A6-8845-BD4E-CB4CCA059FC4}" type="datetimeFigureOut">
               <a:rPr lang="en-US" smtClean="0"/>
-              <a:t>2/23/26</a:t>
+              <a:t>2/25/26</a:t>
             </a:fld>
             <a:endParaRPr lang="en-US"/>
           </a:p>
@@ -12027,7 +12027,7 @@
           <a:p>
             <a:fld id="{5BCAD085-E8A6-8845-BD4E-CB4CCA059FC4}" type="datetimeFigureOut">
               <a:rPr lang="en-US" smtClean="0"/>
-              <a:t>2/23/26</a:t>
+              <a:t>2/25/26</a:t>
             </a:fld>
             <a:endParaRPr lang="en-US"/>
           </a:p>
@@ -12238,7 +12238,7 @@
           <a:p>
             <a:fld id="{5BCAD085-E8A6-8845-BD4E-CB4CCA059FC4}" type="datetimeFigureOut">
               <a:rPr lang="en-US" smtClean="0"/>
-              <a:t>2/23/26</a:t>
+              <a:t>2/25/26</a:t>
             </a:fld>
             <a:endParaRPr lang="en-US"/>
           </a:p>
@@ -18788,7 +18788,7 @@
           <p:nvPr>
             <p:extLst>
               <p:ext uri="{D42A27DB-BD31-4B8C-83A1-F6EECF244321}">
-                <p14:modId xmlns:p14="http://schemas.microsoft.com/office/powerpoint/2010/main" val="774287958"/>
+                <p14:modId xmlns:p14="http://schemas.microsoft.com/office/powerpoint/2010/main" val="3767130561"/>
               </p:ext>
             </p:extLst>
           </p:nvPr>
@@ -18924,7 +18924,7 @@
         </p:nvSpPr>
         <p:spPr>
           <a:xfrm>
-            <a:off x="548640" y="896112"/>
+            <a:off x="914400" y="864108"/>
             <a:ext cx="10058400" cy="347472"/>
           </a:xfrm>
           <a:prstGeom prst="rect">
@@ -19231,13 +19231,13 @@
       </p:sp>
       <p:sp>
         <p:nvSpPr>
-          <p:cNvPr id="11" name="Rectangle 10"/>
+          <p:cNvPr id="17" name="Rectangle 16"/>
           <p:cNvSpPr/>
           <p:nvPr/>
         </p:nvSpPr>
         <p:spPr>
           <a:xfrm>
-            <a:off x="4434840" y="1417320"/>
+            <a:off x="4447770" y="1426464"/>
             <a:ext cx="3657600" cy="2606040"/>
           </a:xfrm>
           <a:prstGeom prst="rect">
@@ -19277,294 +19277,13 @@
       </p:sp>
       <p:sp>
         <p:nvSpPr>
-          <p:cNvPr id="12" name="Rectangle 11"/>
-          <p:cNvSpPr/>
-          <p:nvPr/>
-        </p:nvSpPr>
-        <p:spPr>
-          <a:xfrm>
-            <a:off x="4434840" y="1417320"/>
-            <a:ext cx="3657600" cy="64008"/>
-          </a:xfrm>
-          <a:prstGeom prst="rect">
-            <a:avLst/>
-          </a:prstGeom>
-          <a:solidFill>
-            <a:srgbClr val="B25A37"/>
-          </a:solidFill>
-          <a:ln>
-            <a:noFill/>
-          </a:ln>
-        </p:spPr>
-        <p:style>
-          <a:lnRef idx="1">
-            <a:schemeClr val="accent1"/>
-          </a:lnRef>
-          <a:fillRef idx="3">
-            <a:schemeClr val="accent1"/>
-          </a:fillRef>
-          <a:effectRef idx="2">
-            <a:schemeClr val="accent1"/>
-          </a:effectRef>
-          <a:fontRef idx="minor">
-            <a:schemeClr val="lt1"/>
-          </a:fontRef>
-        </p:style>
-        <p:txBody>
-          <a:bodyPr rtlCol="0" anchor="ctr"/>
-          <a:lstStyle/>
-          <a:p>
-            <a:pPr algn="ctr"/>
-            <a:endParaRPr/>
-          </a:p>
-        </p:txBody>
-      </p:sp>
-      <p:sp>
-        <p:nvSpPr>
-          <p:cNvPr id="13" name="TextBox 12"/>
-          <p:cNvSpPr txBox="1"/>
-          <p:nvPr/>
-        </p:nvSpPr>
-        <p:spPr>
-          <a:xfrm>
-            <a:off x="4617720" y="1536192"/>
-            <a:ext cx="3337560" cy="338554"/>
-          </a:xfrm>
-          <a:prstGeom prst="rect">
-            <a:avLst/>
-          </a:prstGeom>
-          <a:noFill/>
-        </p:spPr>
-        <p:txBody>
-          <a:bodyPr wrap="square">
-            <a:spAutoFit/>
-          </a:bodyPr>
-          <a:lstStyle/>
-          <a:p>
-            <a:pPr algn="l">
-              <a:defRPr sz="1400" b="1" i="0">
-                <a:solidFill>
-                  <a:srgbClr val="1E3C30"/>
-                </a:solidFill>
-                <a:latin typeface="Calibri"/>
-              </a:defRPr>
-            </a:pPr>
-            <a:r>
-              <a:rPr sz="1600" dirty="0"/>
-              <a:t>C · Naypyitaw</a:t>
-            </a:r>
-          </a:p>
-        </p:txBody>
-      </p:sp>
-      <p:sp>
-        <p:nvSpPr>
-          <p:cNvPr id="14" name="TextBox 13"/>
-          <p:cNvSpPr txBox="1"/>
-          <p:nvPr/>
-        </p:nvSpPr>
-        <p:spPr>
-          <a:xfrm>
-            <a:off x="4617720" y="1920240"/>
-            <a:ext cx="3337560" cy="749808"/>
-          </a:xfrm>
-          <a:prstGeom prst="rect">
-            <a:avLst/>
-          </a:prstGeom>
-          <a:noFill/>
-        </p:spPr>
-        <p:txBody>
-          <a:bodyPr wrap="square">
-            <a:spAutoFit/>
-          </a:bodyPr>
-          <a:lstStyle/>
-          <a:p>
-            <a:pPr algn="l">
-              <a:defRPr sz="3800" b="1" i="0">
-                <a:solidFill>
-                  <a:srgbClr val="B25A37"/>
-                </a:solidFill>
-                <a:latin typeface="Calibri"/>
-              </a:defRPr>
-            </a:pPr>
-            <a:r>
-              <a:t>$110.6K</a:t>
-            </a:r>
-          </a:p>
-        </p:txBody>
-      </p:sp>
-      <p:sp>
-        <p:nvSpPr>
-          <p:cNvPr id="15" name="TextBox 14"/>
-          <p:cNvSpPr txBox="1"/>
-          <p:nvPr/>
-        </p:nvSpPr>
-        <p:spPr>
-          <a:xfrm>
-            <a:off x="4617720" y="2651760"/>
-            <a:ext cx="3337560" cy="307777"/>
-          </a:xfrm>
-          <a:prstGeom prst="rect">
-            <a:avLst/>
-          </a:prstGeom>
-          <a:noFill/>
-        </p:spPr>
-        <p:txBody>
-          <a:bodyPr wrap="square">
-            <a:spAutoFit/>
-          </a:bodyPr>
-          <a:lstStyle/>
-          <a:p>
-            <a:pPr algn="l">
-              <a:defRPr sz="1100" b="0" i="1">
-                <a:solidFill>
-                  <a:srgbClr val="828076"/>
-                </a:solidFill>
-                <a:latin typeface="Calibri"/>
-              </a:defRPr>
-            </a:pPr>
-            <a:r>
-              <a:rPr sz="1400" dirty="0"/>
-              <a:t>328 </a:t>
-            </a:r>
-            <a:r>
-              <a:rPr sz="1400" dirty="0" err="1"/>
-              <a:t>transacciones</a:t>
-            </a:r>
-            <a:r>
-              <a:rPr sz="1400" dirty="0"/>
-              <a:t> · ticket $337 · rating 7.1</a:t>
-            </a:r>
-          </a:p>
-        </p:txBody>
-      </p:sp>
-      <p:sp>
-        <p:nvSpPr>
-          <p:cNvPr id="16" name="TextBox 15"/>
-          <p:cNvSpPr txBox="1"/>
-          <p:nvPr/>
-        </p:nvSpPr>
-        <p:spPr>
-          <a:xfrm>
-            <a:off x="4617720" y="3017520"/>
-            <a:ext cx="3337560" cy="523220"/>
-          </a:xfrm>
-          <a:prstGeom prst="rect">
-            <a:avLst/>
-          </a:prstGeom>
-          <a:noFill/>
-        </p:spPr>
-        <p:txBody>
-          <a:bodyPr wrap="square">
-            <a:spAutoFit/>
-          </a:bodyPr>
-          <a:lstStyle/>
-          <a:p>
-            <a:pPr algn="l">
-              <a:defRPr sz="1200" b="0" i="0">
-                <a:solidFill>
-                  <a:srgbClr val="191916"/>
-                </a:solidFill>
-                <a:latin typeface="Calibri"/>
-              </a:defRPr>
-            </a:pPr>
-            <a:r>
-              <a:rPr sz="1400" b="1" dirty="0"/>
-              <a:t>Menor </a:t>
-            </a:r>
-            <a:r>
-              <a:rPr sz="1400" b="1" dirty="0" err="1"/>
-              <a:t>volumen</a:t>
-            </a:r>
-            <a:r>
-              <a:rPr sz="1400" b="1" dirty="0"/>
-              <a:t> </a:t>
-            </a:r>
-            <a:r>
-              <a:rPr sz="1400" b="1" dirty="0" err="1"/>
-              <a:t>pero</a:t>
-            </a:r>
-            <a:r>
-              <a:rPr sz="1400" b="1" dirty="0"/>
-              <a:t> mayor ticket </a:t>
-            </a:r>
-            <a:r>
-              <a:rPr sz="1400" dirty="0"/>
-              <a:t>y </a:t>
-            </a:r>
-            <a:r>
-              <a:rPr sz="1400" dirty="0" err="1"/>
-              <a:t>mejor</a:t>
-            </a:r>
-            <a:r>
-              <a:rPr sz="1400" dirty="0"/>
-              <a:t> </a:t>
-            </a:r>
-            <a:r>
-              <a:rPr sz="1400" dirty="0" err="1"/>
-              <a:t>satisfacción</a:t>
-            </a:r>
-            <a:r>
-              <a:rPr sz="1400" dirty="0"/>
-              <a:t>.</a:t>
-            </a:r>
-          </a:p>
-        </p:txBody>
-      </p:sp>
-      <p:sp>
-        <p:nvSpPr>
-          <p:cNvPr id="17" name="Rectangle 16"/>
-          <p:cNvSpPr/>
-          <p:nvPr/>
-        </p:nvSpPr>
-        <p:spPr>
-          <a:xfrm>
-            <a:off x="8321040" y="1417320"/>
-            <a:ext cx="3657600" cy="2606040"/>
-          </a:xfrm>
-          <a:prstGeom prst="rect">
-            <a:avLst/>
-          </a:prstGeom>
-          <a:solidFill>
-            <a:srgbClr val="FFFFFF"/>
-          </a:solidFill>
-          <a:ln w="10160">
-            <a:solidFill>
-              <a:srgbClr val="DCE8DE"/>
-            </a:solidFill>
-          </a:ln>
-        </p:spPr>
-        <p:style>
-          <a:lnRef idx="1">
-            <a:schemeClr val="accent1"/>
-          </a:lnRef>
-          <a:fillRef idx="3">
-            <a:schemeClr val="accent1"/>
-          </a:fillRef>
-          <a:effectRef idx="2">
-            <a:schemeClr val="accent1"/>
-          </a:effectRef>
-          <a:fontRef idx="minor">
-            <a:schemeClr val="lt1"/>
-          </a:fontRef>
-        </p:style>
-        <p:txBody>
-          <a:bodyPr rtlCol="0" anchor="ctr"/>
-          <a:lstStyle/>
-          <a:p>
-            <a:pPr algn="ctr"/>
-            <a:endParaRPr/>
-          </a:p>
-        </p:txBody>
-      </p:sp>
-      <p:sp>
-        <p:nvSpPr>
           <p:cNvPr id="18" name="Rectangle 17"/>
           <p:cNvSpPr/>
           <p:nvPr/>
         </p:nvSpPr>
         <p:spPr>
           <a:xfrm>
-            <a:off x="8321040" y="1417320"/>
+            <a:off x="4447770" y="1426464"/>
             <a:ext cx="3657600" cy="64008"/>
           </a:xfrm>
           <a:prstGeom prst="rect">
@@ -19608,7 +19327,7 @@
         </p:nvSpPr>
         <p:spPr>
           <a:xfrm>
-            <a:off x="8503919" y="1536192"/>
+            <a:off x="4630649" y="1545336"/>
             <a:ext cx="3337560" cy="338554"/>
           </a:xfrm>
           <a:prstGeom prst="rect">
@@ -19645,7 +19364,7 @@
         </p:nvSpPr>
         <p:spPr>
           <a:xfrm>
-            <a:off x="8503919" y="1920240"/>
+            <a:off x="4630649" y="1929384"/>
             <a:ext cx="3337560" cy="749808"/>
           </a:xfrm>
           <a:prstGeom prst="rect">
@@ -19682,7 +19401,7 @@
         </p:nvSpPr>
         <p:spPr>
           <a:xfrm>
-            <a:off x="8503919" y="2651760"/>
+            <a:off x="4630649" y="2660904"/>
             <a:ext cx="3337560" cy="307777"/>
           </a:xfrm>
           <a:prstGeom prst="rect">
@@ -19727,7 +19446,7 @@
         </p:nvSpPr>
         <p:spPr>
           <a:xfrm>
-            <a:off x="8503919" y="3017520"/>
+            <a:off x="4630649" y="3026664"/>
             <a:ext cx="3337560" cy="523220"/>
           </a:xfrm>
           <a:prstGeom prst="rect">
@@ -19911,6 +19630,323 @@
           </a:graphicData>
         </a:graphic>
       </p:graphicFrame>
+      <p:sp>
+        <p:nvSpPr>
+          <p:cNvPr id="26" name="Rectangle 10">
+            <a:extLst>
+              <a:ext uri="{FF2B5EF4-FFF2-40B4-BE49-F238E27FC236}">
+                <a16:creationId xmlns:a16="http://schemas.microsoft.com/office/drawing/2014/main" id="{543DE968-1498-D4F9-9627-D616F7CCD56F}"/>
+              </a:ext>
+            </a:extLst>
+          </p:cNvPr>
+          <p:cNvSpPr/>
+          <p:nvPr/>
+        </p:nvSpPr>
+        <p:spPr>
+          <a:xfrm>
+            <a:off x="8346901" y="1417320"/>
+            <a:ext cx="3657600" cy="2606040"/>
+          </a:xfrm>
+          <a:prstGeom prst="rect">
+            <a:avLst/>
+          </a:prstGeom>
+          <a:solidFill>
+            <a:srgbClr val="FFFFFF"/>
+          </a:solidFill>
+          <a:ln w="10160">
+            <a:solidFill>
+              <a:srgbClr val="DCE8DE"/>
+            </a:solidFill>
+          </a:ln>
+        </p:spPr>
+        <p:style>
+          <a:lnRef idx="1">
+            <a:schemeClr val="accent1"/>
+          </a:lnRef>
+          <a:fillRef idx="3">
+            <a:schemeClr val="accent1"/>
+          </a:fillRef>
+          <a:effectRef idx="2">
+            <a:schemeClr val="accent1"/>
+          </a:effectRef>
+          <a:fontRef idx="minor">
+            <a:schemeClr val="lt1"/>
+          </a:fontRef>
+        </p:style>
+        <p:txBody>
+          <a:bodyPr rtlCol="0" anchor="ctr"/>
+          <a:lstStyle/>
+          <a:p>
+            <a:pPr algn="ctr"/>
+            <a:endParaRPr/>
+          </a:p>
+        </p:txBody>
+      </p:sp>
+      <p:sp>
+        <p:nvSpPr>
+          <p:cNvPr id="27" name="Rectangle 11">
+            <a:extLst>
+              <a:ext uri="{FF2B5EF4-FFF2-40B4-BE49-F238E27FC236}">
+                <a16:creationId xmlns:a16="http://schemas.microsoft.com/office/drawing/2014/main" id="{C35D9897-A950-9250-5ACE-BA3E6A2C3728}"/>
+              </a:ext>
+            </a:extLst>
+          </p:cNvPr>
+          <p:cNvSpPr/>
+          <p:nvPr/>
+        </p:nvSpPr>
+        <p:spPr>
+          <a:xfrm>
+            <a:off x="8346901" y="1417320"/>
+            <a:ext cx="3657600" cy="64008"/>
+          </a:xfrm>
+          <a:prstGeom prst="rect">
+            <a:avLst/>
+          </a:prstGeom>
+          <a:solidFill>
+            <a:srgbClr val="B25A37"/>
+          </a:solidFill>
+          <a:ln>
+            <a:noFill/>
+          </a:ln>
+        </p:spPr>
+        <p:style>
+          <a:lnRef idx="1">
+            <a:schemeClr val="accent1"/>
+          </a:lnRef>
+          <a:fillRef idx="3">
+            <a:schemeClr val="accent1"/>
+          </a:fillRef>
+          <a:effectRef idx="2">
+            <a:schemeClr val="accent1"/>
+          </a:effectRef>
+          <a:fontRef idx="minor">
+            <a:schemeClr val="lt1"/>
+          </a:fontRef>
+        </p:style>
+        <p:txBody>
+          <a:bodyPr rtlCol="0" anchor="ctr"/>
+          <a:lstStyle/>
+          <a:p>
+            <a:pPr algn="ctr"/>
+            <a:endParaRPr/>
+          </a:p>
+        </p:txBody>
+      </p:sp>
+      <p:sp>
+        <p:nvSpPr>
+          <p:cNvPr id="28" name="TextBox 12">
+            <a:extLst>
+              <a:ext uri="{FF2B5EF4-FFF2-40B4-BE49-F238E27FC236}">
+                <a16:creationId xmlns:a16="http://schemas.microsoft.com/office/drawing/2014/main" id="{7E2805A5-F1A0-AF72-0C70-2C733B8A7DDC}"/>
+              </a:ext>
+            </a:extLst>
+          </p:cNvPr>
+          <p:cNvSpPr txBox="1"/>
+          <p:nvPr/>
+        </p:nvSpPr>
+        <p:spPr>
+          <a:xfrm>
+            <a:off x="8529781" y="1536192"/>
+            <a:ext cx="3337560" cy="338554"/>
+          </a:xfrm>
+          <a:prstGeom prst="rect">
+            <a:avLst/>
+          </a:prstGeom>
+          <a:noFill/>
+        </p:spPr>
+        <p:txBody>
+          <a:bodyPr wrap="square">
+            <a:spAutoFit/>
+          </a:bodyPr>
+          <a:lstStyle/>
+          <a:p>
+            <a:pPr algn="l">
+              <a:defRPr sz="1400" b="1" i="0">
+                <a:solidFill>
+                  <a:srgbClr val="1E3C30"/>
+                </a:solidFill>
+                <a:latin typeface="Calibri"/>
+              </a:defRPr>
+            </a:pPr>
+            <a:r>
+              <a:rPr sz="1600" dirty="0"/>
+              <a:t>C · Naypyitaw</a:t>
+            </a:r>
+          </a:p>
+        </p:txBody>
+      </p:sp>
+      <p:sp>
+        <p:nvSpPr>
+          <p:cNvPr id="29" name="TextBox 13">
+            <a:extLst>
+              <a:ext uri="{FF2B5EF4-FFF2-40B4-BE49-F238E27FC236}">
+                <a16:creationId xmlns:a16="http://schemas.microsoft.com/office/drawing/2014/main" id="{E5AD13EF-81FE-0D43-4954-08C7E17EFDC5}"/>
+              </a:ext>
+            </a:extLst>
+          </p:cNvPr>
+          <p:cNvSpPr txBox="1"/>
+          <p:nvPr/>
+        </p:nvSpPr>
+        <p:spPr>
+          <a:xfrm>
+            <a:off x="8529781" y="1920240"/>
+            <a:ext cx="3337560" cy="749808"/>
+          </a:xfrm>
+          <a:prstGeom prst="rect">
+            <a:avLst/>
+          </a:prstGeom>
+          <a:noFill/>
+        </p:spPr>
+        <p:txBody>
+          <a:bodyPr wrap="square">
+            <a:spAutoFit/>
+          </a:bodyPr>
+          <a:lstStyle/>
+          <a:p>
+            <a:pPr algn="l">
+              <a:defRPr sz="3800" b="1" i="0">
+                <a:solidFill>
+                  <a:srgbClr val="B25A37"/>
+                </a:solidFill>
+                <a:latin typeface="Calibri"/>
+              </a:defRPr>
+            </a:pPr>
+            <a:r>
+              <a:t>$110.6K</a:t>
+            </a:r>
+          </a:p>
+        </p:txBody>
+      </p:sp>
+      <p:sp>
+        <p:nvSpPr>
+          <p:cNvPr id="30" name="TextBox 14">
+            <a:extLst>
+              <a:ext uri="{FF2B5EF4-FFF2-40B4-BE49-F238E27FC236}">
+                <a16:creationId xmlns:a16="http://schemas.microsoft.com/office/drawing/2014/main" id="{7FAD6A5B-5870-5A34-412B-720F0DAE7C36}"/>
+              </a:ext>
+            </a:extLst>
+          </p:cNvPr>
+          <p:cNvSpPr txBox="1"/>
+          <p:nvPr/>
+        </p:nvSpPr>
+        <p:spPr>
+          <a:xfrm>
+            <a:off x="8529781" y="2651760"/>
+            <a:ext cx="3337560" cy="307777"/>
+          </a:xfrm>
+          <a:prstGeom prst="rect">
+            <a:avLst/>
+          </a:prstGeom>
+          <a:noFill/>
+        </p:spPr>
+        <p:txBody>
+          <a:bodyPr wrap="square">
+            <a:spAutoFit/>
+          </a:bodyPr>
+          <a:lstStyle/>
+          <a:p>
+            <a:pPr algn="l">
+              <a:defRPr sz="1100" b="0" i="1">
+                <a:solidFill>
+                  <a:srgbClr val="828076"/>
+                </a:solidFill>
+                <a:latin typeface="Calibri"/>
+              </a:defRPr>
+            </a:pPr>
+            <a:r>
+              <a:rPr sz="1400" dirty="0"/>
+              <a:t>328 </a:t>
+            </a:r>
+            <a:r>
+              <a:rPr sz="1400" dirty="0" err="1"/>
+              <a:t>transacciones</a:t>
+            </a:r>
+            <a:r>
+              <a:rPr sz="1400" dirty="0"/>
+              <a:t> · ticket $337 · rating 7.1</a:t>
+            </a:r>
+          </a:p>
+        </p:txBody>
+      </p:sp>
+      <p:sp>
+        <p:nvSpPr>
+          <p:cNvPr id="31" name="TextBox 15">
+            <a:extLst>
+              <a:ext uri="{FF2B5EF4-FFF2-40B4-BE49-F238E27FC236}">
+                <a16:creationId xmlns:a16="http://schemas.microsoft.com/office/drawing/2014/main" id="{C1A8BC96-C8AC-3CCD-CAC3-14C440D029DA}"/>
+              </a:ext>
+            </a:extLst>
+          </p:cNvPr>
+          <p:cNvSpPr txBox="1"/>
+          <p:nvPr/>
+        </p:nvSpPr>
+        <p:spPr>
+          <a:xfrm>
+            <a:off x="8529781" y="3017520"/>
+            <a:ext cx="3337560" cy="523220"/>
+          </a:xfrm>
+          <a:prstGeom prst="rect">
+            <a:avLst/>
+          </a:prstGeom>
+          <a:noFill/>
+        </p:spPr>
+        <p:txBody>
+          <a:bodyPr wrap="square">
+            <a:spAutoFit/>
+          </a:bodyPr>
+          <a:lstStyle/>
+          <a:p>
+            <a:pPr algn="l">
+              <a:defRPr sz="1200" b="0" i="0">
+                <a:solidFill>
+                  <a:srgbClr val="191916"/>
+                </a:solidFill>
+                <a:latin typeface="Calibri"/>
+              </a:defRPr>
+            </a:pPr>
+            <a:r>
+              <a:rPr sz="1400" b="1" dirty="0"/>
+              <a:t>Menor </a:t>
+            </a:r>
+            <a:r>
+              <a:rPr sz="1400" b="1" dirty="0" err="1"/>
+              <a:t>volumen</a:t>
+            </a:r>
+            <a:r>
+              <a:rPr sz="1400" b="1" dirty="0"/>
+              <a:t> </a:t>
+            </a:r>
+            <a:r>
+              <a:rPr sz="1400" b="1" dirty="0" err="1"/>
+              <a:t>pero</a:t>
+            </a:r>
+            <a:r>
+              <a:rPr sz="1400" b="1" dirty="0"/>
+              <a:t> mayor ticket </a:t>
+            </a:r>
+            <a:r>
+              <a:rPr sz="1400" dirty="0"/>
+              <a:t>y </a:t>
+            </a:r>
+            <a:r>
+              <a:rPr sz="1400" dirty="0" err="1"/>
+              <a:t>mejor</a:t>
+            </a:r>
+            <a:r>
+              <a:rPr sz="1400" dirty="0"/>
+              <a:t> </a:t>
+            </a:r>
+            <a:r>
+              <a:rPr sz="1400" dirty="0" err="1"/>
+              <a:t>satisfacción</a:t>
+            </a:r>
+            <a:r>
+              <a:rPr sz="1400" dirty="0"/>
+              <a:t>.</a:t>
+            </a:r>
+          </a:p>
+        </p:txBody>
+      </p:sp>
     </p:spTree>
   </p:cSld>
   <p:clrMapOvr>
